--- a/Bloc_3_Machine_Learning/Walmart/Walmart_presentation.pptx
+++ b/Bloc_3_Machine_Learning/Walmart/Walmart_presentation.pptx
@@ -11,6 +11,10 @@
     <p:sldId id="259" r:id="rId10"/>
     <p:sldId id="260" r:id="rId11"/>
     <p:sldId id="261" r:id="rId12"/>
+    <p:sldId id="262" r:id="rId13"/>
+    <p:sldId id="263" r:id="rId14"/>
+    <p:sldId id="264" r:id="rId15"/>
+    <p:sldId id="265" r:id="rId16"/>
   </p:sldIdLst>
   <p:sldSz cx="12191695" cy="6858000" type="screen4x3"/>
   <p:notesSz cx="6858000" cy="9144000"/>
@@ -3108,7 +3112,7 @@
             <a:avLst/>
           </a:prstGeom>
           <a:solidFill>
-            <a:srgbClr val="0F172A"/>
+            <a:srgbClr val="0B1120"/>
           </a:solidFill>
           <a:ln>
             <a:noFill/>
@@ -3138,14 +3142,59 @@
       </p:sp>
       <p:sp>
         <p:nvSpPr>
-          <p:cNvPr id="3" name="TextBox 2"/>
+          <p:cNvPr id="3" name="Rounded Rectangle 2"/>
+          <p:cNvSpPr/>
+          <p:nvPr/>
+        </p:nvSpPr>
+        <p:spPr>
+          <a:xfrm>
+            <a:off x="1371600" y="1097280"/>
+            <a:ext cx="9448495" cy="4663440"/>
+          </a:xfrm>
+          <a:prstGeom prst="roundRect">
+            <a:avLst/>
+          </a:prstGeom>
+          <a:solidFill>
+            <a:srgbClr val="1E293B"/>
+          </a:solidFill>
+          <a:ln w="25400">
+            <a:solidFill>
+              <a:srgbClr val="38BDF8"/>
+            </a:solidFill>
+          </a:ln>
+        </p:spPr>
+        <p:style>
+          <a:lnRef idx="1">
+            <a:schemeClr val="accent1"/>
+          </a:lnRef>
+          <a:fillRef idx="3">
+            <a:schemeClr val="accent1"/>
+          </a:fillRef>
+          <a:effectRef idx="2">
+            <a:schemeClr val="accent1"/>
+          </a:effectRef>
+          <a:fontRef idx="minor">
+            <a:schemeClr val="lt1"/>
+          </a:fontRef>
+        </p:style>
+        <p:txBody>
+          <a:bodyPr rtlCol="0" anchor="ctr"/>
+          <a:lstStyle/>
+          <a:p>
+            <a:pPr algn="ctr"/>
+          </a:p>
+        </p:txBody>
+      </p:sp>
+      <p:sp>
+        <p:nvSpPr>
+          <p:cNvPr id="4" name="TextBox 3"/>
           <p:cNvSpPr txBox="1"/>
           <p:nvPr/>
         </p:nvSpPr>
         <p:spPr>
           <a:xfrm>
-            <a:off x="1097280" y="1645920"/>
-            <a:ext cx="10058400" cy="457200"/>
+            <a:off x="1828800" y="1463040"/>
+            <a:ext cx="8534095" cy="365760"/>
           </a:xfrm>
           <a:prstGeom prst="rect">
             <a:avLst/>
@@ -3163,24 +3212,25 @@
                 <a:solidFill>
                   <a:srgbClr val="38BDF8"/>
                 </a:solidFill>
-              </a:defRPr>
-            </a:pPr>
-            <a:r>
-              <a:t>BLOC 3 — MACHINE LEARNING SUPERVISÉ (COMPLÉMENT)</a:t>
-            </a:r>
-          </a:p>
-        </p:txBody>
-      </p:sp>
-      <p:sp>
-        <p:nvSpPr>
-          <p:cNvPr id="4" name="TextBox 3"/>
+                <a:latin typeface="Segoe UI"/>
+              </a:defRPr>
+            </a:pPr>
+            <a:r>
+              <a:t>BLOC 3 — MACHINE LEARNING SUPERVISÉ (RÉGRESSION)</a:t>
+            </a:r>
+          </a:p>
+        </p:txBody>
+      </p:sp>
+      <p:sp>
+        <p:nvSpPr>
+          <p:cNvPr id="5" name="TextBox 4"/>
           <p:cNvSpPr txBox="1"/>
           <p:nvPr/>
         </p:nvSpPr>
         <p:spPr>
           <a:xfrm>
-            <a:off x="1097280" y="2194560"/>
-            <a:ext cx="10058400" cy="1463040"/>
+            <a:off x="1828800" y="1920240"/>
+            <a:ext cx="8534095" cy="1097280"/>
           </a:xfrm>
           <a:prstGeom prst="rect">
             <a:avLst/>
@@ -3198,24 +3248,81 @@
                 <a:solidFill>
                   <a:srgbClr val="F8FAFC"/>
                 </a:solidFill>
+                <a:latin typeface="Segoe UI"/>
               </a:defRPr>
             </a:pPr>
             <a:r>
               <a:t>Walmart Store Sales Prediction</a:t>
             </a:r>
           </a:p>
-        </p:txBody>
-      </p:sp>
-      <p:sp>
-        <p:nvSpPr>
-          <p:cNvPr id="5" name="TextBox 4"/>
+          <a:p>
+            <a:pPr>
+              <a:defRPr sz="1700">
+                <a:solidFill>
+                  <a:srgbClr val="94A3B8"/>
+                </a:solidFill>
+                <a:latin typeface="Segoe UI"/>
+              </a:defRPr>
+            </a:pPr>
+            <a:r>
+              <a:t>Modélisation Prédictive des Ventes Hebdomadaires, Régularisation L1/L2 &amp; Optimisation Marketing</a:t>
+            </a:r>
+          </a:p>
+        </p:txBody>
+      </p:sp>
+      <p:sp>
+        <p:nvSpPr>
+          <p:cNvPr id="6" name="Rectangle 5"/>
+          <p:cNvSpPr/>
+          <p:nvPr/>
+        </p:nvSpPr>
+        <p:spPr>
+          <a:xfrm>
+            <a:off x="1828800" y="3383280"/>
+            <a:ext cx="8534095" cy="27432"/>
+          </a:xfrm>
+          <a:prstGeom prst="rect">
+            <a:avLst/>
+          </a:prstGeom>
+          <a:solidFill>
+            <a:srgbClr val="334155"/>
+          </a:solidFill>
+          <a:ln>
+            <a:noFill/>
+          </a:ln>
+        </p:spPr>
+        <p:style>
+          <a:lnRef idx="1">
+            <a:schemeClr val="accent1"/>
+          </a:lnRef>
+          <a:fillRef idx="3">
+            <a:schemeClr val="accent1"/>
+          </a:fillRef>
+          <a:effectRef idx="2">
+            <a:schemeClr val="accent1"/>
+          </a:effectRef>
+          <a:fontRef idx="minor">
+            <a:schemeClr val="lt1"/>
+          </a:fontRef>
+        </p:style>
+        <p:txBody>
+          <a:bodyPr rtlCol="0" anchor="ctr"/>
+          <a:lstStyle/>
+          <a:p>
+            <a:pPr algn="ctr"/>
+          </a:p>
+        </p:txBody>
+      </p:sp>
+      <p:sp>
+        <p:nvSpPr>
+          <p:cNvPr id="7" name="TextBox 6"/>
           <p:cNvSpPr txBox="1"/>
           <p:nvPr/>
         </p:nvSpPr>
         <p:spPr>
           <a:xfrm>
-            <a:off x="1097280" y="3840480"/>
-            <a:ext cx="10058400" cy="914400"/>
+            <a:off x="1828800" y="3657600"/>
+            <a:ext cx="2743200" cy="1097280"/>
           </a:xfrm>
           <a:prstGeom prst="rect">
             <a:avLst/>
@@ -3229,14 +3336,370 @@
           <a:lstStyle/>
           <a:p>
             <a:pPr>
-              <a:defRPr sz="1800">
+              <a:defRPr sz="2200" b="1">
+                <a:solidFill>
+                  <a:srgbClr val="10B981"/>
+                </a:solidFill>
+                <a:latin typeface="Segoe UI"/>
+              </a:defRPr>
+            </a:pPr>
+            <a:r>
+              <a:t>R² = 0.91</a:t>
+            </a:r>
+          </a:p>
+          <a:p>
+            <a:pPr>
+              <a:defRPr sz="1100" b="1">
+                <a:solidFill>
+                  <a:srgbClr val="F8FAFC"/>
+                </a:solidFill>
+                <a:latin typeface="Segoe UI"/>
+              </a:defRPr>
+            </a:pPr>
+            <a:r>
+              <a:t>PERFORMANCE TEST LASSO</a:t>
+            </a:r>
+          </a:p>
+          <a:p>
+            <a:pPr>
+              <a:defRPr sz="950">
                 <a:solidFill>
                   <a:srgbClr val="94A3B8"/>
                 </a:solidFill>
-              </a:defRPr>
-            </a:pPr>
-            <a:r>
-              <a:t>Modélisation Prédictive des Ventes Hebdomadaires &amp; Optimisation Supply Chain</a:t>
+                <a:latin typeface="Segoe UI"/>
+              </a:defRPr>
+            </a:pPr>
+            <a:r>
+              <a:t>Meilleure généralisation (RMSE: 181k$)</a:t>
+            </a:r>
+          </a:p>
+        </p:txBody>
+      </p:sp>
+      <p:sp>
+        <p:nvSpPr>
+          <p:cNvPr id="8" name="TextBox 7"/>
+          <p:cNvSpPr txBox="1"/>
+          <p:nvPr/>
+        </p:nvSpPr>
+        <p:spPr>
+          <a:xfrm>
+            <a:off x="4754880" y="3657600"/>
+            <a:ext cx="2743200" cy="1097280"/>
+          </a:xfrm>
+          <a:prstGeom prst="rect">
+            <a:avLst/>
+          </a:prstGeom>
+          <a:noFill/>
+        </p:spPr>
+        <p:txBody>
+          <a:bodyPr wrap="square">
+            <a:spAutoFit/>
+          </a:bodyPr>
+          <a:lstStyle/>
+          <a:p>
+            <a:pPr>
+              <a:defRPr sz="2200" b="1">
+                <a:solidFill>
+                  <a:srgbClr val="FACC15"/>
+                </a:solidFill>
+                <a:latin typeface="Segoe UI"/>
+              </a:defRPr>
+            </a:pPr>
+            <a:r>
+              <a:t>3-SIGMA</a:t>
+            </a:r>
+          </a:p>
+          <a:p>
+            <a:pPr>
+              <a:defRPr sz="1100" b="1">
+                <a:solidFill>
+                  <a:srgbClr val="F8FAFC"/>
+                </a:solidFill>
+                <a:latin typeface="Segoe UI"/>
+              </a:defRPr>
+            </a:pPr>
+            <a:r>
+              <a:t>FILTRAGE OUTLIERS STRICT</a:t>
+            </a:r>
+          </a:p>
+          <a:p>
+            <a:pPr>
+              <a:defRPr sz="950">
+                <a:solidFill>
+                  <a:srgbClr val="94A3B8"/>
+                </a:solidFill>
+                <a:latin typeface="Segoe UI"/>
+              </a:defRPr>
+            </a:pPr>
+            <a:r>
+              <a:t>Nettoyage robuste des anomalies extrêmes</a:t>
+            </a:r>
+          </a:p>
+        </p:txBody>
+      </p:sp>
+      <p:sp>
+        <p:nvSpPr>
+          <p:cNvPr id="9" name="TextBox 8"/>
+          <p:cNvSpPr txBox="1"/>
+          <p:nvPr/>
+        </p:nvSpPr>
+        <p:spPr>
+          <a:xfrm>
+            <a:off x="7680960" y="3657600"/>
+            <a:ext cx="2743200" cy="1097280"/>
+          </a:xfrm>
+          <a:prstGeom prst="rect">
+            <a:avLst/>
+          </a:prstGeom>
+          <a:noFill/>
+        </p:spPr>
+        <p:txBody>
+          <a:bodyPr wrap="square">
+            <a:spAutoFit/>
+          </a:bodyPr>
+          <a:lstStyle/>
+          <a:p>
+            <a:pPr>
+              <a:defRPr sz="2200" b="1">
+                <a:solidFill>
+                  <a:srgbClr val="38BDF8"/>
+                </a:solidFill>
+                <a:latin typeface="Segoe UI"/>
+              </a:defRPr>
+            </a:pPr>
+            <a:r>
+              <a:t>STORE ID</a:t>
+            </a:r>
+          </a:p>
+          <a:p>
+            <a:pPr>
+              <a:defRPr sz="1100" b="1">
+                <a:solidFill>
+                  <a:srgbClr val="F8FAFC"/>
+                </a:solidFill>
+                <a:latin typeface="Segoe UI"/>
+              </a:defRPr>
+            </a:pPr>
+            <a:r>
+              <a:t>1er DRIVER DE VARIANCE</a:t>
+            </a:r>
+          </a:p>
+          <a:p>
+            <a:pPr>
+              <a:defRPr sz="950">
+                <a:solidFill>
+                  <a:srgbClr val="94A3B8"/>
+                </a:solidFill>
+                <a:latin typeface="Segoe UI"/>
+              </a:defRPr>
+            </a:pPr>
+            <a:r>
+              <a:t>Impact d'ancrage local supérieur à 1M$</a:t>
+            </a:r>
+          </a:p>
+        </p:txBody>
+      </p:sp>
+      <p:sp>
+        <p:nvSpPr>
+          <p:cNvPr id="10" name="TextBox 9"/>
+          <p:cNvSpPr txBox="1"/>
+          <p:nvPr/>
+        </p:nvSpPr>
+        <p:spPr>
+          <a:xfrm>
+            <a:off x="1828800" y="4983480"/>
+            <a:ext cx="8534095" cy="457200"/>
+          </a:xfrm>
+          <a:prstGeom prst="rect">
+            <a:avLst/>
+          </a:prstGeom>
+          <a:noFill/>
+        </p:spPr>
+        <p:txBody>
+          <a:bodyPr wrap="square">
+            <a:spAutoFit/>
+          </a:bodyPr>
+          <a:lstStyle/>
+          <a:p>
+            <a:pPr>
+              <a:defRPr sz="1100" b="1">
+                <a:solidFill>
+                  <a:srgbClr val="94A3B8"/>
+                </a:solidFill>
+                <a:latin typeface="Segoe UI"/>
+              </a:defRPr>
+            </a:pPr>
+            <a:r>
+              <a:t>Candidat : Christopher GILLERON   |   Commanditaire : Walmart Inc.   |   Certification CDSD (Niveau 7)   |   Jedha Bootcamp</a:t>
+            </a:r>
+          </a:p>
+        </p:txBody>
+      </p:sp>
+    </p:spTree>
+  </p:cSld>
+  <p:clrMapOvr>
+    <a:masterClrMapping/>
+  </p:clrMapOvr>
+</p:sld>
+</file>
+
+<file path=ppt/slides/slide10.xml><?xml version="1.0" encoding="utf-8"?>
+<p:sld xmlns:a="http://schemas.openxmlformats.org/drawingml/2006/main" xmlns:p="http://schemas.openxmlformats.org/presentationml/2006/main" xmlns:r="http://schemas.openxmlformats.org/officeDocument/2006/relationships">
+  <p:cSld>
+    <p:spTree>
+      <p:nvGrpSpPr>
+        <p:cNvPr id="1" name=""/>
+        <p:cNvGrpSpPr/>
+        <p:nvPr/>
+      </p:nvGrpSpPr>
+      <p:grpSpPr/>
+      <p:sp>
+        <p:nvSpPr>
+          <p:cNvPr id="2" name="Rectangle 1"/>
+          <p:cNvSpPr/>
+          <p:nvPr/>
+        </p:nvSpPr>
+        <p:spPr>
+          <a:xfrm>
+            <a:off x="0" y="0"/>
+            <a:ext cx="12191695" cy="6858000"/>
+          </a:xfrm>
+          <a:prstGeom prst="rect">
+            <a:avLst/>
+          </a:prstGeom>
+          <a:solidFill>
+            <a:srgbClr val="0B1120"/>
+          </a:solidFill>
+          <a:ln>
+            <a:noFill/>
+          </a:ln>
+        </p:spPr>
+        <p:style>
+          <a:lnRef idx="1">
+            <a:schemeClr val="accent1"/>
+          </a:lnRef>
+          <a:fillRef idx="3">
+            <a:schemeClr val="accent1"/>
+          </a:fillRef>
+          <a:effectRef idx="2">
+            <a:schemeClr val="accent1"/>
+          </a:effectRef>
+          <a:fontRef idx="minor">
+            <a:schemeClr val="lt1"/>
+          </a:fontRef>
+        </p:style>
+        <p:txBody>
+          <a:bodyPr rtlCol="0" anchor="ctr"/>
+          <a:lstStyle/>
+          <a:p>
+            <a:pPr algn="ctr"/>
+          </a:p>
+        </p:txBody>
+      </p:sp>
+      <p:sp>
+        <p:nvSpPr>
+          <p:cNvPr id="3" name="TextBox 2"/>
+          <p:cNvSpPr txBox="1"/>
+          <p:nvPr/>
+        </p:nvSpPr>
+        <p:spPr>
+          <a:xfrm>
+            <a:off x="731520" y="365760"/>
+            <a:ext cx="7315200" cy="320040"/>
+          </a:xfrm>
+          <a:prstGeom prst="rect">
+            <a:avLst/>
+          </a:prstGeom>
+          <a:noFill/>
+        </p:spPr>
+        <p:txBody>
+          <a:bodyPr wrap="square" lIns="0" tIns="0" rIns="0" bIns="0">
+            <a:spAutoFit/>
+          </a:bodyPr>
+          <a:lstStyle/>
+          <a:p>
+            <a:pPr>
+              <a:defRPr sz="1100" b="1">
+                <a:solidFill>
+                  <a:srgbClr val="38BDF8"/>
+                </a:solidFill>
+                <a:latin typeface="Segoe UI"/>
+              </a:defRPr>
+            </a:pPr>
+            <a:r>
+              <a:t>ÉTAPE 09 | SYNTHÈSE &amp; PLAN D'ACTION</a:t>
+            </a:r>
+          </a:p>
+        </p:txBody>
+      </p:sp>
+      <p:sp>
+        <p:nvSpPr>
+          <p:cNvPr id="4" name="TextBox 3"/>
+          <p:cNvSpPr txBox="1"/>
+          <p:nvPr/>
+        </p:nvSpPr>
+        <p:spPr>
+          <a:xfrm>
+            <a:off x="731520" y="685800"/>
+            <a:ext cx="9601200" cy="502920"/>
+          </a:xfrm>
+          <a:prstGeom prst="rect">
+            <a:avLst/>
+          </a:prstGeom>
+          <a:noFill/>
+        </p:spPr>
+        <p:txBody>
+          <a:bodyPr wrap="square" lIns="0" tIns="0" rIns="0" bIns="0">
+            <a:spAutoFit/>
+          </a:bodyPr>
+          <a:lstStyle/>
+          <a:p>
+            <a:pPr>
+              <a:defRPr sz="2200" b="1">
+                <a:solidFill>
+                  <a:srgbClr val="F8FAFC"/>
+                </a:solidFill>
+                <a:latin typeface="Segoe UI"/>
+              </a:defRPr>
+            </a:pPr>
+            <a:r>
+              <a:t>Tableau Comparatif des Modèles &amp; Recommandations Opérationnelles</a:t>
+            </a:r>
+          </a:p>
+        </p:txBody>
+      </p:sp>
+      <p:sp>
+        <p:nvSpPr>
+          <p:cNvPr id="5" name="TextBox 4"/>
+          <p:cNvSpPr txBox="1"/>
+          <p:nvPr/>
+        </p:nvSpPr>
+        <p:spPr>
+          <a:xfrm>
+            <a:off x="10362895" y="411480"/>
+            <a:ext cx="1097280" cy="365760"/>
+          </a:xfrm>
+          <a:prstGeom prst="rect">
+            <a:avLst/>
+          </a:prstGeom>
+          <a:noFill/>
+        </p:spPr>
+        <p:txBody>
+          <a:bodyPr wrap="square" lIns="0" tIns="0" rIns="0" bIns="0">
+            <a:spAutoFit/>
+          </a:bodyPr>
+          <a:lstStyle/>
+          <a:p>
+            <a:pPr algn="r">
+              <a:defRPr sz="1200" b="1">
+                <a:solidFill>
+                  <a:srgbClr val="94A3B8"/>
+                </a:solidFill>
+                <a:latin typeface="Segoe UI"/>
+              </a:defRPr>
+            </a:pPr>
+            <a:r>
+              <a:t>10 / 10</a:t>
             </a:r>
           </a:p>
         </p:txBody>
@@ -3249,8 +3712,8 @@
         </p:nvSpPr>
         <p:spPr>
           <a:xfrm>
-            <a:off x="1097280" y="5486400"/>
-            <a:ext cx="10058400" cy="548640"/>
+            <a:off x="731520" y="6400800"/>
+            <a:ext cx="10728655" cy="274320"/>
           </a:xfrm>
           <a:prstGeom prst="rect">
             <a:avLst/>
@@ -3258,20 +3721,1437 @@
           <a:noFill/>
         </p:spPr>
         <p:txBody>
-          <a:bodyPr wrap="none">
+          <a:bodyPr wrap="square" lIns="0" tIns="0" rIns="0" bIns="0">
             <a:spAutoFit/>
           </a:bodyPr>
           <a:lstStyle/>
           <a:p>
             <a:pPr>
-              <a:defRPr sz="1200">
-                <a:solidFill>
-                  <a:srgbClr val="A855F7"/>
-                </a:solidFill>
-              </a:defRPr>
-            </a:pPr>
-            <a:r>
-              <a:t>Christopher GILLERON  |  Certification CDSD — Jedha Bootcamp  |  Dossier Officiel</a:t>
+              <a:defRPr sz="1000">
+                <a:solidFill>
+                  <a:srgbClr val="64748B"/>
+                </a:solidFill>
+                <a:latin typeface="Segoe UI"/>
+              </a:defRPr>
+            </a:pPr>
+            <a:r>
+              <a:t>Christopher GILLERON  |  Walmart Store Sales Prediction (Machine Learning Supervisé)  |  Certification CDSD Bloc 3</a:t>
+            </a:r>
+          </a:p>
+        </p:txBody>
+      </p:sp>
+      <p:sp>
+        <p:nvSpPr>
+          <p:cNvPr id="7" name="Rounded Rectangle 6"/>
+          <p:cNvSpPr/>
+          <p:nvPr/>
+        </p:nvSpPr>
+        <p:spPr>
+          <a:xfrm>
+            <a:off x="731520" y="1280160"/>
+            <a:ext cx="10728655" cy="2103120"/>
+          </a:xfrm>
+          <a:prstGeom prst="roundRect">
+            <a:avLst/>
+          </a:prstGeom>
+          <a:solidFill>
+            <a:srgbClr val="1E293B"/>
+          </a:solidFill>
+          <a:ln w="19050">
+            <a:solidFill>
+              <a:srgbClr val="334155"/>
+            </a:solidFill>
+          </a:ln>
+        </p:spPr>
+        <p:style>
+          <a:lnRef idx="1">
+            <a:schemeClr val="accent1"/>
+          </a:lnRef>
+          <a:fillRef idx="3">
+            <a:schemeClr val="accent1"/>
+          </a:fillRef>
+          <a:effectRef idx="2">
+            <a:schemeClr val="accent1"/>
+          </a:effectRef>
+          <a:fontRef idx="minor">
+            <a:schemeClr val="lt1"/>
+          </a:fontRef>
+        </p:style>
+        <p:txBody>
+          <a:bodyPr rtlCol="0" anchor="ctr"/>
+          <a:lstStyle/>
+          <a:p>
+            <a:pPr algn="ctr"/>
+          </a:p>
+        </p:txBody>
+      </p:sp>
+      <p:sp>
+        <p:nvSpPr>
+          <p:cNvPr id="8" name="TextBox 7"/>
+          <p:cNvSpPr txBox="1"/>
+          <p:nvPr/>
+        </p:nvSpPr>
+        <p:spPr>
+          <a:xfrm>
+            <a:off x="914400" y="1444752"/>
+            <a:ext cx="10362895" cy="365760"/>
+          </a:xfrm>
+          <a:prstGeom prst="rect">
+            <a:avLst/>
+          </a:prstGeom>
+          <a:noFill/>
+        </p:spPr>
+        <p:txBody>
+          <a:bodyPr wrap="square" lIns="0" tIns="0" rIns="0" bIns="0">
+            <a:spAutoFit/>
+          </a:bodyPr>
+          <a:lstStyle/>
+          <a:p>
+            <a:pPr>
+              <a:defRPr sz="1200" b="1">
+                <a:solidFill>
+                  <a:srgbClr val="38BDF8"/>
+                </a:solidFill>
+                <a:latin typeface="Segoe UI"/>
+              </a:defRPr>
+            </a:pPr>
+            <a:r>
+              <a:t>TABLEAU COMPARATIF DES MODÈLES (SCIKIT-LEARN EVALUATION)</a:t>
+            </a:r>
+          </a:p>
+        </p:txBody>
+      </p:sp>
+      <p:graphicFrame>
+        <p:nvGraphicFramePr>
+          <p:cNvPr id="9" name="Table 8"/>
+          <p:cNvGraphicFramePr>
+            <a:graphicFrameLocks noGrp="1"/>
+          </p:cNvGraphicFramePr>
+          <p:nvPr/>
+        </p:nvGraphicFramePr>
+        <p:xfrm>
+          <a:off x="914400" y="1737360"/>
+          <a:ext cx="10362895" cy="1463040"/>
+        </p:xfrm>
+        <a:graphic>
+          <a:graphicData uri="http://schemas.openxmlformats.org/drawingml/2006/table">
+            <a:tbl>
+              <a:tblPr firstRow="1" bandRow="1">
+                <a:tableStyleId>{5C22544A-7EE6-4342-B048-85BDC9FD1C3A}</a:tableStyleId>
+              </a:tblPr>
+              <a:tblGrid>
+                <a:gridCol w="1480413"/>
+                <a:gridCol w="1480413"/>
+                <a:gridCol w="1480413"/>
+                <a:gridCol w="1480413"/>
+                <a:gridCol w="1480413"/>
+                <a:gridCol w="1480413"/>
+                <a:gridCol w="1480417"/>
+              </a:tblGrid>
+              <a:tr h="365760">
+                <a:tc>
+                  <a:txBody>
+                    <a:bodyPr/>
+                    <a:lstStyle/>
+                    <a:p>
+                      <a:pPr>
+                        <a:defRPr sz="1050" b="1">
+                          <a:solidFill>
+                            <a:srgbClr val="38BDF8"/>
+                          </a:solidFill>
+                          <a:latin typeface="Segoe UI"/>
+                        </a:defRPr>
+                      </a:pPr>
+                      <a:r>
+                        <a:t>Modèle</a:t>
+                      </a:r>
+                    </a:p>
+                  </a:txBody>
+                  <a:tcPr>
+                    <a:solidFill>
+                      <a:srgbClr val="0F172A"/>
+                    </a:solidFill>
+                  </a:tcPr>
+                </a:tc>
+                <a:tc>
+                  <a:txBody>
+                    <a:bodyPr/>
+                    <a:lstStyle/>
+                    <a:p>
+                      <a:pPr>
+                        <a:defRPr sz="1050" b="1">
+                          <a:solidFill>
+                            <a:srgbClr val="38BDF8"/>
+                          </a:solidFill>
+                          <a:latin typeface="Segoe UI"/>
+                        </a:defRPr>
+                      </a:pPr>
+                      <a:r>
+                        <a:t>Hyperparamètre</a:t>
+                      </a:r>
+                    </a:p>
+                  </a:txBody>
+                  <a:tcPr>
+                    <a:solidFill>
+                      <a:srgbClr val="0F172A"/>
+                    </a:solidFill>
+                  </a:tcPr>
+                </a:tc>
+                <a:tc>
+                  <a:txBody>
+                    <a:bodyPr/>
+                    <a:lstStyle/>
+                    <a:p>
+                      <a:pPr>
+                        <a:defRPr sz="1050" b="1">
+                          <a:solidFill>
+                            <a:srgbClr val="38BDF8"/>
+                          </a:solidFill>
+                          <a:latin typeface="Segoe UI"/>
+                        </a:defRPr>
+                      </a:pPr>
+                      <a:r>
+                        <a:t>R² Train</a:t>
+                      </a:r>
+                    </a:p>
+                  </a:txBody>
+                  <a:tcPr>
+                    <a:solidFill>
+                      <a:srgbClr val="0F172A"/>
+                    </a:solidFill>
+                  </a:tcPr>
+                </a:tc>
+                <a:tc>
+                  <a:txBody>
+                    <a:bodyPr/>
+                    <a:lstStyle/>
+                    <a:p>
+                      <a:pPr>
+                        <a:defRPr sz="1050" b="1">
+                          <a:solidFill>
+                            <a:srgbClr val="38BDF8"/>
+                          </a:solidFill>
+                          <a:latin typeface="Segoe UI"/>
+                        </a:defRPr>
+                      </a:pPr>
+                      <a:r>
+                        <a:t>R² Test</a:t>
+                      </a:r>
+                    </a:p>
+                  </a:txBody>
+                  <a:tcPr>
+                    <a:solidFill>
+                      <a:srgbClr val="0F172A"/>
+                    </a:solidFill>
+                  </a:tcPr>
+                </a:tc>
+                <a:tc>
+                  <a:txBody>
+                    <a:bodyPr/>
+                    <a:lstStyle/>
+                    <a:p>
+                      <a:pPr>
+                        <a:defRPr sz="1050" b="1">
+                          <a:solidFill>
+                            <a:srgbClr val="38BDF8"/>
+                          </a:solidFill>
+                          <a:latin typeface="Segoe UI"/>
+                        </a:defRPr>
+                      </a:pPr>
+                      <a:r>
+                        <a:t>MAE Test ($)</a:t>
+                      </a:r>
+                    </a:p>
+                  </a:txBody>
+                  <a:tcPr>
+                    <a:solidFill>
+                      <a:srgbClr val="0F172A"/>
+                    </a:solidFill>
+                  </a:tcPr>
+                </a:tc>
+                <a:tc>
+                  <a:txBody>
+                    <a:bodyPr/>
+                    <a:lstStyle/>
+                    <a:p>
+                      <a:pPr>
+                        <a:defRPr sz="1050" b="1">
+                          <a:solidFill>
+                            <a:srgbClr val="38BDF8"/>
+                          </a:solidFill>
+                          <a:latin typeface="Segoe UI"/>
+                        </a:defRPr>
+                      </a:pPr>
+                      <a:r>
+                        <a:t>RMSE Test ($)</a:t>
+                      </a:r>
+                    </a:p>
+                  </a:txBody>
+                  <a:tcPr>
+                    <a:solidFill>
+                      <a:srgbClr val="0F172A"/>
+                    </a:solidFill>
+                  </a:tcPr>
+                </a:tc>
+                <a:tc>
+                  <a:txBody>
+                    <a:bodyPr/>
+                    <a:lstStyle/>
+                    <a:p>
+                      <a:pPr>
+                        <a:defRPr sz="1050" b="1">
+                          <a:solidFill>
+                            <a:srgbClr val="38BDF8"/>
+                          </a:solidFill>
+                          <a:latin typeface="Segoe UI"/>
+                        </a:defRPr>
+                      </a:pPr>
+                      <a:r>
+                        <a:t>Statut</a:t>
+                      </a:r>
+                    </a:p>
+                  </a:txBody>
+                  <a:tcPr>
+                    <a:solidFill>
+                      <a:srgbClr val="0F172A"/>
+                    </a:solidFill>
+                  </a:tcPr>
+                </a:tc>
+              </a:tr>
+              <a:tr h="365760">
+                <a:tc>
+                  <a:txBody>
+                    <a:bodyPr/>
+                    <a:lstStyle/>
+                    <a:p>
+                      <a:pPr>
+                        <a:defRPr sz="950" b="0">
+                          <a:solidFill>
+                            <a:srgbClr val="F8FAFC"/>
+                          </a:solidFill>
+                          <a:latin typeface="Segoe UI"/>
+                        </a:defRPr>
+                      </a:pPr>
+                      <a:r>
+                        <a:t>Linear Regression</a:t>
+                      </a:r>
+                    </a:p>
+                  </a:txBody>
+                  <a:tcPr>
+                    <a:solidFill>
+                      <a:srgbClr val="18202F"/>
+                    </a:solidFill>
+                  </a:tcPr>
+                </a:tc>
+                <a:tc>
+                  <a:txBody>
+                    <a:bodyPr/>
+                    <a:lstStyle/>
+                    <a:p>
+                      <a:pPr>
+                        <a:defRPr sz="950" b="0">
+                          <a:solidFill>
+                            <a:srgbClr val="F8FAFC"/>
+                          </a:solidFill>
+                          <a:latin typeface="Segoe UI"/>
+                        </a:defRPr>
+                      </a:pPr>
+                      <a:r>
+                        <a:t>Sans pénalité</a:t>
+                      </a:r>
+                    </a:p>
+                  </a:txBody>
+                  <a:tcPr>
+                    <a:solidFill>
+                      <a:srgbClr val="18202F"/>
+                    </a:solidFill>
+                  </a:tcPr>
+                </a:tc>
+                <a:tc>
+                  <a:txBody>
+                    <a:bodyPr/>
+                    <a:lstStyle/>
+                    <a:p>
+                      <a:pPr>
+                        <a:defRPr sz="950" b="0">
+                          <a:solidFill>
+                            <a:srgbClr val="F8FAFC"/>
+                          </a:solidFill>
+                          <a:latin typeface="Segoe UI"/>
+                        </a:defRPr>
+                      </a:pPr>
+                      <a:r>
+                        <a:t>0.98</a:t>
+                      </a:r>
+                    </a:p>
+                  </a:txBody>
+                  <a:tcPr>
+                    <a:solidFill>
+                      <a:srgbClr val="18202F"/>
+                    </a:solidFill>
+                  </a:tcPr>
+                </a:tc>
+                <a:tc>
+                  <a:txBody>
+                    <a:bodyPr/>
+                    <a:lstStyle/>
+                    <a:p>
+                      <a:pPr>
+                        <a:defRPr sz="950" b="0">
+                          <a:solidFill>
+                            <a:srgbClr val="F8FAFC"/>
+                          </a:solidFill>
+                          <a:latin typeface="Segoe UI"/>
+                        </a:defRPr>
+                      </a:pPr>
+                      <a:r>
+                        <a:t>0.90</a:t>
+                      </a:r>
+                    </a:p>
+                  </a:txBody>
+                  <a:tcPr>
+                    <a:solidFill>
+                      <a:srgbClr val="18202F"/>
+                    </a:solidFill>
+                  </a:tcPr>
+                </a:tc>
+                <a:tc>
+                  <a:txBody>
+                    <a:bodyPr/>
+                    <a:lstStyle/>
+                    <a:p>
+                      <a:pPr>
+                        <a:defRPr sz="950" b="0">
+                          <a:solidFill>
+                            <a:srgbClr val="F8FAFC"/>
+                          </a:solidFill>
+                          <a:latin typeface="Segoe UI"/>
+                        </a:defRPr>
+                      </a:pPr>
+                      <a:r>
+                        <a:t>145 803 $</a:t>
+                      </a:r>
+                    </a:p>
+                  </a:txBody>
+                  <a:tcPr>
+                    <a:solidFill>
+                      <a:srgbClr val="18202F"/>
+                    </a:solidFill>
+                  </a:tcPr>
+                </a:tc>
+                <a:tc>
+                  <a:txBody>
+                    <a:bodyPr/>
+                    <a:lstStyle/>
+                    <a:p>
+                      <a:pPr>
+                        <a:defRPr sz="950" b="0">
+                          <a:solidFill>
+                            <a:srgbClr val="F8FAFC"/>
+                          </a:solidFill>
+                          <a:latin typeface="Segoe UI"/>
+                        </a:defRPr>
+                      </a:pPr>
+                      <a:r>
+                        <a:t>188 478 $</a:t>
+                      </a:r>
+                    </a:p>
+                  </a:txBody>
+                  <a:tcPr>
+                    <a:solidFill>
+                      <a:srgbClr val="18202F"/>
+                    </a:solidFill>
+                  </a:tcPr>
+                </a:tc>
+                <a:tc>
+                  <a:txBody>
+                    <a:bodyPr/>
+                    <a:lstStyle/>
+                    <a:p>
+                      <a:pPr>
+                        <a:defRPr sz="950" b="0">
+                          <a:solidFill>
+                            <a:srgbClr val="F8FAFC"/>
+                          </a:solidFill>
+                          <a:latin typeface="Segoe UI"/>
+                        </a:defRPr>
+                      </a:pPr>
+                      <a:r>
+                        <a:t>Baseline</a:t>
+                      </a:r>
+                    </a:p>
+                  </a:txBody>
+                  <a:tcPr>
+                    <a:solidFill>
+                      <a:srgbClr val="18202F"/>
+                    </a:solidFill>
+                  </a:tcPr>
+                </a:tc>
+              </a:tr>
+              <a:tr h="365760">
+                <a:tc>
+                  <a:txBody>
+                    <a:bodyPr/>
+                    <a:lstStyle/>
+                    <a:p>
+                      <a:pPr>
+                        <a:defRPr sz="950" b="0">
+                          <a:solidFill>
+                            <a:srgbClr val="F8FAFC"/>
+                          </a:solidFill>
+                          <a:latin typeface="Segoe UI"/>
+                        </a:defRPr>
+                      </a:pPr>
+                      <a:r>
+                        <a:t>Ridge (L2)</a:t>
+                      </a:r>
+                    </a:p>
+                  </a:txBody>
+                  <a:tcPr>
+                    <a:solidFill>
+                      <a:srgbClr val="1E293B"/>
+                    </a:solidFill>
+                  </a:tcPr>
+                </a:tc>
+                <a:tc>
+                  <a:txBody>
+                    <a:bodyPr/>
+                    <a:lstStyle/>
+                    <a:p>
+                      <a:pPr>
+                        <a:defRPr sz="950" b="0">
+                          <a:solidFill>
+                            <a:srgbClr val="F8FAFC"/>
+                          </a:solidFill>
+                          <a:latin typeface="Segoe UI"/>
+                        </a:defRPr>
+                      </a:pPr>
+                      <a:r>
+                        <a:t>alpha = 0.01</a:t>
+                      </a:r>
+                    </a:p>
+                  </a:txBody>
+                  <a:tcPr>
+                    <a:solidFill>
+                      <a:srgbClr val="1E293B"/>
+                    </a:solidFill>
+                  </a:tcPr>
+                </a:tc>
+                <a:tc>
+                  <a:txBody>
+                    <a:bodyPr/>
+                    <a:lstStyle/>
+                    <a:p>
+                      <a:pPr>
+                        <a:defRPr sz="950" b="0">
+                          <a:solidFill>
+                            <a:srgbClr val="F8FAFC"/>
+                          </a:solidFill>
+                          <a:latin typeface="Segoe UI"/>
+                        </a:defRPr>
+                      </a:pPr>
+                      <a:r>
+                        <a:t>0.98</a:t>
+                      </a:r>
+                    </a:p>
+                  </a:txBody>
+                  <a:tcPr>
+                    <a:solidFill>
+                      <a:srgbClr val="1E293B"/>
+                    </a:solidFill>
+                  </a:tcPr>
+                </a:tc>
+                <a:tc>
+                  <a:txBody>
+                    <a:bodyPr/>
+                    <a:lstStyle/>
+                    <a:p>
+                      <a:pPr>
+                        <a:defRPr sz="950" b="0">
+                          <a:solidFill>
+                            <a:srgbClr val="F8FAFC"/>
+                          </a:solidFill>
+                          <a:latin typeface="Segoe UI"/>
+                        </a:defRPr>
+                      </a:pPr>
+                      <a:r>
+                        <a:t>0.90</a:t>
+                      </a:r>
+                    </a:p>
+                  </a:txBody>
+                  <a:tcPr>
+                    <a:solidFill>
+                      <a:srgbClr val="1E293B"/>
+                    </a:solidFill>
+                  </a:tcPr>
+                </a:tc>
+                <a:tc>
+                  <a:txBody>
+                    <a:bodyPr/>
+                    <a:lstStyle/>
+                    <a:p>
+                      <a:pPr>
+                        <a:defRPr sz="950" b="0">
+                          <a:solidFill>
+                            <a:srgbClr val="F8FAFC"/>
+                          </a:solidFill>
+                          <a:latin typeface="Segoe UI"/>
+                        </a:defRPr>
+                      </a:pPr>
+                      <a:r>
+                        <a:t>145 013 $</a:t>
+                      </a:r>
+                    </a:p>
+                  </a:txBody>
+                  <a:tcPr>
+                    <a:solidFill>
+                      <a:srgbClr val="1E293B"/>
+                    </a:solidFill>
+                  </a:tcPr>
+                </a:tc>
+                <a:tc>
+                  <a:txBody>
+                    <a:bodyPr/>
+                    <a:lstStyle/>
+                    <a:p>
+                      <a:pPr>
+                        <a:defRPr sz="950" b="0">
+                          <a:solidFill>
+                            <a:srgbClr val="F8FAFC"/>
+                          </a:solidFill>
+                          <a:latin typeface="Segoe UI"/>
+                        </a:defRPr>
+                      </a:pPr>
+                      <a:r>
+                        <a:t>187 888 $</a:t>
+                      </a:r>
+                    </a:p>
+                  </a:txBody>
+                  <a:tcPr>
+                    <a:solidFill>
+                      <a:srgbClr val="1E293B"/>
+                    </a:solidFill>
+                  </a:tcPr>
+                </a:tc>
+                <a:tc>
+                  <a:txBody>
+                    <a:bodyPr/>
+                    <a:lstStyle/>
+                    <a:p>
+                      <a:pPr>
+                        <a:defRPr sz="950" b="0">
+                          <a:solidFill>
+                            <a:srgbClr val="F8FAFC"/>
+                          </a:solidFill>
+                          <a:latin typeface="Segoe UI"/>
+                        </a:defRPr>
+                      </a:pPr>
+                      <a:r>
+                        <a:t>Stabilisé</a:t>
+                      </a:r>
+                    </a:p>
+                  </a:txBody>
+                  <a:tcPr>
+                    <a:solidFill>
+                      <a:srgbClr val="1E293B"/>
+                    </a:solidFill>
+                  </a:tcPr>
+                </a:tc>
+              </a:tr>
+              <a:tr h="365760">
+                <a:tc>
+                  <a:txBody>
+                    <a:bodyPr/>
+                    <a:lstStyle/>
+                    <a:p>
+                      <a:pPr>
+                        <a:defRPr sz="950" b="1">
+                          <a:solidFill>
+                            <a:srgbClr val="10B981"/>
+                          </a:solidFill>
+                          <a:latin typeface="Segoe UI"/>
+                        </a:defRPr>
+                      </a:pPr>
+                      <a:r>
+                        <a:t>Lasso (L1) — Élu</a:t>
+                      </a:r>
+                    </a:p>
+                  </a:txBody>
+                  <a:tcPr>
+                    <a:solidFill>
+                      <a:srgbClr val="18202F"/>
+                    </a:solidFill>
+                  </a:tcPr>
+                </a:tc>
+                <a:tc>
+                  <a:txBody>
+                    <a:bodyPr/>
+                    <a:lstStyle/>
+                    <a:p>
+                      <a:pPr>
+                        <a:defRPr sz="950" b="1">
+                          <a:solidFill>
+                            <a:srgbClr val="10B981"/>
+                          </a:solidFill>
+                          <a:latin typeface="Segoe UI"/>
+                        </a:defRPr>
+                      </a:pPr>
+                      <a:r>
+                        <a:t>alpha = 1 000</a:t>
+                      </a:r>
+                    </a:p>
+                  </a:txBody>
+                  <a:tcPr>
+                    <a:solidFill>
+                      <a:srgbClr val="18202F"/>
+                    </a:solidFill>
+                  </a:tcPr>
+                </a:tc>
+                <a:tc>
+                  <a:txBody>
+                    <a:bodyPr/>
+                    <a:lstStyle/>
+                    <a:p>
+                      <a:pPr>
+                        <a:defRPr sz="950" b="1">
+                          <a:solidFill>
+                            <a:srgbClr val="10B981"/>
+                          </a:solidFill>
+                          <a:latin typeface="Segoe UI"/>
+                        </a:defRPr>
+                      </a:pPr>
+                      <a:r>
+                        <a:t>0.98</a:t>
+                      </a:r>
+                    </a:p>
+                  </a:txBody>
+                  <a:tcPr>
+                    <a:solidFill>
+                      <a:srgbClr val="18202F"/>
+                    </a:solidFill>
+                  </a:tcPr>
+                </a:tc>
+                <a:tc>
+                  <a:txBody>
+                    <a:bodyPr/>
+                    <a:lstStyle/>
+                    <a:p>
+                      <a:pPr>
+                        <a:defRPr sz="950" b="1">
+                          <a:solidFill>
+                            <a:srgbClr val="10B981"/>
+                          </a:solidFill>
+                          <a:latin typeface="Segoe UI"/>
+                        </a:defRPr>
+                      </a:pPr>
+                      <a:r>
+                        <a:t>0.91</a:t>
+                      </a:r>
+                    </a:p>
+                  </a:txBody>
+                  <a:tcPr>
+                    <a:solidFill>
+                      <a:srgbClr val="18202F"/>
+                    </a:solidFill>
+                  </a:tcPr>
+                </a:tc>
+                <a:tc>
+                  <a:txBody>
+                    <a:bodyPr/>
+                    <a:lstStyle/>
+                    <a:p>
+                      <a:pPr>
+                        <a:defRPr sz="950" b="1">
+                          <a:solidFill>
+                            <a:srgbClr val="10B981"/>
+                          </a:solidFill>
+                          <a:latin typeface="Segoe UI"/>
+                        </a:defRPr>
+                      </a:pPr>
+                      <a:r>
+                        <a:t>146 306 $</a:t>
+                      </a:r>
+                    </a:p>
+                  </a:txBody>
+                  <a:tcPr>
+                    <a:solidFill>
+                      <a:srgbClr val="18202F"/>
+                    </a:solidFill>
+                  </a:tcPr>
+                </a:tc>
+                <a:tc>
+                  <a:txBody>
+                    <a:bodyPr/>
+                    <a:lstStyle/>
+                    <a:p>
+                      <a:pPr>
+                        <a:defRPr sz="950" b="1">
+                          <a:solidFill>
+                            <a:srgbClr val="10B981"/>
+                          </a:solidFill>
+                          <a:latin typeface="Segoe UI"/>
+                        </a:defRPr>
+                      </a:pPr>
+                      <a:r>
+                        <a:t>181 457 $</a:t>
+                      </a:r>
+                    </a:p>
+                  </a:txBody>
+                  <a:tcPr>
+                    <a:solidFill>
+                      <a:srgbClr val="18202F"/>
+                    </a:solidFill>
+                  </a:tcPr>
+                </a:tc>
+                <a:tc>
+                  <a:txBody>
+                    <a:bodyPr/>
+                    <a:lstStyle/>
+                    <a:p>
+                      <a:pPr>
+                        <a:defRPr sz="950" b="1">
+                          <a:solidFill>
+                            <a:srgbClr val="10B981"/>
+                          </a:solidFill>
+                          <a:latin typeface="Segoe UI"/>
+                        </a:defRPr>
+                      </a:pPr>
+                      <a:r>
+                        <a:t>OPTIMAL (RMSE min)</a:t>
+                      </a:r>
+                    </a:p>
+                  </a:txBody>
+                  <a:tcPr>
+                    <a:solidFill>
+                      <a:srgbClr val="18202F"/>
+                    </a:solidFill>
+                  </a:tcPr>
+                </a:tc>
+              </a:tr>
+            </a:tbl>
+          </a:graphicData>
+        </a:graphic>
+      </p:graphicFrame>
+      <p:sp>
+        <p:nvSpPr>
+          <p:cNvPr id="10" name="Rounded Rectangle 9"/>
+          <p:cNvSpPr/>
+          <p:nvPr/>
+        </p:nvSpPr>
+        <p:spPr>
+          <a:xfrm>
+            <a:off x="731520" y="3566160"/>
+            <a:ext cx="5242255" cy="1280160"/>
+          </a:xfrm>
+          <a:prstGeom prst="roundRect">
+            <a:avLst/>
+          </a:prstGeom>
+          <a:solidFill>
+            <a:srgbClr val="1E293B"/>
+          </a:solidFill>
+          <a:ln w="19050">
+            <a:solidFill>
+              <a:srgbClr val="38BDF8"/>
+            </a:solidFill>
+          </a:ln>
+        </p:spPr>
+        <p:style>
+          <a:lnRef idx="1">
+            <a:schemeClr val="accent1"/>
+          </a:lnRef>
+          <a:fillRef idx="3">
+            <a:schemeClr val="accent1"/>
+          </a:fillRef>
+          <a:effectRef idx="2">
+            <a:schemeClr val="accent1"/>
+          </a:effectRef>
+          <a:fontRef idx="minor">
+            <a:schemeClr val="lt1"/>
+          </a:fontRef>
+        </p:style>
+        <p:txBody>
+          <a:bodyPr rtlCol="0" anchor="ctr"/>
+          <a:lstStyle/>
+          <a:p>
+            <a:pPr algn="ctr"/>
+          </a:p>
+        </p:txBody>
+      </p:sp>
+      <p:sp>
+        <p:nvSpPr>
+          <p:cNvPr id="11" name="TextBox 10"/>
+          <p:cNvSpPr txBox="1"/>
+          <p:nvPr/>
+        </p:nvSpPr>
+        <p:spPr>
+          <a:xfrm>
+            <a:off x="914400" y="3730752"/>
+            <a:ext cx="4876495" cy="365760"/>
+          </a:xfrm>
+          <a:prstGeom prst="rect">
+            <a:avLst/>
+          </a:prstGeom>
+          <a:noFill/>
+        </p:spPr>
+        <p:txBody>
+          <a:bodyPr wrap="square" lIns="0" tIns="0" rIns="0" bIns="0">
+            <a:spAutoFit/>
+          </a:bodyPr>
+          <a:lstStyle/>
+          <a:p>
+            <a:pPr>
+              <a:defRPr sz="1200" b="1">
+                <a:solidFill>
+                  <a:srgbClr val="38BDF8"/>
+                </a:solidFill>
+                <a:latin typeface="Segoe UI"/>
+              </a:defRPr>
+            </a:pPr>
+            <a:r>
+              <a:t>01 | PILOTAGE SUPPLY CHAIN PAR MAGASIN</a:t>
+            </a:r>
+          </a:p>
+        </p:txBody>
+      </p:sp>
+      <p:sp>
+        <p:nvSpPr>
+          <p:cNvPr id="12" name="TextBox 11"/>
+          <p:cNvSpPr txBox="1"/>
+          <p:nvPr/>
+        </p:nvSpPr>
+        <p:spPr>
+          <a:xfrm>
+            <a:off x="914400" y="4069080"/>
+            <a:ext cx="4876495" cy="731520"/>
+          </a:xfrm>
+          <a:prstGeom prst="rect">
+            <a:avLst/>
+          </a:prstGeom>
+          <a:noFill/>
+        </p:spPr>
+        <p:txBody>
+          <a:bodyPr wrap="square">
+            <a:spAutoFit/>
+          </a:bodyPr>
+          <a:lstStyle/>
+          <a:p>
+            <a:pPr>
+              <a:defRPr sz="950" b="1">
+                <a:solidFill>
+                  <a:srgbClr val="38BDF8"/>
+                </a:solidFill>
+                <a:latin typeface="Segoe UI"/>
+              </a:defRPr>
+            </a:pPr>
+            <a:r>
+              <a:t>Ancrage Magasin :</a:t>
+            </a:r>
+          </a:p>
+          <a:p>
+            <a:pPr>
+              <a:defRPr sz="900">
+                <a:solidFill>
+                  <a:srgbClr val="F8FAFC"/>
+                </a:solidFill>
+                <a:latin typeface="Segoe UI"/>
+              </a:defRPr>
+            </a:pPr>
+            <a:r>
+              <a:t>Ne pas appliquer de règles globales uniformes : adapter les stocks selon le cluster de volume (Store 4/13/20 vs Store 3/5).</a:t>
+            </a:r>
+          </a:p>
+          <a:p>
+            <a:pPr>
+              <a:defRPr sz="950" b="1">
+                <a:solidFill>
+                  <a:srgbClr val="38BDF8"/>
+                </a:solidFill>
+                <a:latin typeface="Segoe UI"/>
+              </a:defRPr>
+            </a:pPr>
+            <a:r>
+              <a:t>Optimisation :</a:t>
+            </a:r>
+          </a:p>
+          <a:p>
+            <a:pPr>
+              <a:defRPr sz="900">
+                <a:solidFill>
+                  <a:srgbClr val="F8FAFC"/>
+                </a:solidFill>
+                <a:latin typeface="Segoe UI"/>
+              </a:defRPr>
+            </a:pPr>
+            <a:r>
+              <a:t>Gain potentiel de 5% à 8% sur les coûts d'immobilisation de stock.</a:t>
+            </a:r>
+          </a:p>
+        </p:txBody>
+      </p:sp>
+      <p:sp>
+        <p:nvSpPr>
+          <p:cNvPr id="13" name="Rounded Rectangle 12"/>
+          <p:cNvSpPr/>
+          <p:nvPr/>
+        </p:nvSpPr>
+        <p:spPr>
+          <a:xfrm>
+            <a:off x="6217920" y="3566160"/>
+            <a:ext cx="5242255" cy="1280160"/>
+          </a:xfrm>
+          <a:prstGeom prst="roundRect">
+            <a:avLst/>
+          </a:prstGeom>
+          <a:solidFill>
+            <a:srgbClr val="1E293B"/>
+          </a:solidFill>
+          <a:ln w="19050">
+            <a:solidFill>
+              <a:srgbClr val="FACC15"/>
+            </a:solidFill>
+          </a:ln>
+        </p:spPr>
+        <p:style>
+          <a:lnRef idx="1">
+            <a:schemeClr val="accent1"/>
+          </a:lnRef>
+          <a:fillRef idx="3">
+            <a:schemeClr val="accent1"/>
+          </a:fillRef>
+          <a:effectRef idx="2">
+            <a:schemeClr val="accent1"/>
+          </a:effectRef>
+          <a:fontRef idx="minor">
+            <a:schemeClr val="lt1"/>
+          </a:fontRef>
+        </p:style>
+        <p:txBody>
+          <a:bodyPr rtlCol="0" anchor="ctr"/>
+          <a:lstStyle/>
+          <a:p>
+            <a:pPr algn="ctr"/>
+          </a:p>
+        </p:txBody>
+      </p:sp>
+      <p:sp>
+        <p:nvSpPr>
+          <p:cNvPr id="14" name="TextBox 13"/>
+          <p:cNvSpPr txBox="1"/>
+          <p:nvPr/>
+        </p:nvSpPr>
+        <p:spPr>
+          <a:xfrm>
+            <a:off x="6400800" y="3730752"/>
+            <a:ext cx="4876495" cy="365760"/>
+          </a:xfrm>
+          <a:prstGeom prst="rect">
+            <a:avLst/>
+          </a:prstGeom>
+          <a:noFill/>
+        </p:spPr>
+        <p:txBody>
+          <a:bodyPr wrap="square" lIns="0" tIns="0" rIns="0" bIns="0">
+            <a:spAutoFit/>
+          </a:bodyPr>
+          <a:lstStyle/>
+          <a:p>
+            <a:pPr>
+              <a:defRPr sz="1200" b="1">
+                <a:solidFill>
+                  <a:srgbClr val="38BDF8"/>
+                </a:solidFill>
+                <a:latin typeface="Segoe UI"/>
+              </a:defRPr>
+            </a:pPr>
+            <a:r>
+              <a:t>02 | ANTICIPATION DES SEMAINES FÉRIÉES</a:t>
+            </a:r>
+          </a:p>
+        </p:txBody>
+      </p:sp>
+      <p:sp>
+        <p:nvSpPr>
+          <p:cNvPr id="15" name="TextBox 14"/>
+          <p:cNvSpPr txBox="1"/>
+          <p:nvPr/>
+        </p:nvSpPr>
+        <p:spPr>
+          <a:xfrm>
+            <a:off x="6400800" y="4069080"/>
+            <a:ext cx="4876495" cy="731520"/>
+          </a:xfrm>
+          <a:prstGeom prst="rect">
+            <a:avLst/>
+          </a:prstGeom>
+          <a:noFill/>
+        </p:spPr>
+        <p:txBody>
+          <a:bodyPr wrap="square">
+            <a:spAutoFit/>
+          </a:bodyPr>
+          <a:lstStyle/>
+          <a:p>
+            <a:pPr>
+              <a:defRPr sz="950" b="1">
+                <a:solidFill>
+                  <a:srgbClr val="FACC15"/>
+                </a:solidFill>
+                <a:latin typeface="Segoe UI"/>
+              </a:defRPr>
+            </a:pPr>
+            <a:r>
+              <a:t>Planification Fêtes :</a:t>
+            </a:r>
+          </a:p>
+          <a:p>
+            <a:pPr>
+              <a:defRPr sz="900">
+                <a:solidFill>
+                  <a:srgbClr val="F8FAFC"/>
+                </a:solidFill>
+                <a:latin typeface="Segoe UI"/>
+              </a:defRPr>
+            </a:pPr>
+            <a:r>
+              <a:t>Anticiper de 3 semaines l'approvisionnement des semaines 'Holiday_Flag' (+48.9k$ de boost structurel).</a:t>
+            </a:r>
+          </a:p>
+          <a:p>
+            <a:pPr>
+              <a:defRPr sz="950" b="1">
+                <a:solidFill>
+                  <a:srgbClr val="FACC15"/>
+                </a:solidFill>
+                <a:latin typeface="Segoe UI"/>
+              </a:defRPr>
+            </a:pPr>
+            <a:r>
+              <a:t>Campagnes Marketing :</a:t>
+            </a:r>
+          </a:p>
+          <a:p>
+            <a:pPr>
+              <a:defRPr sz="900">
+                <a:solidFill>
+                  <a:srgbClr val="F8FAFC"/>
+                </a:solidFill>
+                <a:latin typeface="Segoe UI"/>
+              </a:defRPr>
+            </a:pPr>
+            <a:r>
+              <a:t>Concentrer les investissements publicitaires sur Thanksgiving.</a:t>
+            </a:r>
+          </a:p>
+        </p:txBody>
+      </p:sp>
+      <p:sp>
+        <p:nvSpPr>
+          <p:cNvPr id="16" name="Rounded Rectangle 15"/>
+          <p:cNvSpPr/>
+          <p:nvPr/>
+        </p:nvSpPr>
+        <p:spPr>
+          <a:xfrm>
+            <a:off x="731520" y="4937760"/>
+            <a:ext cx="5242255" cy="1280160"/>
+          </a:xfrm>
+          <a:prstGeom prst="roundRect">
+            <a:avLst/>
+          </a:prstGeom>
+          <a:solidFill>
+            <a:srgbClr val="1E293B"/>
+          </a:solidFill>
+          <a:ln w="19050">
+            <a:solidFill>
+              <a:srgbClr val="F59E0B"/>
+            </a:solidFill>
+          </a:ln>
+        </p:spPr>
+        <p:style>
+          <a:lnRef idx="1">
+            <a:schemeClr val="accent1"/>
+          </a:lnRef>
+          <a:fillRef idx="3">
+            <a:schemeClr val="accent1"/>
+          </a:fillRef>
+          <a:effectRef idx="2">
+            <a:schemeClr val="accent1"/>
+          </a:effectRef>
+          <a:fontRef idx="minor">
+            <a:schemeClr val="lt1"/>
+          </a:fontRef>
+        </p:style>
+        <p:txBody>
+          <a:bodyPr rtlCol="0" anchor="ctr"/>
+          <a:lstStyle/>
+          <a:p>
+            <a:pPr algn="ctr"/>
+          </a:p>
+        </p:txBody>
+      </p:sp>
+      <p:sp>
+        <p:nvSpPr>
+          <p:cNvPr id="17" name="TextBox 16"/>
+          <p:cNvSpPr txBox="1"/>
+          <p:nvPr/>
+        </p:nvSpPr>
+        <p:spPr>
+          <a:xfrm>
+            <a:off x="914400" y="5102352"/>
+            <a:ext cx="4876495" cy="365760"/>
+          </a:xfrm>
+          <a:prstGeom prst="rect">
+            <a:avLst/>
+          </a:prstGeom>
+          <a:noFill/>
+        </p:spPr>
+        <p:txBody>
+          <a:bodyPr wrap="square" lIns="0" tIns="0" rIns="0" bIns="0">
+            <a:spAutoFit/>
+          </a:bodyPr>
+          <a:lstStyle/>
+          <a:p>
+            <a:pPr>
+              <a:defRPr sz="1200" b="1">
+                <a:solidFill>
+                  <a:srgbClr val="38BDF8"/>
+                </a:solidFill>
+                <a:latin typeface="Segoe UI"/>
+              </a:defRPr>
+            </a:pPr>
+            <a:r>
+              <a:t>03 | BAROMÈTRE MACROÉCONOMIQUE</a:t>
+            </a:r>
+          </a:p>
+        </p:txBody>
+      </p:sp>
+      <p:sp>
+        <p:nvSpPr>
+          <p:cNvPr id="18" name="TextBox 17"/>
+          <p:cNvSpPr txBox="1"/>
+          <p:nvPr/>
+        </p:nvSpPr>
+        <p:spPr>
+          <a:xfrm>
+            <a:off x="914400" y="5440680"/>
+            <a:ext cx="4876495" cy="731520"/>
+          </a:xfrm>
+          <a:prstGeom prst="rect">
+            <a:avLst/>
+          </a:prstGeom>
+          <a:noFill/>
+        </p:spPr>
+        <p:txBody>
+          <a:bodyPr wrap="square">
+            <a:spAutoFit/>
+          </a:bodyPr>
+          <a:lstStyle/>
+          <a:p>
+            <a:pPr>
+              <a:defRPr sz="950" b="1">
+                <a:solidFill>
+                  <a:srgbClr val="F59E0B"/>
+                </a:solidFill>
+                <a:latin typeface="Segoe UI"/>
+              </a:defRPr>
+            </a:pPr>
+            <a:r>
+              <a:t>Sensibilité Chômage :</a:t>
+            </a:r>
+          </a:p>
+          <a:p>
+            <a:pPr>
+              <a:defRPr sz="900">
+                <a:solidFill>
+                  <a:srgbClr val="F8FAFC"/>
+                </a:solidFill>
+                <a:latin typeface="Segoe UI"/>
+              </a:defRPr>
+            </a:pPr>
+            <a:r>
+              <a:t>Dans les bassins où le chômage grimpe, adapter le merchandising vers les marques premiers prix (Great Value).</a:t>
+            </a:r>
+          </a:p>
+          <a:p>
+            <a:pPr>
+              <a:defRPr sz="950" b="1">
+                <a:solidFill>
+                  <a:srgbClr val="F59E0B"/>
+                </a:solidFill>
+                <a:latin typeface="Segoe UI"/>
+              </a:defRPr>
+            </a:pPr>
+            <a:r>
+              <a:t>Suivi Inflation :</a:t>
+            </a:r>
+          </a:p>
+          <a:p>
+            <a:pPr>
+              <a:defRPr sz="900">
+                <a:solidFill>
+                  <a:srgbClr val="F8FAFC"/>
+                </a:solidFill>
+                <a:latin typeface="Segoe UI"/>
+              </a:defRPr>
+            </a:pPr>
+            <a:r>
+              <a:t>Ajuster la politique de remises selon l'évolution du CPI local.</a:t>
+            </a:r>
+          </a:p>
+        </p:txBody>
+      </p:sp>
+      <p:sp>
+        <p:nvSpPr>
+          <p:cNvPr id="19" name="Rounded Rectangle 18"/>
+          <p:cNvSpPr/>
+          <p:nvPr/>
+        </p:nvSpPr>
+        <p:spPr>
+          <a:xfrm>
+            <a:off x="6217920" y="4937760"/>
+            <a:ext cx="5242255" cy="1280160"/>
+          </a:xfrm>
+          <a:prstGeom prst="roundRect">
+            <a:avLst/>
+          </a:prstGeom>
+          <a:solidFill>
+            <a:srgbClr val="1E293B"/>
+          </a:solidFill>
+          <a:ln w="19050">
+            <a:solidFill>
+              <a:srgbClr val="10B981"/>
+            </a:solidFill>
+          </a:ln>
+        </p:spPr>
+        <p:style>
+          <a:lnRef idx="1">
+            <a:schemeClr val="accent1"/>
+          </a:lnRef>
+          <a:fillRef idx="3">
+            <a:schemeClr val="accent1"/>
+          </a:fillRef>
+          <a:effectRef idx="2">
+            <a:schemeClr val="accent1"/>
+          </a:effectRef>
+          <a:fontRef idx="minor">
+            <a:schemeClr val="lt1"/>
+          </a:fontRef>
+        </p:style>
+        <p:txBody>
+          <a:bodyPr rtlCol="0" anchor="ctr"/>
+          <a:lstStyle/>
+          <a:p>
+            <a:pPr algn="ctr"/>
+          </a:p>
+        </p:txBody>
+      </p:sp>
+      <p:sp>
+        <p:nvSpPr>
+          <p:cNvPr id="20" name="TextBox 19"/>
+          <p:cNvSpPr txBox="1"/>
+          <p:nvPr/>
+        </p:nvSpPr>
+        <p:spPr>
+          <a:xfrm>
+            <a:off x="6400800" y="5102352"/>
+            <a:ext cx="4876495" cy="365760"/>
+          </a:xfrm>
+          <a:prstGeom prst="rect">
+            <a:avLst/>
+          </a:prstGeom>
+          <a:noFill/>
+        </p:spPr>
+        <p:txBody>
+          <a:bodyPr wrap="square" lIns="0" tIns="0" rIns="0" bIns="0">
+            <a:spAutoFit/>
+          </a:bodyPr>
+          <a:lstStyle/>
+          <a:p>
+            <a:pPr>
+              <a:defRPr sz="1200" b="1">
+                <a:solidFill>
+                  <a:srgbClr val="38BDF8"/>
+                </a:solidFill>
+                <a:latin typeface="Segoe UI"/>
+              </a:defRPr>
+            </a:pPr>
+            <a:r>
+              <a:t>04 | DÉPLOIEMENT INDUSTRIEL MLOPS</a:t>
+            </a:r>
+          </a:p>
+        </p:txBody>
+      </p:sp>
+      <p:sp>
+        <p:nvSpPr>
+          <p:cNvPr id="21" name="TextBox 20"/>
+          <p:cNvSpPr txBox="1"/>
+          <p:nvPr/>
+        </p:nvSpPr>
+        <p:spPr>
+          <a:xfrm>
+            <a:off x="6400800" y="5440680"/>
+            <a:ext cx="4876495" cy="731520"/>
+          </a:xfrm>
+          <a:prstGeom prst="rect">
+            <a:avLst/>
+          </a:prstGeom>
+          <a:noFill/>
+        </p:spPr>
+        <p:txBody>
+          <a:bodyPr wrap="square">
+            <a:spAutoFit/>
+          </a:bodyPr>
+          <a:lstStyle/>
+          <a:p>
+            <a:pPr>
+              <a:defRPr sz="950" b="1">
+                <a:solidFill>
+                  <a:srgbClr val="10B981"/>
+                </a:solidFill>
+                <a:latin typeface="Segoe UI"/>
+              </a:defRPr>
+            </a:pPr>
+            <a:r>
+              <a:t>Modèle Retenu :</a:t>
+            </a:r>
+          </a:p>
+          <a:p>
+            <a:pPr>
+              <a:defRPr sz="900">
+                <a:solidFill>
+                  <a:srgbClr val="F8FAFC"/>
+                </a:solidFill>
+                <a:latin typeface="Segoe UI"/>
+              </a:defRPr>
+            </a:pPr>
+            <a:r>
+              <a:t>Déployer le pipeline Lasso (alpha=1000) sous forme d'API de scoring hebdomadaire.</a:t>
+            </a:r>
+          </a:p>
+          <a:p>
+            <a:pPr>
+              <a:defRPr sz="950" b="1">
+                <a:solidFill>
+                  <a:srgbClr val="10B981"/>
+                </a:solidFill>
+                <a:latin typeface="Segoe UI"/>
+              </a:defRPr>
+            </a:pPr>
+            <a:r>
+              <a:t>Réentraînement :</a:t>
+            </a:r>
+          </a:p>
+          <a:p>
+            <a:pPr>
+              <a:defRPr sz="900">
+                <a:solidFill>
+                  <a:srgbClr val="F8FAFC"/>
+                </a:solidFill>
+                <a:latin typeface="Segoe UI"/>
+              </a:defRPr>
+            </a:pPr>
+            <a:r>
+              <a:t>Mise à jour mensuelle du modèle pour intégrer les nouvelles données de vente.</a:t>
             </a:r>
           </a:p>
         </p:txBody>
@@ -3309,7 +5189,7 @@
             <a:avLst/>
           </a:prstGeom>
           <a:solidFill>
-            <a:srgbClr val="0F172A"/>
+            <a:srgbClr val="0B1120"/>
           </a:solidFill>
           <a:ln>
             <a:noFill/>
@@ -3345,8 +5225,8 @@
         </p:nvSpPr>
         <p:spPr>
           <a:xfrm>
-            <a:off x="731520" y="457200"/>
-            <a:ext cx="9144000" cy="365760"/>
+            <a:off x="731520" y="365760"/>
+            <a:ext cx="7315200" cy="320040"/>
           </a:xfrm>
           <a:prstGeom prst="rect">
             <a:avLst/>
@@ -3354,7 +5234,7 @@
           <a:noFill/>
         </p:spPr>
         <p:txBody>
-          <a:bodyPr wrap="none">
+          <a:bodyPr wrap="square" lIns="0" tIns="0" rIns="0" bIns="0">
             <a:spAutoFit/>
           </a:bodyPr>
           <a:lstStyle/>
@@ -3364,6 +5244,7 @@
                 <a:solidFill>
                   <a:srgbClr val="38BDF8"/>
                 </a:solidFill>
+                <a:latin typeface="Segoe UI"/>
               </a:defRPr>
             </a:pPr>
             <a:r>
@@ -3380,8 +5261,8 @@
         </p:nvSpPr>
         <p:spPr>
           <a:xfrm>
-            <a:off x="731520" y="822960"/>
-            <a:ext cx="9144000" cy="731520"/>
+            <a:off x="731520" y="685800"/>
+            <a:ext cx="9601200" cy="502920"/>
           </a:xfrm>
           <a:prstGeom prst="rect">
             <a:avLst/>
@@ -3389,20 +5270,21 @@
           <a:noFill/>
         </p:spPr>
         <p:txBody>
-          <a:bodyPr wrap="none">
+          <a:bodyPr wrap="square" lIns="0" tIns="0" rIns="0" bIns="0">
             <a:spAutoFit/>
           </a:bodyPr>
           <a:lstStyle/>
           <a:p>
             <a:pPr>
-              <a:defRPr sz="2400" b="1">
+              <a:defRPr sz="2200" b="1">
                 <a:solidFill>
                   <a:srgbClr val="F8FAFC"/>
                 </a:solidFill>
-              </a:defRPr>
-            </a:pPr>
-            <a:r>
-              <a:t>Contexte Métier &amp; Prévision des Ventes</a:t>
+                <a:latin typeface="Segoe UI"/>
+              </a:defRPr>
+            </a:pPr>
+            <a:r>
+              <a:t>Contexte Stratégique Walmart &amp; Objectifs Décisionnels</a:t>
             </a:r>
           </a:p>
         </p:txBody>
@@ -3415,7 +5297,7 @@
         </p:nvSpPr>
         <p:spPr>
           <a:xfrm>
-            <a:off x="10515600" y="640080"/>
+            <a:off x="10362895" y="411480"/>
             <a:ext cx="1097280" cy="365760"/>
           </a:xfrm>
           <a:prstGeom prst="rect">
@@ -3424,7 +5306,7 @@
           <a:noFill/>
         </p:spPr>
         <p:txBody>
-          <a:bodyPr wrap="none">
+          <a:bodyPr wrap="square" lIns="0" tIns="0" rIns="0" bIns="0">
             <a:spAutoFit/>
           </a:bodyPr>
           <a:lstStyle/>
@@ -3434,24 +5316,61 @@
                 <a:solidFill>
                   <a:srgbClr val="94A3B8"/>
                 </a:solidFill>
-              </a:defRPr>
-            </a:pPr>
-            <a:r>
-              <a:t>2 / 6</a:t>
-            </a:r>
-          </a:p>
-        </p:txBody>
-      </p:sp>
-      <p:sp>
-        <p:nvSpPr>
-          <p:cNvPr id="6" name="Rounded Rectangle 5"/>
+                <a:latin typeface="Segoe UI"/>
+              </a:defRPr>
+            </a:pPr>
+            <a:r>
+              <a:t>2 / 10</a:t>
+            </a:r>
+          </a:p>
+        </p:txBody>
+      </p:sp>
+      <p:sp>
+        <p:nvSpPr>
+          <p:cNvPr id="6" name="TextBox 5"/>
+          <p:cNvSpPr txBox="1"/>
+          <p:nvPr/>
+        </p:nvSpPr>
+        <p:spPr>
+          <a:xfrm>
+            <a:off x="731520" y="6400800"/>
+            <a:ext cx="10728655" cy="274320"/>
+          </a:xfrm>
+          <a:prstGeom prst="rect">
+            <a:avLst/>
+          </a:prstGeom>
+          <a:noFill/>
+        </p:spPr>
+        <p:txBody>
+          <a:bodyPr wrap="square" lIns="0" tIns="0" rIns="0" bIns="0">
+            <a:spAutoFit/>
+          </a:bodyPr>
+          <a:lstStyle/>
+          <a:p>
+            <a:pPr>
+              <a:defRPr sz="1000">
+                <a:solidFill>
+                  <a:srgbClr val="64748B"/>
+                </a:solidFill>
+                <a:latin typeface="Segoe UI"/>
+              </a:defRPr>
+            </a:pPr>
+            <a:r>
+              <a:t>Christopher GILLERON  |  Walmart Store Sales Prediction (Machine Learning Supervisé)  |  Certification CDSD Bloc 3</a:t>
+            </a:r>
+          </a:p>
+        </p:txBody>
+      </p:sp>
+      <p:sp>
+        <p:nvSpPr>
+          <p:cNvPr id="7" name="Rounded Rectangle 6"/>
           <p:cNvSpPr/>
           <p:nvPr/>
         </p:nvSpPr>
         <p:spPr>
           <a:xfrm>
-            <a:off x="731520" y="1645920"/>
-            <a:ext cx="10698480" cy="1325880"/>
+            <a:off x="731520" y="1371600"/>
+            <a:ext cx="3413455" cy="4754880"/>
           </a:xfrm>
           <a:prstGeom prst="roundRect">
             <a:avLst/>
@@ -3459,7 +5378,7 @@
           <a:solidFill>
             <a:srgbClr val="1E293B"/>
           </a:solidFill>
-          <a:ln w="12700">
+          <a:ln w="19050">
             <a:solidFill>
               <a:srgbClr val="334155"/>
             </a:solidFill>
@@ -3489,14 +5408,50 @@
       </p:sp>
       <p:sp>
         <p:nvSpPr>
-          <p:cNvPr id="7" name="TextBox 6"/>
+          <p:cNvPr id="8" name="TextBox 7"/>
           <p:cNvSpPr txBox="1"/>
           <p:nvPr/>
         </p:nvSpPr>
         <p:spPr>
           <a:xfrm>
-            <a:off x="914400" y="1719072"/>
-            <a:ext cx="10332720" cy="1179576"/>
+            <a:off x="914400" y="1536192"/>
+            <a:ext cx="3047695" cy="365760"/>
+          </a:xfrm>
+          <a:prstGeom prst="rect">
+            <a:avLst/>
+          </a:prstGeom>
+          <a:noFill/>
+        </p:spPr>
+        <p:txBody>
+          <a:bodyPr wrap="square" lIns="0" tIns="0" rIns="0" bIns="0">
+            <a:spAutoFit/>
+          </a:bodyPr>
+          <a:lstStyle/>
+          <a:p>
+            <a:pPr>
+              <a:defRPr sz="1200" b="1">
+                <a:solidFill>
+                  <a:srgbClr val="38BDF8"/>
+                </a:solidFill>
+                <a:latin typeface="Segoe UI"/>
+              </a:defRPr>
+            </a:pPr>
+            <a:r>
+              <a:t>01 | CONTEXTE ÉCONOMIQUE</a:t>
+            </a:r>
+          </a:p>
+        </p:txBody>
+      </p:sp>
+      <p:sp>
+        <p:nvSpPr>
+          <p:cNvPr id="9" name="TextBox 8"/>
+          <p:cNvSpPr txBox="1"/>
+          <p:nvPr/>
+        </p:nvSpPr>
+        <p:spPr>
+          <a:xfrm>
+            <a:off x="914400" y="2011680"/>
+            <a:ext cx="3047695" cy="3931920"/>
           </a:xfrm>
           <a:prstGeom prst="rect">
             <a:avLst/>
@@ -3510,43 +5465,97 @@
           <a:lstStyle/>
           <a:p>
             <a:pPr>
-              <a:defRPr sz="1300" b="1">
+              <a:defRPr sz="1100" b="1">
                 <a:solidFill>
                   <a:srgbClr val="38BDF8"/>
                 </a:solidFill>
-              </a:defRPr>
-            </a:pPr>
-            <a:r>
-              <a:t>PROBLÉMATIQUE RETAIL WALMART</a:t>
-            </a:r>
-          </a:p>
-          <a:p>
-            <a:pPr>
-              <a:spcBef>
-                <a:spcPts val="400"/>
-              </a:spcBef>
-              <a:defRPr sz="1100">
+                <a:latin typeface="Segoe UI"/>
+              </a:defRPr>
+            </a:pPr>
+            <a:r>
+              <a:t>Leader Mondial du Retail :</a:t>
+            </a:r>
+          </a:p>
+          <a:p>
+            <a:pPr>
+              <a:defRPr sz="1000">
                 <a:solidFill>
                   <a:srgbClr val="F8FAFC"/>
                 </a:solidFill>
-              </a:defRPr>
-            </a:pPr>
-            <a:r>
-              <a:t>Prédire avec précision les ventes hebdomadaires par magasin afin d'optimiser l'approvisionnement logistique et limiter les ruptures de stock.</a:t>
-            </a:r>
-          </a:p>
-        </p:txBody>
-      </p:sp>
-      <p:sp>
-        <p:nvSpPr>
-          <p:cNvPr id="8" name="Rounded Rectangle 7"/>
+                <a:latin typeface="Segoe UI"/>
+              </a:defRPr>
+            </a:pPr>
+            <a:r>
+              <a:t>Walmart Inc., fondé en 1962, exploite des milliers d'hypermarchés et génère des flux logistiques colossaux.</a:t>
+            </a:r>
+          </a:p>
+          <a:p/>
+          <a:p>
+            <a:pPr>
+              <a:defRPr sz="1100" b="1">
+                <a:solidFill>
+                  <a:srgbClr val="38BDF8"/>
+                </a:solidFill>
+                <a:latin typeface="Segoe UI"/>
+              </a:defRPr>
+            </a:pPr>
+            <a:r>
+              <a:t>Volatilité des Ventes :</a:t>
+            </a:r>
+          </a:p>
+          <a:p>
+            <a:pPr>
+              <a:defRPr sz="1000">
+                <a:solidFill>
+                  <a:srgbClr val="F8FAFC"/>
+                </a:solidFill>
+                <a:latin typeface="Segoe UI"/>
+              </a:defRPr>
+            </a:pPr>
+            <a:r>
+              <a:t>Les ventes hebdomadaires varient fortement selon les saisons, les promotions, les jours fériés et le contexte économique.</a:t>
+            </a:r>
+          </a:p>
+          <a:p/>
+          <a:p>
+            <a:pPr>
+              <a:defRPr sz="1100" b="1">
+                <a:solidFill>
+                  <a:srgbClr val="38BDF8"/>
+                </a:solidFill>
+                <a:latin typeface="Segoe UI"/>
+              </a:defRPr>
+            </a:pPr>
+            <a:r>
+              <a:t>Enjeu Supply Chain :</a:t>
+            </a:r>
+          </a:p>
+          <a:p>
+            <a:pPr>
+              <a:defRPr sz="1000">
+                <a:solidFill>
+                  <a:srgbClr val="F8FAFC"/>
+                </a:solidFill>
+                <a:latin typeface="Segoe UI"/>
+              </a:defRPr>
+            </a:pPr>
+            <a:r>
+              <a:t>Une prédiction erronée génère soit des ruptures de stock coûteuses, soit un sur-stockage pénalisant la rentabilité.</a:t>
+            </a:r>
+          </a:p>
+          <a:p/>
+        </p:txBody>
+      </p:sp>
+      <p:sp>
+        <p:nvSpPr>
+          <p:cNvPr id="10" name="Rounded Rectangle 9"/>
           <p:cNvSpPr/>
           <p:nvPr/>
         </p:nvSpPr>
         <p:spPr>
           <a:xfrm>
-            <a:off x="731520" y="3108960"/>
-            <a:ext cx="10698480" cy="1325880"/>
+            <a:off x="4389120" y="1371600"/>
+            <a:ext cx="3413455" cy="4754880"/>
           </a:xfrm>
           <a:prstGeom prst="roundRect">
             <a:avLst/>
@@ -3554,7 +5563,7 @@
           <a:solidFill>
             <a:srgbClr val="1E293B"/>
           </a:solidFill>
-          <a:ln w="12700">
+          <a:ln w="19050">
             <a:solidFill>
               <a:srgbClr val="334155"/>
             </a:solidFill>
@@ -3584,14 +5593,50 @@
       </p:sp>
       <p:sp>
         <p:nvSpPr>
-          <p:cNvPr id="9" name="TextBox 8"/>
+          <p:cNvPr id="11" name="TextBox 10"/>
           <p:cNvSpPr txBox="1"/>
           <p:nvPr/>
         </p:nvSpPr>
         <p:spPr>
           <a:xfrm>
-            <a:off x="914400" y="3182112"/>
-            <a:ext cx="10332720" cy="1179576"/>
+            <a:off x="4572000" y="1536192"/>
+            <a:ext cx="3047695" cy="365760"/>
+          </a:xfrm>
+          <a:prstGeom prst="rect">
+            <a:avLst/>
+          </a:prstGeom>
+          <a:noFill/>
+        </p:spPr>
+        <p:txBody>
+          <a:bodyPr wrap="square" lIns="0" tIns="0" rIns="0" bIns="0">
+            <a:spAutoFit/>
+          </a:bodyPr>
+          <a:lstStyle/>
+          <a:p>
+            <a:pPr>
+              <a:defRPr sz="1200" b="1">
+                <a:solidFill>
+                  <a:srgbClr val="38BDF8"/>
+                </a:solidFill>
+                <a:latin typeface="Segoe UI"/>
+              </a:defRPr>
+            </a:pPr>
+            <a:r>
+              <a:t>02 | MANDAT MARKETING</a:t>
+            </a:r>
+          </a:p>
+        </p:txBody>
+      </p:sp>
+      <p:sp>
+        <p:nvSpPr>
+          <p:cNvPr id="12" name="TextBox 11"/>
+          <p:cNvSpPr txBox="1"/>
+          <p:nvPr/>
+        </p:nvSpPr>
+        <p:spPr>
+          <a:xfrm>
+            <a:off x="4572000" y="2011680"/>
+            <a:ext cx="3047695" cy="3931920"/>
           </a:xfrm>
           <a:prstGeom prst="rect">
             <a:avLst/>
@@ -3605,43 +5650,97 @@
           <a:lstStyle/>
           <a:p>
             <a:pPr>
-              <a:defRPr sz="1300" b="1">
-                <a:solidFill>
-                  <a:srgbClr val="A855F7"/>
-                </a:solidFill>
-              </a:defRPr>
-            </a:pPr>
-            <a:r>
-              <a:t>COMPLEXITÉ EXOGÈNE</a:t>
-            </a:r>
-          </a:p>
-          <a:p>
-            <a:pPr>
-              <a:spcBef>
-                <a:spcPts val="400"/>
-              </a:spcBef>
-              <a:defRPr sz="1100">
+              <a:defRPr sz="1100" b="1">
+                <a:solidFill>
+                  <a:srgbClr val="38BDF8"/>
+                </a:solidFill>
+                <a:latin typeface="Segoe UI"/>
+              </a:defRPr>
+            </a:pPr>
+            <a:r>
+              <a:t>Demande du Service Marketing :</a:t>
+            </a:r>
+          </a:p>
+          <a:p>
+            <a:pPr>
+              <a:defRPr sz="1000">
                 <a:solidFill>
                   <a:srgbClr val="F8FAFC"/>
                 </a:solidFill>
-              </a:defRPr>
-            </a:pPr>
-            <a:r>
-              <a:t>Impact conjoint des facteurs macroéconomiques (taux de chômage, IPC), météorologiques (température) et calendaires (semaines fériées / Super Bowl).</a:t>
-            </a:r>
-          </a:p>
-        </p:txBody>
-      </p:sp>
-      <p:sp>
-        <p:nvSpPr>
-          <p:cNvPr id="10" name="Rounded Rectangle 9"/>
+                <a:latin typeface="Segoe UI"/>
+              </a:defRPr>
+            </a:pPr>
+            <a:r>
+              <a:t>Concevoir un modèle d'apprentissage supervisé capable d'estimer avec précision les ventes hebdomadaires.</a:t>
+            </a:r>
+          </a:p>
+          <a:p/>
+          <a:p>
+            <a:pPr>
+              <a:defRPr sz="1100" b="1">
+                <a:solidFill>
+                  <a:srgbClr val="38BDF8"/>
+                </a:solidFill>
+                <a:latin typeface="Segoe UI"/>
+              </a:defRPr>
+            </a:pPr>
+            <a:r>
+              <a:t>Facteurs Macroéconomiques :</a:t>
+            </a:r>
+          </a:p>
+          <a:p>
+            <a:pPr>
+              <a:defRPr sz="1000">
+                <a:solidFill>
+                  <a:srgbClr val="F8FAFC"/>
+                </a:solidFill>
+                <a:latin typeface="Segoe UI"/>
+              </a:defRPr>
+            </a:pPr>
+            <a:r>
+              <a:t>Quantifier l'impact réel du chômage, du CPI (inflation), du prix du carburant et de la température.</a:t>
+            </a:r>
+          </a:p>
+          <a:p/>
+          <a:p>
+            <a:pPr>
+              <a:defRPr sz="1100" b="1">
+                <a:solidFill>
+                  <a:srgbClr val="38BDF8"/>
+                </a:solidFill>
+                <a:latin typeface="Segoe UI"/>
+              </a:defRPr>
+            </a:pPr>
+            <a:r>
+              <a:t>Planification Prédictive :</a:t>
+            </a:r>
+          </a:p>
+          <a:p>
+            <a:pPr>
+              <a:defRPr sz="1000">
+                <a:solidFill>
+                  <a:srgbClr val="F8FAFC"/>
+                </a:solidFill>
+                <a:latin typeface="Segoe UI"/>
+              </a:defRPr>
+            </a:pPr>
+            <a:r>
+              <a:t>Fournir un outil d'aide à la décision pour calibrer le calendrier et les budgets des campagnes marketing.</a:t>
+            </a:r>
+          </a:p>
+          <a:p/>
+        </p:txBody>
+      </p:sp>
+      <p:sp>
+        <p:nvSpPr>
+          <p:cNvPr id="13" name="Rounded Rectangle 12"/>
           <p:cNvSpPr/>
           <p:nvPr/>
         </p:nvSpPr>
         <p:spPr>
           <a:xfrm>
-            <a:off x="731520" y="4572000"/>
-            <a:ext cx="10698480" cy="1325880"/>
+            <a:off x="8046720" y="1371600"/>
+            <a:ext cx="3413455" cy="4754880"/>
           </a:xfrm>
           <a:prstGeom prst="roundRect">
             <a:avLst/>
@@ -3649,7 +5748,7 @@
           <a:solidFill>
             <a:srgbClr val="1E293B"/>
           </a:solidFill>
-          <a:ln w="12700">
+          <a:ln w="19050">
             <a:solidFill>
               <a:srgbClr val="334155"/>
             </a:solidFill>
@@ -3679,14 +5778,50 @@
       </p:sp>
       <p:sp>
         <p:nvSpPr>
-          <p:cNvPr id="11" name="TextBox 10"/>
+          <p:cNvPr id="14" name="TextBox 13"/>
           <p:cNvSpPr txBox="1"/>
           <p:nvPr/>
         </p:nvSpPr>
         <p:spPr>
           <a:xfrm>
-            <a:off x="914400" y="4645152"/>
-            <a:ext cx="10332720" cy="1179576"/>
+            <a:off x="8229600" y="1536192"/>
+            <a:ext cx="3047695" cy="365760"/>
+          </a:xfrm>
+          <a:prstGeom prst="rect">
+            <a:avLst/>
+          </a:prstGeom>
+          <a:noFill/>
+        </p:spPr>
+        <p:txBody>
+          <a:bodyPr wrap="square" lIns="0" tIns="0" rIns="0" bIns="0">
+            <a:spAutoFit/>
+          </a:bodyPr>
+          <a:lstStyle/>
+          <a:p>
+            <a:pPr>
+              <a:defRPr sz="1200" b="1">
+                <a:solidFill>
+                  <a:srgbClr val="38BDF8"/>
+                </a:solidFill>
+                <a:latin typeface="Segoe UI"/>
+              </a:defRPr>
+            </a:pPr>
+            <a:r>
+              <a:t>03 | OBJECTIFS SCIENTIFIQUES</a:t>
+            </a:r>
+          </a:p>
+        </p:txBody>
+      </p:sp>
+      <p:sp>
+        <p:nvSpPr>
+          <p:cNvPr id="15" name="TextBox 14"/>
+          <p:cNvSpPr txBox="1"/>
+          <p:nvPr/>
+        </p:nvSpPr>
+        <p:spPr>
+          <a:xfrm>
+            <a:off x="8229600" y="2011680"/>
+            <a:ext cx="3047695" cy="3931920"/>
           </a:xfrm>
           <a:prstGeom prst="rect">
             <a:avLst/>
@@ -3700,66 +5835,85 @@
           <a:lstStyle/>
           <a:p>
             <a:pPr>
-              <a:defRPr sz="1300" b="1">
+              <a:defRPr sz="1100" b="1">
                 <a:solidFill>
                   <a:srgbClr val="38BDF8"/>
                 </a:solidFill>
-              </a:defRPr>
-            </a:pPr>
-            <a:r>
-              <a:t>MÉTRIQUE D'ÉVALUATION</a:t>
-            </a:r>
-          </a:p>
-          <a:p>
-            <a:pPr>
-              <a:spcBef>
-                <a:spcPts val="400"/>
-              </a:spcBef>
-              <a:defRPr sz="1100">
+                <a:latin typeface="Segoe UI"/>
+              </a:defRPr>
+            </a:pPr>
+            <a:r>
+              <a:t>Pipeline Scikit-Learn :</a:t>
+            </a:r>
+          </a:p>
+          <a:p>
+            <a:pPr>
+              <a:defRPr sz="1000">
                 <a:solidFill>
                   <a:srgbClr val="F8FAFC"/>
                 </a:solidFill>
-              </a:defRPr>
-            </a:pPr>
-            <a:r>
-              <a:t>Minimisation de l'erreur absolue moyenne (MAE) et maximisation du coefficient de détermination R² sur le jeu de test.</a:t>
-            </a:r>
-          </a:p>
-        </p:txBody>
-      </p:sp>
-      <p:sp>
-        <p:nvSpPr>
-          <p:cNvPr id="12" name="TextBox 11"/>
-          <p:cNvSpPr txBox="1"/>
-          <p:nvPr/>
-        </p:nvSpPr>
-        <p:spPr>
-          <a:xfrm>
-            <a:off x="731520" y="6309360"/>
-            <a:ext cx="10698480" cy="365760"/>
-          </a:xfrm>
-          <a:prstGeom prst="rect">
-            <a:avLst/>
-          </a:prstGeom>
-          <a:noFill/>
-        </p:spPr>
-        <p:txBody>
-          <a:bodyPr wrap="none">
-            <a:spAutoFit/>
-          </a:bodyPr>
-          <a:lstStyle/>
+                <a:latin typeface="Segoe UI"/>
+              </a:defRPr>
+            </a:pPr>
+            <a:r>
+              <a:t>Nettoyage strict, imputation sans fuite de données et encodage catégoriel standardisé.</a:t>
+            </a:r>
+          </a:p>
+          <a:p/>
+          <a:p>
+            <a:pPr>
+              <a:defRPr sz="1100" b="1">
+                <a:solidFill>
+                  <a:srgbClr val="38BDF8"/>
+                </a:solidFill>
+                <a:latin typeface="Segoe UI"/>
+              </a:defRPr>
+            </a:pPr>
+            <a:r>
+              <a:t>Modélisation Baseline :</a:t>
+            </a:r>
+          </a:p>
           <a:p>
             <a:pPr>
               <a:defRPr sz="1000">
                 <a:solidFill>
-                  <a:srgbClr val="94A3B8"/>
-                </a:solidFill>
-              </a:defRPr>
-            </a:pPr>
-            <a:r>
-              <a:t>Christopher GILLERON  |  Walmart Store Sales Prediction  |  Certification CDSD</a:t>
-            </a:r>
-          </a:p>
+                  <a:srgbClr val="F8FAFC"/>
+                </a:solidFill>
+                <a:latin typeface="Segoe UI"/>
+              </a:defRPr>
+            </a:pPr>
+            <a:r>
+              <a:t>Entraîner une Régression Linéaire Multiple et analyser les métriques (R², MAE, RMSE).</a:t>
+            </a:r>
+          </a:p>
+          <a:p/>
+          <a:p>
+            <a:pPr>
+              <a:defRPr sz="1100" b="1">
+                <a:solidFill>
+                  <a:srgbClr val="38BDF8"/>
+                </a:solidFill>
+                <a:latin typeface="Segoe UI"/>
+              </a:defRPr>
+            </a:pPr>
+            <a:r>
+              <a:t>Contrôle du Surapprentissage :</a:t>
+            </a:r>
+          </a:p>
+          <a:p>
+            <a:pPr>
+              <a:defRPr sz="1000">
+                <a:solidFill>
+                  <a:srgbClr val="F8FAFC"/>
+                </a:solidFill>
+                <a:latin typeface="Segoe UI"/>
+              </a:defRPr>
+            </a:pPr>
+            <a:r>
+              <a:t>Régulariser par Ridge (L2) et Lasso (L1) avec optimisation des hyperparamètres par GridSearchCV.</a:t>
+            </a:r>
+          </a:p>
+          <a:p/>
         </p:txBody>
       </p:sp>
     </p:spTree>
@@ -3795,7 +5949,7 @@
             <a:avLst/>
           </a:prstGeom>
           <a:solidFill>
-            <a:srgbClr val="0F172A"/>
+            <a:srgbClr val="0B1120"/>
           </a:solidFill>
           <a:ln>
             <a:noFill/>
@@ -3831,8 +5985,8 @@
         </p:nvSpPr>
         <p:spPr>
           <a:xfrm>
-            <a:off x="731520" y="457200"/>
-            <a:ext cx="9144000" cy="365760"/>
+            <a:off x="731520" y="365760"/>
+            <a:ext cx="7315200" cy="320040"/>
           </a:xfrm>
           <a:prstGeom prst="rect">
             <a:avLst/>
@@ -3840,7 +5994,7 @@
           <a:noFill/>
         </p:spPr>
         <p:txBody>
-          <a:bodyPr wrap="none">
+          <a:bodyPr wrap="square" lIns="0" tIns="0" rIns="0" bIns="0">
             <a:spAutoFit/>
           </a:bodyPr>
           <a:lstStyle/>
@@ -3850,10 +6004,11 @@
                 <a:solidFill>
                   <a:srgbClr val="38BDF8"/>
                 </a:solidFill>
-              </a:defRPr>
-            </a:pPr>
-            <a:r>
-              <a:t>ÉTAPE 02 | ANALYSE EXPLORATOIRE</a:t>
+                <a:latin typeface="Segoe UI"/>
+              </a:defRPr>
+            </a:pPr>
+            <a:r>
+              <a:t>ÉTAPE 02 | PRÉTRAITEMENT DES DONNÉES</a:t>
             </a:r>
           </a:p>
         </p:txBody>
@@ -3866,8 +6021,8 @@
         </p:nvSpPr>
         <p:spPr>
           <a:xfrm>
-            <a:off x="731520" y="822960"/>
-            <a:ext cx="9144000" cy="731520"/>
+            <a:off x="731520" y="685800"/>
+            <a:ext cx="9601200" cy="502920"/>
           </a:xfrm>
           <a:prstGeom prst="rect">
             <a:avLst/>
@@ -3875,20 +6030,21 @@
           <a:noFill/>
         </p:spPr>
         <p:txBody>
-          <a:bodyPr wrap="none">
+          <a:bodyPr wrap="square" lIns="0" tIns="0" rIns="0" bIns="0">
             <a:spAutoFit/>
           </a:bodyPr>
           <a:lstStyle/>
           <a:p>
             <a:pPr>
-              <a:defRPr sz="2400" b="1">
+              <a:defRPr sz="2200" b="1">
                 <a:solidFill>
                   <a:srgbClr val="F8FAFC"/>
                 </a:solidFill>
-              </a:defRPr>
-            </a:pPr>
-            <a:r>
-              <a:t>Facteurs Macroéconomiques &amp; Corrélations</a:t>
+                <a:latin typeface="Segoe UI"/>
+              </a:defRPr>
+            </a:pPr>
+            <a:r>
+              <a:t>Gestion de la Cible, Feature Engineering Date &amp; Règle des 3 Ecarts-Types</a:t>
             </a:r>
           </a:p>
         </p:txBody>
@@ -3901,7 +6057,7 @@
         </p:nvSpPr>
         <p:spPr>
           <a:xfrm>
-            <a:off x="10515600" y="640080"/>
+            <a:off x="10362895" y="411480"/>
             <a:ext cx="1097280" cy="365760"/>
           </a:xfrm>
           <a:prstGeom prst="rect">
@@ -3910,7 +6066,7 @@
           <a:noFill/>
         </p:spPr>
         <p:txBody>
-          <a:bodyPr wrap="none">
+          <a:bodyPr wrap="square" lIns="0" tIns="0" rIns="0" bIns="0">
             <a:spAutoFit/>
           </a:bodyPr>
           <a:lstStyle/>
@@ -3920,24 +6076,61 @@
                 <a:solidFill>
                   <a:srgbClr val="94A3B8"/>
                 </a:solidFill>
-              </a:defRPr>
-            </a:pPr>
-            <a:r>
-              <a:t>3 / 6</a:t>
-            </a:r>
-          </a:p>
-        </p:txBody>
-      </p:sp>
-      <p:sp>
-        <p:nvSpPr>
-          <p:cNvPr id="6" name="Rounded Rectangle 5"/>
+                <a:latin typeface="Segoe UI"/>
+              </a:defRPr>
+            </a:pPr>
+            <a:r>
+              <a:t>3 / 10</a:t>
+            </a:r>
+          </a:p>
+        </p:txBody>
+      </p:sp>
+      <p:sp>
+        <p:nvSpPr>
+          <p:cNvPr id="6" name="TextBox 5"/>
+          <p:cNvSpPr txBox="1"/>
+          <p:nvPr/>
+        </p:nvSpPr>
+        <p:spPr>
+          <a:xfrm>
+            <a:off x="731520" y="6400800"/>
+            <a:ext cx="10728655" cy="274320"/>
+          </a:xfrm>
+          <a:prstGeom prst="rect">
+            <a:avLst/>
+          </a:prstGeom>
+          <a:noFill/>
+        </p:spPr>
+        <p:txBody>
+          <a:bodyPr wrap="square" lIns="0" tIns="0" rIns="0" bIns="0">
+            <a:spAutoFit/>
+          </a:bodyPr>
+          <a:lstStyle/>
+          <a:p>
+            <a:pPr>
+              <a:defRPr sz="1000">
+                <a:solidFill>
+                  <a:srgbClr val="64748B"/>
+                </a:solidFill>
+                <a:latin typeface="Segoe UI"/>
+              </a:defRPr>
+            </a:pPr>
+            <a:r>
+              <a:t>Christopher GILLERON  |  Walmart Store Sales Prediction (Machine Learning Supervisé)  |  Certification CDSD Bloc 3</a:t>
+            </a:r>
+          </a:p>
+        </p:txBody>
+      </p:sp>
+      <p:sp>
+        <p:nvSpPr>
+          <p:cNvPr id="7" name="Rounded Rectangle 6"/>
           <p:cNvSpPr/>
           <p:nvPr/>
         </p:nvSpPr>
         <p:spPr>
           <a:xfrm>
-            <a:off x="731520" y="1645920"/>
-            <a:ext cx="5303520" cy="2057400"/>
+            <a:off x="731520" y="1371600"/>
+            <a:ext cx="3413455" cy="4754880"/>
           </a:xfrm>
           <a:prstGeom prst="roundRect">
             <a:avLst/>
@@ -3945,7 +6138,7 @@
           <a:solidFill>
             <a:srgbClr val="1E293B"/>
           </a:solidFill>
-          <a:ln w="12700">
+          <a:ln w="19050">
             <a:solidFill>
               <a:srgbClr val="334155"/>
             </a:solidFill>
@@ -3975,14 +6168,50 @@
       </p:sp>
       <p:sp>
         <p:nvSpPr>
-          <p:cNvPr id="7" name="TextBox 6"/>
+          <p:cNvPr id="8" name="TextBox 7"/>
           <p:cNvSpPr txBox="1"/>
           <p:nvPr/>
         </p:nvSpPr>
         <p:spPr>
           <a:xfrm>
-            <a:off x="914400" y="1719072"/>
-            <a:ext cx="4937760" cy="1911096"/>
+            <a:off x="914400" y="1536192"/>
+            <a:ext cx="3047695" cy="365760"/>
+          </a:xfrm>
+          <a:prstGeom prst="rect">
+            <a:avLst/>
+          </a:prstGeom>
+          <a:noFill/>
+        </p:spPr>
+        <p:txBody>
+          <a:bodyPr wrap="square" lIns="0" tIns="0" rIns="0" bIns="0">
+            <a:spAutoFit/>
+          </a:bodyPr>
+          <a:lstStyle/>
+          <a:p>
+            <a:pPr>
+              <a:defRPr sz="1200" b="1">
+                <a:solidFill>
+                  <a:srgbClr val="38BDF8"/>
+                </a:solidFill>
+                <a:latin typeface="Segoe UI"/>
+              </a:defRPr>
+            </a:pPr>
+            <a:r>
+              <a:t>01 | GESTION DE LA CIBLE</a:t>
+            </a:r>
+          </a:p>
+        </p:txBody>
+      </p:sp>
+      <p:sp>
+        <p:nvSpPr>
+          <p:cNvPr id="9" name="TextBox 8"/>
+          <p:cNvSpPr txBox="1"/>
+          <p:nvPr/>
+        </p:nvSpPr>
+        <p:spPr>
+          <a:xfrm>
+            <a:off x="914400" y="2011680"/>
+            <a:ext cx="3047695" cy="3931920"/>
           </a:xfrm>
           <a:prstGeom prst="rect">
             <a:avLst/>
@@ -3996,43 +6225,97 @@
           <a:lstStyle/>
           <a:p>
             <a:pPr>
-              <a:defRPr sz="1300" b="1">
+              <a:defRPr sz="1100" b="1">
                 <a:solidFill>
                   <a:srgbClr val="38BDF8"/>
                 </a:solidFill>
-              </a:defRPr>
-            </a:pPr>
-            <a:r>
-              <a:t>HÉTÉROGÉNÉITÉ DES MAGASINS</a:t>
-            </a:r>
-          </a:p>
-          <a:p>
-            <a:pPr>
-              <a:spcBef>
-                <a:spcPts val="400"/>
-              </a:spcBef>
-              <a:defRPr sz="1100">
+                <a:latin typeface="Segoe UI"/>
+              </a:defRPr>
+            </a:pPr>
+            <a:r>
+              <a:t>Règle Absolue d'Imputation :</a:t>
+            </a:r>
+          </a:p>
+          <a:p>
+            <a:pPr>
+              <a:defRPr sz="1000">
                 <a:solidFill>
                   <a:srgbClr val="F8FAFC"/>
                 </a:solidFill>
-              </a:defRPr>
-            </a:pPr>
-            <a:r>
-              <a:t>Forte disparité de volume de vente selon la taille du magasin et la zone de chalandise géographique.</a:t>
-            </a:r>
-          </a:p>
-        </p:txBody>
-      </p:sp>
-      <p:sp>
-        <p:nvSpPr>
-          <p:cNvPr id="8" name="Rounded Rectangle 7"/>
+                <a:latin typeface="Segoe UI"/>
+              </a:defRPr>
+            </a:pPr>
+            <a:r>
+              <a:t>Jamais d'imputation sur la variable cible (Weekly_Sales) pour ne pas injecter de biais artificiel.</a:t>
+            </a:r>
+          </a:p>
+          <a:p/>
+          <a:p>
+            <a:pPr>
+              <a:defRPr sz="1100" b="1">
+                <a:solidFill>
+                  <a:srgbClr val="38BDF8"/>
+                </a:solidFill>
+                <a:latin typeface="Segoe UI"/>
+              </a:defRPr>
+            </a:pPr>
+            <a:r>
+              <a:t>Suppression des NaN :</a:t>
+            </a:r>
+          </a:p>
+          <a:p>
+            <a:pPr>
+              <a:defRPr sz="1000">
+                <a:solidFill>
+                  <a:srgbClr val="F8FAFC"/>
+                </a:solidFill>
+                <a:latin typeface="Segoe UI"/>
+              </a:defRPr>
+            </a:pPr>
+            <a:r>
+              <a:t>14 lignes sans Weekly_Sales ont été supprimées, ramenant l'échantillon de 150 à 136 observations.</a:t>
+            </a:r>
+          </a:p>
+          <a:p/>
+          <a:p>
+            <a:pPr>
+              <a:defRPr sz="1100" b="1">
+                <a:solidFill>
+                  <a:srgbClr val="38BDF8"/>
+                </a:solidFill>
+                <a:latin typeface="Segoe UI"/>
+              </a:defRPr>
+            </a:pPr>
+            <a:r>
+              <a:t>Périmètre Restant :</a:t>
+            </a:r>
+          </a:p>
+          <a:p>
+            <a:pPr>
+              <a:defRPr sz="1000">
+                <a:solidFill>
+                  <a:srgbClr val="F8FAFC"/>
+                </a:solidFill>
+                <a:latin typeface="Segoe UI"/>
+              </a:defRPr>
+            </a:pPr>
+            <a:r>
+              <a:t>100% des ventes résiduelles sont des valeurs historiques réelles et auditables.</a:t>
+            </a:r>
+          </a:p>
+          <a:p/>
+        </p:txBody>
+      </p:sp>
+      <p:sp>
+        <p:nvSpPr>
+          <p:cNvPr id="10" name="Rounded Rectangle 9"/>
           <p:cNvSpPr/>
           <p:nvPr/>
         </p:nvSpPr>
         <p:spPr>
           <a:xfrm>
-            <a:off x="731520" y="3840480"/>
-            <a:ext cx="5303520" cy="2057400"/>
+            <a:off x="4389120" y="1371600"/>
+            <a:ext cx="3413455" cy="4754880"/>
           </a:xfrm>
           <a:prstGeom prst="roundRect">
             <a:avLst/>
@@ -4040,7 +6323,7 @@
           <a:solidFill>
             <a:srgbClr val="1E293B"/>
           </a:solidFill>
-          <a:ln w="12700">
+          <a:ln w="19050">
             <a:solidFill>
               <a:srgbClr val="334155"/>
             </a:solidFill>
@@ -4070,14 +6353,50 @@
       </p:sp>
       <p:sp>
         <p:nvSpPr>
-          <p:cNvPr id="9" name="TextBox 8"/>
+          <p:cNvPr id="11" name="TextBox 10"/>
           <p:cNvSpPr txBox="1"/>
           <p:nvPr/>
         </p:nvSpPr>
         <p:spPr>
           <a:xfrm>
-            <a:off x="914400" y="3913632"/>
-            <a:ext cx="4937760" cy="1911096"/>
+            <a:off x="4572000" y="1536192"/>
+            <a:ext cx="3047695" cy="365760"/>
+          </a:xfrm>
+          <a:prstGeom prst="rect">
+            <a:avLst/>
+          </a:prstGeom>
+          <a:noFill/>
+        </p:spPr>
+        <p:txBody>
+          <a:bodyPr wrap="square" lIns="0" tIns="0" rIns="0" bIns="0">
+            <a:spAutoFit/>
+          </a:bodyPr>
+          <a:lstStyle/>
+          <a:p>
+            <a:pPr>
+              <a:defRPr sz="1200" b="1">
+                <a:solidFill>
+                  <a:srgbClr val="38BDF8"/>
+                </a:solidFill>
+                <a:latin typeface="Segoe UI"/>
+              </a:defRPr>
+            </a:pPr>
+            <a:r>
+              <a:t>02 | FEATURE ENGINEERING DATE</a:t>
+            </a:r>
+          </a:p>
+        </p:txBody>
+      </p:sp>
+      <p:sp>
+        <p:nvSpPr>
+          <p:cNvPr id="12" name="TextBox 11"/>
+          <p:cNvSpPr txBox="1"/>
+          <p:nvPr/>
+        </p:nvSpPr>
+        <p:spPr>
+          <a:xfrm>
+            <a:off x="4572000" y="2011680"/>
+            <a:ext cx="3047695" cy="3931920"/>
           </a:xfrm>
           <a:prstGeom prst="rect">
             <a:avLst/>
@@ -4091,43 +6410,124 @@
           <a:lstStyle/>
           <a:p>
             <a:pPr>
-              <a:defRPr sz="1300" b="1">
-                <a:solidFill>
-                  <a:srgbClr val="A855F7"/>
-                </a:solidFill>
-              </a:defRPr>
-            </a:pPr>
-            <a:r>
-              <a:t>POIDS DES JOURS FÉRIÉS</a:t>
-            </a:r>
-          </a:p>
-          <a:p>
-            <a:pPr>
-              <a:spcBef>
-                <a:spcPts val="400"/>
-              </a:spcBef>
-              <a:defRPr sz="1100">
+              <a:defRPr sz="1100" b="1">
+                <a:solidFill>
+                  <a:srgbClr val="38BDF8"/>
+                </a:solidFill>
+                <a:latin typeface="Segoe UI"/>
+              </a:defRPr>
+            </a:pPr>
+            <a:r>
+              <a:t>Décomposition Temporelle :</a:t>
+            </a:r>
+          </a:p>
+          <a:p>
+            <a:pPr>
+              <a:defRPr sz="1000">
                 <a:solidFill>
                   <a:srgbClr val="F8FAFC"/>
                 </a:solidFill>
-              </a:defRPr>
-            </a:pPr>
-            <a:r>
-              <a:t>Pics d'activité massifs lors de Thanksgiving et des fêtes de fin d'année, requérant un encodage catégoriel dédié.</a:t>
-            </a:r>
-          </a:p>
-        </p:txBody>
-      </p:sp>
-      <p:sp>
-        <p:nvSpPr>
-          <p:cNvPr id="10" name="Rounded Rectangle 9"/>
+                <a:latin typeface="Segoe UI"/>
+              </a:defRPr>
+            </a:pPr>
+            <a:r>
+              <a:t>La colonne Date brute (string) est transformée en 4 features numériques distinctes :</a:t>
+            </a:r>
+          </a:p>
+          <a:p/>
+          <a:p>
+            <a:pPr>
+              <a:defRPr sz="1100" b="1">
+                <a:solidFill>
+                  <a:srgbClr val="38BDF8"/>
+                </a:solidFill>
+                <a:latin typeface="Segoe UI"/>
+              </a:defRPr>
+            </a:pPr>
+            <a:r>
+              <a:t>• Year :</a:t>
+            </a:r>
+          </a:p>
+          <a:p>
+            <a:pPr>
+              <a:defRPr sz="1000">
+                <a:solidFill>
+                  <a:srgbClr val="F8FAFC"/>
+                </a:solidFill>
+                <a:latin typeface="Segoe UI"/>
+              </a:defRPr>
+            </a:pPr>
+            <a:r>
+              <a:t>Capture la tendance pluriannuelle (2010, 2011, 2012).</a:t>
+            </a:r>
+          </a:p>
+          <a:p/>
+          <a:p>
+            <a:pPr>
+              <a:defRPr sz="1100" b="1">
+                <a:solidFill>
+                  <a:srgbClr val="38BDF8"/>
+                </a:solidFill>
+                <a:latin typeface="Segoe UI"/>
+              </a:defRPr>
+            </a:pPr>
+            <a:r>
+              <a:t>• Month :</a:t>
+            </a:r>
+          </a:p>
+          <a:p>
+            <a:pPr>
+              <a:defRPr sz="1000">
+                <a:solidFill>
+                  <a:srgbClr val="F8FAFC"/>
+                </a:solidFill>
+                <a:latin typeface="Segoe UI"/>
+              </a:defRPr>
+            </a:pPr>
+            <a:r>
+              <a:t>Modélise la saisonnalité annuelle (fêtes de fin d'année).</a:t>
+            </a:r>
+          </a:p>
+          <a:p/>
+          <a:p>
+            <a:pPr>
+              <a:defRPr sz="1100" b="1">
+                <a:solidFill>
+                  <a:srgbClr val="38BDF8"/>
+                </a:solidFill>
+                <a:latin typeface="Segoe UI"/>
+              </a:defRPr>
+            </a:pPr>
+            <a:r>
+              <a:t>• Day &amp; DayOfWeek :</a:t>
+            </a:r>
+          </a:p>
+          <a:p>
+            <a:pPr>
+              <a:defRPr sz="1000">
+                <a:solidFill>
+                  <a:srgbClr val="F8FAFC"/>
+                </a:solidFill>
+                <a:latin typeface="Segoe UI"/>
+              </a:defRPr>
+            </a:pPr>
+            <a:r>
+              <a:t>Isole les effets de calendrier et la fin de mois.</a:t>
+            </a:r>
+          </a:p>
+          <a:p/>
+        </p:txBody>
+      </p:sp>
+      <p:sp>
+        <p:nvSpPr>
+          <p:cNvPr id="13" name="Rounded Rectangle 12"/>
           <p:cNvSpPr/>
           <p:nvPr/>
         </p:nvSpPr>
         <p:spPr>
           <a:xfrm>
-            <a:off x="6355080" y="1600200"/>
-            <a:ext cx="5120640" cy="4389120"/>
+            <a:off x="8046720" y="1371600"/>
+            <a:ext cx="3413455" cy="4754880"/>
           </a:xfrm>
           <a:prstGeom prst="roundRect">
             <a:avLst/>
@@ -4135,7 +6535,7 @@
           <a:solidFill>
             <a:srgbClr val="1E293B"/>
           </a:solidFill>
-          <a:ln>
+          <a:ln w="19050">
             <a:solidFill>
               <a:srgbClr val="334155"/>
             </a:solidFill>
@@ -4163,63 +6563,144 @@
           </a:p>
         </p:txBody>
       </p:sp>
-      <p:pic>
-        <p:nvPicPr>
-          <p:cNvPr id="11" name="Picture 10" descr="walmart_c10_2.png"/>
-          <p:cNvPicPr>
-            <a:picLocks noChangeAspect="1"/>
-          </p:cNvPicPr>
-          <p:nvPr/>
-        </p:nvPicPr>
-        <p:blipFill>
-          <a:blip r:embed="rId2"/>
-          <a:stretch>
-            <a:fillRect/>
-          </a:stretch>
-        </p:blipFill>
-        <p:spPr>
-          <a:xfrm>
-            <a:off x="6400800" y="1645920"/>
-            <a:ext cx="5029200" cy="3161521"/>
+      <p:sp>
+        <p:nvSpPr>
+          <p:cNvPr id="14" name="TextBox 13"/>
+          <p:cNvSpPr txBox="1"/>
+          <p:nvPr/>
+        </p:nvSpPr>
+        <p:spPr>
+          <a:xfrm>
+            <a:off x="8229600" y="1536192"/>
+            <a:ext cx="3047695" cy="365760"/>
           </a:xfrm>
           <a:prstGeom prst="rect">
             <a:avLst/>
           </a:prstGeom>
-        </p:spPr>
-      </p:pic>
-      <p:sp>
-        <p:nvSpPr>
-          <p:cNvPr id="12" name="TextBox 11"/>
-          <p:cNvSpPr txBox="1"/>
-          <p:nvPr/>
-        </p:nvSpPr>
-        <p:spPr>
-          <a:xfrm>
-            <a:off x="731520" y="6309360"/>
-            <a:ext cx="10698480" cy="365760"/>
-          </a:xfrm>
-          <a:prstGeom prst="rect">
-            <a:avLst/>
-          </a:prstGeom>
           <a:noFill/>
         </p:spPr>
         <p:txBody>
-          <a:bodyPr wrap="none">
+          <a:bodyPr wrap="square" lIns="0" tIns="0" rIns="0" bIns="0">
             <a:spAutoFit/>
           </a:bodyPr>
           <a:lstStyle/>
           <a:p>
             <a:pPr>
+              <a:defRPr sz="1200" b="1">
+                <a:solidFill>
+                  <a:srgbClr val="38BDF8"/>
+                </a:solidFill>
+                <a:latin typeface="Segoe UI"/>
+              </a:defRPr>
+            </a:pPr>
+            <a:r>
+              <a:t>03 | RÈGLE DES 3 ÉCARTS-TYPES [X̄ ± 3Σ]</a:t>
+            </a:r>
+          </a:p>
+        </p:txBody>
+      </p:sp>
+      <p:sp>
+        <p:nvSpPr>
+          <p:cNvPr id="15" name="TextBox 14"/>
+          <p:cNvSpPr txBox="1"/>
+          <p:nvPr/>
+        </p:nvSpPr>
+        <p:spPr>
+          <a:xfrm>
+            <a:off x="8229600" y="2011680"/>
+            <a:ext cx="3047695" cy="3931920"/>
+          </a:xfrm>
+          <a:prstGeom prst="rect">
+            <a:avLst/>
+          </a:prstGeom>
+          <a:noFill/>
+        </p:spPr>
+        <p:txBody>
+          <a:bodyPr wrap="square">
+            <a:spAutoFit/>
+          </a:bodyPr>
+          <a:lstStyle/>
+          <a:p>
+            <a:pPr>
+              <a:defRPr sz="1100" b="1">
+                <a:solidFill>
+                  <a:srgbClr val="38BDF8"/>
+                </a:solidFill>
+                <a:latin typeface="Segoe UI"/>
+              </a:defRPr>
+            </a:pPr>
+            <a:r>
+              <a:t>Colonnes Filtrées :</a:t>
+            </a:r>
+          </a:p>
+          <a:p>
+            <a:pPr>
               <a:defRPr sz="1000">
                 <a:solidFill>
-                  <a:srgbClr val="94A3B8"/>
-                </a:solidFill>
-              </a:defRPr>
-            </a:pPr>
-            <a:r>
-              <a:t>Christopher GILLERON  |  Walmart Store Sales Prediction  |  Certification CDSD</a:t>
-            </a:r>
-          </a:p>
+                  <a:srgbClr val="F8FAFC"/>
+                </a:solidFill>
+                <a:latin typeface="Segoe UI"/>
+              </a:defRPr>
+            </a:pPr>
+            <a:r>
+              <a:t>Application stricte de l'intervalle [X̄ - 3σ, X̄ + 3σ] sur Temperature, Fuel_Price, CPI et Unemployment.</a:t>
+            </a:r>
+          </a:p>
+          <a:p/>
+          <a:p>
+            <a:pPr>
+              <a:defRPr sz="1100" b="1">
+                <a:solidFill>
+                  <a:srgbClr val="38BDF8"/>
+                </a:solidFill>
+                <a:latin typeface="Segoe UI"/>
+              </a:defRPr>
+            </a:pPr>
+            <a:r>
+              <a:t>Élimination des Aberrations :</a:t>
+            </a:r>
+          </a:p>
+          <a:p>
+            <a:pPr>
+              <a:defRPr sz="1000">
+                <a:solidFill>
+                  <a:srgbClr val="F8FAFC"/>
+                </a:solidFill>
+                <a:latin typeface="Segoe UI"/>
+              </a:defRPr>
+            </a:pPr>
+            <a:r>
+              <a:t>5 observations atypiques éliminées sans supprimer involontairement les NaN des autres colonnes.</a:t>
+            </a:r>
+          </a:p>
+          <a:p/>
+          <a:p>
+            <a:pPr>
+              <a:defRPr sz="1100" b="1">
+                <a:solidFill>
+                  <a:srgbClr val="38BDF8"/>
+                </a:solidFill>
+                <a:latin typeface="Segoe UI"/>
+              </a:defRPr>
+            </a:pPr>
+            <a:r>
+              <a:t>Taille Finale :</a:t>
+            </a:r>
+          </a:p>
+          <a:p>
+            <a:pPr>
+              <a:defRPr sz="1000">
+                <a:solidFill>
+                  <a:srgbClr val="F8FAFC"/>
+                </a:solidFill>
+                <a:latin typeface="Segoe UI"/>
+              </a:defRPr>
+            </a:pPr>
+            <a:r>
+              <a:t>131 observations prêtes pour le pipeline d'apprentissage.</a:t>
+            </a:r>
+          </a:p>
+          <a:p/>
         </p:txBody>
       </p:sp>
     </p:spTree>
@@ -4255,7 +6736,7 @@
             <a:avLst/>
           </a:prstGeom>
           <a:solidFill>
-            <a:srgbClr val="0F172A"/>
+            <a:srgbClr val="0B1120"/>
           </a:solidFill>
           <a:ln>
             <a:noFill/>
@@ -4291,8 +6772,8 @@
         </p:nvSpPr>
         <p:spPr>
           <a:xfrm>
-            <a:off x="731520" y="457200"/>
-            <a:ext cx="9144000" cy="365760"/>
+            <a:off x="731520" y="365760"/>
+            <a:ext cx="7315200" cy="320040"/>
           </a:xfrm>
           <a:prstGeom prst="rect">
             <a:avLst/>
@@ -4300,7 +6781,7 @@
           <a:noFill/>
         </p:spPr>
         <p:txBody>
-          <a:bodyPr wrap="none">
+          <a:bodyPr wrap="square" lIns="0" tIns="0" rIns="0" bIns="0">
             <a:spAutoFit/>
           </a:bodyPr>
           <a:lstStyle/>
@@ -4310,10 +6791,11 @@
                 <a:solidFill>
                   <a:srgbClr val="38BDF8"/>
                 </a:solidFill>
-              </a:defRPr>
-            </a:pPr>
-            <a:r>
-              <a:t>ÉTAPE 03 | PIPELINE DE MODÉLISATION</a:t>
+                <a:latin typeface="Segoe UI"/>
+              </a:defRPr>
+            </a:pPr>
+            <a:r>
+              <a:t>ÉTAPE 03 | ANALYSE EXPLORATOIRE</a:t>
             </a:r>
           </a:p>
         </p:txBody>
@@ -4326,8 +6808,8 @@
         </p:nvSpPr>
         <p:spPr>
           <a:xfrm>
-            <a:off x="731520" y="822960"/>
-            <a:ext cx="9144000" cy="731520"/>
+            <a:off x="731520" y="685800"/>
+            <a:ext cx="9601200" cy="502920"/>
           </a:xfrm>
           <a:prstGeom prst="rect">
             <a:avLst/>
@@ -4335,20 +6817,21 @@
           <a:noFill/>
         </p:spPr>
         <p:txBody>
-          <a:bodyPr wrap="none">
+          <a:bodyPr wrap="square" lIns="0" tIns="0" rIns="0" bIns="0">
             <a:spAutoFit/>
           </a:bodyPr>
           <a:lstStyle/>
           <a:p>
             <a:pPr>
-              <a:defRPr sz="2400" b="1">
+              <a:defRPr sz="2200" b="1">
                 <a:solidFill>
                   <a:srgbClr val="F8FAFC"/>
                 </a:solidFill>
-              </a:defRPr>
-            </a:pPr>
-            <a:r>
-              <a:t>Benchmark &amp; Régularisation (Lasso / Ridge)</a:t>
+                <a:latin typeface="Segoe UI"/>
+              </a:defRPr>
+            </a:pPr>
+            <a:r>
+              <a:t>Distribution des Ventes &amp; Corrélations Macroéconomiques</a:t>
             </a:r>
           </a:p>
         </p:txBody>
@@ -4361,7 +6844,7 @@
         </p:nvSpPr>
         <p:spPr>
           <a:xfrm>
-            <a:off x="10515600" y="640080"/>
+            <a:off x="10362895" y="411480"/>
             <a:ext cx="1097280" cy="365760"/>
           </a:xfrm>
           <a:prstGeom prst="rect">
@@ -4370,7 +6853,7 @@
           <a:noFill/>
         </p:spPr>
         <p:txBody>
-          <a:bodyPr wrap="none">
+          <a:bodyPr wrap="square" lIns="0" tIns="0" rIns="0" bIns="0">
             <a:spAutoFit/>
           </a:bodyPr>
           <a:lstStyle/>
@@ -4380,24 +6863,61 @@
                 <a:solidFill>
                   <a:srgbClr val="94A3B8"/>
                 </a:solidFill>
-              </a:defRPr>
-            </a:pPr>
-            <a:r>
-              <a:t>4 / 6</a:t>
-            </a:r>
-          </a:p>
-        </p:txBody>
-      </p:sp>
-      <p:sp>
-        <p:nvSpPr>
-          <p:cNvPr id="6" name="Rounded Rectangle 5"/>
+                <a:latin typeface="Segoe UI"/>
+              </a:defRPr>
+            </a:pPr>
+            <a:r>
+              <a:t>4 / 10</a:t>
+            </a:r>
+          </a:p>
+        </p:txBody>
+      </p:sp>
+      <p:sp>
+        <p:nvSpPr>
+          <p:cNvPr id="6" name="TextBox 5"/>
+          <p:cNvSpPr txBox="1"/>
+          <p:nvPr/>
+        </p:nvSpPr>
+        <p:spPr>
+          <a:xfrm>
+            <a:off x="731520" y="6400800"/>
+            <a:ext cx="10728655" cy="274320"/>
+          </a:xfrm>
+          <a:prstGeom prst="rect">
+            <a:avLst/>
+          </a:prstGeom>
+          <a:noFill/>
+        </p:spPr>
+        <p:txBody>
+          <a:bodyPr wrap="square" lIns="0" tIns="0" rIns="0" bIns="0">
+            <a:spAutoFit/>
+          </a:bodyPr>
+          <a:lstStyle/>
+          <a:p>
+            <a:pPr>
+              <a:defRPr sz="1000">
+                <a:solidFill>
+                  <a:srgbClr val="64748B"/>
+                </a:solidFill>
+                <a:latin typeface="Segoe UI"/>
+              </a:defRPr>
+            </a:pPr>
+            <a:r>
+              <a:t>Christopher GILLERON  |  Walmart Store Sales Prediction (Machine Learning Supervisé)  |  Certification CDSD Bloc 3</a:t>
+            </a:r>
+          </a:p>
+        </p:txBody>
+      </p:sp>
+      <p:sp>
+        <p:nvSpPr>
+          <p:cNvPr id="7" name="Rounded Rectangle 6"/>
           <p:cNvSpPr/>
           <p:nvPr/>
         </p:nvSpPr>
         <p:spPr>
           <a:xfrm>
-            <a:off x="731520" y="1645920"/>
-            <a:ext cx="5303520" cy="2057400"/>
+            <a:off x="731520" y="1371600"/>
+            <a:ext cx="5212080" cy="4754880"/>
           </a:xfrm>
           <a:prstGeom prst="roundRect">
             <a:avLst/>
@@ -4405,7 +6925,7 @@
           <a:solidFill>
             <a:srgbClr val="1E293B"/>
           </a:solidFill>
-          <a:ln w="12700">
+          <a:ln w="19050">
             <a:solidFill>
               <a:srgbClr val="334155"/>
             </a:solidFill>
@@ -4435,14 +6955,50 @@
       </p:sp>
       <p:sp>
         <p:nvSpPr>
-          <p:cNvPr id="7" name="TextBox 6"/>
+          <p:cNvPr id="8" name="TextBox 7"/>
           <p:cNvSpPr txBox="1"/>
           <p:nvPr/>
         </p:nvSpPr>
         <p:spPr>
           <a:xfrm>
-            <a:off x="914400" y="1719072"/>
-            <a:ext cx="4937760" cy="1911096"/>
+            <a:off x="914400" y="1536192"/>
+            <a:ext cx="4846320" cy="365760"/>
+          </a:xfrm>
+          <a:prstGeom prst="rect">
+            <a:avLst/>
+          </a:prstGeom>
+          <a:noFill/>
+        </p:spPr>
+        <p:txBody>
+          <a:bodyPr wrap="square" lIns="0" tIns="0" rIns="0" bIns="0">
+            <a:spAutoFit/>
+          </a:bodyPr>
+          <a:lstStyle/>
+          <a:p>
+            <a:pPr>
+              <a:defRPr sz="1200" b="1">
+                <a:solidFill>
+                  <a:srgbClr val="38BDF8"/>
+                </a:solidFill>
+                <a:latin typeface="Segoe UI"/>
+              </a:defRPr>
+            </a:pPr>
+            <a:r>
+              <a:t>DISPARITÉ DES VENTES PAR MAGASIN (STORE)</a:t>
+            </a:r>
+          </a:p>
+        </p:txBody>
+      </p:sp>
+      <p:sp>
+        <p:nvSpPr>
+          <p:cNvPr id="9" name="TextBox 8"/>
+          <p:cNvSpPr txBox="1"/>
+          <p:nvPr/>
+        </p:nvSpPr>
+        <p:spPr>
+          <a:xfrm>
+            <a:off x="914400" y="1920240"/>
+            <a:ext cx="4846320" cy="3931920"/>
           </a:xfrm>
           <a:prstGeom prst="rect">
             <a:avLst/>
@@ -4456,43 +7012,120 @@
           <a:lstStyle/>
           <a:p>
             <a:pPr>
-              <a:defRPr sz="1300" b="1">
+              <a:defRPr sz="1100" b="1">
                 <a:solidFill>
                   <a:srgbClr val="38BDF8"/>
                 </a:solidFill>
-              </a:defRPr>
-            </a:pPr>
-            <a:r>
-              <a:t>PRÉ-TRAITEMENT SCIKIT-LEARN</a:t>
-            </a:r>
-          </a:p>
-          <a:p>
-            <a:pPr>
-              <a:spcBef>
-                <a:spcPts val="400"/>
-              </a:spcBef>
-              <a:defRPr sz="1100">
+                <a:latin typeface="Segoe UI"/>
+              </a:defRPr>
+            </a:pPr>
+            <a:r>
+              <a:t>Hétérogénéité Majeure :</a:t>
+            </a:r>
+          </a:p>
+          <a:p>
+            <a:pPr>
+              <a:defRPr sz="1000">
                 <a:solidFill>
                   <a:srgbClr val="F8FAFC"/>
                 </a:solidFill>
-              </a:defRPr>
-            </a:pPr>
-            <a:r>
-              <a:t>Standardisation des variables continues (StandardScaler) et One-Hot Encoding des identifiants magasins et périodes fériées.</a:t>
-            </a:r>
-          </a:p>
-        </p:txBody>
-      </p:sp>
-      <p:sp>
-        <p:nvSpPr>
-          <p:cNvPr id="8" name="Rounded Rectangle 7"/>
+                <a:latin typeface="Segoe UI"/>
+              </a:defRPr>
+            </a:pPr>
+            <a:r>
+              <a:t>Les ventes moyennes varient de 250 000 $ à plus de 2 100 000 $ par semaine selon les magasins.</a:t>
+            </a:r>
+          </a:p>
+          <a:p>
+            <a:pPr>
+              <a:defRPr sz="1100" b="1">
+                <a:solidFill>
+                  <a:srgbClr val="38BDF8"/>
+                </a:solidFill>
+                <a:latin typeface="Segoe UI"/>
+              </a:defRPr>
+            </a:pPr>
+            <a:r>
+              <a:t>Top Magasins Performeurs :</a:t>
+            </a:r>
+          </a:p>
+          <a:p>
+            <a:pPr>
+              <a:defRPr sz="1000">
+                <a:solidFill>
+                  <a:srgbClr val="F8FAFC"/>
+                </a:solidFill>
+                <a:latin typeface="Segoe UI"/>
+              </a:defRPr>
+            </a:pPr>
+            <a:r>
+              <a:t>Les magasins 4, 13, 14 et 20 réalisent régulièrement plus de 1.8M$ par semaine (hypermarchés à très fort trafic).</a:t>
+            </a:r>
+          </a:p>
+          <a:p>
+            <a:pPr>
+              <a:defRPr sz="1100" b="1">
+                <a:solidFill>
+                  <a:srgbClr val="38BDF8"/>
+                </a:solidFill>
+                <a:latin typeface="Segoe UI"/>
+              </a:defRPr>
+            </a:pPr>
+            <a:r>
+              <a:t>Magasins à Faible Volume :</a:t>
+            </a:r>
+          </a:p>
+          <a:p>
+            <a:pPr>
+              <a:defRPr sz="1000">
+                <a:solidFill>
+                  <a:srgbClr val="F8FAFC"/>
+                </a:solidFill>
+                <a:latin typeface="Segoe UI"/>
+              </a:defRPr>
+            </a:pPr>
+            <a:r>
+              <a:t>Les magasins 3, 5, 9 et 16 plafonnent sous les 600 000 $ hebdomadaires.</a:t>
+            </a:r>
+          </a:p>
+          <a:p>
+            <a:pPr>
+              <a:defRPr sz="1100" b="1">
+                <a:solidFill>
+                  <a:srgbClr val="38BDF8"/>
+                </a:solidFill>
+                <a:latin typeface="Segoe UI"/>
+              </a:defRPr>
+            </a:pPr>
+            <a:r>
+              <a:t>Conclusion EDA Magasin :</a:t>
+            </a:r>
+          </a:p>
+          <a:p>
+            <a:pPr>
+              <a:defRPr sz="1000">
+                <a:solidFill>
+                  <a:srgbClr val="F8FAFC"/>
+                </a:solidFill>
+                <a:latin typeface="Segoe UI"/>
+              </a:defRPr>
+            </a:pPr>
+            <a:r>
+              <a:t>La variable 'Store' est de loin le descripteur le plus discriminant du modèle : un encodage catégoriel (One-Hot) est obligatoire.</a:t>
+            </a:r>
+          </a:p>
+        </p:txBody>
+      </p:sp>
+      <p:sp>
+        <p:nvSpPr>
+          <p:cNvPr id="10" name="Rounded Rectangle 9"/>
           <p:cNvSpPr/>
           <p:nvPr/>
         </p:nvSpPr>
         <p:spPr>
           <a:xfrm>
-            <a:off x="731520" y="3840480"/>
-            <a:ext cx="5303520" cy="2057400"/>
+            <a:off x="6217920" y="1371600"/>
+            <a:ext cx="5242255" cy="4754880"/>
           </a:xfrm>
           <a:prstGeom prst="roundRect">
             <a:avLst/>
@@ -4500,7 +7133,7 @@
           <a:solidFill>
             <a:srgbClr val="1E293B"/>
           </a:solidFill>
-          <a:ln w="12700">
+          <a:ln w="19050">
             <a:solidFill>
               <a:srgbClr val="334155"/>
             </a:solidFill>
@@ -4530,14 +7163,50 @@
       </p:sp>
       <p:sp>
         <p:nvSpPr>
-          <p:cNvPr id="9" name="TextBox 8"/>
+          <p:cNvPr id="11" name="TextBox 10"/>
           <p:cNvSpPr txBox="1"/>
           <p:nvPr/>
         </p:nvSpPr>
         <p:spPr>
           <a:xfrm>
-            <a:off x="914400" y="3913632"/>
-            <a:ext cx="4937760" cy="1911096"/>
+            <a:off x="6400800" y="1536192"/>
+            <a:ext cx="4876495" cy="365760"/>
+          </a:xfrm>
+          <a:prstGeom prst="rect">
+            <a:avLst/>
+          </a:prstGeom>
+          <a:noFill/>
+        </p:spPr>
+        <p:txBody>
+          <a:bodyPr wrap="square" lIns="0" tIns="0" rIns="0" bIns="0">
+            <a:spAutoFit/>
+          </a:bodyPr>
+          <a:lstStyle/>
+          <a:p>
+            <a:pPr>
+              <a:defRPr sz="1200" b="1">
+                <a:solidFill>
+                  <a:srgbClr val="38BDF8"/>
+                </a:solidFill>
+                <a:latin typeface="Segoe UI"/>
+              </a:defRPr>
+            </a:pPr>
+            <a:r>
+              <a:t>SIGNAUX MACROÉCONOMIQUES &amp; CALENDRIER</a:t>
+            </a:r>
+          </a:p>
+        </p:txBody>
+      </p:sp>
+      <p:sp>
+        <p:nvSpPr>
+          <p:cNvPr id="12" name="TextBox 11"/>
+          <p:cNvSpPr txBox="1"/>
+          <p:nvPr/>
+        </p:nvSpPr>
+        <p:spPr>
+          <a:xfrm>
+            <a:off x="6400800" y="1920240"/>
+            <a:ext cx="4846320" cy="3931920"/>
           </a:xfrm>
           <a:prstGeom prst="rect">
             <a:avLst/>
@@ -4551,133 +7220,106 @@
           <a:lstStyle/>
           <a:p>
             <a:pPr>
-              <a:defRPr sz="1300" b="1">
-                <a:solidFill>
-                  <a:srgbClr val="A855F7"/>
-                </a:solidFill>
-              </a:defRPr>
-            </a:pPr>
-            <a:r>
-              <a:t>CONTRÔLE DU SURAPPRENTISSAGE</a:t>
-            </a:r>
-          </a:p>
-          <a:p>
-            <a:pPr>
-              <a:spcBef>
-                <a:spcPts val="400"/>
-              </a:spcBef>
-              <a:defRPr sz="1100">
+              <a:defRPr sz="1100" b="1">
+                <a:solidFill>
+                  <a:srgbClr val="FACC15"/>
+                </a:solidFill>
+                <a:latin typeface="Segoe UI"/>
+              </a:defRPr>
+            </a:pPr>
+            <a:r>
+              <a:t>Taux de Chômage (Unemployment) :</a:t>
+            </a:r>
+          </a:p>
+          <a:p>
+            <a:pPr>
+              <a:defRPr sz="1000">
                 <a:solidFill>
                   <a:srgbClr val="F8FAFC"/>
                 </a:solidFill>
-              </a:defRPr>
-            </a:pPr>
-            <a:r>
-              <a:t>Mise en place de régressions pénalisées Lasso (L1) pour la sélection automatique de variables et Ridge (L2) pour stabiliser la colinéarité.</a:t>
-            </a:r>
-          </a:p>
-        </p:txBody>
-      </p:sp>
-      <p:sp>
-        <p:nvSpPr>
-          <p:cNvPr id="10" name="Rounded Rectangle 9"/>
-          <p:cNvSpPr/>
-          <p:nvPr/>
-        </p:nvSpPr>
-        <p:spPr>
-          <a:xfrm>
-            <a:off x="6355080" y="1600200"/>
-            <a:ext cx="5120640" cy="4389120"/>
-          </a:xfrm>
-          <a:prstGeom prst="roundRect">
-            <a:avLst/>
-          </a:prstGeom>
-          <a:solidFill>
-            <a:srgbClr val="1E293B"/>
-          </a:solidFill>
-          <a:ln>
-            <a:solidFill>
-              <a:srgbClr val="334155"/>
-            </a:solidFill>
-          </a:ln>
-        </p:spPr>
-        <p:style>
-          <a:lnRef idx="1">
-            <a:schemeClr val="accent1"/>
-          </a:lnRef>
-          <a:fillRef idx="3">
-            <a:schemeClr val="accent1"/>
-          </a:fillRef>
-          <a:effectRef idx="2">
-            <a:schemeClr val="accent1"/>
-          </a:effectRef>
-          <a:fontRef idx="minor">
-            <a:schemeClr val="lt1"/>
-          </a:fontRef>
-        </p:style>
-        <p:txBody>
-          <a:bodyPr rtlCol="0" anchor="ctr"/>
-          <a:lstStyle/>
-          <a:p>
-            <a:pPr algn="ctr"/>
-          </a:p>
-        </p:txBody>
-      </p:sp>
-      <p:pic>
-        <p:nvPicPr>
-          <p:cNvPr id="11" name="Picture 10" descr="walmart_c15_3.png"/>
-          <p:cNvPicPr>
-            <a:picLocks noChangeAspect="1"/>
-          </p:cNvPicPr>
-          <p:nvPr/>
-        </p:nvPicPr>
-        <p:blipFill>
-          <a:blip r:embed="rId2"/>
-          <a:stretch>
-            <a:fillRect/>
-          </a:stretch>
-        </p:blipFill>
-        <p:spPr>
-          <a:xfrm>
-            <a:off x="6400800" y="1645920"/>
-            <a:ext cx="5029200" cy="4293937"/>
-          </a:xfrm>
-          <a:prstGeom prst="rect">
-            <a:avLst/>
-          </a:prstGeom>
-        </p:spPr>
-      </p:pic>
-      <p:sp>
-        <p:nvSpPr>
-          <p:cNvPr id="12" name="TextBox 11"/>
-          <p:cNvSpPr txBox="1"/>
-          <p:nvPr/>
-        </p:nvSpPr>
-        <p:spPr>
-          <a:xfrm>
-            <a:off x="731520" y="6309360"/>
-            <a:ext cx="10698480" cy="365760"/>
-          </a:xfrm>
-          <a:prstGeom prst="rect">
-            <a:avLst/>
-          </a:prstGeom>
-          <a:noFill/>
-        </p:spPr>
-        <p:txBody>
-          <a:bodyPr wrap="none">
-            <a:spAutoFit/>
-          </a:bodyPr>
-          <a:lstStyle/>
+                <a:latin typeface="Segoe UI"/>
+              </a:defRPr>
+            </a:pPr>
+            <a:r>
+              <a:t>Corrélation négative nette avec les ventes (-0.16). Les zones de chômage élevé subissent une contraction directe du panier moyen.</a:t>
+            </a:r>
+          </a:p>
+          <a:p>
+            <a:pPr>
+              <a:defRPr sz="1100" b="1">
+                <a:solidFill>
+                  <a:srgbClr val="FACC15"/>
+                </a:solidFill>
+                <a:latin typeface="Segoe UI"/>
+              </a:defRPr>
+            </a:pPr>
+            <a:r>
+              <a:t>Indice des Prix à la Consommation (CPI) :</a:t>
+            </a:r>
+          </a:p>
           <a:p>
             <a:pPr>
               <a:defRPr sz="1000">
                 <a:solidFill>
-                  <a:srgbClr val="94A3B8"/>
-                </a:solidFill>
-              </a:defRPr>
-            </a:pPr>
-            <a:r>
-              <a:t>Christopher GILLERON  |  Walmart Store Sales Prediction  |  Certification CDSD</a:t>
+                  <a:srgbClr val="F8FAFC"/>
+                </a:solidFill>
+                <a:latin typeface="Segoe UI"/>
+              </a:defRPr>
+            </a:pPr>
+            <a:r>
+              <a:t>Léger impact négatif (-0.08) : l'inflation incite à l'arbitrage vers des produits de première nécessité.</a:t>
+            </a:r>
+          </a:p>
+          <a:p>
+            <a:pPr>
+              <a:defRPr sz="1100" b="1">
+                <a:solidFill>
+                  <a:srgbClr val="FACC15"/>
+                </a:solidFill>
+                <a:latin typeface="Segoe UI"/>
+              </a:defRPr>
+            </a:pPr>
+            <a:r>
+              <a:t>Température &amp; Météo :</a:t>
+            </a:r>
+          </a:p>
+          <a:p>
+            <a:pPr>
+              <a:defRPr sz="1000">
+                <a:solidFill>
+                  <a:srgbClr val="F8FAFC"/>
+                </a:solidFill>
+                <a:latin typeface="Segoe UI"/>
+              </a:defRPr>
+            </a:pPr>
+            <a:r>
+              <a:t>Légère corrélation négative (-0.11) : les ventes sont plus faibles lors des fortes chaleurs estivales et montent en hiver (fêtes).</a:t>
+            </a:r>
+          </a:p>
+          <a:p>
+            <a:pPr>
+              <a:defRPr sz="1100" b="1">
+                <a:solidFill>
+                  <a:srgbClr val="FACC15"/>
+                </a:solidFill>
+                <a:latin typeface="Segoe UI"/>
+              </a:defRPr>
+            </a:pPr>
+            <a:r>
+              <a:t>Holiday_Flag (Semaines Fériées) :</a:t>
+            </a:r>
+          </a:p>
+          <a:p>
+            <a:pPr>
+              <a:defRPr sz="1000">
+                <a:solidFill>
+                  <a:srgbClr val="F8FAFC"/>
+                </a:solidFill>
+                <a:latin typeface="Segoe UI"/>
+              </a:defRPr>
+            </a:pPr>
+            <a:r>
+              <a:t>Pics de surconsommation massifs lors de Thanksgiving et Noël (+15% à +25% de CA hebdomadaire).</a:t>
             </a:r>
           </a:p>
         </p:txBody>
@@ -4715,7 +7357,7 @@
             <a:avLst/>
           </a:prstGeom>
           <a:solidFill>
-            <a:srgbClr val="0F172A"/>
+            <a:srgbClr val="0B1120"/>
           </a:solidFill>
           <a:ln>
             <a:noFill/>
@@ -4751,8 +7393,8 @@
         </p:nvSpPr>
         <p:spPr>
           <a:xfrm>
-            <a:off x="731520" y="457200"/>
-            <a:ext cx="9144000" cy="365760"/>
+            <a:off x="731520" y="365760"/>
+            <a:ext cx="7315200" cy="320040"/>
           </a:xfrm>
           <a:prstGeom prst="rect">
             <a:avLst/>
@@ -4760,7 +7402,7 @@
           <a:noFill/>
         </p:spPr>
         <p:txBody>
-          <a:bodyPr wrap="none">
+          <a:bodyPr wrap="square" lIns="0" tIns="0" rIns="0" bIns="0">
             <a:spAutoFit/>
           </a:bodyPr>
           <a:lstStyle/>
@@ -4770,10 +7412,11 @@
                 <a:solidFill>
                   <a:srgbClr val="38BDF8"/>
                 </a:solidFill>
-              </a:defRPr>
-            </a:pPr>
-            <a:r>
-              <a:t>ÉTAPE 04 | IMPORTANCE DES VARIABLES</a:t>
+                <a:latin typeface="Segoe UI"/>
+              </a:defRPr>
+            </a:pPr>
+            <a:r>
+              <a:t>ÉTAPE 04 | PIPELINE DE MODÉLISATION</a:t>
             </a:r>
           </a:p>
         </p:txBody>
@@ -4786,8 +7429,8 @@
         </p:nvSpPr>
         <p:spPr>
           <a:xfrm>
-            <a:off x="731520" y="822960"/>
-            <a:ext cx="9144000" cy="731520"/>
+            <a:off x="731520" y="685800"/>
+            <a:ext cx="9601200" cy="502920"/>
           </a:xfrm>
           <a:prstGeom prst="rect">
             <a:avLst/>
@@ -4795,20 +7438,21 @@
           <a:noFill/>
         </p:spPr>
         <p:txBody>
-          <a:bodyPr wrap="none">
+          <a:bodyPr wrap="square" lIns="0" tIns="0" rIns="0" bIns="0">
             <a:spAutoFit/>
           </a:bodyPr>
           <a:lstStyle/>
           <a:p>
             <a:pPr>
-              <a:defRPr sz="2400" b="1">
+              <a:defRPr sz="2200" b="1">
                 <a:solidFill>
                   <a:srgbClr val="F8FAFC"/>
                 </a:solidFill>
-              </a:defRPr>
-            </a:pPr>
-            <a:r>
-              <a:t>Interprétabilité &amp; Diagnostic Décisionnel</a:t>
+                <a:latin typeface="Segoe UI"/>
+              </a:defRPr>
+            </a:pPr>
+            <a:r>
+              <a:t>Architecture du Préprocesseur Scikit-Learn &amp; Split Train/Test</a:t>
             </a:r>
           </a:p>
         </p:txBody>
@@ -4821,7 +7465,7 @@
         </p:nvSpPr>
         <p:spPr>
           <a:xfrm>
-            <a:off x="10515600" y="640080"/>
+            <a:off x="10362895" y="411480"/>
             <a:ext cx="1097280" cy="365760"/>
           </a:xfrm>
           <a:prstGeom prst="rect">
@@ -4830,7 +7474,7 @@
           <a:noFill/>
         </p:spPr>
         <p:txBody>
-          <a:bodyPr wrap="none">
+          <a:bodyPr wrap="square" lIns="0" tIns="0" rIns="0" bIns="0">
             <a:spAutoFit/>
           </a:bodyPr>
           <a:lstStyle/>
@@ -4840,24 +7484,61 @@
                 <a:solidFill>
                   <a:srgbClr val="94A3B8"/>
                 </a:solidFill>
-              </a:defRPr>
-            </a:pPr>
-            <a:r>
-              <a:t>5 / 6</a:t>
-            </a:r>
-          </a:p>
-        </p:txBody>
-      </p:sp>
-      <p:sp>
-        <p:nvSpPr>
-          <p:cNvPr id="6" name="Rounded Rectangle 5"/>
+                <a:latin typeface="Segoe UI"/>
+              </a:defRPr>
+            </a:pPr>
+            <a:r>
+              <a:t>5 / 10</a:t>
+            </a:r>
+          </a:p>
+        </p:txBody>
+      </p:sp>
+      <p:sp>
+        <p:nvSpPr>
+          <p:cNvPr id="6" name="TextBox 5"/>
+          <p:cNvSpPr txBox="1"/>
+          <p:nvPr/>
+        </p:nvSpPr>
+        <p:spPr>
+          <a:xfrm>
+            <a:off x="731520" y="6400800"/>
+            <a:ext cx="10728655" cy="274320"/>
+          </a:xfrm>
+          <a:prstGeom prst="rect">
+            <a:avLst/>
+          </a:prstGeom>
+          <a:noFill/>
+        </p:spPr>
+        <p:txBody>
+          <a:bodyPr wrap="square" lIns="0" tIns="0" rIns="0" bIns="0">
+            <a:spAutoFit/>
+          </a:bodyPr>
+          <a:lstStyle/>
+          <a:p>
+            <a:pPr>
+              <a:defRPr sz="1000">
+                <a:solidFill>
+                  <a:srgbClr val="64748B"/>
+                </a:solidFill>
+                <a:latin typeface="Segoe UI"/>
+              </a:defRPr>
+            </a:pPr>
+            <a:r>
+              <a:t>Christopher GILLERON  |  Walmart Store Sales Prediction (Machine Learning Supervisé)  |  Certification CDSD Bloc 3</a:t>
+            </a:r>
+          </a:p>
+        </p:txBody>
+      </p:sp>
+      <p:sp>
+        <p:nvSpPr>
+          <p:cNvPr id="7" name="Rounded Rectangle 6"/>
           <p:cNvSpPr/>
           <p:nvPr/>
         </p:nvSpPr>
         <p:spPr>
           <a:xfrm>
-            <a:off x="731520" y="1645920"/>
-            <a:ext cx="5303520" cy="2057400"/>
+            <a:off x="731520" y="1371600"/>
+            <a:ext cx="3413455" cy="4754880"/>
           </a:xfrm>
           <a:prstGeom prst="roundRect">
             <a:avLst/>
@@ -4865,7 +7546,7 @@
           <a:solidFill>
             <a:srgbClr val="1E293B"/>
           </a:solidFill>
-          <a:ln w="12700">
+          <a:ln w="19050">
             <a:solidFill>
               <a:srgbClr val="334155"/>
             </a:solidFill>
@@ -4895,14 +7576,50 @@
       </p:sp>
       <p:sp>
         <p:nvSpPr>
-          <p:cNvPr id="7" name="TextBox 6"/>
+          <p:cNvPr id="8" name="TextBox 7"/>
           <p:cNvSpPr txBox="1"/>
           <p:nvPr/>
         </p:nvSpPr>
         <p:spPr>
           <a:xfrm>
-            <a:off x="914400" y="1719072"/>
-            <a:ext cx="4937760" cy="1911096"/>
+            <a:off x="914400" y="1536192"/>
+            <a:ext cx="3047695" cy="365760"/>
+          </a:xfrm>
+          <a:prstGeom prst="rect">
+            <a:avLst/>
+          </a:prstGeom>
+          <a:noFill/>
+        </p:spPr>
+        <p:txBody>
+          <a:bodyPr wrap="square" lIns="0" tIns="0" rIns="0" bIns="0">
+            <a:spAutoFit/>
+          </a:bodyPr>
+          <a:lstStyle/>
+          <a:p>
+            <a:pPr>
+              <a:defRPr sz="1200" b="1">
+                <a:solidFill>
+                  <a:srgbClr val="38BDF8"/>
+                </a:solidFill>
+                <a:latin typeface="Segoe UI"/>
+              </a:defRPr>
+            </a:pPr>
+            <a:r>
+              <a:t>01 | SPLIT TRAIN / TEST</a:t>
+            </a:r>
+          </a:p>
+        </p:txBody>
+      </p:sp>
+      <p:sp>
+        <p:nvSpPr>
+          <p:cNvPr id="9" name="TextBox 8"/>
+          <p:cNvSpPr txBox="1"/>
+          <p:nvPr/>
+        </p:nvSpPr>
+        <p:spPr>
+          <a:xfrm>
+            <a:off x="914400" y="2011680"/>
+            <a:ext cx="3047695" cy="3931920"/>
           </a:xfrm>
           <a:prstGeom prst="rect">
             <a:avLst/>
@@ -4916,43 +7633,97 @@
           <a:lstStyle/>
           <a:p>
             <a:pPr>
-              <a:defRPr sz="1300" b="1">
+              <a:defRPr sz="1100" b="1">
                 <a:solidFill>
                   <a:srgbClr val="38BDF8"/>
                 </a:solidFill>
-              </a:defRPr>
-            </a:pPr>
-            <a:r>
-              <a:t>HIÉRARCHIE DES POIDS</a:t>
-            </a:r>
-          </a:p>
-          <a:p>
-            <a:pPr>
-              <a:spcBef>
-                <a:spcPts val="400"/>
-              </a:spcBef>
-              <a:defRPr sz="1100">
+                <a:latin typeface="Segoe UI"/>
+              </a:defRPr>
+            </a:pPr>
+            <a:r>
+              <a:t>Partition 80% / 20% :</a:t>
+            </a:r>
+          </a:p>
+          <a:p>
+            <a:pPr>
+              <a:defRPr sz="1000">
                 <a:solidFill>
                   <a:srgbClr val="F8FAFC"/>
                 </a:solidFill>
-              </a:defRPr>
-            </a:pPr>
-            <a:r>
-              <a:t>L'effet d'ancrage du magasin (Store ID) domine les prédictions, suivi par la saisonnalité calendaire et le niveau de chômage local.</a:t>
-            </a:r>
-          </a:p>
-        </p:txBody>
-      </p:sp>
-      <p:sp>
-        <p:nvSpPr>
-          <p:cNvPr id="8" name="Rounded Rectangle 7"/>
+                <a:latin typeface="Segoe UI"/>
+              </a:defRPr>
+            </a:pPr>
+            <a:r>
+              <a:t>Séparation aléatoire reproductible avec random_state=42.</a:t>
+            </a:r>
+          </a:p>
+          <a:p/>
+          <a:p>
+            <a:pPr>
+              <a:defRPr sz="1100" b="1">
+                <a:solidFill>
+                  <a:srgbClr val="38BDF8"/>
+                </a:solidFill>
+                <a:latin typeface="Segoe UI"/>
+              </a:defRPr>
+            </a:pPr>
+            <a:r>
+              <a:t>Taille Train :</a:t>
+            </a:r>
+          </a:p>
+          <a:p>
+            <a:pPr>
+              <a:defRPr sz="1000">
+                <a:solidFill>
+                  <a:srgbClr val="F8FAFC"/>
+                </a:solidFill>
+                <a:latin typeface="Segoe UI"/>
+              </a:defRPr>
+            </a:pPr>
+            <a:r>
+              <a:t>104 observations d'entraînement pour apprendre les relations statistiques.</a:t>
+            </a:r>
+          </a:p>
+          <a:p/>
+          <a:p>
+            <a:pPr>
+              <a:defRPr sz="1100" b="1">
+                <a:solidFill>
+                  <a:srgbClr val="38BDF8"/>
+                </a:solidFill>
+                <a:latin typeface="Segoe UI"/>
+              </a:defRPr>
+            </a:pPr>
+            <a:r>
+              <a:t>Taille Test :</a:t>
+            </a:r>
+          </a:p>
+          <a:p>
+            <a:pPr>
+              <a:defRPr sz="1000">
+                <a:solidFill>
+                  <a:srgbClr val="F8FAFC"/>
+                </a:solidFill>
+                <a:latin typeface="Segoe UI"/>
+              </a:defRPr>
+            </a:pPr>
+            <a:r>
+              <a:t>27 observations indépendantes de test pour évaluer la capacité de généralisation.</a:t>
+            </a:r>
+          </a:p>
+          <a:p/>
+        </p:txBody>
+      </p:sp>
+      <p:sp>
+        <p:nvSpPr>
+          <p:cNvPr id="10" name="Rounded Rectangle 9"/>
           <p:cNvSpPr/>
           <p:nvPr/>
         </p:nvSpPr>
         <p:spPr>
           <a:xfrm>
-            <a:off x="731520" y="3840480"/>
-            <a:ext cx="5303520" cy="2057400"/>
+            <a:off x="4389120" y="1371600"/>
+            <a:ext cx="3413455" cy="4754880"/>
           </a:xfrm>
           <a:prstGeom prst="roundRect">
             <a:avLst/>
@@ -4960,7 +7731,7 @@
           <a:solidFill>
             <a:srgbClr val="1E293B"/>
           </a:solidFill>
-          <a:ln w="12700">
+          <a:ln w="19050">
             <a:solidFill>
               <a:srgbClr val="334155"/>
             </a:solidFill>
@@ -4990,14 +7761,50 @@
       </p:sp>
       <p:sp>
         <p:nvSpPr>
-          <p:cNvPr id="9" name="TextBox 8"/>
+          <p:cNvPr id="11" name="TextBox 10"/>
           <p:cNvSpPr txBox="1"/>
           <p:nvPr/>
         </p:nvSpPr>
         <p:spPr>
           <a:xfrm>
-            <a:off x="914400" y="3913632"/>
-            <a:ext cx="4937760" cy="1911096"/>
+            <a:off x="4572000" y="1536192"/>
+            <a:ext cx="3047695" cy="365760"/>
+          </a:xfrm>
+          <a:prstGeom prst="rect">
+            <a:avLst/>
+          </a:prstGeom>
+          <a:noFill/>
+        </p:spPr>
+        <p:txBody>
+          <a:bodyPr wrap="square" lIns="0" tIns="0" rIns="0" bIns="0">
+            <a:spAutoFit/>
+          </a:bodyPr>
+          <a:lstStyle/>
+          <a:p>
+            <a:pPr>
+              <a:defRPr sz="1200" b="1">
+                <a:solidFill>
+                  <a:srgbClr val="38BDF8"/>
+                </a:solidFill>
+                <a:latin typeface="Segoe UI"/>
+              </a:defRPr>
+            </a:pPr>
+            <a:r>
+              <a:t>02 | BRANCHES NUMÉRIQUES (8 FEATURES)</a:t>
+            </a:r>
+          </a:p>
+        </p:txBody>
+      </p:sp>
+      <p:sp>
+        <p:nvSpPr>
+          <p:cNvPr id="12" name="TextBox 11"/>
+          <p:cNvSpPr txBox="1"/>
+          <p:nvPr/>
+        </p:nvSpPr>
+        <p:spPr>
+          <a:xfrm>
+            <a:off x="4572000" y="2011680"/>
+            <a:ext cx="3047695" cy="3931920"/>
           </a:xfrm>
           <a:prstGeom prst="rect">
             <a:avLst/>
@@ -5011,43 +7818,97 @@
           <a:lstStyle/>
           <a:p>
             <a:pPr>
-              <a:defRPr sz="1300" b="1">
-                <a:solidFill>
-                  <a:srgbClr val="A855F7"/>
-                </a:solidFill>
-              </a:defRPr>
-            </a:pPr>
-            <a:r>
-              <a:t>PERFORMANCE FINALE</a:t>
-            </a:r>
-          </a:p>
-          <a:p>
-            <a:pPr>
-              <a:spcBef>
-                <a:spcPts val="400"/>
-              </a:spcBef>
-              <a:defRPr sz="1100">
+              <a:defRPr sz="1100" b="1">
+                <a:solidFill>
+                  <a:srgbClr val="38BDF8"/>
+                </a:solidFill>
+                <a:latin typeface="Segoe UI"/>
+              </a:defRPr>
+            </a:pPr>
+            <a:r>
+              <a:t>Variables Incluses :</a:t>
+            </a:r>
+          </a:p>
+          <a:p>
+            <a:pPr>
+              <a:defRPr sz="1000">
                 <a:solidFill>
                   <a:srgbClr val="F8FAFC"/>
                 </a:solidFill>
-              </a:defRPr>
-            </a:pPr>
-            <a:r>
-              <a:t>Le modèle de régression linéaire régularisé atteint un R² supérieur à 0.93 en validation, offrant une base prédictive fiable pour la Supply Chain.</a:t>
-            </a:r>
-          </a:p>
-        </p:txBody>
-      </p:sp>
-      <p:sp>
-        <p:nvSpPr>
-          <p:cNvPr id="10" name="Rounded Rectangle 9"/>
+                <a:latin typeface="Segoe UI"/>
+              </a:defRPr>
+            </a:pPr>
+            <a:r>
+              <a:t>Temperature, Fuel_Price, CPI, Unemployment, Year, Month, Day, DayOfWeek.</a:t>
+            </a:r>
+          </a:p>
+          <a:p/>
+          <a:p>
+            <a:pPr>
+              <a:defRPr sz="1100" b="1">
+                <a:solidFill>
+                  <a:srgbClr val="38BDF8"/>
+                </a:solidFill>
+                <a:latin typeface="Segoe UI"/>
+              </a:defRPr>
+            </a:pPr>
+            <a:r>
+              <a:t>Imputation Médiane :</a:t>
+            </a:r>
+          </a:p>
+          <a:p>
+            <a:pPr>
+              <a:defRPr sz="1000">
+                <a:solidFill>
+                  <a:srgbClr val="F8FAFC"/>
+                </a:solidFill>
+                <a:latin typeface="Segoe UI"/>
+              </a:defRPr>
+            </a:pPr>
+            <a:r>
+              <a:t>SimpleImputer(strategy='median') pour résister aux valeurs aberrantes résiduelles.</a:t>
+            </a:r>
+          </a:p>
+          <a:p/>
+          <a:p>
+            <a:pPr>
+              <a:defRPr sz="1100" b="1">
+                <a:solidFill>
+                  <a:srgbClr val="38BDF8"/>
+                </a:solidFill>
+                <a:latin typeface="Segoe UI"/>
+              </a:defRPr>
+            </a:pPr>
+            <a:r>
+              <a:t>Normalisation :</a:t>
+            </a:r>
+          </a:p>
+          <a:p>
+            <a:pPr>
+              <a:defRPr sz="1000">
+                <a:solidFill>
+                  <a:srgbClr val="F8FAFC"/>
+                </a:solidFill>
+                <a:latin typeface="Segoe UI"/>
+              </a:defRPr>
+            </a:pPr>
+            <a:r>
+              <a:t>StandardScaler() pour centrer et réduire (moyenne=0, variance=1) afin d'aligner les coefficients.</a:t>
+            </a:r>
+          </a:p>
+          <a:p/>
+        </p:txBody>
+      </p:sp>
+      <p:sp>
+        <p:nvSpPr>
+          <p:cNvPr id="13" name="Rounded Rectangle 12"/>
           <p:cNvSpPr/>
           <p:nvPr/>
         </p:nvSpPr>
         <p:spPr>
           <a:xfrm>
-            <a:off x="6355080" y="1600200"/>
-            <a:ext cx="5120640" cy="4389120"/>
+            <a:off x="8046720" y="1371600"/>
+            <a:ext cx="3413455" cy="4754880"/>
           </a:xfrm>
           <a:prstGeom prst="roundRect">
             <a:avLst/>
@@ -5055,7 +7916,7 @@
           <a:solidFill>
             <a:srgbClr val="1E293B"/>
           </a:solidFill>
-          <a:ln>
+          <a:ln w="19050">
             <a:solidFill>
               <a:srgbClr val="334155"/>
             </a:solidFill>
@@ -5083,63 +7944,144 @@
           </a:p>
         </p:txBody>
       </p:sp>
-      <p:pic>
-        <p:nvPicPr>
-          <p:cNvPr id="11" name="Picture 10" descr="walmart_c18_4.png"/>
-          <p:cNvPicPr>
-            <a:picLocks noChangeAspect="1"/>
-          </p:cNvPicPr>
-          <p:nvPr/>
-        </p:nvPicPr>
-        <p:blipFill>
-          <a:blip r:embed="rId2"/>
-          <a:stretch>
-            <a:fillRect/>
-          </a:stretch>
-        </p:blipFill>
-        <p:spPr>
-          <a:xfrm>
-            <a:off x="6400800" y="1645920"/>
-            <a:ext cx="5029200" cy="2984810"/>
+      <p:sp>
+        <p:nvSpPr>
+          <p:cNvPr id="14" name="TextBox 13"/>
+          <p:cNvSpPr txBox="1"/>
+          <p:nvPr/>
+        </p:nvSpPr>
+        <p:spPr>
+          <a:xfrm>
+            <a:off x="8229600" y="1536192"/>
+            <a:ext cx="3047695" cy="365760"/>
           </a:xfrm>
           <a:prstGeom prst="rect">
             <a:avLst/>
           </a:prstGeom>
-        </p:spPr>
-      </p:pic>
-      <p:sp>
-        <p:nvSpPr>
-          <p:cNvPr id="12" name="TextBox 11"/>
-          <p:cNvSpPr txBox="1"/>
-          <p:nvPr/>
-        </p:nvSpPr>
-        <p:spPr>
-          <a:xfrm>
-            <a:off x="731520" y="6309360"/>
-            <a:ext cx="10698480" cy="365760"/>
-          </a:xfrm>
-          <a:prstGeom prst="rect">
-            <a:avLst/>
-          </a:prstGeom>
           <a:noFill/>
         </p:spPr>
         <p:txBody>
-          <a:bodyPr wrap="none">
+          <a:bodyPr wrap="square" lIns="0" tIns="0" rIns="0" bIns="0">
             <a:spAutoFit/>
           </a:bodyPr>
           <a:lstStyle/>
           <a:p>
             <a:pPr>
+              <a:defRPr sz="1200" b="1">
+                <a:solidFill>
+                  <a:srgbClr val="38BDF8"/>
+                </a:solidFill>
+                <a:latin typeface="Segoe UI"/>
+              </a:defRPr>
+            </a:pPr>
+            <a:r>
+              <a:t>03 | BRANCHES CATÉGORIELLES (2 FEATURES)</a:t>
+            </a:r>
+          </a:p>
+        </p:txBody>
+      </p:sp>
+      <p:sp>
+        <p:nvSpPr>
+          <p:cNvPr id="15" name="TextBox 14"/>
+          <p:cNvSpPr txBox="1"/>
+          <p:nvPr/>
+        </p:nvSpPr>
+        <p:spPr>
+          <a:xfrm>
+            <a:off x="8229600" y="2011680"/>
+            <a:ext cx="3047695" cy="3931920"/>
+          </a:xfrm>
+          <a:prstGeom prst="rect">
+            <a:avLst/>
+          </a:prstGeom>
+          <a:noFill/>
+        </p:spPr>
+        <p:txBody>
+          <a:bodyPr wrap="square">
+            <a:spAutoFit/>
+          </a:bodyPr>
+          <a:lstStyle/>
+          <a:p>
+            <a:pPr>
+              <a:defRPr sz="1100" b="1">
+                <a:solidFill>
+                  <a:srgbClr val="38BDF8"/>
+                </a:solidFill>
+                <a:latin typeface="Segoe UI"/>
+              </a:defRPr>
+            </a:pPr>
+            <a:r>
+              <a:t>Variables Incluses :</a:t>
+            </a:r>
+          </a:p>
+          <a:p>
+            <a:pPr>
               <a:defRPr sz="1000">
                 <a:solidFill>
-                  <a:srgbClr val="94A3B8"/>
-                </a:solidFill>
-              </a:defRPr>
-            </a:pPr>
-            <a:r>
-              <a:t>Christopher GILLERON  |  Walmart Store Sales Prediction  |  Certification CDSD</a:t>
-            </a:r>
-          </a:p>
+                  <a:srgbClr val="F8FAFC"/>
+                </a:solidFill>
+                <a:latin typeface="Segoe UI"/>
+              </a:defRPr>
+            </a:pPr>
+            <a:r>
+              <a:t>Store (identifiant magasin) et Holiday_Flag (booléen férié).</a:t>
+            </a:r>
+          </a:p>
+          <a:p/>
+          <a:p>
+            <a:pPr>
+              <a:defRPr sz="1100" b="1">
+                <a:solidFill>
+                  <a:srgbClr val="38BDF8"/>
+                </a:solidFill>
+                <a:latin typeface="Segoe UI"/>
+              </a:defRPr>
+            </a:pPr>
+            <a:r>
+              <a:t>Imputation Mode :</a:t>
+            </a:r>
+          </a:p>
+          <a:p>
+            <a:pPr>
+              <a:defRPr sz="1000">
+                <a:solidFill>
+                  <a:srgbClr val="F8FAFC"/>
+                </a:solidFill>
+                <a:latin typeface="Segoe UI"/>
+              </a:defRPr>
+            </a:pPr>
+            <a:r>
+              <a:t>SimpleImputer(strategy='most_frequent') sur les catégories manquantes.</a:t>
+            </a:r>
+          </a:p>
+          <a:p/>
+          <a:p>
+            <a:pPr>
+              <a:defRPr sz="1100" b="1">
+                <a:solidFill>
+                  <a:srgbClr val="38BDF8"/>
+                </a:solidFill>
+                <a:latin typeface="Segoe UI"/>
+              </a:defRPr>
+            </a:pPr>
+            <a:r>
+              <a:t>OneHotEncoder :</a:t>
+            </a:r>
+          </a:p>
+          <a:p>
+            <a:pPr>
+              <a:defRPr sz="1000">
+                <a:solidFill>
+                  <a:srgbClr val="F8FAFC"/>
+                </a:solidFill>
+                <a:latin typeface="Segoe UI"/>
+              </a:defRPr>
+            </a:pPr>
+            <a:r>
+              <a:t>OneHotEncoder(drop='first') pour éviter la colinéarité parfaite dans la régression linéaire.</a:t>
+            </a:r>
+          </a:p>
+          <a:p/>
         </p:txBody>
       </p:sp>
     </p:spTree>
@@ -5175,7 +8117,7 @@
             <a:avLst/>
           </a:prstGeom>
           <a:solidFill>
-            <a:srgbClr val="0F172A"/>
+            <a:srgbClr val="0B1120"/>
           </a:solidFill>
           <a:ln>
             <a:noFill/>
@@ -5211,8 +8153,8 @@
         </p:nvSpPr>
         <p:spPr>
           <a:xfrm>
-            <a:off x="731520" y="457200"/>
-            <a:ext cx="9144000" cy="365760"/>
+            <a:off x="731520" y="365760"/>
+            <a:ext cx="7315200" cy="320040"/>
           </a:xfrm>
           <a:prstGeom prst="rect">
             <a:avLst/>
@@ -5220,7 +8162,7 @@
           <a:noFill/>
         </p:spPr>
         <p:txBody>
-          <a:bodyPr wrap="none">
+          <a:bodyPr wrap="square" lIns="0" tIns="0" rIns="0" bIns="0">
             <a:spAutoFit/>
           </a:bodyPr>
           <a:lstStyle/>
@@ -5230,10 +8172,11 @@
                 <a:solidFill>
                   <a:srgbClr val="38BDF8"/>
                 </a:solidFill>
-              </a:defRPr>
-            </a:pPr>
-            <a:r>
-              <a:t>ÉTAPE 05 | RECOMMANDATIONS MÉTIER</a:t>
+                <a:latin typeface="Segoe UI"/>
+              </a:defRPr>
+            </a:pPr>
+            <a:r>
+              <a:t>ÉTAPE 05 | MODÈLE BASELINE</a:t>
             </a:r>
           </a:p>
         </p:txBody>
@@ -5246,8 +8189,8 @@
         </p:nvSpPr>
         <p:spPr>
           <a:xfrm>
-            <a:off x="731520" y="822960"/>
-            <a:ext cx="9144000" cy="731520"/>
+            <a:off x="731520" y="685800"/>
+            <a:ext cx="9601200" cy="502920"/>
           </a:xfrm>
           <a:prstGeom prst="rect">
             <a:avLst/>
@@ -5255,20 +8198,21 @@
           <a:noFill/>
         </p:spPr>
         <p:txBody>
-          <a:bodyPr wrap="none">
+          <a:bodyPr wrap="square" lIns="0" tIns="0" rIns="0" bIns="0">
             <a:spAutoFit/>
           </a:bodyPr>
           <a:lstStyle/>
           <a:p>
             <a:pPr>
-              <a:defRPr sz="2400" b="1">
+              <a:defRPr sz="2200" b="1">
                 <a:solidFill>
                   <a:srgbClr val="F8FAFC"/>
                 </a:solidFill>
-              </a:defRPr>
-            </a:pPr>
-            <a:r>
-              <a:t>Déploiement Logistique &amp; Plan d'Action</a:t>
+                <a:latin typeface="Segoe UI"/>
+              </a:defRPr>
+            </a:pPr>
+            <a:r>
+              <a:t>Régression Linéaire Multiple &amp; Évaluation des Performances</a:t>
             </a:r>
           </a:p>
         </p:txBody>
@@ -5281,7 +8225,7 @@
         </p:nvSpPr>
         <p:spPr>
           <a:xfrm>
-            <a:off x="10515600" y="640080"/>
+            <a:off x="10362895" y="411480"/>
             <a:ext cx="1097280" cy="365760"/>
           </a:xfrm>
           <a:prstGeom prst="rect">
@@ -5290,7 +8234,7 @@
           <a:noFill/>
         </p:spPr>
         <p:txBody>
-          <a:bodyPr wrap="none">
+          <a:bodyPr wrap="square" lIns="0" tIns="0" rIns="0" bIns="0">
             <a:spAutoFit/>
           </a:bodyPr>
           <a:lstStyle/>
@@ -5300,24 +8244,61 @@
                 <a:solidFill>
                   <a:srgbClr val="94A3B8"/>
                 </a:solidFill>
-              </a:defRPr>
-            </a:pPr>
-            <a:r>
-              <a:t>6 / 6</a:t>
-            </a:r>
-          </a:p>
-        </p:txBody>
-      </p:sp>
-      <p:sp>
-        <p:nvSpPr>
-          <p:cNvPr id="6" name="Rounded Rectangle 5"/>
+                <a:latin typeface="Segoe UI"/>
+              </a:defRPr>
+            </a:pPr>
+            <a:r>
+              <a:t>6 / 10</a:t>
+            </a:r>
+          </a:p>
+        </p:txBody>
+      </p:sp>
+      <p:sp>
+        <p:nvSpPr>
+          <p:cNvPr id="6" name="TextBox 5"/>
+          <p:cNvSpPr txBox="1"/>
+          <p:nvPr/>
+        </p:nvSpPr>
+        <p:spPr>
+          <a:xfrm>
+            <a:off x="731520" y="6400800"/>
+            <a:ext cx="10728655" cy="274320"/>
+          </a:xfrm>
+          <a:prstGeom prst="rect">
+            <a:avLst/>
+          </a:prstGeom>
+          <a:noFill/>
+        </p:spPr>
+        <p:txBody>
+          <a:bodyPr wrap="square" lIns="0" tIns="0" rIns="0" bIns="0">
+            <a:spAutoFit/>
+          </a:bodyPr>
+          <a:lstStyle/>
+          <a:p>
+            <a:pPr>
+              <a:defRPr sz="1000">
+                <a:solidFill>
+                  <a:srgbClr val="64748B"/>
+                </a:solidFill>
+                <a:latin typeface="Segoe UI"/>
+              </a:defRPr>
+            </a:pPr>
+            <a:r>
+              <a:t>Christopher GILLERON  |  Walmart Store Sales Prediction (Machine Learning Supervisé)  |  Certification CDSD Bloc 3</a:t>
+            </a:r>
+          </a:p>
+        </p:txBody>
+      </p:sp>
+      <p:sp>
+        <p:nvSpPr>
+          <p:cNvPr id="7" name="Rounded Rectangle 6"/>
           <p:cNvSpPr/>
           <p:nvPr/>
         </p:nvSpPr>
         <p:spPr>
           <a:xfrm>
-            <a:off x="731520" y="1645920"/>
-            <a:ext cx="10698480" cy="1325880"/>
+            <a:off x="731520" y="1371600"/>
+            <a:ext cx="5212080" cy="4754880"/>
           </a:xfrm>
           <a:prstGeom prst="roundRect">
             <a:avLst/>
@@ -5325,7 +8306,7 @@
           <a:solidFill>
             <a:srgbClr val="1E293B"/>
           </a:solidFill>
-          <a:ln w="12700">
+          <a:ln w="19050">
             <a:solidFill>
               <a:srgbClr val="334155"/>
             </a:solidFill>
@@ -5355,14 +8336,372 @@
       </p:sp>
       <p:sp>
         <p:nvSpPr>
-          <p:cNvPr id="7" name="TextBox 6"/>
+          <p:cNvPr id="8" name="TextBox 7"/>
           <p:cNvSpPr txBox="1"/>
           <p:nvPr/>
         </p:nvSpPr>
         <p:spPr>
           <a:xfrm>
-            <a:off x="914400" y="1719072"/>
-            <a:ext cx="10332720" cy="1179576"/>
+            <a:off x="914400" y="1536192"/>
+            <a:ext cx="4846320" cy="365760"/>
+          </a:xfrm>
+          <a:prstGeom prst="rect">
+            <a:avLst/>
+          </a:prstGeom>
+          <a:noFill/>
+        </p:spPr>
+        <p:txBody>
+          <a:bodyPr wrap="square" lIns="0" tIns="0" rIns="0" bIns="0">
+            <a:spAutoFit/>
+          </a:bodyPr>
+          <a:lstStyle/>
+          <a:p>
+            <a:pPr>
+              <a:defRPr sz="1200" b="1">
+                <a:solidFill>
+                  <a:srgbClr val="38BDF8"/>
+                </a:solidFill>
+                <a:latin typeface="Segoe UI"/>
+              </a:defRPr>
+            </a:pPr>
+            <a:r>
+              <a:t>PERFORMANCES DU MODÈLE LINÉAIRE (PYSPARK/SCIKIT-LEARN)</a:t>
+            </a:r>
+          </a:p>
+        </p:txBody>
+      </p:sp>
+      <p:graphicFrame>
+        <p:nvGraphicFramePr>
+          <p:cNvPr id="9" name="Table 8"/>
+          <p:cNvGraphicFramePr>
+            <a:graphicFrameLocks noGrp="1"/>
+          </p:cNvGraphicFramePr>
+          <p:nvPr/>
+        </p:nvGraphicFramePr>
+        <p:xfrm>
+          <a:off x="914400" y="1920240"/>
+          <a:ext cx="4846320" cy="1645920"/>
+        </p:xfrm>
+        <a:graphic>
+          <a:graphicData uri="http://schemas.openxmlformats.org/drawingml/2006/table">
+            <a:tbl>
+              <a:tblPr firstRow="1" bandRow="1">
+                <a:tableStyleId>{5C22544A-7EE6-4342-B048-85BDC9FD1C3A}</a:tableStyleId>
+              </a:tblPr>
+              <a:tblGrid>
+                <a:gridCol w="1211580"/>
+                <a:gridCol w="1211580"/>
+                <a:gridCol w="1211580"/>
+                <a:gridCol w="1211580"/>
+              </a:tblGrid>
+              <a:tr h="548640">
+                <a:tc>
+                  <a:txBody>
+                    <a:bodyPr/>
+                    <a:lstStyle/>
+                    <a:p>
+                      <a:pPr>
+                        <a:defRPr sz="1100" b="1">
+                          <a:solidFill>
+                            <a:srgbClr val="38BDF8"/>
+                          </a:solidFill>
+                          <a:latin typeface="Segoe UI"/>
+                        </a:defRPr>
+                      </a:pPr>
+                      <a:r>
+                        <a:t>Dataset</a:t>
+                      </a:r>
+                    </a:p>
+                  </a:txBody>
+                  <a:tcPr>
+                    <a:solidFill>
+                      <a:srgbClr val="0F172A"/>
+                    </a:solidFill>
+                  </a:tcPr>
+                </a:tc>
+                <a:tc>
+                  <a:txBody>
+                    <a:bodyPr/>
+                    <a:lstStyle/>
+                    <a:p>
+                      <a:pPr>
+                        <a:defRPr sz="1100" b="1">
+                          <a:solidFill>
+                            <a:srgbClr val="38BDF8"/>
+                          </a:solidFill>
+                          <a:latin typeface="Segoe UI"/>
+                        </a:defRPr>
+                      </a:pPr>
+                      <a:r>
+                        <a:t>R²</a:t>
+                      </a:r>
+                    </a:p>
+                  </a:txBody>
+                  <a:tcPr>
+                    <a:solidFill>
+                      <a:srgbClr val="0F172A"/>
+                    </a:solidFill>
+                  </a:tcPr>
+                </a:tc>
+                <a:tc>
+                  <a:txBody>
+                    <a:bodyPr/>
+                    <a:lstStyle/>
+                    <a:p>
+                      <a:pPr>
+                        <a:defRPr sz="1100" b="1">
+                          <a:solidFill>
+                            <a:srgbClr val="38BDF8"/>
+                          </a:solidFill>
+                          <a:latin typeface="Segoe UI"/>
+                        </a:defRPr>
+                      </a:pPr>
+                      <a:r>
+                        <a:t>MAE ($)</a:t>
+                      </a:r>
+                    </a:p>
+                  </a:txBody>
+                  <a:tcPr>
+                    <a:solidFill>
+                      <a:srgbClr val="0F172A"/>
+                    </a:solidFill>
+                  </a:tcPr>
+                </a:tc>
+                <a:tc>
+                  <a:txBody>
+                    <a:bodyPr/>
+                    <a:lstStyle/>
+                    <a:p>
+                      <a:pPr>
+                        <a:defRPr sz="1100" b="1">
+                          <a:solidFill>
+                            <a:srgbClr val="38BDF8"/>
+                          </a:solidFill>
+                          <a:latin typeface="Segoe UI"/>
+                        </a:defRPr>
+                      </a:pPr>
+                      <a:r>
+                        <a:t>RMSE ($)</a:t>
+                      </a:r>
+                    </a:p>
+                  </a:txBody>
+                  <a:tcPr>
+                    <a:solidFill>
+                      <a:srgbClr val="0F172A"/>
+                    </a:solidFill>
+                  </a:tcPr>
+                </a:tc>
+              </a:tr>
+              <a:tr h="548640">
+                <a:tc>
+                  <a:txBody>
+                    <a:bodyPr/>
+                    <a:lstStyle/>
+                    <a:p>
+                      <a:pPr>
+                        <a:defRPr sz="1000" b="0">
+                          <a:solidFill>
+                            <a:srgbClr val="F8FAFC"/>
+                          </a:solidFill>
+                          <a:latin typeface="Segoe UI"/>
+                        </a:defRPr>
+                      </a:pPr>
+                      <a:r>
+                        <a:t>Train (Entraînement)</a:t>
+                      </a:r>
+                    </a:p>
+                  </a:txBody>
+                  <a:tcPr>
+                    <a:solidFill>
+                      <a:srgbClr val="18202F"/>
+                    </a:solidFill>
+                  </a:tcPr>
+                </a:tc>
+                <a:tc>
+                  <a:txBody>
+                    <a:bodyPr/>
+                    <a:lstStyle/>
+                    <a:p>
+                      <a:pPr>
+                        <a:defRPr sz="1000" b="1">
+                          <a:solidFill>
+                            <a:srgbClr val="F8FAFC"/>
+                          </a:solidFill>
+                          <a:latin typeface="Segoe UI"/>
+                        </a:defRPr>
+                      </a:pPr>
+                      <a:r>
+                        <a:t>0.98</a:t>
+                      </a:r>
+                    </a:p>
+                  </a:txBody>
+                  <a:tcPr>
+                    <a:solidFill>
+                      <a:srgbClr val="18202F"/>
+                    </a:solidFill>
+                  </a:tcPr>
+                </a:tc>
+                <a:tc>
+                  <a:txBody>
+                    <a:bodyPr/>
+                    <a:lstStyle/>
+                    <a:p>
+                      <a:pPr>
+                        <a:defRPr sz="1000" b="0">
+                          <a:solidFill>
+                            <a:srgbClr val="F8FAFC"/>
+                          </a:solidFill>
+                          <a:latin typeface="Segoe UI"/>
+                        </a:defRPr>
+                      </a:pPr>
+                      <a:r>
+                        <a:t>77 220 $</a:t>
+                      </a:r>
+                    </a:p>
+                  </a:txBody>
+                  <a:tcPr>
+                    <a:solidFill>
+                      <a:srgbClr val="18202F"/>
+                    </a:solidFill>
+                  </a:tcPr>
+                </a:tc>
+                <a:tc>
+                  <a:txBody>
+                    <a:bodyPr/>
+                    <a:lstStyle/>
+                    <a:p>
+                      <a:pPr>
+                        <a:defRPr sz="1000" b="0">
+                          <a:solidFill>
+                            <a:srgbClr val="F8FAFC"/>
+                          </a:solidFill>
+                          <a:latin typeface="Segoe UI"/>
+                        </a:defRPr>
+                      </a:pPr>
+                      <a:r>
+                        <a:t>100 071 $</a:t>
+                      </a:r>
+                    </a:p>
+                  </a:txBody>
+                  <a:tcPr>
+                    <a:solidFill>
+                      <a:srgbClr val="18202F"/>
+                    </a:solidFill>
+                  </a:tcPr>
+                </a:tc>
+              </a:tr>
+              <a:tr h="548640">
+                <a:tc>
+                  <a:txBody>
+                    <a:bodyPr/>
+                    <a:lstStyle/>
+                    <a:p>
+                      <a:pPr>
+                        <a:defRPr sz="1000" b="0">
+                          <a:solidFill>
+                            <a:srgbClr val="F8FAFC"/>
+                          </a:solidFill>
+                          <a:latin typeface="Segoe UI"/>
+                        </a:defRPr>
+                      </a:pPr>
+                      <a:r>
+                        <a:t>Test (Validation)</a:t>
+                      </a:r>
+                    </a:p>
+                  </a:txBody>
+                  <a:tcPr>
+                    <a:solidFill>
+                      <a:srgbClr val="1E293B"/>
+                    </a:solidFill>
+                  </a:tcPr>
+                </a:tc>
+                <a:tc>
+                  <a:txBody>
+                    <a:bodyPr/>
+                    <a:lstStyle/>
+                    <a:p>
+                      <a:pPr>
+                        <a:defRPr sz="1000" b="1">
+                          <a:solidFill>
+                            <a:srgbClr val="F8FAFC"/>
+                          </a:solidFill>
+                          <a:latin typeface="Segoe UI"/>
+                        </a:defRPr>
+                      </a:pPr>
+                      <a:r>
+                        <a:t>0.90</a:t>
+                      </a:r>
+                    </a:p>
+                  </a:txBody>
+                  <a:tcPr>
+                    <a:solidFill>
+                      <a:srgbClr val="1E293B"/>
+                    </a:solidFill>
+                  </a:tcPr>
+                </a:tc>
+                <a:tc>
+                  <a:txBody>
+                    <a:bodyPr/>
+                    <a:lstStyle/>
+                    <a:p>
+                      <a:pPr>
+                        <a:defRPr sz="1000" b="0">
+                          <a:solidFill>
+                            <a:srgbClr val="F8FAFC"/>
+                          </a:solidFill>
+                          <a:latin typeface="Segoe UI"/>
+                        </a:defRPr>
+                      </a:pPr>
+                      <a:r>
+                        <a:t>145 803 $</a:t>
+                      </a:r>
+                    </a:p>
+                  </a:txBody>
+                  <a:tcPr>
+                    <a:solidFill>
+                      <a:srgbClr val="1E293B"/>
+                    </a:solidFill>
+                  </a:tcPr>
+                </a:tc>
+                <a:tc>
+                  <a:txBody>
+                    <a:bodyPr/>
+                    <a:lstStyle/>
+                    <a:p>
+                      <a:pPr>
+                        <a:defRPr sz="1000" b="0">
+                          <a:solidFill>
+                            <a:srgbClr val="F8FAFC"/>
+                          </a:solidFill>
+                          <a:latin typeface="Segoe UI"/>
+                        </a:defRPr>
+                      </a:pPr>
+                      <a:r>
+                        <a:t>188 478 $</a:t>
+                      </a:r>
+                    </a:p>
+                  </a:txBody>
+                  <a:tcPr>
+                    <a:solidFill>
+                      <a:srgbClr val="1E293B"/>
+                    </a:solidFill>
+                  </a:tcPr>
+                </a:tc>
+              </a:tr>
+            </a:tbl>
+          </a:graphicData>
+        </a:graphic>
+      </p:graphicFrame>
+      <p:sp>
+        <p:nvSpPr>
+          <p:cNvPr id="10" name="TextBox 9"/>
+          <p:cNvSpPr txBox="1"/>
+          <p:nvPr/>
+        </p:nvSpPr>
+        <p:spPr>
+          <a:xfrm>
+            <a:off x="914400" y="3840480"/>
+            <a:ext cx="4846320" cy="2103120"/>
           </a:xfrm>
           <a:prstGeom prst="rect">
             <a:avLst/>
@@ -5376,43 +8715,94 @@
           <a:lstStyle/>
           <a:p>
             <a:pPr>
-              <a:defRPr sz="1300" b="1">
-                <a:solidFill>
-                  <a:srgbClr val="38BDF8"/>
-                </a:solidFill>
-              </a:defRPr>
-            </a:pPr>
-            <a:r>
-              <a:t>PLANIFICATION SUPPLY CHAIN</a:t>
-            </a:r>
-          </a:p>
-          <a:p>
-            <a:pPr>
-              <a:spcBef>
-                <a:spcPts val="400"/>
-              </a:spcBef>
-              <a:defRPr sz="1100">
+              <a:defRPr sz="1050" b="1">
+                <a:solidFill>
+                  <a:srgbClr val="FACC15"/>
+                </a:solidFill>
+                <a:latin typeface="Segoe UI"/>
+              </a:defRPr>
+            </a:pPr>
+            <a:r>
+              <a:t>Qualité d'Ajustement Élevée :</a:t>
+            </a:r>
+          </a:p>
+          <a:p>
+            <a:pPr>
+              <a:defRPr sz="950">
                 <a:solidFill>
                   <a:srgbClr val="F8FAFC"/>
                 </a:solidFill>
-              </a:defRPr>
-            </a:pPr>
-            <a:r>
-              <a:t>Ajuster les cadences de réassort 3 semaines en amont des fériés majeurs identifiés comme multiplicateurs de chiffre d'affaires.</a:t>
-            </a:r>
-          </a:p>
-        </p:txBody>
-      </p:sp>
-      <p:sp>
-        <p:nvSpPr>
-          <p:cNvPr id="8" name="Rounded Rectangle 7"/>
+                <a:latin typeface="Segoe UI"/>
+              </a:defRPr>
+            </a:pPr>
+            <a:r>
+              <a:t>Un R² de 0.90 sur le test indique que 90% de la variance des ventes est expliquée par les variables du modèle.</a:t>
+            </a:r>
+          </a:p>
+          <a:p>
+            <a:pPr>
+              <a:defRPr sz="1050" b="1">
+                <a:solidFill>
+                  <a:srgbClr val="FACC15"/>
+                </a:solidFill>
+                <a:latin typeface="Segoe UI"/>
+              </a:defRPr>
+            </a:pPr>
+            <a:r>
+              <a:t>Écart Train / Test (Overfitting modéré) :</a:t>
+            </a:r>
+          </a:p>
+          <a:p>
+            <a:pPr>
+              <a:defRPr sz="950">
+                <a:solidFill>
+                  <a:srgbClr val="F8FAFC"/>
+                </a:solidFill>
+                <a:latin typeface="Segoe UI"/>
+              </a:defRPr>
+            </a:pPr>
+            <a:r>
+              <a:t>L'erreur MAE passe de 77k$ sur le train à 145k$ sur le test. Ce gap justifie pleinement la mise en place d'une régularisation (Ridge/Lasso).</a:t>
+            </a:r>
+          </a:p>
+          <a:p>
+            <a:pPr>
+              <a:defRPr sz="1050" b="1">
+                <a:solidFill>
+                  <a:srgbClr val="FACC15"/>
+                </a:solidFill>
+                <a:latin typeface="Segoe UI"/>
+              </a:defRPr>
+            </a:pPr>
+            <a:r>
+              <a:t>Erreur Relative :</a:t>
+            </a:r>
+          </a:p>
+          <a:p>
+            <a:pPr>
+              <a:defRPr sz="950">
+                <a:solidFill>
+                  <a:srgbClr val="F8FAFC"/>
+                </a:solidFill>
+                <a:latin typeface="Segoe UI"/>
+              </a:defRPr>
+            </a:pPr>
+            <a:r>
+              <a:t>Avec une vente moyenne à 1.2M$, une MAE de 145k$ représente une marge d'erreur relative inférieure à 12%.</a:t>
+            </a:r>
+          </a:p>
+        </p:txBody>
+      </p:sp>
+      <p:sp>
+        <p:nvSpPr>
+          <p:cNvPr id="11" name="Rounded Rectangle 10"/>
           <p:cNvSpPr/>
           <p:nvPr/>
         </p:nvSpPr>
         <p:spPr>
           <a:xfrm>
-            <a:off x="731520" y="3108960"/>
-            <a:ext cx="10698480" cy="1325880"/>
+            <a:off x="6217920" y="1371600"/>
+            <a:ext cx="5242255" cy="4754880"/>
           </a:xfrm>
           <a:prstGeom prst="roundRect">
             <a:avLst/>
@@ -5420,7 +8810,7 @@
           <a:solidFill>
             <a:srgbClr val="1E293B"/>
           </a:solidFill>
-          <a:ln w="12700">
+          <a:ln w="19050">
             <a:solidFill>
               <a:srgbClr val="334155"/>
             </a:solidFill>
@@ -5450,14 +8840,50 @@
       </p:sp>
       <p:sp>
         <p:nvSpPr>
-          <p:cNvPr id="9" name="TextBox 8"/>
+          <p:cNvPr id="12" name="TextBox 11"/>
           <p:cNvSpPr txBox="1"/>
           <p:nvPr/>
         </p:nvSpPr>
         <p:spPr>
           <a:xfrm>
-            <a:off x="914400" y="3182112"/>
-            <a:ext cx="10332720" cy="1179576"/>
+            <a:off x="6400800" y="1536192"/>
+            <a:ext cx="4876495" cy="365760"/>
+          </a:xfrm>
+          <a:prstGeom prst="rect">
+            <a:avLst/>
+          </a:prstGeom>
+          <a:noFill/>
+        </p:spPr>
+        <p:txBody>
+          <a:bodyPr wrap="square" lIns="0" tIns="0" rIns="0" bIns="0">
+            <a:spAutoFit/>
+          </a:bodyPr>
+          <a:lstStyle/>
+          <a:p>
+            <a:pPr>
+              <a:defRPr sz="1200" b="1">
+                <a:solidFill>
+                  <a:srgbClr val="38BDF8"/>
+                </a:solidFill>
+                <a:latin typeface="Segoe UI"/>
+              </a:defRPr>
+            </a:pPr>
+            <a:r>
+              <a:t>ANALYSE DES RÉSIDUS &amp; LIMITES DU MODÈLE</a:t>
+            </a:r>
+          </a:p>
+        </p:txBody>
+      </p:sp>
+      <p:sp>
+        <p:nvSpPr>
+          <p:cNvPr id="13" name="TextBox 12"/>
+          <p:cNvSpPr txBox="1"/>
+          <p:nvPr/>
+        </p:nvSpPr>
+        <p:spPr>
+          <a:xfrm>
+            <a:off x="6400800" y="1920240"/>
+            <a:ext cx="4846320" cy="3931920"/>
           </a:xfrm>
           <a:prstGeom prst="rect">
             <a:avLst/>
@@ -5471,54 +8897,147 @@
           <a:lstStyle/>
           <a:p>
             <a:pPr>
-              <a:defRPr sz="1300" b="1">
-                <a:solidFill>
-                  <a:srgbClr val="A855F7"/>
-                </a:solidFill>
-              </a:defRPr>
-            </a:pPr>
-            <a:r>
-              <a:t>GESTION DYNAMIQUE DES STOCKS</a:t>
-            </a:r>
-          </a:p>
-          <a:p>
-            <a:pPr>
-              <a:spcBef>
-                <a:spcPts val="400"/>
-              </a:spcBef>
-              <a:defRPr sz="1100">
+              <a:defRPr sz="1100" b="1">
+                <a:solidFill>
+                  <a:srgbClr val="38BDF8"/>
+                </a:solidFill>
+                <a:latin typeface="Segoe UI"/>
+              </a:defRPr>
+            </a:pPr>
+            <a:r>
+              <a:t>1. Linéarité Globale Vérifiée :</a:t>
+            </a:r>
+          </a:p>
+          <a:p>
+            <a:pPr>
+              <a:defRPr sz="1000">
                 <a:solidFill>
                   <a:srgbClr val="F8FAFC"/>
                 </a:solidFill>
-              </a:defRPr>
-            </a:pPr>
-            <a:r>
-              <a:t>Adapter les allocations d'inventaire selon le profil macroéconomique et l'historique de chaque magasin.</a:t>
-            </a:r>
-          </a:p>
-        </p:txBody>
-      </p:sp>
-      <p:sp>
-        <p:nvSpPr>
-          <p:cNvPr id="10" name="Rounded Rectangle 9"/>
+                <a:latin typeface="Segoe UI"/>
+              </a:defRPr>
+            </a:pPr>
+            <a:r>
+              <a:t>Le nuage de points Ventes Réelles vs Ventes Prédites s'aligne fidèlement le long de la diagonale y = x.</a:t>
+            </a:r>
+          </a:p>
+          <a:p>
+            <a:pPr>
+              <a:defRPr sz="1100" b="1">
+                <a:solidFill>
+                  <a:srgbClr val="38BDF8"/>
+                </a:solidFill>
+                <a:latin typeface="Segoe UI"/>
+              </a:defRPr>
+            </a:pPr>
+            <a:r>
+              <a:t>2. Dispersion sur les Pics de Fin d'Année :</a:t>
+            </a:r>
+          </a:p>
+          <a:p>
+            <a:pPr>
+              <a:defRPr sz="1000">
+                <a:solidFill>
+                  <a:srgbClr val="F8FAFC"/>
+                </a:solidFill>
+                <a:latin typeface="Segoe UI"/>
+              </a:defRPr>
+            </a:pPr>
+            <a:r>
+              <a:t>Les résidus les plus forts (&gt; 250k$) surviennent lors de la semaine du Black Friday : la dynamique promotionnelle dépasse les simples effets linéaires.</a:t>
+            </a:r>
+          </a:p>
+          <a:p>
+            <a:pPr>
+              <a:defRPr sz="1100" b="1">
+                <a:solidFill>
+                  <a:srgbClr val="38BDF8"/>
+                </a:solidFill>
+                <a:latin typeface="Segoe UI"/>
+              </a:defRPr>
+            </a:pPr>
+            <a:r>
+              <a:t>3. Multicolinéarité Résiduelle :</a:t>
+            </a:r>
+          </a:p>
+          <a:p>
+            <a:pPr>
+              <a:defRPr sz="1000">
+                <a:solidFill>
+                  <a:srgbClr val="F8FAFC"/>
+                </a:solidFill>
+                <a:latin typeface="Segoe UI"/>
+              </a:defRPr>
+            </a:pPr>
+            <a:r>
+              <a:t>Certains magasins partagent des tendances macroéconomiques similaires (ex: même région, même CPI), ce qui gonfle artificiellement certains coefficients ordinaires.</a:t>
+            </a:r>
+          </a:p>
+          <a:p>
+            <a:pPr>
+              <a:defRPr sz="1100" b="1">
+                <a:solidFill>
+                  <a:srgbClr val="38BDF8"/>
+                </a:solidFill>
+                <a:latin typeface="Segoe UI"/>
+              </a:defRPr>
+            </a:pPr>
+            <a:r>
+              <a:t>4. Nécessité d'une Pénalisation :</a:t>
+            </a:r>
+          </a:p>
+          <a:p>
+            <a:pPr>
+              <a:defRPr sz="1000">
+                <a:solidFill>
+                  <a:srgbClr val="F8FAFC"/>
+                </a:solidFill>
+                <a:latin typeface="Segoe UI"/>
+              </a:defRPr>
+            </a:pPr>
+            <a:r>
+              <a:t>L'étape suivante consiste à contraindre la norme des poids via Ridge (L2) et Lasso (L1) pour stabiliser les prédictions.</a:t>
+            </a:r>
+          </a:p>
+        </p:txBody>
+      </p:sp>
+    </p:spTree>
+  </p:cSld>
+  <p:clrMapOvr>
+    <a:masterClrMapping/>
+  </p:clrMapOvr>
+</p:sld>
+</file>
+
+<file path=ppt/slides/slide7.xml><?xml version="1.0" encoding="utf-8"?>
+<p:sld xmlns:a="http://schemas.openxmlformats.org/drawingml/2006/main" xmlns:p="http://schemas.openxmlformats.org/presentationml/2006/main" xmlns:r="http://schemas.openxmlformats.org/officeDocument/2006/relationships">
+  <p:cSld>
+    <p:spTree>
+      <p:nvGrpSpPr>
+        <p:cNvPr id="1" name=""/>
+        <p:cNvGrpSpPr/>
+        <p:nvPr/>
+      </p:nvGrpSpPr>
+      <p:grpSpPr/>
+      <p:sp>
+        <p:nvSpPr>
+          <p:cNvPr id="2" name="Rectangle 1"/>
           <p:cNvSpPr/>
           <p:nvPr/>
         </p:nvSpPr>
         <p:spPr>
           <a:xfrm>
-            <a:off x="731520" y="4572000"/>
-            <a:ext cx="10698480" cy="1325880"/>
-          </a:xfrm>
-          <a:prstGeom prst="roundRect">
+            <a:off x="0" y="0"/>
+            <a:ext cx="12191695" cy="6858000"/>
+          </a:xfrm>
+          <a:prstGeom prst="rect">
             <a:avLst/>
           </a:prstGeom>
           <a:solidFill>
-            <a:srgbClr val="1E293B"/>
+            <a:srgbClr val="0B1120"/>
           </a:solidFill>
-          <a:ln w="12700">
-            <a:solidFill>
-              <a:srgbClr val="334155"/>
-            </a:solidFill>
+          <a:ln>
+            <a:noFill/>
           </a:ln>
         </p:spPr>
         <p:style>
@@ -5545,14 +9064,1013 @@
       </p:sp>
       <p:sp>
         <p:nvSpPr>
+          <p:cNvPr id="3" name="TextBox 2"/>
+          <p:cNvSpPr txBox="1"/>
+          <p:nvPr/>
+        </p:nvSpPr>
+        <p:spPr>
+          <a:xfrm>
+            <a:off x="731520" y="365760"/>
+            <a:ext cx="7315200" cy="320040"/>
+          </a:xfrm>
+          <a:prstGeom prst="rect">
+            <a:avLst/>
+          </a:prstGeom>
+          <a:noFill/>
+        </p:spPr>
+        <p:txBody>
+          <a:bodyPr wrap="square" lIns="0" tIns="0" rIns="0" bIns="0">
+            <a:spAutoFit/>
+          </a:bodyPr>
+          <a:lstStyle/>
+          <a:p>
+            <a:pPr>
+              <a:defRPr sz="1100" b="1">
+                <a:solidFill>
+                  <a:srgbClr val="38BDF8"/>
+                </a:solidFill>
+                <a:latin typeface="Segoe UI"/>
+              </a:defRPr>
+            </a:pPr>
+            <a:r>
+              <a:t>ÉTAPE 06 | INTERPRÉTABILITÉ</a:t>
+            </a:r>
+          </a:p>
+        </p:txBody>
+      </p:sp>
+      <p:sp>
+        <p:nvSpPr>
+          <p:cNvPr id="4" name="TextBox 3"/>
+          <p:cNvSpPr txBox="1"/>
+          <p:nvPr/>
+        </p:nvSpPr>
+        <p:spPr>
+          <a:xfrm>
+            <a:off x="731520" y="685800"/>
+            <a:ext cx="9601200" cy="502920"/>
+          </a:xfrm>
+          <a:prstGeom prst="rect">
+            <a:avLst/>
+          </a:prstGeom>
+          <a:noFill/>
+        </p:spPr>
+        <p:txBody>
+          <a:bodyPr wrap="square" lIns="0" tIns="0" rIns="0" bIns="0">
+            <a:spAutoFit/>
+          </a:bodyPr>
+          <a:lstStyle/>
+          <a:p>
+            <a:pPr>
+              <a:defRPr sz="2200" b="1">
+                <a:solidFill>
+                  <a:srgbClr val="F8FAFC"/>
+                </a:solidFill>
+                <a:latin typeface="Segoe UI"/>
+              </a:defRPr>
+            </a:pPr>
+            <a:r>
+              <a:t>Analyse des Coefficients du Modèle (.coef_) &amp; Drivers de Vente</a:t>
+            </a:r>
+          </a:p>
+        </p:txBody>
+      </p:sp>
+      <p:sp>
+        <p:nvSpPr>
+          <p:cNvPr id="5" name="TextBox 4"/>
+          <p:cNvSpPr txBox="1"/>
+          <p:nvPr/>
+        </p:nvSpPr>
+        <p:spPr>
+          <a:xfrm>
+            <a:off x="10362895" y="411480"/>
+            <a:ext cx="1097280" cy="365760"/>
+          </a:xfrm>
+          <a:prstGeom prst="rect">
+            <a:avLst/>
+          </a:prstGeom>
+          <a:noFill/>
+        </p:spPr>
+        <p:txBody>
+          <a:bodyPr wrap="square" lIns="0" tIns="0" rIns="0" bIns="0">
+            <a:spAutoFit/>
+          </a:bodyPr>
+          <a:lstStyle/>
+          <a:p>
+            <a:pPr algn="r">
+              <a:defRPr sz="1200" b="1">
+                <a:solidFill>
+                  <a:srgbClr val="94A3B8"/>
+                </a:solidFill>
+                <a:latin typeface="Segoe UI"/>
+              </a:defRPr>
+            </a:pPr>
+            <a:r>
+              <a:t>7 / 10</a:t>
+            </a:r>
+          </a:p>
+        </p:txBody>
+      </p:sp>
+      <p:sp>
+        <p:nvSpPr>
+          <p:cNvPr id="6" name="TextBox 5"/>
+          <p:cNvSpPr txBox="1"/>
+          <p:nvPr/>
+        </p:nvSpPr>
+        <p:spPr>
+          <a:xfrm>
+            <a:off x="731520" y="6400800"/>
+            <a:ext cx="10728655" cy="274320"/>
+          </a:xfrm>
+          <a:prstGeom prst="rect">
+            <a:avLst/>
+          </a:prstGeom>
+          <a:noFill/>
+        </p:spPr>
+        <p:txBody>
+          <a:bodyPr wrap="square" lIns="0" tIns="0" rIns="0" bIns="0">
+            <a:spAutoFit/>
+          </a:bodyPr>
+          <a:lstStyle/>
+          <a:p>
+            <a:pPr>
+              <a:defRPr sz="1000">
+                <a:solidFill>
+                  <a:srgbClr val="64748B"/>
+                </a:solidFill>
+                <a:latin typeface="Segoe UI"/>
+              </a:defRPr>
+            </a:pPr>
+            <a:r>
+              <a:t>Christopher GILLERON  |  Walmart Store Sales Prediction (Machine Learning Supervisé)  |  Certification CDSD Bloc 3</a:t>
+            </a:r>
+          </a:p>
+        </p:txBody>
+      </p:sp>
+      <p:sp>
+        <p:nvSpPr>
+          <p:cNvPr id="7" name="Rounded Rectangle 6"/>
+          <p:cNvSpPr/>
+          <p:nvPr/>
+        </p:nvSpPr>
+        <p:spPr>
+          <a:xfrm>
+            <a:off x="731520" y="1371600"/>
+            <a:ext cx="5212080" cy="4754880"/>
+          </a:xfrm>
+          <a:prstGeom prst="roundRect">
+            <a:avLst/>
+          </a:prstGeom>
+          <a:solidFill>
+            <a:srgbClr val="1E293B"/>
+          </a:solidFill>
+          <a:ln w="19050">
+            <a:solidFill>
+              <a:srgbClr val="334155"/>
+            </a:solidFill>
+          </a:ln>
+        </p:spPr>
+        <p:style>
+          <a:lnRef idx="1">
+            <a:schemeClr val="accent1"/>
+          </a:lnRef>
+          <a:fillRef idx="3">
+            <a:schemeClr val="accent1"/>
+          </a:fillRef>
+          <a:effectRef idx="2">
+            <a:schemeClr val="accent1"/>
+          </a:effectRef>
+          <a:fontRef idx="minor">
+            <a:schemeClr val="lt1"/>
+          </a:fontRef>
+        </p:style>
+        <p:txBody>
+          <a:bodyPr rtlCol="0" anchor="ctr"/>
+          <a:lstStyle/>
+          <a:p>
+            <a:pPr algn="ctr"/>
+          </a:p>
+        </p:txBody>
+      </p:sp>
+      <p:sp>
+        <p:nvSpPr>
+          <p:cNvPr id="8" name="TextBox 7"/>
+          <p:cNvSpPr txBox="1"/>
+          <p:nvPr/>
+        </p:nvSpPr>
+        <p:spPr>
+          <a:xfrm>
+            <a:off x="914400" y="1536192"/>
+            <a:ext cx="4846320" cy="365760"/>
+          </a:xfrm>
+          <a:prstGeom prst="rect">
+            <a:avLst/>
+          </a:prstGeom>
+          <a:noFill/>
+        </p:spPr>
+        <p:txBody>
+          <a:bodyPr wrap="square" lIns="0" tIns="0" rIns="0" bIns="0">
+            <a:spAutoFit/>
+          </a:bodyPr>
+          <a:lstStyle/>
+          <a:p>
+            <a:pPr>
+              <a:defRPr sz="1200" b="1">
+                <a:solidFill>
+                  <a:srgbClr val="38BDF8"/>
+                </a:solidFill>
+                <a:latin typeface="Segoe UI"/>
+              </a:defRPr>
+            </a:pPr>
+            <a:r>
+              <a:t>HIÉRARCHIE DES COEFFICIENTS MAJEURS (SCIKIT-LEARN)</a:t>
+            </a:r>
+          </a:p>
+        </p:txBody>
+      </p:sp>
+      <p:graphicFrame>
+        <p:nvGraphicFramePr>
+          <p:cNvPr id="9" name="Table 8"/>
+          <p:cNvGraphicFramePr>
+            <a:graphicFrameLocks noGrp="1"/>
+          </p:cNvGraphicFramePr>
+          <p:nvPr/>
+        </p:nvGraphicFramePr>
+        <p:xfrm>
+          <a:off x="914400" y="1920240"/>
+          <a:ext cx="4846320" cy="3931920"/>
+        </p:xfrm>
+        <a:graphic>
+          <a:graphicData uri="http://schemas.openxmlformats.org/drawingml/2006/table">
+            <a:tbl>
+              <a:tblPr firstRow="1" bandRow="1">
+                <a:tableStyleId>{5C22544A-7EE6-4342-B048-85BDC9FD1C3A}</a:tableStyleId>
+              </a:tblPr>
+              <a:tblGrid>
+                <a:gridCol w="1615440"/>
+                <a:gridCol w="1615440"/>
+                <a:gridCol w="1615440"/>
+              </a:tblGrid>
+              <a:tr h="436880">
+                <a:tc>
+                  <a:txBody>
+                    <a:bodyPr/>
+                    <a:lstStyle/>
+                    <a:p>
+                      <a:pPr>
+                        <a:defRPr sz="1050" b="1">
+                          <a:solidFill>
+                            <a:srgbClr val="38BDF8"/>
+                          </a:solidFill>
+                          <a:latin typeface="Segoe UI"/>
+                        </a:defRPr>
+                      </a:pPr>
+                      <a:r>
+                        <a:t>Variable / Feature</a:t>
+                      </a:r>
+                    </a:p>
+                  </a:txBody>
+                  <a:tcPr>
+                    <a:solidFill>
+                      <a:srgbClr val="0F172A"/>
+                    </a:solidFill>
+                  </a:tcPr>
+                </a:tc>
+                <a:tc>
+                  <a:txBody>
+                    <a:bodyPr/>
+                    <a:lstStyle/>
+                    <a:p>
+                      <a:pPr>
+                        <a:defRPr sz="1050" b="1">
+                          <a:solidFill>
+                            <a:srgbClr val="38BDF8"/>
+                          </a:solidFill>
+                          <a:latin typeface="Segoe UI"/>
+                        </a:defRPr>
+                      </a:pPr>
+                      <a:r>
+                        <a:t>Coefficient ($)</a:t>
+                      </a:r>
+                    </a:p>
+                  </a:txBody>
+                  <a:tcPr>
+                    <a:solidFill>
+                      <a:srgbClr val="0F172A"/>
+                    </a:solidFill>
+                  </a:tcPr>
+                </a:tc>
+                <a:tc>
+                  <a:txBody>
+                    <a:bodyPr/>
+                    <a:lstStyle/>
+                    <a:p>
+                      <a:pPr>
+                        <a:defRPr sz="1050" b="1">
+                          <a:solidFill>
+                            <a:srgbClr val="38BDF8"/>
+                          </a:solidFill>
+                          <a:latin typeface="Segoe UI"/>
+                        </a:defRPr>
+                      </a:pPr>
+                      <a:r>
+                        <a:t>Impact Ventes</a:t>
+                      </a:r>
+                    </a:p>
+                  </a:txBody>
+                  <a:tcPr>
+                    <a:solidFill>
+                      <a:srgbClr val="0F172A"/>
+                    </a:solidFill>
+                  </a:tcPr>
+                </a:tc>
+              </a:tr>
+              <a:tr h="436880">
+                <a:tc>
+                  <a:txBody>
+                    <a:bodyPr/>
+                    <a:lstStyle/>
+                    <a:p>
+                      <a:pPr>
+                        <a:defRPr sz="950" b="1">
+                          <a:solidFill>
+                            <a:srgbClr val="F8FAFC"/>
+                          </a:solidFill>
+                          <a:latin typeface="Segoe UI"/>
+                        </a:defRPr>
+                      </a:pPr>
+                      <a:r>
+                        <a:t>Store 5</a:t>
+                      </a:r>
+                    </a:p>
+                  </a:txBody>
+                  <a:tcPr>
+                    <a:solidFill>
+                      <a:srgbClr val="18202F"/>
+                    </a:solidFill>
+                  </a:tcPr>
+                </a:tc>
+                <a:tc>
+                  <a:txBody>
+                    <a:bodyPr/>
+                    <a:lstStyle/>
+                    <a:p>
+                      <a:pPr>
+                        <a:defRPr sz="950" b="0">
+                          <a:solidFill>
+                            <a:srgbClr val="F87171"/>
+                          </a:solidFill>
+                          <a:latin typeface="Segoe UI"/>
+                        </a:defRPr>
+                      </a:pPr>
+                      <a:r>
+                        <a:t>- 1 363 365 $</a:t>
+                      </a:r>
+                    </a:p>
+                  </a:txBody>
+                  <a:tcPr>
+                    <a:solidFill>
+                      <a:srgbClr val="18202F"/>
+                    </a:solidFill>
+                  </a:tcPr>
+                </a:tc>
+                <a:tc>
+                  <a:txBody>
+                    <a:bodyPr/>
+                    <a:lstStyle/>
+                    <a:p>
+                      <a:pPr>
+                        <a:defRPr sz="950" b="0">
+                          <a:solidFill>
+                            <a:srgbClr val="F8FAFC"/>
+                          </a:solidFill>
+                          <a:latin typeface="Segoe UI"/>
+                        </a:defRPr>
+                      </a:pPr>
+                      <a:r>
+                        <a:t>Pénalité maximale</a:t>
+                      </a:r>
+                    </a:p>
+                  </a:txBody>
+                  <a:tcPr>
+                    <a:solidFill>
+                      <a:srgbClr val="18202F"/>
+                    </a:solidFill>
+                  </a:tcPr>
+                </a:tc>
+              </a:tr>
+              <a:tr h="436880">
+                <a:tc>
+                  <a:txBody>
+                    <a:bodyPr/>
+                    <a:lstStyle/>
+                    <a:p>
+                      <a:pPr>
+                        <a:defRPr sz="950" b="1">
+                          <a:solidFill>
+                            <a:srgbClr val="F8FAFC"/>
+                          </a:solidFill>
+                          <a:latin typeface="Segoe UI"/>
+                        </a:defRPr>
+                      </a:pPr>
+                      <a:r>
+                        <a:t>Store 3</a:t>
+                      </a:r>
+                    </a:p>
+                  </a:txBody>
+                  <a:tcPr>
+                    <a:solidFill>
+                      <a:srgbClr val="1E293B"/>
+                    </a:solidFill>
+                  </a:tcPr>
+                </a:tc>
+                <a:tc>
+                  <a:txBody>
+                    <a:bodyPr/>
+                    <a:lstStyle/>
+                    <a:p>
+                      <a:pPr>
+                        <a:defRPr sz="950" b="0">
+                          <a:solidFill>
+                            <a:srgbClr val="F87171"/>
+                          </a:solidFill>
+                          <a:latin typeface="Segoe UI"/>
+                        </a:defRPr>
+                      </a:pPr>
+                      <a:r>
+                        <a:t>- 1 203 335 $</a:t>
+                      </a:r>
+                    </a:p>
+                  </a:txBody>
+                  <a:tcPr>
+                    <a:solidFill>
+                      <a:srgbClr val="1E293B"/>
+                    </a:solidFill>
+                  </a:tcPr>
+                </a:tc>
+                <a:tc>
+                  <a:txBody>
+                    <a:bodyPr/>
+                    <a:lstStyle/>
+                    <a:p>
+                      <a:pPr>
+                        <a:defRPr sz="950" b="0">
+                          <a:solidFill>
+                            <a:srgbClr val="F8FAFC"/>
+                          </a:solidFill>
+                          <a:latin typeface="Segoe UI"/>
+                        </a:defRPr>
+                      </a:pPr>
+                      <a:r>
+                        <a:t>Très faible volume</a:t>
+                      </a:r>
+                    </a:p>
+                  </a:txBody>
+                  <a:tcPr>
+                    <a:solidFill>
+                      <a:srgbClr val="1E293B"/>
+                    </a:solidFill>
+                  </a:tcPr>
+                </a:tc>
+              </a:tr>
+              <a:tr h="436880">
+                <a:tc>
+                  <a:txBody>
+                    <a:bodyPr/>
+                    <a:lstStyle/>
+                    <a:p>
+                      <a:pPr>
+                        <a:defRPr sz="950" b="1">
+                          <a:solidFill>
+                            <a:srgbClr val="F8FAFC"/>
+                          </a:solidFill>
+                          <a:latin typeface="Segoe UI"/>
+                        </a:defRPr>
+                      </a:pPr>
+                      <a:r>
+                        <a:t>Store 16</a:t>
+                      </a:r>
+                    </a:p>
+                  </a:txBody>
+                  <a:tcPr>
+                    <a:solidFill>
+                      <a:srgbClr val="18202F"/>
+                    </a:solidFill>
+                  </a:tcPr>
+                </a:tc>
+                <a:tc>
+                  <a:txBody>
+                    <a:bodyPr/>
+                    <a:lstStyle/>
+                    <a:p>
+                      <a:pPr>
+                        <a:defRPr sz="950" b="0">
+                          <a:solidFill>
+                            <a:srgbClr val="F87171"/>
+                          </a:solidFill>
+                          <a:latin typeface="Segoe UI"/>
+                        </a:defRPr>
+                      </a:pPr>
+                      <a:r>
+                        <a:t>- 1 155 017 $</a:t>
+                      </a:r>
+                    </a:p>
+                  </a:txBody>
+                  <a:tcPr>
+                    <a:solidFill>
+                      <a:srgbClr val="18202F"/>
+                    </a:solidFill>
+                  </a:tcPr>
+                </a:tc>
+                <a:tc>
+                  <a:txBody>
+                    <a:bodyPr/>
+                    <a:lstStyle/>
+                    <a:p>
+                      <a:pPr>
+                        <a:defRPr sz="950" b="0">
+                          <a:solidFill>
+                            <a:srgbClr val="F8FAFC"/>
+                          </a:solidFill>
+                          <a:latin typeface="Segoe UI"/>
+                        </a:defRPr>
+                      </a:pPr>
+                      <a:r>
+                        <a:t>Sous-performance</a:t>
+                      </a:r>
+                    </a:p>
+                  </a:txBody>
+                  <a:tcPr>
+                    <a:solidFill>
+                      <a:srgbClr val="18202F"/>
+                    </a:solidFill>
+                  </a:tcPr>
+                </a:tc>
+              </a:tr>
+              <a:tr h="436880">
+                <a:tc>
+                  <a:txBody>
+                    <a:bodyPr/>
+                    <a:lstStyle/>
+                    <a:p>
+                      <a:pPr>
+                        <a:defRPr sz="950" b="1">
+                          <a:solidFill>
+                            <a:srgbClr val="F8FAFC"/>
+                          </a:solidFill>
+                          <a:latin typeface="Segoe UI"/>
+                        </a:defRPr>
+                      </a:pPr>
+                      <a:r>
+                        <a:t>Store 9</a:t>
+                      </a:r>
+                    </a:p>
+                  </a:txBody>
+                  <a:tcPr>
+                    <a:solidFill>
+                      <a:srgbClr val="1E293B"/>
+                    </a:solidFill>
+                  </a:tcPr>
+                </a:tc>
+                <a:tc>
+                  <a:txBody>
+                    <a:bodyPr/>
+                    <a:lstStyle/>
+                    <a:p>
+                      <a:pPr>
+                        <a:defRPr sz="950" b="0">
+                          <a:solidFill>
+                            <a:srgbClr val="F87171"/>
+                          </a:solidFill>
+                          <a:latin typeface="Segoe UI"/>
+                        </a:defRPr>
+                      </a:pPr>
+                      <a:r>
+                        <a:t>- 1 148 236 $</a:t>
+                      </a:r>
+                    </a:p>
+                  </a:txBody>
+                  <a:tcPr>
+                    <a:solidFill>
+                      <a:srgbClr val="1E293B"/>
+                    </a:solidFill>
+                  </a:tcPr>
+                </a:tc>
+                <a:tc>
+                  <a:txBody>
+                    <a:bodyPr/>
+                    <a:lstStyle/>
+                    <a:p>
+                      <a:pPr>
+                        <a:defRPr sz="950" b="0">
+                          <a:solidFill>
+                            <a:srgbClr val="F8FAFC"/>
+                          </a:solidFill>
+                          <a:latin typeface="Segoe UI"/>
+                        </a:defRPr>
+                      </a:pPr>
+                      <a:r>
+                        <a:t>Sous-performance</a:t>
+                      </a:r>
+                    </a:p>
+                  </a:txBody>
+                  <a:tcPr>
+                    <a:solidFill>
+                      <a:srgbClr val="1E293B"/>
+                    </a:solidFill>
+                  </a:tcPr>
+                </a:tc>
+              </a:tr>
+              <a:tr h="436880">
+                <a:tc>
+                  <a:txBody>
+                    <a:bodyPr/>
+                    <a:lstStyle/>
+                    <a:p>
+                      <a:pPr>
+                        <a:defRPr sz="950" b="1">
+                          <a:solidFill>
+                            <a:srgbClr val="F8FAFC"/>
+                          </a:solidFill>
+                          <a:latin typeface="Segoe UI"/>
+                        </a:defRPr>
+                      </a:pPr>
+                      <a:r>
+                        <a:t>Store 7</a:t>
+                      </a:r>
+                    </a:p>
+                  </a:txBody>
+                  <a:tcPr>
+                    <a:solidFill>
+                      <a:srgbClr val="18202F"/>
+                    </a:solidFill>
+                  </a:tcPr>
+                </a:tc>
+                <a:tc>
+                  <a:txBody>
+                    <a:bodyPr/>
+                    <a:lstStyle/>
+                    <a:p>
+                      <a:pPr>
+                        <a:defRPr sz="950" b="0">
+                          <a:solidFill>
+                            <a:srgbClr val="F87171"/>
+                          </a:solidFill>
+                          <a:latin typeface="Segoe UI"/>
+                        </a:defRPr>
+                      </a:pPr>
+                      <a:r>
+                        <a:t>- 969 082 $</a:t>
+                      </a:r>
+                    </a:p>
+                  </a:txBody>
+                  <a:tcPr>
+                    <a:solidFill>
+                      <a:srgbClr val="18202F"/>
+                    </a:solidFill>
+                  </a:tcPr>
+                </a:tc>
+                <a:tc>
+                  <a:txBody>
+                    <a:bodyPr/>
+                    <a:lstStyle/>
+                    <a:p>
+                      <a:pPr>
+                        <a:defRPr sz="950" b="0">
+                          <a:solidFill>
+                            <a:srgbClr val="F8FAFC"/>
+                          </a:solidFill>
+                          <a:latin typeface="Segoe UI"/>
+                        </a:defRPr>
+                      </a:pPr>
+                      <a:r>
+                        <a:t>Impact négatif fort</a:t>
+                      </a:r>
+                    </a:p>
+                  </a:txBody>
+                  <a:tcPr>
+                    <a:solidFill>
+                      <a:srgbClr val="18202F"/>
+                    </a:solidFill>
+                  </a:tcPr>
+                </a:tc>
+              </a:tr>
+              <a:tr h="436880">
+                <a:tc>
+                  <a:txBody>
+                    <a:bodyPr/>
+                    <a:lstStyle/>
+                    <a:p>
+                      <a:pPr>
+                        <a:defRPr sz="950" b="1">
+                          <a:solidFill>
+                            <a:srgbClr val="F8FAFC"/>
+                          </a:solidFill>
+                          <a:latin typeface="Segoe UI"/>
+                        </a:defRPr>
+                      </a:pPr>
+                      <a:r>
+                        <a:t>Unemployment</a:t>
+                      </a:r>
+                    </a:p>
+                  </a:txBody>
+                  <a:tcPr>
+                    <a:solidFill>
+                      <a:srgbClr val="1E293B"/>
+                    </a:solidFill>
+                  </a:tcPr>
+                </a:tc>
+                <a:tc>
+                  <a:txBody>
+                    <a:bodyPr/>
+                    <a:lstStyle/>
+                    <a:p>
+                      <a:pPr>
+                        <a:defRPr sz="950" b="0">
+                          <a:solidFill>
+                            <a:srgbClr val="F87171"/>
+                          </a:solidFill>
+                          <a:latin typeface="Segoe UI"/>
+                        </a:defRPr>
+                      </a:pPr>
+                      <a:r>
+                        <a:t>- 42 150 $ / std</a:t>
+                      </a:r>
+                    </a:p>
+                  </a:txBody>
+                  <a:tcPr>
+                    <a:solidFill>
+                      <a:srgbClr val="1E293B"/>
+                    </a:solidFill>
+                  </a:tcPr>
+                </a:tc>
+                <a:tc>
+                  <a:txBody>
+                    <a:bodyPr/>
+                    <a:lstStyle/>
+                    <a:p>
+                      <a:pPr>
+                        <a:defRPr sz="950" b="0">
+                          <a:solidFill>
+                            <a:srgbClr val="F8FAFC"/>
+                          </a:solidFill>
+                          <a:latin typeface="Segoe UI"/>
+                        </a:defRPr>
+                      </a:pPr>
+                      <a:r>
+                        <a:t>Sensibilité économique</a:t>
+                      </a:r>
+                    </a:p>
+                  </a:txBody>
+                  <a:tcPr>
+                    <a:solidFill>
+                      <a:srgbClr val="1E293B"/>
+                    </a:solidFill>
+                  </a:tcPr>
+                </a:tc>
+              </a:tr>
+              <a:tr h="436880">
+                <a:tc>
+                  <a:txBody>
+                    <a:bodyPr/>
+                    <a:lstStyle/>
+                    <a:p>
+                      <a:pPr>
+                        <a:defRPr sz="950" b="1">
+                          <a:solidFill>
+                            <a:srgbClr val="F8FAFC"/>
+                          </a:solidFill>
+                          <a:latin typeface="Segoe UI"/>
+                        </a:defRPr>
+                      </a:pPr>
+                      <a:r>
+                        <a:t>CPI (Inflation)</a:t>
+                      </a:r>
+                    </a:p>
+                  </a:txBody>
+                  <a:tcPr>
+                    <a:solidFill>
+                      <a:srgbClr val="18202F"/>
+                    </a:solidFill>
+                  </a:tcPr>
+                </a:tc>
+                <a:tc>
+                  <a:txBody>
+                    <a:bodyPr/>
+                    <a:lstStyle/>
+                    <a:p>
+                      <a:pPr>
+                        <a:defRPr sz="950" b="0">
+                          <a:solidFill>
+                            <a:srgbClr val="F87171"/>
+                          </a:solidFill>
+                          <a:latin typeface="Segoe UI"/>
+                        </a:defRPr>
+                      </a:pPr>
+                      <a:r>
+                        <a:t>- 28 640 $ / std</a:t>
+                      </a:r>
+                    </a:p>
+                  </a:txBody>
+                  <a:tcPr>
+                    <a:solidFill>
+                      <a:srgbClr val="18202F"/>
+                    </a:solidFill>
+                  </a:tcPr>
+                </a:tc>
+                <a:tc>
+                  <a:txBody>
+                    <a:bodyPr/>
+                    <a:lstStyle/>
+                    <a:p>
+                      <a:pPr>
+                        <a:defRPr sz="950" b="0">
+                          <a:solidFill>
+                            <a:srgbClr val="F8FAFC"/>
+                          </a:solidFill>
+                          <a:latin typeface="Segoe UI"/>
+                        </a:defRPr>
+                      </a:pPr>
+                      <a:r>
+                        <a:t>Arbitrage panier</a:t>
+                      </a:r>
+                    </a:p>
+                  </a:txBody>
+                  <a:tcPr>
+                    <a:solidFill>
+                      <a:srgbClr val="18202F"/>
+                    </a:solidFill>
+                  </a:tcPr>
+                </a:tc>
+              </a:tr>
+              <a:tr h="436880">
+                <a:tc>
+                  <a:txBody>
+                    <a:bodyPr/>
+                    <a:lstStyle/>
+                    <a:p>
+                      <a:pPr>
+                        <a:defRPr sz="950" b="1">
+                          <a:solidFill>
+                            <a:srgbClr val="F8FAFC"/>
+                          </a:solidFill>
+                          <a:latin typeface="Segoe UI"/>
+                        </a:defRPr>
+                      </a:pPr>
+                      <a:r>
+                        <a:t>Holiday_Flag</a:t>
+                      </a:r>
+                    </a:p>
+                  </a:txBody>
+                  <a:tcPr>
+                    <a:solidFill>
+                      <a:srgbClr val="1E293B"/>
+                    </a:solidFill>
+                  </a:tcPr>
+                </a:tc>
+                <a:tc>
+                  <a:txBody>
+                    <a:bodyPr/>
+                    <a:lstStyle/>
+                    <a:p>
+                      <a:pPr>
+                        <a:defRPr sz="950" b="0">
+                          <a:solidFill>
+                            <a:srgbClr val="10B981"/>
+                          </a:solidFill>
+                          <a:latin typeface="Segoe UI"/>
+                        </a:defRPr>
+                      </a:pPr>
+                      <a:r>
+                        <a:t>+ 48 900 $</a:t>
+                      </a:r>
+                    </a:p>
+                  </a:txBody>
+                  <a:tcPr>
+                    <a:solidFill>
+                      <a:srgbClr val="1E293B"/>
+                    </a:solidFill>
+                  </a:tcPr>
+                </a:tc>
+                <a:tc>
+                  <a:txBody>
+                    <a:bodyPr/>
+                    <a:lstStyle/>
+                    <a:p>
+                      <a:pPr>
+                        <a:defRPr sz="950" b="0">
+                          <a:solidFill>
+                            <a:srgbClr val="F8FAFC"/>
+                          </a:solidFill>
+                          <a:latin typeface="Segoe UI"/>
+                        </a:defRPr>
+                      </a:pPr>
+                      <a:r>
+                        <a:t>Boost semaines fériées</a:t>
+                      </a:r>
+                    </a:p>
+                  </a:txBody>
+                  <a:tcPr>
+                    <a:solidFill>
+                      <a:srgbClr val="1E293B"/>
+                    </a:solidFill>
+                  </a:tcPr>
+                </a:tc>
+              </a:tr>
+            </a:tbl>
+          </a:graphicData>
+        </a:graphic>
+      </p:graphicFrame>
+      <p:sp>
+        <p:nvSpPr>
+          <p:cNvPr id="10" name="Rounded Rectangle 9"/>
+          <p:cNvSpPr/>
+          <p:nvPr/>
+        </p:nvSpPr>
+        <p:spPr>
+          <a:xfrm>
+            <a:off x="6217920" y="1371600"/>
+            <a:ext cx="5242255" cy="4754880"/>
+          </a:xfrm>
+          <a:prstGeom prst="roundRect">
+            <a:avLst/>
+          </a:prstGeom>
+          <a:solidFill>
+            <a:srgbClr val="1E293B"/>
+          </a:solidFill>
+          <a:ln w="19050">
+            <a:solidFill>
+              <a:srgbClr val="334155"/>
+            </a:solidFill>
+          </a:ln>
+        </p:spPr>
+        <p:style>
+          <a:lnRef idx="1">
+            <a:schemeClr val="accent1"/>
+          </a:lnRef>
+          <a:fillRef idx="3">
+            <a:schemeClr val="accent1"/>
+          </a:fillRef>
+          <a:effectRef idx="2">
+            <a:schemeClr val="accent1"/>
+          </a:effectRef>
+          <a:fontRef idx="minor">
+            <a:schemeClr val="lt1"/>
+          </a:fontRef>
+        </p:style>
+        <p:txBody>
+          <a:bodyPr rtlCol="0" anchor="ctr"/>
+          <a:lstStyle/>
+          <a:p>
+            <a:pPr algn="ctr"/>
+          </a:p>
+        </p:txBody>
+      </p:sp>
+      <p:sp>
+        <p:nvSpPr>
           <p:cNvPr id="11" name="TextBox 10"/>
           <p:cNvSpPr txBox="1"/>
           <p:nvPr/>
         </p:nvSpPr>
         <p:spPr>
           <a:xfrm>
-            <a:off x="914400" y="4645152"/>
-            <a:ext cx="10332720" cy="1179576"/>
+            <a:off x="6400800" y="1536192"/>
+            <a:ext cx="4876495" cy="365760"/>
+          </a:xfrm>
+          <a:prstGeom prst="rect">
+            <a:avLst/>
+          </a:prstGeom>
+          <a:noFill/>
+        </p:spPr>
+        <p:txBody>
+          <a:bodyPr wrap="square" lIns="0" tIns="0" rIns="0" bIns="0">
+            <a:spAutoFit/>
+          </a:bodyPr>
+          <a:lstStyle/>
+          <a:p>
+            <a:pPr>
+              <a:defRPr sz="1200" b="1">
+                <a:solidFill>
+                  <a:srgbClr val="38BDF8"/>
+                </a:solidFill>
+                <a:latin typeface="Segoe UI"/>
+              </a:defRPr>
+            </a:pPr>
+            <a:r>
+              <a:t>ENSEIGNEMENTS MÉTIER DE L'INTERPRÉTABILITÉ</a:t>
+            </a:r>
+          </a:p>
+        </p:txBody>
+      </p:sp>
+      <p:sp>
+        <p:nvSpPr>
+          <p:cNvPr id="12" name="TextBox 11"/>
+          <p:cNvSpPr txBox="1"/>
+          <p:nvPr/>
+        </p:nvSpPr>
+        <p:spPr>
+          <a:xfrm>
+            <a:off x="6400800" y="1920240"/>
+            <a:ext cx="4846320" cy="3931920"/>
           </a:xfrm>
           <a:prstGeom prst="rect">
             <a:avLst/>
@@ -5566,29 +10084,600 @@
           <a:lstStyle/>
           <a:p>
             <a:pPr>
-              <a:defRPr sz="1300" b="1">
+              <a:defRPr sz="1100" b="1">
                 <a:solidFill>
                   <a:srgbClr val="38BDF8"/>
                 </a:solidFill>
-              </a:defRPr>
-            </a:pPr>
-            <a:r>
-              <a:t>MONITORING CONTINU</a:t>
-            </a:r>
-          </a:p>
-          <a:p>
-            <a:pPr>
-              <a:spcBef>
-                <a:spcPts val="400"/>
-              </a:spcBef>
-              <a:defRPr sz="1100">
+                <a:latin typeface="Segoe UI"/>
+              </a:defRPr>
+            </a:pPr>
+            <a:r>
+              <a:t>L'Emplacement Géographique Écrase Tout :</a:t>
+            </a:r>
+          </a:p>
+          <a:p>
+            <a:pPr>
+              <a:defRPr sz="1000">
                 <a:solidFill>
                   <a:srgbClr val="F8FAFC"/>
                 </a:solidFill>
-              </a:defRPr>
-            </a:pPr>
-            <a:r>
-              <a:t>Intégrer les nouvelles données hebdomadaires dans une boucle de ré-entraînement supervisée.</a:t>
+                <a:latin typeface="Segoe UI"/>
+              </a:defRPr>
+            </a:pPr>
+            <a:r>
+              <a:t>Les variables de magasins ('Store') génèrent des écarts structurels de plus de 1.3 million de dollars par semaine par rapport au magasin de référence. La surface et la zone de chalandise constituent le socle de prédiction.</a:t>
+            </a:r>
+          </a:p>
+          <a:p>
+            <a:pPr>
+              <a:defRPr sz="1100" b="1">
+                <a:solidFill>
+                  <a:srgbClr val="38BDF8"/>
+                </a:solidFill>
+                <a:latin typeface="Segoe UI"/>
+              </a:defRPr>
+            </a:pPr>
+            <a:r>
+              <a:t>Sensibilité au Pouvoir d'Achat :</a:t>
+            </a:r>
+          </a:p>
+          <a:p>
+            <a:pPr>
+              <a:defRPr sz="1000">
+                <a:solidFill>
+                  <a:srgbClr val="F8FAFC"/>
+                </a:solidFill>
+                <a:latin typeface="Segoe UI"/>
+              </a:defRPr>
+            </a:pPr>
+            <a:r>
+              <a:t>Chaque augmentation d'un écart-type du chômage dégrade les ventes de ~42 000 $ par semaine. Walmart doit adapter son mix de marques distributeur (Great Value) dans ces zones.</a:t>
+            </a:r>
+          </a:p>
+          <a:p>
+            <a:pPr>
+              <a:defRPr sz="1100" b="1">
+                <a:solidFill>
+                  <a:srgbClr val="38BDF8"/>
+                </a:solidFill>
+                <a:latin typeface="Segoe UI"/>
+              </a:defRPr>
+            </a:pPr>
+            <a:r>
+              <a:t>Effet Fêtes (+48.9k$) :</a:t>
+            </a:r>
+          </a:p>
+          <a:p>
+            <a:pPr>
+              <a:defRPr sz="1000">
+                <a:solidFill>
+                  <a:srgbClr val="F8FAFC"/>
+                </a:solidFill>
+                <a:latin typeface="Segoe UI"/>
+              </a:defRPr>
+            </a:pPr>
+            <a:r>
+              <a:t>Les semaines fériées génèrent un surcroît moyen systématique de près de 50 000 $ par magasin, confirmant la rentabilité des mises en avant saisonnières.</a:t>
+            </a:r>
+          </a:p>
+        </p:txBody>
+      </p:sp>
+    </p:spTree>
+  </p:cSld>
+  <p:clrMapOvr>
+    <a:masterClrMapping/>
+  </p:clrMapOvr>
+</p:sld>
+</file>
+
+<file path=ppt/slides/slide8.xml><?xml version="1.0" encoding="utf-8"?>
+<p:sld xmlns:a="http://schemas.openxmlformats.org/drawingml/2006/main" xmlns:p="http://schemas.openxmlformats.org/presentationml/2006/main" xmlns:r="http://schemas.openxmlformats.org/officeDocument/2006/relationships">
+  <p:cSld>
+    <p:spTree>
+      <p:nvGrpSpPr>
+        <p:cNvPr id="1" name=""/>
+        <p:cNvGrpSpPr/>
+        <p:nvPr/>
+      </p:nvGrpSpPr>
+      <p:grpSpPr/>
+      <p:sp>
+        <p:nvSpPr>
+          <p:cNvPr id="2" name="Rectangle 1"/>
+          <p:cNvSpPr/>
+          <p:nvPr/>
+        </p:nvSpPr>
+        <p:spPr>
+          <a:xfrm>
+            <a:off x="0" y="0"/>
+            <a:ext cx="12191695" cy="6858000"/>
+          </a:xfrm>
+          <a:prstGeom prst="rect">
+            <a:avLst/>
+          </a:prstGeom>
+          <a:solidFill>
+            <a:srgbClr val="0B1120"/>
+          </a:solidFill>
+          <a:ln>
+            <a:noFill/>
+          </a:ln>
+        </p:spPr>
+        <p:style>
+          <a:lnRef idx="1">
+            <a:schemeClr val="accent1"/>
+          </a:lnRef>
+          <a:fillRef idx="3">
+            <a:schemeClr val="accent1"/>
+          </a:fillRef>
+          <a:effectRef idx="2">
+            <a:schemeClr val="accent1"/>
+          </a:effectRef>
+          <a:fontRef idx="minor">
+            <a:schemeClr val="lt1"/>
+          </a:fontRef>
+        </p:style>
+        <p:txBody>
+          <a:bodyPr rtlCol="0" anchor="ctr"/>
+          <a:lstStyle/>
+          <a:p>
+            <a:pPr algn="ctr"/>
+          </a:p>
+        </p:txBody>
+      </p:sp>
+      <p:sp>
+        <p:nvSpPr>
+          <p:cNvPr id="3" name="TextBox 2"/>
+          <p:cNvSpPr txBox="1"/>
+          <p:nvPr/>
+        </p:nvSpPr>
+        <p:spPr>
+          <a:xfrm>
+            <a:off x="731520" y="365760"/>
+            <a:ext cx="7315200" cy="320040"/>
+          </a:xfrm>
+          <a:prstGeom prst="rect">
+            <a:avLst/>
+          </a:prstGeom>
+          <a:noFill/>
+        </p:spPr>
+        <p:txBody>
+          <a:bodyPr wrap="square" lIns="0" tIns="0" rIns="0" bIns="0">
+            <a:spAutoFit/>
+          </a:bodyPr>
+          <a:lstStyle/>
+          <a:p>
+            <a:pPr>
+              <a:defRPr sz="1100" b="1">
+                <a:solidFill>
+                  <a:srgbClr val="38BDF8"/>
+                </a:solidFill>
+                <a:latin typeface="Segoe UI"/>
+              </a:defRPr>
+            </a:pPr>
+            <a:r>
+              <a:t>ÉTAPE 07 | RÉGULARISATION L2</a:t>
+            </a:r>
+          </a:p>
+        </p:txBody>
+      </p:sp>
+      <p:sp>
+        <p:nvSpPr>
+          <p:cNvPr id="4" name="TextBox 3"/>
+          <p:cNvSpPr txBox="1"/>
+          <p:nvPr/>
+        </p:nvSpPr>
+        <p:spPr>
+          <a:xfrm>
+            <a:off x="731520" y="685800"/>
+            <a:ext cx="9601200" cy="502920"/>
+          </a:xfrm>
+          <a:prstGeom prst="rect">
+            <a:avLst/>
+          </a:prstGeom>
+          <a:noFill/>
+        </p:spPr>
+        <p:txBody>
+          <a:bodyPr wrap="square" lIns="0" tIns="0" rIns="0" bIns="0">
+            <a:spAutoFit/>
+          </a:bodyPr>
+          <a:lstStyle/>
+          <a:p>
+            <a:pPr>
+              <a:defRPr sz="2200" b="1">
+                <a:solidFill>
+                  <a:srgbClr val="F8FAFC"/>
+                </a:solidFill>
+                <a:latin typeface="Segoe UI"/>
+              </a:defRPr>
+            </a:pPr>
+            <a:r>
+              <a:t>Modèle Ridge &amp; Optimisation par Validation Croisée (GridSearchCV)</a:t>
+            </a:r>
+          </a:p>
+        </p:txBody>
+      </p:sp>
+      <p:sp>
+        <p:nvSpPr>
+          <p:cNvPr id="5" name="TextBox 4"/>
+          <p:cNvSpPr txBox="1"/>
+          <p:nvPr/>
+        </p:nvSpPr>
+        <p:spPr>
+          <a:xfrm>
+            <a:off x="10362895" y="411480"/>
+            <a:ext cx="1097280" cy="365760"/>
+          </a:xfrm>
+          <a:prstGeom prst="rect">
+            <a:avLst/>
+          </a:prstGeom>
+          <a:noFill/>
+        </p:spPr>
+        <p:txBody>
+          <a:bodyPr wrap="square" lIns="0" tIns="0" rIns="0" bIns="0">
+            <a:spAutoFit/>
+          </a:bodyPr>
+          <a:lstStyle/>
+          <a:p>
+            <a:pPr algn="r">
+              <a:defRPr sz="1200" b="1">
+                <a:solidFill>
+                  <a:srgbClr val="94A3B8"/>
+                </a:solidFill>
+                <a:latin typeface="Segoe UI"/>
+              </a:defRPr>
+            </a:pPr>
+            <a:r>
+              <a:t>8 / 10</a:t>
+            </a:r>
+          </a:p>
+        </p:txBody>
+      </p:sp>
+      <p:sp>
+        <p:nvSpPr>
+          <p:cNvPr id="6" name="TextBox 5"/>
+          <p:cNvSpPr txBox="1"/>
+          <p:nvPr/>
+        </p:nvSpPr>
+        <p:spPr>
+          <a:xfrm>
+            <a:off x="731520" y="6400800"/>
+            <a:ext cx="10728655" cy="274320"/>
+          </a:xfrm>
+          <a:prstGeom prst="rect">
+            <a:avLst/>
+          </a:prstGeom>
+          <a:noFill/>
+        </p:spPr>
+        <p:txBody>
+          <a:bodyPr wrap="square" lIns="0" tIns="0" rIns="0" bIns="0">
+            <a:spAutoFit/>
+          </a:bodyPr>
+          <a:lstStyle/>
+          <a:p>
+            <a:pPr>
+              <a:defRPr sz="1000">
+                <a:solidFill>
+                  <a:srgbClr val="64748B"/>
+                </a:solidFill>
+                <a:latin typeface="Segoe UI"/>
+              </a:defRPr>
+            </a:pPr>
+            <a:r>
+              <a:t>Christopher GILLERON  |  Walmart Store Sales Prediction (Machine Learning Supervisé)  |  Certification CDSD Bloc 3</a:t>
+            </a:r>
+          </a:p>
+        </p:txBody>
+      </p:sp>
+      <p:sp>
+        <p:nvSpPr>
+          <p:cNvPr id="7" name="Rounded Rectangle 6"/>
+          <p:cNvSpPr/>
+          <p:nvPr/>
+        </p:nvSpPr>
+        <p:spPr>
+          <a:xfrm>
+            <a:off x="731520" y="1371600"/>
+            <a:ext cx="5212080" cy="4754880"/>
+          </a:xfrm>
+          <a:prstGeom prst="roundRect">
+            <a:avLst/>
+          </a:prstGeom>
+          <a:solidFill>
+            <a:srgbClr val="1E293B"/>
+          </a:solidFill>
+          <a:ln w="19050">
+            <a:solidFill>
+              <a:srgbClr val="334155"/>
+            </a:solidFill>
+          </a:ln>
+        </p:spPr>
+        <p:style>
+          <a:lnRef idx="1">
+            <a:schemeClr val="accent1"/>
+          </a:lnRef>
+          <a:fillRef idx="3">
+            <a:schemeClr val="accent1"/>
+          </a:fillRef>
+          <a:effectRef idx="2">
+            <a:schemeClr val="accent1"/>
+          </a:effectRef>
+          <a:fontRef idx="minor">
+            <a:schemeClr val="lt1"/>
+          </a:fontRef>
+        </p:style>
+        <p:txBody>
+          <a:bodyPr rtlCol="0" anchor="ctr"/>
+          <a:lstStyle/>
+          <a:p>
+            <a:pPr algn="ctr"/>
+          </a:p>
+        </p:txBody>
+      </p:sp>
+      <p:sp>
+        <p:nvSpPr>
+          <p:cNvPr id="8" name="TextBox 7"/>
+          <p:cNvSpPr txBox="1"/>
+          <p:nvPr/>
+        </p:nvSpPr>
+        <p:spPr>
+          <a:xfrm>
+            <a:off x="914400" y="1536192"/>
+            <a:ext cx="4846320" cy="365760"/>
+          </a:xfrm>
+          <a:prstGeom prst="rect">
+            <a:avLst/>
+          </a:prstGeom>
+          <a:noFill/>
+        </p:spPr>
+        <p:txBody>
+          <a:bodyPr wrap="square" lIns="0" tIns="0" rIns="0" bIns="0">
+            <a:spAutoFit/>
+          </a:bodyPr>
+          <a:lstStyle/>
+          <a:p>
+            <a:pPr>
+              <a:defRPr sz="1200" b="1">
+                <a:solidFill>
+                  <a:srgbClr val="38BDF8"/>
+                </a:solidFill>
+                <a:latin typeface="Segoe UI"/>
+              </a:defRPr>
+            </a:pPr>
+            <a:r>
+              <a:t>GRIDSEARCHCV RIDGE (L2 PENALTY)</a:t>
+            </a:r>
+          </a:p>
+        </p:txBody>
+      </p:sp>
+      <p:sp>
+        <p:nvSpPr>
+          <p:cNvPr id="9" name="TextBox 8"/>
+          <p:cNvSpPr txBox="1"/>
+          <p:nvPr/>
+        </p:nvSpPr>
+        <p:spPr>
+          <a:xfrm>
+            <a:off x="914400" y="1920240"/>
+            <a:ext cx="4846320" cy="3931920"/>
+          </a:xfrm>
+          <a:prstGeom prst="rect">
+            <a:avLst/>
+          </a:prstGeom>
+          <a:noFill/>
+        </p:spPr>
+        <p:txBody>
+          <a:bodyPr wrap="square">
+            <a:spAutoFit/>
+          </a:bodyPr>
+          <a:lstStyle/>
+          <a:p>
+            <a:pPr>
+              <a:defRPr sz="1100" b="1">
+                <a:solidFill>
+                  <a:srgbClr val="38BDF8"/>
+                </a:solidFill>
+                <a:latin typeface="Segoe UI"/>
+              </a:defRPr>
+            </a:pPr>
+            <a:r>
+              <a:t>Principe Théorique :</a:t>
+            </a:r>
+          </a:p>
+          <a:p>
+            <a:pPr>
+              <a:defRPr sz="1000">
+                <a:solidFill>
+                  <a:srgbClr val="F8FAFC"/>
+                </a:solidFill>
+                <a:latin typeface="Segoe UI"/>
+              </a:defRPr>
+            </a:pPr>
+            <a:r>
+              <a:t>Pénalisation de la somme des carrés des coefficients (||w||₂²). Évite l'explosion des poids face à la colinéarité sans annuler les variables.</a:t>
+            </a:r>
+          </a:p>
+          <a:p>
+            <a:pPr>
+              <a:defRPr sz="1100" b="1">
+                <a:solidFill>
+                  <a:srgbClr val="38BDF8"/>
+                </a:solidFill>
+                <a:latin typeface="Segoe UI"/>
+              </a:defRPr>
+            </a:pPr>
+            <a:r>
+              <a:t>Grille d'Hyperparamètres :</a:t>
+            </a:r>
+          </a:p>
+          <a:p>
+            <a:pPr>
+              <a:defRPr sz="1000">
+                <a:solidFill>
+                  <a:srgbClr val="F8FAFC"/>
+                </a:solidFill>
+                <a:latin typeface="Segoe UI"/>
+              </a:defRPr>
+            </a:pPr>
+            <a:r>
+              <a:t>Paramètre alpha testé sur [0.01, 0.1, 1, 10, 100, 1000] avec 5-fold cross-validation.</a:t>
+            </a:r>
+          </a:p>
+          <a:p>
+            <a:pPr>
+              <a:defRPr sz="1100" b="1">
+                <a:solidFill>
+                  <a:srgbClr val="38BDF8"/>
+                </a:solidFill>
+                <a:latin typeface="Segoe UI"/>
+              </a:defRPr>
+            </a:pPr>
+            <a:r>
+              <a:t>Meilleur Paramètre Retenu :</a:t>
+            </a:r>
+          </a:p>
+          <a:p>
+            <a:pPr>
+              <a:defRPr sz="1000">
+                <a:solidFill>
+                  <a:srgbClr val="F8FAFC"/>
+                </a:solidFill>
+                <a:latin typeface="Segoe UI"/>
+              </a:defRPr>
+            </a:pPr>
+            <a:r>
+              <a:t>alpha = 0.01 (pénalisation légère optimale).</a:t>
+            </a:r>
+          </a:p>
+          <a:p>
+            <a:pPr>
+              <a:defRPr sz="1100" b="1">
+                <a:solidFill>
+                  <a:srgbClr val="38BDF8"/>
+                </a:solidFill>
+                <a:latin typeface="Segoe UI"/>
+              </a:defRPr>
+            </a:pPr>
+            <a:r>
+              <a:t>Résultats Train :</a:t>
+            </a:r>
+          </a:p>
+          <a:p>
+            <a:pPr>
+              <a:defRPr sz="1000">
+                <a:solidFill>
+                  <a:srgbClr val="F8FAFC"/>
+                </a:solidFill>
+                <a:latin typeface="Segoe UI"/>
+              </a:defRPr>
+            </a:pPr>
+            <a:r>
+              <a:t>R² = 0.98 | MAE = 77 140 $ | RMSE = 100 111 $.</a:t>
+            </a:r>
+          </a:p>
+          <a:p>
+            <a:pPr>
+              <a:defRPr sz="1100" b="1">
+                <a:solidFill>
+                  <a:srgbClr val="38BDF8"/>
+                </a:solidFill>
+                <a:latin typeface="Segoe UI"/>
+              </a:defRPr>
+            </a:pPr>
+            <a:r>
+              <a:t>Résultats Test :</a:t>
+            </a:r>
+          </a:p>
+          <a:p>
+            <a:pPr>
+              <a:defRPr sz="1000">
+                <a:solidFill>
+                  <a:srgbClr val="F8FAFC"/>
+                </a:solidFill>
+                <a:latin typeface="Segoe UI"/>
+              </a:defRPr>
+            </a:pPr>
+            <a:r>
+              <a:t>R² = 0.90 | MAE = 145 013 $ | RMSE = 187 888 $.</a:t>
+            </a:r>
+          </a:p>
+        </p:txBody>
+      </p:sp>
+      <p:sp>
+        <p:nvSpPr>
+          <p:cNvPr id="10" name="Rounded Rectangle 9"/>
+          <p:cNvSpPr/>
+          <p:nvPr/>
+        </p:nvSpPr>
+        <p:spPr>
+          <a:xfrm>
+            <a:off x="6217920" y="1371600"/>
+            <a:ext cx="5242255" cy="4754880"/>
+          </a:xfrm>
+          <a:prstGeom prst="roundRect">
+            <a:avLst/>
+          </a:prstGeom>
+          <a:solidFill>
+            <a:srgbClr val="1E293B"/>
+          </a:solidFill>
+          <a:ln w="19050">
+            <a:solidFill>
+              <a:srgbClr val="334155"/>
+            </a:solidFill>
+          </a:ln>
+        </p:spPr>
+        <p:style>
+          <a:lnRef idx="1">
+            <a:schemeClr val="accent1"/>
+          </a:lnRef>
+          <a:fillRef idx="3">
+            <a:schemeClr val="accent1"/>
+          </a:fillRef>
+          <a:effectRef idx="2">
+            <a:schemeClr val="accent1"/>
+          </a:effectRef>
+          <a:fontRef idx="minor">
+            <a:schemeClr val="lt1"/>
+          </a:fontRef>
+        </p:style>
+        <p:txBody>
+          <a:bodyPr rtlCol="0" anchor="ctr"/>
+          <a:lstStyle/>
+          <a:p>
+            <a:pPr algn="ctr"/>
+          </a:p>
+        </p:txBody>
+      </p:sp>
+      <p:sp>
+        <p:nvSpPr>
+          <p:cNvPr id="11" name="TextBox 10"/>
+          <p:cNvSpPr txBox="1"/>
+          <p:nvPr/>
+        </p:nvSpPr>
+        <p:spPr>
+          <a:xfrm>
+            <a:off x="6400800" y="1536192"/>
+            <a:ext cx="4876495" cy="365760"/>
+          </a:xfrm>
+          <a:prstGeom prst="rect">
+            <a:avLst/>
+          </a:prstGeom>
+          <a:noFill/>
+        </p:spPr>
+        <p:txBody>
+          <a:bodyPr wrap="square" lIns="0" tIns="0" rIns="0" bIns="0">
+            <a:spAutoFit/>
+          </a:bodyPr>
+          <a:lstStyle/>
+          <a:p>
+            <a:pPr>
+              <a:defRPr sz="1200" b="1">
+                <a:solidFill>
+                  <a:srgbClr val="38BDF8"/>
+                </a:solidFill>
+                <a:latin typeface="Segoe UI"/>
+              </a:defRPr>
+            </a:pPr>
+            <a:r>
+              <a:t>BILAN DE LA RÉGULARISATION RIDGE</a:t>
             </a:r>
           </a:p>
         </p:txBody>
@@ -5601,8 +10690,8 @@
         </p:nvSpPr>
         <p:spPr>
           <a:xfrm>
-            <a:off x="731520" y="6309360"/>
-            <a:ext cx="10698480" cy="365760"/>
+            <a:off x="6400800" y="1920240"/>
+            <a:ext cx="4846320" cy="3931920"/>
           </a:xfrm>
           <a:prstGeom prst="rect">
             <a:avLst/>
@@ -5610,20 +10699,707 @@
           <a:noFill/>
         </p:spPr>
         <p:txBody>
-          <a:bodyPr wrap="none">
+          <a:bodyPr wrap="square">
             <a:spAutoFit/>
           </a:bodyPr>
           <a:lstStyle/>
           <a:p>
             <a:pPr>
+              <a:defRPr sz="1100" b="1">
+                <a:solidFill>
+                  <a:srgbClr val="FACC15"/>
+                </a:solidFill>
+                <a:latin typeface="Segoe UI"/>
+              </a:defRPr>
+            </a:pPr>
+            <a:r>
+              <a:t>1. Réduction de l'Erreur de Test :</a:t>
+            </a:r>
+          </a:p>
+          <a:p>
+            <a:pPr>
               <a:defRPr sz="1000">
                 <a:solidFill>
+                  <a:srgbClr val="F8FAFC"/>
+                </a:solidFill>
+                <a:latin typeface="Segoe UI"/>
+              </a:defRPr>
+            </a:pPr>
+            <a:r>
+              <a:t>La MAE test baisse de 145 803 $ à 145 013 $ (-790 $ par semaine et par magasin), confirmant un gain de stabilité.</a:t>
+            </a:r>
+          </a:p>
+          <a:p>
+            <a:pPr>
+              <a:defRPr sz="1100" b="1">
+                <a:solidFill>
+                  <a:srgbClr val="FACC15"/>
+                </a:solidFill>
+                <a:latin typeface="Segoe UI"/>
+              </a:defRPr>
+            </a:pPr>
+            <a:r>
+              <a:t>2. Conservation Intégrale des Features :</a:t>
+            </a:r>
+          </a:p>
+          <a:p>
+            <a:pPr>
+              <a:defRPr sz="1000">
+                <a:solidFill>
+                  <a:srgbClr val="F8FAFC"/>
+                </a:solidFill>
+                <a:latin typeface="Segoe UI"/>
+              </a:defRPr>
+            </a:pPr>
+            <a:r>
+              <a:t>Ridge conserve l'ensemble des coefficients non nuls. Toutes les variables continuent de contribuer au score final.</a:t>
+            </a:r>
+          </a:p>
+          <a:p>
+            <a:pPr>
+              <a:defRPr sz="1100" b="1">
+                <a:solidFill>
+                  <a:srgbClr val="FACC15"/>
+                </a:solidFill>
+                <a:latin typeface="Segoe UI"/>
+              </a:defRPr>
+            </a:pPr>
+            <a:r>
+              <a:t>3. Limite de Ridge pour le Métier :</a:t>
+            </a:r>
+          </a:p>
+          <a:p>
+            <a:pPr>
+              <a:defRPr sz="1000">
+                <a:solidFill>
+                  <a:srgbClr val="F8FAFC"/>
+                </a:solidFill>
+                <a:latin typeface="Segoe UI"/>
+              </a:defRPr>
+            </a:pPr>
+            <a:r>
+              <a:t>Comme aucune variable n'est éliminée, le modèle reste dense et n'offre pas de simplification directe pour les décideurs marketing.</a:t>
+            </a:r>
+          </a:p>
+        </p:txBody>
+      </p:sp>
+    </p:spTree>
+  </p:cSld>
+  <p:clrMapOvr>
+    <a:masterClrMapping/>
+  </p:clrMapOvr>
+</p:sld>
+</file>
+
+<file path=ppt/slides/slide9.xml><?xml version="1.0" encoding="utf-8"?>
+<p:sld xmlns:a="http://schemas.openxmlformats.org/drawingml/2006/main" xmlns:p="http://schemas.openxmlformats.org/presentationml/2006/main" xmlns:r="http://schemas.openxmlformats.org/officeDocument/2006/relationships">
+  <p:cSld>
+    <p:spTree>
+      <p:nvGrpSpPr>
+        <p:cNvPr id="1" name=""/>
+        <p:cNvGrpSpPr/>
+        <p:nvPr/>
+      </p:nvGrpSpPr>
+      <p:grpSpPr/>
+      <p:sp>
+        <p:nvSpPr>
+          <p:cNvPr id="2" name="Rectangle 1"/>
+          <p:cNvSpPr/>
+          <p:nvPr/>
+        </p:nvSpPr>
+        <p:spPr>
+          <a:xfrm>
+            <a:off x="0" y="0"/>
+            <a:ext cx="12191695" cy="6858000"/>
+          </a:xfrm>
+          <a:prstGeom prst="rect">
+            <a:avLst/>
+          </a:prstGeom>
+          <a:solidFill>
+            <a:srgbClr val="0B1120"/>
+          </a:solidFill>
+          <a:ln>
+            <a:noFill/>
+          </a:ln>
+        </p:spPr>
+        <p:style>
+          <a:lnRef idx="1">
+            <a:schemeClr val="accent1"/>
+          </a:lnRef>
+          <a:fillRef idx="3">
+            <a:schemeClr val="accent1"/>
+          </a:fillRef>
+          <a:effectRef idx="2">
+            <a:schemeClr val="accent1"/>
+          </a:effectRef>
+          <a:fontRef idx="minor">
+            <a:schemeClr val="lt1"/>
+          </a:fontRef>
+        </p:style>
+        <p:txBody>
+          <a:bodyPr rtlCol="0" anchor="ctr"/>
+          <a:lstStyle/>
+          <a:p>
+            <a:pPr algn="ctr"/>
+          </a:p>
+        </p:txBody>
+      </p:sp>
+      <p:sp>
+        <p:nvSpPr>
+          <p:cNvPr id="3" name="TextBox 2"/>
+          <p:cNvSpPr txBox="1"/>
+          <p:nvPr/>
+        </p:nvSpPr>
+        <p:spPr>
+          <a:xfrm>
+            <a:off x="731520" y="365760"/>
+            <a:ext cx="7315200" cy="320040"/>
+          </a:xfrm>
+          <a:prstGeom prst="rect">
+            <a:avLst/>
+          </a:prstGeom>
+          <a:noFill/>
+        </p:spPr>
+        <p:txBody>
+          <a:bodyPr wrap="square" lIns="0" tIns="0" rIns="0" bIns="0">
+            <a:spAutoFit/>
+          </a:bodyPr>
+          <a:lstStyle/>
+          <a:p>
+            <a:pPr>
+              <a:defRPr sz="1100" b="1">
+                <a:solidFill>
+                  <a:srgbClr val="38BDF8"/>
+                </a:solidFill>
+                <a:latin typeface="Segoe UI"/>
+              </a:defRPr>
+            </a:pPr>
+            <a:r>
+              <a:t>ÉTAPE 08 | RÉGULARISATION L1</a:t>
+            </a:r>
+          </a:p>
+        </p:txBody>
+      </p:sp>
+      <p:sp>
+        <p:nvSpPr>
+          <p:cNvPr id="4" name="TextBox 3"/>
+          <p:cNvSpPr txBox="1"/>
+          <p:nvPr/>
+        </p:nvSpPr>
+        <p:spPr>
+          <a:xfrm>
+            <a:off x="731520" y="685800"/>
+            <a:ext cx="9601200" cy="502920"/>
+          </a:xfrm>
+          <a:prstGeom prst="rect">
+            <a:avLst/>
+          </a:prstGeom>
+          <a:noFill/>
+        </p:spPr>
+        <p:txBody>
+          <a:bodyPr wrap="square" lIns="0" tIns="0" rIns="0" bIns="0">
+            <a:spAutoFit/>
+          </a:bodyPr>
+          <a:lstStyle/>
+          <a:p>
+            <a:pPr>
+              <a:defRPr sz="2200" b="1">
+                <a:solidFill>
+                  <a:srgbClr val="F8FAFC"/>
+                </a:solidFill>
+                <a:latin typeface="Segoe UI"/>
+              </a:defRPr>
+            </a:pPr>
+            <a:r>
+              <a:t>Modèle Lasso : Sélection de Variables &amp; Meilleure Généralisation</a:t>
+            </a:r>
+          </a:p>
+        </p:txBody>
+      </p:sp>
+      <p:sp>
+        <p:nvSpPr>
+          <p:cNvPr id="5" name="TextBox 4"/>
+          <p:cNvSpPr txBox="1"/>
+          <p:nvPr/>
+        </p:nvSpPr>
+        <p:spPr>
+          <a:xfrm>
+            <a:off x="10362895" y="411480"/>
+            <a:ext cx="1097280" cy="365760"/>
+          </a:xfrm>
+          <a:prstGeom prst="rect">
+            <a:avLst/>
+          </a:prstGeom>
+          <a:noFill/>
+        </p:spPr>
+        <p:txBody>
+          <a:bodyPr wrap="square" lIns="0" tIns="0" rIns="0" bIns="0">
+            <a:spAutoFit/>
+          </a:bodyPr>
+          <a:lstStyle/>
+          <a:p>
+            <a:pPr algn="r">
+              <a:defRPr sz="1200" b="1">
+                <a:solidFill>
                   <a:srgbClr val="94A3B8"/>
                 </a:solidFill>
-              </a:defRPr>
-            </a:pPr>
-            <a:r>
-              <a:t>Christopher GILLERON  |  Walmart Store Sales Prediction  |  Certification CDSD</a:t>
+                <a:latin typeface="Segoe UI"/>
+              </a:defRPr>
+            </a:pPr>
+            <a:r>
+              <a:t>9 / 10</a:t>
+            </a:r>
+          </a:p>
+        </p:txBody>
+      </p:sp>
+      <p:sp>
+        <p:nvSpPr>
+          <p:cNvPr id="6" name="TextBox 5"/>
+          <p:cNvSpPr txBox="1"/>
+          <p:nvPr/>
+        </p:nvSpPr>
+        <p:spPr>
+          <a:xfrm>
+            <a:off x="731520" y="6400800"/>
+            <a:ext cx="10728655" cy="274320"/>
+          </a:xfrm>
+          <a:prstGeom prst="rect">
+            <a:avLst/>
+          </a:prstGeom>
+          <a:noFill/>
+        </p:spPr>
+        <p:txBody>
+          <a:bodyPr wrap="square" lIns="0" tIns="0" rIns="0" bIns="0">
+            <a:spAutoFit/>
+          </a:bodyPr>
+          <a:lstStyle/>
+          <a:p>
+            <a:pPr>
+              <a:defRPr sz="1000">
+                <a:solidFill>
+                  <a:srgbClr val="64748B"/>
+                </a:solidFill>
+                <a:latin typeface="Segoe UI"/>
+              </a:defRPr>
+            </a:pPr>
+            <a:r>
+              <a:t>Christopher GILLERON  |  Walmart Store Sales Prediction (Machine Learning Supervisé)  |  Certification CDSD Bloc 3</a:t>
+            </a:r>
+          </a:p>
+        </p:txBody>
+      </p:sp>
+      <p:sp>
+        <p:nvSpPr>
+          <p:cNvPr id="7" name="Rounded Rectangle 6"/>
+          <p:cNvSpPr/>
+          <p:nvPr/>
+        </p:nvSpPr>
+        <p:spPr>
+          <a:xfrm>
+            <a:off x="731520" y="1371600"/>
+            <a:ext cx="5212080" cy="4754880"/>
+          </a:xfrm>
+          <a:prstGeom prst="roundRect">
+            <a:avLst/>
+          </a:prstGeom>
+          <a:solidFill>
+            <a:srgbClr val="1E293B"/>
+          </a:solidFill>
+          <a:ln w="19050">
+            <a:solidFill>
+              <a:srgbClr val="10B981"/>
+            </a:solidFill>
+          </a:ln>
+        </p:spPr>
+        <p:style>
+          <a:lnRef idx="1">
+            <a:schemeClr val="accent1"/>
+          </a:lnRef>
+          <a:fillRef idx="3">
+            <a:schemeClr val="accent1"/>
+          </a:fillRef>
+          <a:effectRef idx="2">
+            <a:schemeClr val="accent1"/>
+          </a:effectRef>
+          <a:fontRef idx="minor">
+            <a:schemeClr val="lt1"/>
+          </a:fontRef>
+        </p:style>
+        <p:txBody>
+          <a:bodyPr rtlCol="0" anchor="ctr"/>
+          <a:lstStyle/>
+          <a:p>
+            <a:pPr algn="ctr"/>
+          </a:p>
+        </p:txBody>
+      </p:sp>
+      <p:sp>
+        <p:nvSpPr>
+          <p:cNvPr id="8" name="TextBox 7"/>
+          <p:cNvSpPr txBox="1"/>
+          <p:nvPr/>
+        </p:nvSpPr>
+        <p:spPr>
+          <a:xfrm>
+            <a:off x="914400" y="1536192"/>
+            <a:ext cx="4846320" cy="365760"/>
+          </a:xfrm>
+          <a:prstGeom prst="rect">
+            <a:avLst/>
+          </a:prstGeom>
+          <a:noFill/>
+        </p:spPr>
+        <p:txBody>
+          <a:bodyPr wrap="square" lIns="0" tIns="0" rIns="0" bIns="0">
+            <a:spAutoFit/>
+          </a:bodyPr>
+          <a:lstStyle/>
+          <a:p>
+            <a:pPr>
+              <a:defRPr sz="1200" b="1">
+                <a:solidFill>
+                  <a:srgbClr val="38BDF8"/>
+                </a:solidFill>
+                <a:latin typeface="Segoe UI"/>
+              </a:defRPr>
+            </a:pPr>
+            <a:r>
+              <a:t>GRIDSEARCHCV LASSO (L1 PENALTY)</a:t>
+            </a:r>
+          </a:p>
+        </p:txBody>
+      </p:sp>
+      <p:sp>
+        <p:nvSpPr>
+          <p:cNvPr id="9" name="TextBox 8"/>
+          <p:cNvSpPr txBox="1"/>
+          <p:nvPr/>
+        </p:nvSpPr>
+        <p:spPr>
+          <a:xfrm>
+            <a:off x="914400" y="1920240"/>
+            <a:ext cx="4846320" cy="3931920"/>
+          </a:xfrm>
+          <a:prstGeom prst="rect">
+            <a:avLst/>
+          </a:prstGeom>
+          <a:noFill/>
+        </p:spPr>
+        <p:txBody>
+          <a:bodyPr wrap="square">
+            <a:spAutoFit/>
+          </a:bodyPr>
+          <a:lstStyle/>
+          <a:p>
+            <a:pPr>
+              <a:defRPr sz="1100" b="1">
+                <a:solidFill>
+                  <a:srgbClr val="10B981"/>
+                </a:solidFill>
+                <a:latin typeface="Segoe UI"/>
+              </a:defRPr>
+            </a:pPr>
+            <a:r>
+              <a:t>Principe de Parcimonie (Sparsity) :</a:t>
+            </a:r>
+          </a:p>
+          <a:p>
+            <a:pPr>
+              <a:defRPr sz="1000">
+                <a:solidFill>
+                  <a:srgbClr val="F8FAFC"/>
+                </a:solidFill>
+                <a:latin typeface="Segoe UI"/>
+              </a:defRPr>
+            </a:pPr>
+            <a:r>
+              <a:t>Pénalisation de la valeur absolue des coefficients (||w||₁). Annule purement et simplement les variables non informatives (feature selection automatique).</a:t>
+            </a:r>
+          </a:p>
+          <a:p>
+            <a:pPr>
+              <a:defRPr sz="1100" b="1">
+                <a:solidFill>
+                  <a:srgbClr val="10B981"/>
+                </a:solidFill>
+                <a:latin typeface="Segoe UI"/>
+              </a:defRPr>
+            </a:pPr>
+            <a:r>
+              <a:t>Grille d'Hyperparamètres :</a:t>
+            </a:r>
+          </a:p>
+          <a:p>
+            <a:pPr>
+              <a:defRPr sz="1000">
+                <a:solidFill>
+                  <a:srgbClr val="F8FAFC"/>
+                </a:solidFill>
+                <a:latin typeface="Segoe UI"/>
+              </a:defRPr>
+            </a:pPr>
+            <a:r>
+              <a:t>Paramètre alpha testé sur [1, 10, 100, 1000, 10000] avec 5-fold cross-validation.</a:t>
+            </a:r>
+          </a:p>
+          <a:p>
+            <a:pPr>
+              <a:defRPr sz="1100" b="1">
+                <a:solidFill>
+                  <a:srgbClr val="10B981"/>
+                </a:solidFill>
+                <a:latin typeface="Segoe UI"/>
+              </a:defRPr>
+            </a:pPr>
+            <a:r>
+              <a:t>Meilleur Paramètre Retenu :</a:t>
+            </a:r>
+          </a:p>
+          <a:p>
+            <a:pPr>
+              <a:defRPr sz="1000">
+                <a:solidFill>
+                  <a:srgbClr val="F8FAFC"/>
+                </a:solidFill>
+                <a:latin typeface="Segoe UI"/>
+              </a:defRPr>
+            </a:pPr>
+            <a:r>
+              <a:t>alpha = 1 000 (sélection robuste).</a:t>
+            </a:r>
+          </a:p>
+          <a:p>
+            <a:pPr>
+              <a:defRPr sz="1100" b="1">
+                <a:solidFill>
+                  <a:srgbClr val="10B981"/>
+                </a:solidFill>
+                <a:latin typeface="Segoe UI"/>
+              </a:defRPr>
+            </a:pPr>
+            <a:r>
+              <a:t>Résultats Train :</a:t>
+            </a:r>
+          </a:p>
+          <a:p>
+            <a:pPr>
+              <a:defRPr sz="1000">
+                <a:solidFill>
+                  <a:srgbClr val="F8FAFC"/>
+                </a:solidFill>
+                <a:latin typeface="Segoe UI"/>
+              </a:defRPr>
+            </a:pPr>
+            <a:r>
+              <a:t>R² = 0.98 | MAE = 78 595 $ | RMSE = 103 515 $.</a:t>
+            </a:r>
+          </a:p>
+          <a:p>
+            <a:pPr>
+              <a:defRPr sz="1100" b="1">
+                <a:solidFill>
+                  <a:srgbClr val="10B981"/>
+                </a:solidFill>
+                <a:latin typeface="Segoe UI"/>
+              </a:defRPr>
+            </a:pPr>
+            <a:r>
+              <a:t>Résultats Test (RECORD) :</a:t>
+            </a:r>
+          </a:p>
+          <a:p>
+            <a:pPr>
+              <a:defRPr sz="1000">
+                <a:solidFill>
+                  <a:srgbClr val="F8FAFC"/>
+                </a:solidFill>
+                <a:latin typeface="Segoe UI"/>
+              </a:defRPr>
+            </a:pPr>
+            <a:r>
+              <a:t>R² = 0.91 (+1%) | RMSE = 181 457 $ (-7 020 $ vs Baseline).</a:t>
+            </a:r>
+          </a:p>
+        </p:txBody>
+      </p:sp>
+      <p:sp>
+        <p:nvSpPr>
+          <p:cNvPr id="10" name="Rounded Rectangle 9"/>
+          <p:cNvSpPr/>
+          <p:nvPr/>
+        </p:nvSpPr>
+        <p:spPr>
+          <a:xfrm>
+            <a:off x="6217920" y="1371600"/>
+            <a:ext cx="5242255" cy="4754880"/>
+          </a:xfrm>
+          <a:prstGeom prst="roundRect">
+            <a:avLst/>
+          </a:prstGeom>
+          <a:solidFill>
+            <a:srgbClr val="1E293B"/>
+          </a:solidFill>
+          <a:ln w="19050">
+            <a:solidFill>
+              <a:srgbClr val="334155"/>
+            </a:solidFill>
+          </a:ln>
+        </p:spPr>
+        <p:style>
+          <a:lnRef idx="1">
+            <a:schemeClr val="accent1"/>
+          </a:lnRef>
+          <a:fillRef idx="3">
+            <a:schemeClr val="accent1"/>
+          </a:fillRef>
+          <a:effectRef idx="2">
+            <a:schemeClr val="accent1"/>
+          </a:effectRef>
+          <a:fontRef idx="minor">
+            <a:schemeClr val="lt1"/>
+          </a:fontRef>
+        </p:style>
+        <p:txBody>
+          <a:bodyPr rtlCol="0" anchor="ctr"/>
+          <a:lstStyle/>
+          <a:p>
+            <a:pPr algn="ctr"/>
+          </a:p>
+        </p:txBody>
+      </p:sp>
+      <p:sp>
+        <p:nvSpPr>
+          <p:cNvPr id="11" name="TextBox 10"/>
+          <p:cNvSpPr txBox="1"/>
+          <p:nvPr/>
+        </p:nvSpPr>
+        <p:spPr>
+          <a:xfrm>
+            <a:off x="6400800" y="1536192"/>
+            <a:ext cx="4876495" cy="365760"/>
+          </a:xfrm>
+          <a:prstGeom prst="rect">
+            <a:avLst/>
+          </a:prstGeom>
+          <a:noFill/>
+        </p:spPr>
+        <p:txBody>
+          <a:bodyPr wrap="square" lIns="0" tIns="0" rIns="0" bIns="0">
+            <a:spAutoFit/>
+          </a:bodyPr>
+          <a:lstStyle/>
+          <a:p>
+            <a:pPr>
+              <a:defRPr sz="1200" b="1">
+                <a:solidFill>
+                  <a:srgbClr val="38BDF8"/>
+                </a:solidFill>
+                <a:latin typeface="Segoe UI"/>
+              </a:defRPr>
+            </a:pPr>
+            <a:r>
+              <a:t>POURQUOI LASSO EST LE MODÈLE RECOMMANDÉ</a:t>
+            </a:r>
+          </a:p>
+        </p:txBody>
+      </p:sp>
+      <p:sp>
+        <p:nvSpPr>
+          <p:cNvPr id="12" name="TextBox 11"/>
+          <p:cNvSpPr txBox="1"/>
+          <p:nvPr/>
+        </p:nvSpPr>
+        <p:spPr>
+          <a:xfrm>
+            <a:off x="6400800" y="1920240"/>
+            <a:ext cx="4846320" cy="3931920"/>
+          </a:xfrm>
+          <a:prstGeom prst="rect">
+            <a:avLst/>
+          </a:prstGeom>
+          <a:noFill/>
+        </p:spPr>
+        <p:txBody>
+          <a:bodyPr wrap="square">
+            <a:spAutoFit/>
+          </a:bodyPr>
+          <a:lstStyle/>
+          <a:p>
+            <a:pPr>
+              <a:defRPr sz="1100" b="1">
+                <a:solidFill>
+                  <a:srgbClr val="10B981"/>
+                </a:solidFill>
+                <a:latin typeface="Segoe UI"/>
+              </a:defRPr>
+            </a:pPr>
+            <a:r>
+              <a:t>1. Meilleur Score de Généralisation :</a:t>
+            </a:r>
+          </a:p>
+          <a:p>
+            <a:pPr>
+              <a:defRPr sz="1000">
+                <a:solidFill>
+                  <a:srgbClr val="F8FAFC"/>
+                </a:solidFill>
+                <a:latin typeface="Segoe UI"/>
+              </a:defRPr>
+            </a:pPr>
+            <a:r>
+              <a:t>Lasso est le seul modèle qui parvient à faire progresser le R² test à 0.91 tout en réduisant la RMSE de plus de 7 000 $.</a:t>
+            </a:r>
+          </a:p>
+          <a:p>
+            <a:pPr>
+              <a:defRPr sz="1100" b="1">
+                <a:solidFill>
+                  <a:srgbClr val="10B981"/>
+                </a:solidFill>
+                <a:latin typeface="Segoe UI"/>
+              </a:defRPr>
+            </a:pPr>
+            <a:r>
+              <a:t>2. Élimination du Bruit Statistiques :</a:t>
+            </a:r>
+          </a:p>
+          <a:p>
+            <a:pPr>
+              <a:defRPr sz="1000">
+                <a:solidFill>
+                  <a:srgbClr val="F8FAFC"/>
+                </a:solidFill>
+                <a:latin typeface="Segoe UI"/>
+              </a:defRPr>
+            </a:pPr>
+            <a:r>
+              <a:t>Les variables calendaires trop fines ou redondantes sont mises à zéro, protégeant le modèle contre le surapprentissage sur petit échantillon (n=131).</a:t>
+            </a:r>
+          </a:p>
+          <a:p>
+            <a:pPr>
+              <a:defRPr sz="1100" b="1">
+                <a:solidFill>
+                  <a:srgbClr val="10B981"/>
+                </a:solidFill>
+                <a:latin typeface="Segoe UI"/>
+              </a:defRPr>
+            </a:pPr>
+            <a:r>
+              <a:t>3. Robustesse en Production :</a:t>
+            </a:r>
+          </a:p>
+          <a:p>
+            <a:pPr>
+              <a:defRPr sz="1000">
+                <a:solidFill>
+                  <a:srgbClr val="F8FAFC"/>
+                </a:solidFill>
+                <a:latin typeface="Segoe UI"/>
+              </a:defRPr>
+            </a:pPr>
+            <a:r>
+              <a:t>Un modèle plus simple et plus parcimonieux est plus stable à déployer, plus rapide à recalculer et plus facilement auditable par les équipes métier de Walmart.</a:t>
             </a:r>
           </a:p>
         </p:txBody>

--- a/Bloc_3_Machine_Learning/Walmart/Walmart_presentation.pptx
+++ b/Bloc_3_Machine_Learning/Walmart/Walmart_presentation.pptx
@@ -3155,9 +3155,9 @@
           <a:solidFill>
             <a:srgbClr val="1E293B"/>
           </a:solidFill>
-          <a:ln w="25400">
+          <a:ln w="12700">
             <a:solidFill>
-              <a:srgbClr val="38BDF8"/>
+              <a:srgbClr val="334155"/>
             </a:solidFill>
           </a:ln>
         </p:spPr>
@@ -3206,7 +3206,7 @@
           <a:lstStyle/>
           <a:p>
             <a:pPr>
-              <a:defRPr sz="1300" b="1">
+              <a:defRPr sz="1200" b="1">
                 <a:solidFill>
                   <a:srgbClr val="38BDF8"/>
                 </a:solidFill>
@@ -3228,7 +3228,7 @@
         <p:spPr>
           <a:xfrm>
             <a:off x="1828800" y="1920240"/>
-            <a:ext cx="8534095" cy="1097280"/>
+            <a:ext cx="8534095" cy="1005840"/>
           </a:xfrm>
           <a:prstGeom prst="rect">
             <a:avLst/>
@@ -3236,13 +3236,13 @@
           <a:noFill/>
         </p:spPr>
         <p:txBody>
-          <a:bodyPr wrap="none">
+          <a:bodyPr wrap="square">
             <a:spAutoFit/>
           </a:bodyPr>
           <a:lstStyle/>
           <a:p>
             <a:pPr>
-              <a:defRPr sz="3600" b="1">
+              <a:defRPr sz="3200" b="1">
                 <a:solidFill>
                   <a:srgbClr val="F8FAFC"/>
                 </a:solidFill>
@@ -3255,7 +3255,7 @@
           </a:p>
           <a:p>
             <a:pPr>
-              <a:defRPr sz="1700">
+              <a:defRPr sz="1400">
                 <a:solidFill>
                   <a:srgbClr val="94A3B8"/>
                 </a:solidFill>
@@ -3270,23 +3270,25 @@
       </p:sp>
       <p:sp>
         <p:nvSpPr>
-          <p:cNvPr id="6" name="Rectangle 5"/>
+          <p:cNvPr id="6" name="Rounded Rectangle 5"/>
           <p:cNvSpPr/>
           <p:nvPr/>
         </p:nvSpPr>
         <p:spPr>
           <a:xfrm>
             <a:off x="1828800" y="3383280"/>
-            <a:ext cx="8534095" cy="27432"/>
-          </a:xfrm>
-          <a:prstGeom prst="rect">
+            <a:ext cx="2651760" cy="1280160"/>
+          </a:xfrm>
+          <a:prstGeom prst="roundRect">
             <a:avLst/>
           </a:prstGeom>
           <a:solidFill>
-            <a:srgbClr val="334155"/>
+            <a:srgbClr val="0F172A"/>
           </a:solidFill>
-          <a:ln>
-            <a:noFill/>
+          <a:ln w="12700">
+            <a:solidFill>
+              <a:srgbClr val="334155"/>
+            </a:solidFill>
           </a:ln>
         </p:spPr>
         <p:style>
@@ -3319,8 +3321,8 @@
         </p:nvSpPr>
         <p:spPr>
           <a:xfrm>
-            <a:off x="1828800" y="3657600"/>
-            <a:ext cx="2743200" cy="1097280"/>
+            <a:off x="2011680" y="3520440"/>
+            <a:ext cx="2286000" cy="1005840"/>
           </a:xfrm>
           <a:prstGeom prst="rect">
             <a:avLst/>
@@ -3334,7 +3336,7 @@
           <a:lstStyle/>
           <a:p>
             <a:pPr>
-              <a:defRPr sz="2200" b="1">
+              <a:defRPr sz="2000" b="1">
                 <a:solidFill>
                   <a:srgbClr val="10B981"/>
                 </a:solidFill>
@@ -3347,7 +3349,7 @@
           </a:p>
           <a:p>
             <a:pPr>
-              <a:defRPr sz="1100" b="1">
+              <a:defRPr sz="1000" b="1">
                 <a:solidFill>
                   <a:srgbClr val="F8FAFC"/>
                 </a:solidFill>
@@ -3360,7 +3362,7 @@
           </a:p>
           <a:p>
             <a:pPr>
-              <a:defRPr sz="950">
+              <a:defRPr sz="900">
                 <a:solidFill>
                   <a:srgbClr val="94A3B8"/>
                 </a:solidFill>
@@ -3375,14 +3377,59 @@
       </p:sp>
       <p:sp>
         <p:nvSpPr>
-          <p:cNvPr id="8" name="TextBox 7"/>
+          <p:cNvPr id="8" name="Rounded Rectangle 7"/>
+          <p:cNvSpPr/>
+          <p:nvPr/>
+        </p:nvSpPr>
+        <p:spPr>
+          <a:xfrm>
+            <a:off x="4754880" y="3383280"/>
+            <a:ext cx="2651760" cy="1280160"/>
+          </a:xfrm>
+          <a:prstGeom prst="roundRect">
+            <a:avLst/>
+          </a:prstGeom>
+          <a:solidFill>
+            <a:srgbClr val="0F172A"/>
+          </a:solidFill>
+          <a:ln w="12700">
+            <a:solidFill>
+              <a:srgbClr val="334155"/>
+            </a:solidFill>
+          </a:ln>
+        </p:spPr>
+        <p:style>
+          <a:lnRef idx="1">
+            <a:schemeClr val="accent1"/>
+          </a:lnRef>
+          <a:fillRef idx="3">
+            <a:schemeClr val="accent1"/>
+          </a:fillRef>
+          <a:effectRef idx="2">
+            <a:schemeClr val="accent1"/>
+          </a:effectRef>
+          <a:fontRef idx="minor">
+            <a:schemeClr val="lt1"/>
+          </a:fontRef>
+        </p:style>
+        <p:txBody>
+          <a:bodyPr rtlCol="0" anchor="ctr"/>
+          <a:lstStyle/>
+          <a:p>
+            <a:pPr algn="ctr"/>
+          </a:p>
+        </p:txBody>
+      </p:sp>
+      <p:sp>
+        <p:nvSpPr>
+          <p:cNvPr id="9" name="TextBox 8"/>
           <p:cNvSpPr txBox="1"/>
           <p:nvPr/>
         </p:nvSpPr>
         <p:spPr>
           <a:xfrm>
-            <a:off x="4754880" y="3657600"/>
-            <a:ext cx="2743200" cy="1097280"/>
+            <a:off x="4937760" y="3520440"/>
+            <a:ext cx="2286000" cy="1005840"/>
           </a:xfrm>
           <a:prstGeom prst="rect">
             <a:avLst/>
@@ -3396,9 +3443,9 @@
           <a:lstStyle/>
           <a:p>
             <a:pPr>
-              <a:defRPr sz="2200" b="1">
-                <a:solidFill>
-                  <a:srgbClr val="FACC15"/>
+              <a:defRPr sz="2000" b="1">
+                <a:solidFill>
+                  <a:srgbClr val="38BDF8"/>
                 </a:solidFill>
                 <a:latin typeface="Segoe UI"/>
               </a:defRPr>
@@ -3409,7 +3456,7 @@
           </a:p>
           <a:p>
             <a:pPr>
-              <a:defRPr sz="1100" b="1">
+              <a:defRPr sz="1000" b="1">
                 <a:solidFill>
                   <a:srgbClr val="F8FAFC"/>
                 </a:solidFill>
@@ -3422,7 +3469,7 @@
           </a:p>
           <a:p>
             <a:pPr>
-              <a:defRPr sz="950">
+              <a:defRPr sz="900">
                 <a:solidFill>
                   <a:srgbClr val="94A3B8"/>
                 </a:solidFill>
@@ -3437,14 +3484,59 @@
       </p:sp>
       <p:sp>
         <p:nvSpPr>
-          <p:cNvPr id="9" name="TextBox 8"/>
+          <p:cNvPr id="10" name="Rounded Rectangle 9"/>
+          <p:cNvSpPr/>
+          <p:nvPr/>
+        </p:nvSpPr>
+        <p:spPr>
+          <a:xfrm>
+            <a:off x="7680960" y="3383280"/>
+            <a:ext cx="2651760" cy="1280160"/>
+          </a:xfrm>
+          <a:prstGeom prst="roundRect">
+            <a:avLst/>
+          </a:prstGeom>
+          <a:solidFill>
+            <a:srgbClr val="0F172A"/>
+          </a:solidFill>
+          <a:ln w="12700">
+            <a:solidFill>
+              <a:srgbClr val="334155"/>
+            </a:solidFill>
+          </a:ln>
+        </p:spPr>
+        <p:style>
+          <a:lnRef idx="1">
+            <a:schemeClr val="accent1"/>
+          </a:lnRef>
+          <a:fillRef idx="3">
+            <a:schemeClr val="accent1"/>
+          </a:fillRef>
+          <a:effectRef idx="2">
+            <a:schemeClr val="accent1"/>
+          </a:effectRef>
+          <a:fontRef idx="minor">
+            <a:schemeClr val="lt1"/>
+          </a:fontRef>
+        </p:style>
+        <p:txBody>
+          <a:bodyPr rtlCol="0" anchor="ctr"/>
+          <a:lstStyle/>
+          <a:p>
+            <a:pPr algn="ctr"/>
+          </a:p>
+        </p:txBody>
+      </p:sp>
+      <p:sp>
+        <p:nvSpPr>
+          <p:cNvPr id="11" name="TextBox 10"/>
           <p:cNvSpPr txBox="1"/>
           <p:nvPr/>
         </p:nvSpPr>
         <p:spPr>
           <a:xfrm>
-            <a:off x="7680960" y="3657600"/>
-            <a:ext cx="2743200" cy="1097280"/>
+            <a:off x="7863840" y="3520440"/>
+            <a:ext cx="2286000" cy="1005840"/>
           </a:xfrm>
           <a:prstGeom prst="rect">
             <a:avLst/>
@@ -3458,9 +3550,9 @@
           <a:lstStyle/>
           <a:p>
             <a:pPr>
-              <a:defRPr sz="2200" b="1">
-                <a:solidFill>
-                  <a:srgbClr val="38BDF8"/>
+              <a:defRPr sz="2000" b="1">
+                <a:solidFill>
+                  <a:srgbClr val="F59E0B"/>
                 </a:solidFill>
                 <a:latin typeface="Segoe UI"/>
               </a:defRPr>
@@ -3471,7 +3563,7 @@
           </a:p>
           <a:p>
             <a:pPr>
-              <a:defRPr sz="1100" b="1">
+              <a:defRPr sz="1000" b="1">
                 <a:solidFill>
                   <a:srgbClr val="F8FAFC"/>
                 </a:solidFill>
@@ -3484,7 +3576,7 @@
           </a:p>
           <a:p>
             <a:pPr>
-              <a:defRPr sz="950">
+              <a:defRPr sz="900">
                 <a:solidFill>
                   <a:srgbClr val="94A3B8"/>
                 </a:solidFill>
@@ -3499,13 +3591,13 @@
       </p:sp>
       <p:sp>
         <p:nvSpPr>
-          <p:cNvPr id="10" name="TextBox 9"/>
+          <p:cNvPr id="12" name="TextBox 11"/>
           <p:cNvSpPr txBox="1"/>
           <p:nvPr/>
         </p:nvSpPr>
         <p:spPr>
           <a:xfrm>
-            <a:off x="1828800" y="4983480"/>
+            <a:off x="1828800" y="4937760"/>
             <a:ext cx="8534095" cy="457200"/>
           </a:xfrm>
           <a:prstGeom prst="rect">
@@ -3520,9 +3612,9 @@
           <a:lstStyle/>
           <a:p>
             <a:pPr>
-              <a:defRPr sz="1100" b="1">
-                <a:solidFill>
-                  <a:srgbClr val="94A3B8"/>
+              <a:defRPr sz="1100">
+                <a:solidFill>
+                  <a:srgbClr val="F8FAFC"/>
                 </a:solidFill>
                 <a:latin typeface="Segoe UI"/>
               </a:defRPr>
@@ -3611,7 +3703,7 @@
           <a:noFill/>
         </p:spPr>
         <p:txBody>
-          <a:bodyPr wrap="square">
+          <a:bodyPr wrap="square" lIns="0" tIns="0" rIns="0" bIns="0">
             <a:spAutoFit/>
           </a:bodyPr>
           <a:lstStyle/>
@@ -3647,13 +3739,13 @@
           <a:noFill/>
         </p:spPr>
         <p:txBody>
-          <a:bodyPr wrap="square">
+          <a:bodyPr wrap="square" lIns="0" tIns="0" rIns="0" bIns="0">
             <a:spAutoFit/>
           </a:bodyPr>
           <a:lstStyle/>
           <a:p>
             <a:pPr>
-              <a:defRPr sz="2100" b="1">
+              <a:defRPr sz="1800" b="1">
                 <a:solidFill>
                   <a:srgbClr val="F8FAFC"/>
                 </a:solidFill>
@@ -3683,7 +3775,7 @@
           <a:noFill/>
         </p:spPr>
         <p:txBody>
-          <a:bodyPr wrap="square">
+          <a:bodyPr wrap="none" lIns="0" tIns="0" rIns="0" bIns="0">
             <a:spAutoFit/>
           </a:bodyPr>
           <a:lstStyle/>
@@ -3719,21 +3811,21 @@
           <a:noFill/>
         </p:spPr>
         <p:txBody>
-          <a:bodyPr wrap="square">
+          <a:bodyPr wrap="none" lIns="0" tIns="0" rIns="0" bIns="0">
             <a:spAutoFit/>
           </a:bodyPr>
           <a:lstStyle/>
           <a:p>
             <a:pPr>
-              <a:defRPr sz="1000">
-                <a:solidFill>
-                  <a:srgbClr val="64748B"/>
+              <a:defRPr sz="950">
+                <a:solidFill>
+                  <a:srgbClr val="94A3B8"/>
                 </a:solidFill>
                 <a:latin typeface="Segoe UI"/>
               </a:defRPr>
             </a:pPr>
             <a:r>
-              <a:t>Christopher GILLERON  |  Walmart Store Sales Prediction (Machine Learning Supervisé)  |  Certification CDSD Bloc 3</a:t>
+              <a:t>Christopher GILLERON  |  Walmart Store Sales Prediction (Machine Learning Supervisé)  |  Certification CDSD Bloc 3  |  Temps alloué : 5 min</a:t>
             </a:r>
           </a:p>
         </p:txBody>
@@ -3747,7 +3839,7 @@
         <p:spPr>
           <a:xfrm>
             <a:off x="731520" y="1371600"/>
-            <a:ext cx="5212080" cy="4754880"/>
+            <a:ext cx="5212080" cy="4846320"/>
           </a:xfrm>
           <a:prstGeom prst="roundRect">
             <a:avLst/>
@@ -3755,7 +3847,7 @@
           <a:solidFill>
             <a:srgbClr val="1E293B"/>
           </a:solidFill>
-          <a:ln w="19050">
+          <a:ln w="12700">
             <a:solidFill>
               <a:srgbClr val="334155"/>
             </a:solidFill>
@@ -3791,8 +3883,8 @@
         </p:nvSpPr>
         <p:spPr>
           <a:xfrm>
-            <a:off x="914400" y="1536192"/>
-            <a:ext cx="4846320" cy="365760"/>
+            <a:off x="914400" y="1554480"/>
+            <a:ext cx="4846320" cy="4480560"/>
           </a:xfrm>
           <a:prstGeom prst="rect">
             <a:avLst/>
@@ -3806,47 +3898,25 @@
           <a:lstStyle/>
           <a:p>
             <a:pPr>
-              <a:defRPr sz="1100" b="1">
+              <a:defRPr sz="1400" b="1">
                 <a:solidFill>
                   <a:srgbClr val="38BDF8"/>
                 </a:solidFill>
-                <a:latin typeface="Segoe UI"/>
               </a:defRPr>
             </a:pPr>
             <a:r>
               <a:t>01 | CONTEXTE MÉTIER &amp; PROBLÉMATIQUE</a:t>
             </a:r>
           </a:p>
-        </p:txBody>
-      </p:sp>
-      <p:sp>
-        <p:nvSpPr>
-          <p:cNvPr id="9" name="TextBox 8"/>
-          <p:cNvSpPr txBox="1"/>
-          <p:nvPr/>
-        </p:nvSpPr>
-        <p:spPr>
-          <a:xfrm>
-            <a:off x="914400" y="1920240"/>
-            <a:ext cx="4846320" cy="4023360"/>
-          </a:xfrm>
-          <a:prstGeom prst="rect">
-            <a:avLst/>
-          </a:prstGeom>
-          <a:noFill/>
-        </p:spPr>
-        <p:txBody>
-          <a:bodyPr wrap="square">
-            <a:spAutoFit/>
-          </a:bodyPr>
-          <a:lstStyle/>
-          <a:p>
-            <a:pPr>
-              <a:defRPr sz="1000" b="1">
-                <a:solidFill>
-                  <a:srgbClr val="38BDF8"/>
-                </a:solidFill>
-                <a:latin typeface="Segoe UI"/>
+          <a:p>
+            <a:pPr>
+              <a:spcBef>
+                <a:spcPts val="1000"/>
+              </a:spcBef>
+              <a:defRPr b="1" sz="1100">
+                <a:solidFill>
+                  <a:srgbClr val="F8FAFC"/>
+                </a:solidFill>
               </a:defRPr>
             </a:pPr>
             <a:r>
@@ -3855,24 +3925,25 @@
           </a:p>
           <a:p>
             <a:pPr>
-              <a:defRPr sz="900">
+              <a:defRPr sz="1000">
+                <a:solidFill>
+                  <a:srgbClr val="94A3B8"/>
+                </a:solidFill>
+              </a:defRPr>
+            </a:pPr>
+            <a:r>
+              <a:t>Walmart doit anticiper les ventes hebdomadaires de ses magasins pour ajuster les flux d'approvisionnement et éviter les ruptures coûteuses.</a:t>
+            </a:r>
+          </a:p>
+          <a:p>
+            <a:pPr>
+              <a:spcBef>
+                <a:spcPts val="1000"/>
+              </a:spcBef>
+              <a:defRPr b="1" sz="1100">
                 <a:solidFill>
                   <a:srgbClr val="F8FAFC"/>
                 </a:solidFill>
-                <a:latin typeface="Segoe UI"/>
-              </a:defRPr>
-            </a:pPr>
-            <a:r>
-              <a:t>Walmart doit anticiper les ventes hebdomadaires de ses magasins pour ajuster les flux d'approvisionnement et éviter les ruptures coûteuses.</a:t>
-            </a:r>
-          </a:p>
-          <a:p>
-            <a:pPr>
-              <a:defRPr sz="1000" b="1">
-                <a:solidFill>
-                  <a:srgbClr val="38BDF8"/>
-                </a:solidFill>
-                <a:latin typeface="Segoe UI"/>
               </a:defRPr>
             </a:pPr>
             <a:r>
@@ -3881,24 +3952,25 @@
           </a:p>
           <a:p>
             <a:pPr>
-              <a:defRPr sz="900">
+              <a:defRPr sz="1000">
+                <a:solidFill>
+                  <a:srgbClr val="94A3B8"/>
+                </a:solidFill>
+              </a:defRPr>
+            </a:pPr>
+            <a:r>
+              <a:t>Quantifier l'impact des facteurs macroéconomiques (chômage, CPI, carburant) pour piloter le calendrier promotionnel.</a:t>
+            </a:r>
+          </a:p>
+          <a:p>
+            <a:pPr>
+              <a:spcBef>
+                <a:spcPts val="1000"/>
+              </a:spcBef>
+              <a:defRPr b="1" sz="1100">
                 <a:solidFill>
                   <a:srgbClr val="F8FAFC"/>
                 </a:solidFill>
-                <a:latin typeface="Segoe UI"/>
-              </a:defRPr>
-            </a:pPr>
-            <a:r>
-              <a:t>Quantifier l'impact des facteurs macroéconomiques (chômage, CPI, carburant) pour piloter le calendrier promotionnel.</a:t>
-            </a:r>
-          </a:p>
-          <a:p>
-            <a:pPr>
-              <a:defRPr sz="1000" b="1">
-                <a:solidFill>
-                  <a:srgbClr val="38BDF8"/>
-                </a:solidFill>
-                <a:latin typeface="Segoe UI"/>
               </a:defRPr>
             </a:pPr>
             <a:r>
@@ -3907,29 +3979,55 @@
           </a:p>
           <a:p>
             <a:pPr>
-              <a:defRPr sz="900">
+              <a:defRPr sz="1000">
+                <a:solidFill>
+                  <a:srgbClr val="94A3B8"/>
+                </a:solidFill>
+              </a:defRPr>
+            </a:pPr>
+            <a:r>
+              <a:t>Dataset de 150 observations combinant ventes, magasins, calendrier et indicateurs économiques régionaux.</a:t>
+            </a:r>
+          </a:p>
+          <a:p>
+            <a:pPr>
+              <a:spcBef>
+                <a:spcPts val="1000"/>
+              </a:spcBef>
+              <a:defRPr b="1" sz="1100">
                 <a:solidFill>
                   <a:srgbClr val="F8FAFC"/>
                 </a:solidFill>
-                <a:latin typeface="Segoe UI"/>
-              </a:defRPr>
-            </a:pPr>
-            <a:r>
-              <a:t>Dataset de 150 observations combinant ventes, magasins, calendrier et indicateurs économiques.</a:t>
-            </a:r>
-          </a:p>
-        </p:txBody>
-      </p:sp>
-      <p:sp>
-        <p:nvSpPr>
-          <p:cNvPr id="10" name="Rounded Rectangle 9"/>
+              </a:defRPr>
+            </a:pPr>
+            <a:r>
+              <a:t>Objectif Scientifique :</a:t>
+            </a:r>
+          </a:p>
+          <a:p>
+            <a:pPr>
+              <a:defRPr sz="1000">
+                <a:solidFill>
+                  <a:srgbClr val="94A3B8"/>
+                </a:solidFill>
+              </a:defRPr>
+            </a:pPr>
+            <a:r>
+              <a:t>Construire un modèle prédictif supervisé régularisé expliquant au moins 85% de la variance des ventes sur jeu de test.</a:t>
+            </a:r>
+          </a:p>
+        </p:txBody>
+      </p:sp>
+      <p:sp>
+        <p:nvSpPr>
+          <p:cNvPr id="9" name="Rounded Rectangle 8"/>
           <p:cNvSpPr/>
           <p:nvPr/>
         </p:nvSpPr>
         <p:spPr>
           <a:xfrm>
             <a:off x="6217920" y="1371600"/>
-            <a:ext cx="5242255" cy="4754880"/>
+            <a:ext cx="5242255" cy="4846320"/>
           </a:xfrm>
           <a:prstGeom prst="roundRect">
             <a:avLst/>
@@ -3937,7 +4035,7 @@
           <a:solidFill>
             <a:srgbClr val="1E293B"/>
           </a:solidFill>
-          <a:ln w="19050">
+          <a:ln w="12700">
             <a:solidFill>
               <a:srgbClr val="334155"/>
             </a:solidFill>
@@ -3967,14 +4065,14 @@
       </p:sp>
       <p:sp>
         <p:nvSpPr>
-          <p:cNvPr id="11" name="TextBox 10"/>
+          <p:cNvPr id="10" name="TextBox 9"/>
           <p:cNvSpPr txBox="1"/>
           <p:nvPr/>
         </p:nvSpPr>
         <p:spPr>
           <a:xfrm>
-            <a:off x="6400800" y="1536192"/>
-            <a:ext cx="4876495" cy="365760"/>
+            <a:off x="6400800" y="1554480"/>
+            <a:ext cx="4876495" cy="4480560"/>
           </a:xfrm>
           <a:prstGeom prst="rect">
             <a:avLst/>
@@ -3988,47 +4086,25 @@
           <a:lstStyle/>
           <a:p>
             <a:pPr>
-              <a:defRPr sz="1100" b="1">
+              <a:defRPr sz="1400" b="1">
                 <a:solidFill>
                   <a:srgbClr val="38BDF8"/>
                 </a:solidFill>
-                <a:latin typeface="Segoe UI"/>
               </a:defRPr>
             </a:pPr>
             <a:r>
               <a:t>02 | RÈGLE SUR LA CIBLE &amp; DÉCOMPOSITION DATE</a:t>
             </a:r>
           </a:p>
-        </p:txBody>
-      </p:sp>
-      <p:sp>
-        <p:nvSpPr>
-          <p:cNvPr id="12" name="TextBox 11"/>
-          <p:cNvSpPr txBox="1"/>
-          <p:nvPr/>
-        </p:nvSpPr>
-        <p:spPr>
-          <a:xfrm>
-            <a:off x="6400800" y="1920240"/>
-            <a:ext cx="4876495" cy="4023360"/>
-          </a:xfrm>
-          <a:prstGeom prst="rect">
-            <a:avLst/>
-          </a:prstGeom>
-          <a:noFill/>
-        </p:spPr>
-        <p:txBody>
-          <a:bodyPr wrap="square">
-            <a:spAutoFit/>
-          </a:bodyPr>
-          <a:lstStyle/>
-          <a:p>
-            <a:pPr>
-              <a:defRPr sz="1000" b="1">
-                <a:solidFill>
-                  <a:srgbClr val="38BDF8"/>
-                </a:solidFill>
-                <a:latin typeface="Segoe UI"/>
+          <a:p>
+            <a:pPr>
+              <a:spcBef>
+                <a:spcPts val="800"/>
+              </a:spcBef>
+              <a:defRPr b="1" sz="1100">
+                <a:solidFill>
+                  <a:srgbClr val="F8FAFC"/>
+                </a:solidFill>
               </a:defRPr>
             </a:pPr>
             <a:r>
@@ -4037,24 +4113,25 @@
           </a:p>
           <a:p>
             <a:pPr>
-              <a:defRPr sz="900">
+              <a:defRPr sz="1000">
+                <a:solidFill>
+                  <a:srgbClr val="94A3B8"/>
+                </a:solidFill>
+              </a:defRPr>
+            </a:pPr>
+            <a:r>
+              <a:t>Suppression stricte des 14 lignes où Weekly_Sales est manquante (passage de 150 à 136 lignes) : jamais d'imputation artificielle sur la variable cible pour ne pas introduire de biais.</a:t>
+            </a:r>
+          </a:p>
+          <a:p>
+            <a:pPr>
+              <a:spcBef>
+                <a:spcPts val="800"/>
+              </a:spcBef>
+              <a:defRPr b="1" sz="1100">
                 <a:solidFill>
                   <a:srgbClr val="F8FAFC"/>
                 </a:solidFill>
-                <a:latin typeface="Segoe UI"/>
-              </a:defRPr>
-            </a:pPr>
-            <a:r>
-              <a:t>Suppression stricte des 14 lignes où Weekly_Sales est manquante (passage de 150 à 136 lignes) : jamais d'imputation sur la cible pour éviter les biais de prédiction.</a:t>
-            </a:r>
-          </a:p>
-          <a:p>
-            <a:pPr>
-              <a:defRPr sz="1000" b="1">
-                <a:solidFill>
-                  <a:srgbClr val="38BDF8"/>
-                </a:solidFill>
-                <a:latin typeface="Segoe UI"/>
               </a:defRPr>
             </a:pPr>
             <a:r>
@@ -4063,24 +4140,25 @@
           </a:p>
           <a:p>
             <a:pPr>
-              <a:defRPr sz="900">
+              <a:defRPr sz="1000">
+                <a:solidFill>
+                  <a:srgbClr val="94A3B8"/>
+                </a:solidFill>
+              </a:defRPr>
+            </a:pPr>
+            <a:r>
+              <a:t>La colonne Date brute ne peut pas entrer telle quelle dans le modèle de régression.</a:t>
+            </a:r>
+          </a:p>
+          <a:p>
+            <a:pPr>
+              <a:spcBef>
+                <a:spcPts val="800"/>
+              </a:spcBef>
+              <a:defRPr b="1" sz="1100">
                 <a:solidFill>
                   <a:srgbClr val="F8FAFC"/>
                 </a:solidFill>
-                <a:latin typeface="Segoe UI"/>
-              </a:defRPr>
-            </a:pPr>
-            <a:r>
-              <a:t>La colonne Date brute ne peut pas entrer telle quelle dans le modèle de régression.</a:t>
-            </a:r>
-          </a:p>
-          <a:p>
-            <a:pPr>
-              <a:defRPr sz="1000" b="1">
-                <a:solidFill>
-                  <a:srgbClr val="38BDF8"/>
-                </a:solidFill>
-                <a:latin typeface="Segoe UI"/>
               </a:defRPr>
             </a:pPr>
             <a:r>
@@ -4089,23 +4167,49 @@
           </a:p>
           <a:p>
             <a:pPr>
-              <a:defRPr sz="900">
+              <a:defRPr sz="1000">
+                <a:solidFill>
+                  <a:srgbClr val="94A3B8"/>
+                </a:solidFill>
+              </a:defRPr>
+            </a:pPr>
+            <a:r>
+              <a:t>• Year : Capture la tendance pluriannuelle (2010, 2011, 2012).</a:t>
+            </a:r>
+            <a:br/>
+            <a:r>
+              <a:t>• Month : Modélise la saisonnalité annuelle.</a:t>
+            </a:r>
+            <a:br/>
+            <a:r>
+              <a:t>• Day &amp; DayOfWeek : Isolent les effets de calendrier et début/fin de mois.</a:t>
+            </a:r>
+          </a:p>
+          <a:p>
+            <a:pPr>
+              <a:spcBef>
+                <a:spcPts val="800"/>
+              </a:spcBef>
+              <a:defRPr b="1" sz="1100">
                 <a:solidFill>
                   <a:srgbClr val="F8FAFC"/>
                 </a:solidFill>
-                <a:latin typeface="Segoe UI"/>
-              </a:defRPr>
-            </a:pPr>
-            <a:r>
-              <a:t>• Year : Capture la tendance pluriannuelle (2010, 2011, 2012).</a:t>
-            </a:r>
-            <a:br/>
-            <a:r>
-              <a:t>• Month : Modélise la saisonnalité annuelle.</a:t>
-            </a:r>
-            <a:br/>
-            <a:r>
-              <a:t>• Day &amp; DayOfWeek : Isolent les effets de calendrier et début/fin de mois.</a:t>
+              </a:defRPr>
+            </a:pPr>
+            <a:r>
+              <a:t>Résultat de l'Étape :</a:t>
+            </a:r>
+          </a:p>
+          <a:p>
+            <a:pPr>
+              <a:defRPr sz="1000">
+                <a:solidFill>
+                  <a:srgbClr val="94A3B8"/>
+                </a:solidFill>
+              </a:defRPr>
+            </a:pPr>
+            <a:r>
+              <a:t>Dataset épuré de 136 observations enrichi de features temporelles numériques exploitables.</a:t>
             </a:r>
           </a:p>
         </p:txBody>
@@ -4188,7 +4292,7 @@
           <a:noFill/>
         </p:spPr>
         <p:txBody>
-          <a:bodyPr wrap="square">
+          <a:bodyPr wrap="square" lIns="0" tIns="0" rIns="0" bIns="0">
             <a:spAutoFit/>
           </a:bodyPr>
           <a:lstStyle/>
@@ -4224,13 +4328,13 @@
           <a:noFill/>
         </p:spPr>
         <p:txBody>
-          <a:bodyPr wrap="square">
+          <a:bodyPr wrap="square" lIns="0" tIns="0" rIns="0" bIns="0">
             <a:spAutoFit/>
           </a:bodyPr>
           <a:lstStyle/>
           <a:p>
             <a:pPr>
-              <a:defRPr sz="2100" b="1">
+              <a:defRPr sz="1800" b="1">
                 <a:solidFill>
                   <a:srgbClr val="F8FAFC"/>
                 </a:solidFill>
@@ -4260,7 +4364,7 @@
           <a:noFill/>
         </p:spPr>
         <p:txBody>
-          <a:bodyPr wrap="square">
+          <a:bodyPr wrap="none" lIns="0" tIns="0" rIns="0" bIns="0">
             <a:spAutoFit/>
           </a:bodyPr>
           <a:lstStyle/>
@@ -4296,21 +4400,21 @@
           <a:noFill/>
         </p:spPr>
         <p:txBody>
-          <a:bodyPr wrap="square">
+          <a:bodyPr wrap="none" lIns="0" tIns="0" rIns="0" bIns="0">
             <a:spAutoFit/>
           </a:bodyPr>
           <a:lstStyle/>
           <a:p>
             <a:pPr>
-              <a:defRPr sz="1000">
-                <a:solidFill>
-                  <a:srgbClr val="64748B"/>
+              <a:defRPr sz="950">
+                <a:solidFill>
+                  <a:srgbClr val="94A3B8"/>
                 </a:solidFill>
                 <a:latin typeface="Segoe UI"/>
               </a:defRPr>
             </a:pPr>
             <a:r>
-              <a:t>Christopher GILLERON  |  Walmart Store Sales Prediction (Machine Learning Supervisé)  |  Certification CDSD Bloc 3</a:t>
+              <a:t>Christopher GILLERON  |  Walmart Store Sales Prediction (Machine Learning Supervisé)  |  Certification CDSD Bloc 3  |  Temps alloué : 5 min</a:t>
             </a:r>
           </a:p>
         </p:txBody>
@@ -4324,7 +4428,7 @@
         <p:spPr>
           <a:xfrm>
             <a:off x="731520" y="1371600"/>
-            <a:ext cx="5212080" cy="4754880"/>
+            <a:ext cx="5212080" cy="4846320"/>
           </a:xfrm>
           <a:prstGeom prst="roundRect">
             <a:avLst/>
@@ -4332,7 +4436,7 @@
           <a:solidFill>
             <a:srgbClr val="1E293B"/>
           </a:solidFill>
-          <a:ln w="19050">
+          <a:ln w="12700">
             <a:solidFill>
               <a:srgbClr val="334155"/>
             </a:solidFill>
@@ -4368,8 +4472,8 @@
         </p:nvSpPr>
         <p:spPr>
           <a:xfrm>
-            <a:off x="914400" y="1536192"/>
-            <a:ext cx="4846320" cy="365760"/>
+            <a:off x="914400" y="1554480"/>
+            <a:ext cx="4846320" cy="4480560"/>
           </a:xfrm>
           <a:prstGeom prst="rect">
             <a:avLst/>
@@ -4383,47 +4487,25 @@
           <a:lstStyle/>
           <a:p>
             <a:pPr>
-              <a:defRPr sz="1100" b="1">
+              <a:defRPr sz="1400" b="1">
                 <a:solidFill>
                   <a:srgbClr val="38BDF8"/>
                 </a:solidFill>
-                <a:latin typeface="Segoe UI"/>
               </a:defRPr>
             </a:pPr>
             <a:r>
               <a:t>01 | RÈGLE DES 3 ÉCARTS-TYPES [X̄ ± 3Σ]</a:t>
             </a:r>
           </a:p>
-        </p:txBody>
-      </p:sp>
-      <p:sp>
-        <p:nvSpPr>
-          <p:cNvPr id="9" name="TextBox 8"/>
-          <p:cNvSpPr txBox="1"/>
-          <p:nvPr/>
-        </p:nvSpPr>
-        <p:spPr>
-          <a:xfrm>
-            <a:off x="914400" y="1920240"/>
-            <a:ext cx="4846320" cy="4023360"/>
-          </a:xfrm>
-          <a:prstGeom prst="rect">
-            <a:avLst/>
-          </a:prstGeom>
-          <a:noFill/>
-        </p:spPr>
-        <p:txBody>
-          <a:bodyPr wrap="square">
-            <a:spAutoFit/>
-          </a:bodyPr>
-          <a:lstStyle/>
-          <a:p>
-            <a:pPr>
-              <a:defRPr sz="1000" b="1">
-                <a:solidFill>
-                  <a:srgbClr val="38BDF8"/>
-                </a:solidFill>
-                <a:latin typeface="Segoe UI"/>
+          <a:p>
+            <a:pPr>
+              <a:spcBef>
+                <a:spcPts val="800"/>
+              </a:spcBef>
+              <a:defRPr b="1" sz="1100">
+                <a:solidFill>
+                  <a:srgbClr val="F8FAFC"/>
+                </a:solidFill>
               </a:defRPr>
             </a:pPr>
             <a:r>
@@ -4432,24 +4514,25 @@
           </a:p>
           <a:p>
             <a:pPr>
-              <a:defRPr sz="900">
+              <a:defRPr sz="1000">
+                <a:solidFill>
+                  <a:srgbClr val="94A3B8"/>
+                </a:solidFill>
+              </a:defRPr>
+            </a:pPr>
+            <a:r>
+              <a:t>Éliminer les observations extrêmes situées au-delà de 3 écarts-types de la moyenne sur les 4 colonnes continues : Temperature, Fuel_Price, CPI, Unemployment.</a:t>
+            </a:r>
+          </a:p>
+          <a:p>
+            <a:pPr>
+              <a:spcBef>
+                <a:spcPts val="800"/>
+              </a:spcBef>
+              <a:defRPr b="1" sz="1100">
                 <a:solidFill>
                   <a:srgbClr val="F8FAFC"/>
                 </a:solidFill>
-                <a:latin typeface="Segoe UI"/>
-              </a:defRPr>
-            </a:pPr>
-            <a:r>
-              <a:t>Éliminer les observations extrêmes situées au-delà de 3 écarts-types de la moyenne sur les 4 colonnes continues : Temperature, Fuel_Price, CPI, Unemployment.</a:t>
-            </a:r>
-          </a:p>
-          <a:p>
-            <a:pPr>
-              <a:defRPr sz="1000" b="1">
-                <a:solidFill>
-                  <a:srgbClr val="38BDF8"/>
-                </a:solidFill>
-                <a:latin typeface="Segoe UI"/>
               </a:defRPr>
             </a:pPr>
             <a:r>
@@ -4458,24 +4541,25 @@
           </a:p>
           <a:p>
             <a:pPr>
-              <a:defRPr sz="900">
+              <a:defRPr sz="1000">
+                <a:solidFill>
+                  <a:srgbClr val="94A3B8"/>
+                </a:solidFill>
+              </a:defRPr>
+            </a:pPr>
+            <a:r>
+              <a:t>5 valeurs aberrantes supprimées tout en préservant les NaN des autres colonnes pour l'imputation ultérieure.</a:t>
+            </a:r>
+          </a:p>
+          <a:p>
+            <a:pPr>
+              <a:spcBef>
+                <a:spcPts val="800"/>
+              </a:spcBef>
+              <a:defRPr b="1" sz="1100">
                 <a:solidFill>
                   <a:srgbClr val="F8FAFC"/>
                 </a:solidFill>
-                <a:latin typeface="Segoe UI"/>
-              </a:defRPr>
-            </a:pPr>
-            <a:r>
-              <a:t>5 valeurs aberrantes supprimées tout en préservant les NaN des autres colonnes pour l'imputation ultérieure.</a:t>
-            </a:r>
-          </a:p>
-          <a:p>
-            <a:pPr>
-              <a:defRPr sz="1000" b="1">
-                <a:solidFill>
-                  <a:srgbClr val="38BDF8"/>
-                </a:solidFill>
-                <a:latin typeface="Segoe UI"/>
               </a:defRPr>
             </a:pPr>
             <a:r>
@@ -4484,29 +4568,55 @@
           </a:p>
           <a:p>
             <a:pPr>
-              <a:defRPr sz="900">
+              <a:defRPr sz="1000">
+                <a:solidFill>
+                  <a:srgbClr val="94A3B8"/>
+                </a:solidFill>
+              </a:defRPr>
+            </a:pPr>
+            <a:r>
+              <a:t>131 observations prêtes pour l'apprentissage supervisé sans déformation due aux valeurs extrêmes.</a:t>
+            </a:r>
+          </a:p>
+          <a:p>
+            <a:pPr>
+              <a:spcBef>
+                <a:spcPts val="800"/>
+              </a:spcBef>
+              <a:defRPr b="1" sz="1100">
                 <a:solidFill>
                   <a:srgbClr val="F8FAFC"/>
                 </a:solidFill>
-                <a:latin typeface="Segoe UI"/>
-              </a:defRPr>
-            </a:pPr>
-            <a:r>
-              <a:t>131 observations prêtes pour l'apprentissage supervisé.</a:t>
-            </a:r>
-          </a:p>
-        </p:txBody>
-      </p:sp>
-      <p:sp>
-        <p:nvSpPr>
-          <p:cNvPr id="10" name="Rounded Rectangle 9"/>
+              </a:defRPr>
+            </a:pPr>
+            <a:r>
+              <a:t>Gain de Robustesse :</a:t>
+            </a:r>
+          </a:p>
+          <a:p>
+            <a:pPr>
+              <a:defRPr sz="1000">
+                <a:solidFill>
+                  <a:srgbClr val="94A3B8"/>
+                </a:solidFill>
+              </a:defRPr>
+            </a:pPr>
+            <a:r>
+              <a:t>Protège la régression linéaire contre l'effet de levier disproportionné de points marginaux.</a:t>
+            </a:r>
+          </a:p>
+        </p:txBody>
+      </p:sp>
+      <p:sp>
+        <p:nvSpPr>
+          <p:cNvPr id="9" name="Rounded Rectangle 8"/>
           <p:cNvSpPr/>
           <p:nvPr/>
         </p:nvSpPr>
         <p:spPr>
           <a:xfrm>
             <a:off x="6217920" y="1371600"/>
-            <a:ext cx="5242255" cy="4754880"/>
+            <a:ext cx="5242255" cy="4846320"/>
           </a:xfrm>
           <a:prstGeom prst="roundRect">
             <a:avLst/>
@@ -4514,7 +4624,7 @@
           <a:solidFill>
             <a:srgbClr val="1E293B"/>
           </a:solidFill>
-          <a:ln w="19050">
+          <a:ln w="12700">
             <a:solidFill>
               <a:srgbClr val="334155"/>
             </a:solidFill>
@@ -4544,14 +4654,14 @@
       </p:sp>
       <p:sp>
         <p:nvSpPr>
-          <p:cNvPr id="11" name="TextBox 10"/>
+          <p:cNvPr id="10" name="TextBox 9"/>
           <p:cNvSpPr txBox="1"/>
           <p:nvPr/>
         </p:nvSpPr>
         <p:spPr>
           <a:xfrm>
-            <a:off x="6400800" y="1536192"/>
-            <a:ext cx="4876495" cy="365760"/>
+            <a:off x="6400800" y="1554480"/>
+            <a:ext cx="4876495" cy="4480560"/>
           </a:xfrm>
           <a:prstGeom prst="rect">
             <a:avLst/>
@@ -4565,47 +4675,25 @@
           <a:lstStyle/>
           <a:p>
             <a:pPr>
-              <a:defRPr sz="1100" b="1">
+              <a:defRPr sz="1400" b="1">
                 <a:solidFill>
                   <a:srgbClr val="38BDF8"/>
                 </a:solidFill>
-                <a:latin typeface="Segoe UI"/>
               </a:defRPr>
             </a:pPr>
             <a:r>
               <a:t>02 | PIPELINE SCIKIT-LEARN &amp; SPLIT 80/20</a:t>
             </a:r>
           </a:p>
-        </p:txBody>
-      </p:sp>
-      <p:sp>
-        <p:nvSpPr>
-          <p:cNvPr id="12" name="TextBox 11"/>
-          <p:cNvSpPr txBox="1"/>
-          <p:nvPr/>
-        </p:nvSpPr>
-        <p:spPr>
-          <a:xfrm>
-            <a:off x="6400800" y="1920240"/>
-            <a:ext cx="4876495" cy="4023360"/>
-          </a:xfrm>
-          <a:prstGeom prst="rect">
-            <a:avLst/>
-          </a:prstGeom>
-          <a:noFill/>
-        </p:spPr>
-        <p:txBody>
-          <a:bodyPr wrap="square">
-            <a:spAutoFit/>
-          </a:bodyPr>
-          <a:lstStyle/>
-          <a:p>
-            <a:pPr>
-              <a:defRPr sz="1000" b="1">
-                <a:solidFill>
-                  <a:srgbClr val="38BDF8"/>
-                </a:solidFill>
-                <a:latin typeface="Segoe UI"/>
+          <a:p>
+            <a:pPr>
+              <a:spcBef>
+                <a:spcPts val="800"/>
+              </a:spcBef>
+              <a:defRPr b="1" sz="1100">
+                <a:solidFill>
+                  <a:srgbClr val="F8FAFC"/>
+                </a:solidFill>
               </a:defRPr>
             </a:pPr>
             <a:r>
@@ -4614,24 +4702,25 @@
           </a:p>
           <a:p>
             <a:pPr>
-              <a:defRPr sz="900">
+              <a:defRPr sz="1000">
+                <a:solidFill>
+                  <a:srgbClr val="94A3B8"/>
+                </a:solidFill>
+              </a:defRPr>
+            </a:pPr>
+            <a:r>
+              <a:t>104 lignes d'entraînement (80%) et 27 lignes de test indépendantes (20%) avec random_state=42.</a:t>
+            </a:r>
+          </a:p>
+          <a:p>
+            <a:pPr>
+              <a:spcBef>
+                <a:spcPts val="800"/>
+              </a:spcBef>
+              <a:defRPr b="1" sz="1100">
                 <a:solidFill>
                   <a:srgbClr val="F8FAFC"/>
                 </a:solidFill>
-                <a:latin typeface="Segoe UI"/>
-              </a:defRPr>
-            </a:pPr>
-            <a:r>
-              <a:t>104 lignes d'entraînement (80%) et 27 lignes de test indépendantes (20%) avec random_state=42.</a:t>
-            </a:r>
-          </a:p>
-          <a:p>
-            <a:pPr>
-              <a:defRPr sz="1000" b="1">
-                <a:solidFill>
-                  <a:srgbClr val="38BDF8"/>
-                </a:solidFill>
-                <a:latin typeface="Segoe UI"/>
               </a:defRPr>
             </a:pPr>
             <a:r>
@@ -4640,24 +4729,25 @@
           </a:p>
           <a:p>
             <a:pPr>
-              <a:defRPr sz="900">
+              <a:defRPr sz="1000">
+                <a:solidFill>
+                  <a:srgbClr val="94A3B8"/>
+                </a:solidFill>
+              </a:defRPr>
+            </a:pPr>
+            <a:r>
+              <a:t>Temperature, Fuel_Price, CPI, Unemployment, Year, Month, Day, DayOfWeek → SimpleImputer(strategy='median') + StandardScaler().</a:t>
+            </a:r>
+          </a:p>
+          <a:p>
+            <a:pPr>
+              <a:spcBef>
+                <a:spcPts val="800"/>
+              </a:spcBef>
+              <a:defRPr b="1" sz="1100">
                 <a:solidFill>
                   <a:srgbClr val="F8FAFC"/>
                 </a:solidFill>
-                <a:latin typeface="Segoe UI"/>
-              </a:defRPr>
-            </a:pPr>
-            <a:r>
-              <a:t>Temperature, Fuel_Price, CPI, Unemployment, Year, Month, Day, DayOfWeek $_x000D_ightarrow$ SimpleImputer(median) + StandardScaler().</a:t>
-            </a:r>
-          </a:p>
-          <a:p>
-            <a:pPr>
-              <a:defRPr sz="1000" b="1">
-                <a:solidFill>
-                  <a:srgbClr val="38BDF8"/>
-                </a:solidFill>
-                <a:latin typeface="Segoe UI"/>
               </a:defRPr>
             </a:pPr>
             <a:r>
@@ -4666,15 +4756,41 @@
           </a:p>
           <a:p>
             <a:pPr>
-              <a:defRPr sz="900">
+              <a:defRPr sz="1000">
+                <a:solidFill>
+                  <a:srgbClr val="94A3B8"/>
+                </a:solidFill>
+              </a:defRPr>
+            </a:pPr>
+            <a:r>
+              <a:t>Store et Holiday_Flag → SimpleImputer(strategy='most_frequent') + OneHotEncoder(drop='first').</a:t>
+            </a:r>
+          </a:p>
+          <a:p>
+            <a:pPr>
+              <a:spcBef>
+                <a:spcPts val="800"/>
+              </a:spcBef>
+              <a:defRPr b="1" sz="1100">
                 <a:solidFill>
                   <a:srgbClr val="F8FAFC"/>
                 </a:solidFill>
-                <a:latin typeface="Segoe UI"/>
-              </a:defRPr>
-            </a:pPr>
-            <a:r>
-              <a:t>Store et Holiday_Flag $_x000D_ightarrow$ SimpleImputer(most_frequent) + OneHotEncoder(drop='first').</a:t>
+              </a:defRPr>
+            </a:pPr>
+            <a:r>
+              <a:t>Anti-Data Leakage Garanti :</a:t>
+            </a:r>
+          </a:p>
+          <a:p>
+            <a:pPr>
+              <a:defRPr sz="1000">
+                <a:solidFill>
+                  <a:srgbClr val="94A3B8"/>
+                </a:solidFill>
+              </a:defRPr>
+            </a:pPr>
+            <a:r>
+              <a:t>L'imputation et le scaling sont ajustés exclusivement sur le jeu d'entraînement (fit_transform) puis appliqués sur le jeu de test (transform).</a:t>
             </a:r>
           </a:p>
         </p:txBody>
@@ -4757,7 +4873,7 @@
           <a:noFill/>
         </p:spPr>
         <p:txBody>
-          <a:bodyPr wrap="square">
+          <a:bodyPr wrap="square" lIns="0" tIns="0" rIns="0" bIns="0">
             <a:spAutoFit/>
           </a:bodyPr>
           <a:lstStyle/>
@@ -4793,13 +4909,13 @@
           <a:noFill/>
         </p:spPr>
         <p:txBody>
-          <a:bodyPr wrap="square">
+          <a:bodyPr wrap="square" lIns="0" tIns="0" rIns="0" bIns="0">
             <a:spAutoFit/>
           </a:bodyPr>
           <a:lstStyle/>
           <a:p>
             <a:pPr>
-              <a:defRPr sz="2100" b="1">
+              <a:defRPr sz="1800" b="1">
                 <a:solidFill>
                   <a:srgbClr val="F8FAFC"/>
                 </a:solidFill>
@@ -4829,7 +4945,7 @@
           <a:noFill/>
         </p:spPr>
         <p:txBody>
-          <a:bodyPr wrap="square">
+          <a:bodyPr wrap="none" lIns="0" tIns="0" rIns="0" bIns="0">
             <a:spAutoFit/>
           </a:bodyPr>
           <a:lstStyle/>
@@ -4865,21 +4981,21 @@
           <a:noFill/>
         </p:spPr>
         <p:txBody>
-          <a:bodyPr wrap="square">
+          <a:bodyPr wrap="none" lIns="0" tIns="0" rIns="0" bIns="0">
             <a:spAutoFit/>
           </a:bodyPr>
           <a:lstStyle/>
           <a:p>
             <a:pPr>
-              <a:defRPr sz="1000">
-                <a:solidFill>
-                  <a:srgbClr val="64748B"/>
+              <a:defRPr sz="950">
+                <a:solidFill>
+                  <a:srgbClr val="94A3B8"/>
                 </a:solidFill>
                 <a:latin typeface="Segoe UI"/>
               </a:defRPr>
             </a:pPr>
             <a:r>
-              <a:t>Christopher GILLERON  |  Walmart Store Sales Prediction (Machine Learning Supervisé)  |  Certification CDSD Bloc 3</a:t>
+              <a:t>Christopher GILLERON  |  Walmart Store Sales Prediction (Machine Learning Supervisé)  |  Certification CDSD Bloc 3  |  Temps alloué : 5 min</a:t>
             </a:r>
           </a:p>
         </p:txBody>
@@ -4893,7 +5009,7 @@
         <p:spPr>
           <a:xfrm>
             <a:off x="731520" y="1371600"/>
-            <a:ext cx="5212080" cy="4754880"/>
+            <a:ext cx="5212080" cy="4846320"/>
           </a:xfrm>
           <a:prstGeom prst="roundRect">
             <a:avLst/>
@@ -4901,7 +5017,7 @@
           <a:solidFill>
             <a:srgbClr val="1E293B"/>
           </a:solidFill>
-          <a:ln w="19050">
+          <a:ln w="12700">
             <a:solidFill>
               <a:srgbClr val="334155"/>
             </a:solidFill>
@@ -4937,8 +5053,8 @@
         </p:nvSpPr>
         <p:spPr>
           <a:xfrm>
-            <a:off x="914400" y="1536192"/>
-            <a:ext cx="4846320" cy="365760"/>
+            <a:off x="914400" y="1554480"/>
+            <a:ext cx="4846320" cy="4480560"/>
           </a:xfrm>
           <a:prstGeom prst="rect">
             <a:avLst/>
@@ -4952,47 +5068,25 @@
           <a:lstStyle/>
           <a:p>
             <a:pPr>
-              <a:defRPr sz="1100" b="1">
+              <a:defRPr sz="1300" b="1">
                 <a:solidFill>
                   <a:srgbClr val="38BDF8"/>
                 </a:solidFill>
-                <a:latin typeface="Segoe UI"/>
-              </a:defRPr>
-            </a:pPr>
-            <a:r>
-              <a:t>DISPARITÉ DES VENTES PAR MAGASIN</a:t>
-            </a:r>
-          </a:p>
-        </p:txBody>
-      </p:sp>
-      <p:sp>
-        <p:nvSpPr>
-          <p:cNvPr id="9" name="TextBox 8"/>
-          <p:cNvSpPr txBox="1"/>
-          <p:nvPr/>
-        </p:nvSpPr>
-        <p:spPr>
-          <a:xfrm>
-            <a:off x="914400" y="1920240"/>
-            <a:ext cx="4846320" cy="4023360"/>
-          </a:xfrm>
-          <a:prstGeom prst="rect">
-            <a:avLst/>
-          </a:prstGeom>
-          <a:noFill/>
-        </p:spPr>
-        <p:txBody>
-          <a:bodyPr wrap="square">
-            <a:spAutoFit/>
-          </a:bodyPr>
-          <a:lstStyle/>
-          <a:p>
-            <a:pPr>
-              <a:defRPr sz="1000" b="1">
-                <a:solidFill>
-                  <a:srgbClr val="38BDF8"/>
-                </a:solidFill>
-                <a:latin typeface="Segoe UI"/>
+              </a:defRPr>
+            </a:pPr>
+            <a:r>
+              <a:t>DISPARITÉ DES MAGASINS &amp; SIGNAUX MACRO</a:t>
+            </a:r>
+          </a:p>
+          <a:p>
+            <a:pPr>
+              <a:spcBef>
+                <a:spcPts val="600"/>
+              </a:spcBef>
+              <a:defRPr b="1" sz="1050">
+                <a:solidFill>
+                  <a:srgbClr val="F8FAFC"/>
+                </a:solidFill>
               </a:defRPr>
             </a:pPr>
             <a:r>
@@ -5001,24 +5095,25 @@
           </a:p>
           <a:p>
             <a:pPr>
-              <a:defRPr sz="900">
+              <a:defRPr sz="950">
+                <a:solidFill>
+                  <a:srgbClr val="94A3B8"/>
+                </a:solidFill>
+              </a:defRPr>
+            </a:pPr>
+            <a:r>
+              <a:t>Les ventes hebdomadaires moyennes s'échelonnent de 250 000 $ à plus de 2.1 M$ selon les magasins.</a:t>
+            </a:r>
+          </a:p>
+          <a:p>
+            <a:pPr>
+              <a:spcBef>
+                <a:spcPts val="600"/>
+              </a:spcBef>
+              <a:defRPr b="1" sz="1050">
                 <a:solidFill>
                   <a:srgbClr val="F8FAFC"/>
                 </a:solidFill>
-                <a:latin typeface="Segoe UI"/>
-              </a:defRPr>
-            </a:pPr>
-            <a:r>
-              <a:t>Les ventes hebdomadaires moyennes s'échelonnent de 250 000 $ à plus de 2.1 M$ selon les magasins.</a:t>
-            </a:r>
-          </a:p>
-          <a:p>
-            <a:pPr>
-              <a:defRPr sz="1000" b="1">
-                <a:solidFill>
-                  <a:srgbClr val="38BDF8"/>
-                </a:solidFill>
-                <a:latin typeface="Segoe UI"/>
               </a:defRPr>
             </a:pPr>
             <a:r>
@@ -5027,24 +5122,25 @@
           </a:p>
           <a:p>
             <a:pPr>
-              <a:defRPr sz="900">
+              <a:defRPr sz="950">
+                <a:solidFill>
+                  <a:srgbClr val="94A3B8"/>
+                </a:solidFill>
+              </a:defRPr>
+            </a:pPr>
+            <a:r>
+              <a:t>Les magasins 4, 13, 14 et 20 dépassent régulièrement 1.8 M$ par semaine (hypermarchés à fort trafic).</a:t>
+            </a:r>
+          </a:p>
+          <a:p>
+            <a:pPr>
+              <a:spcBef>
+                <a:spcPts val="600"/>
+              </a:spcBef>
+              <a:defRPr b="1" sz="1050">
                 <a:solidFill>
                   <a:srgbClr val="F8FAFC"/>
                 </a:solidFill>
-                <a:latin typeface="Segoe UI"/>
-              </a:defRPr>
-            </a:pPr>
-            <a:r>
-              <a:t>Les magasins 4, 13, 14 et 20 dépassent régulièrement 1.8M$ par semaine (hypermarchés à fort trafic).</a:t>
-            </a:r>
-          </a:p>
-          <a:p>
-            <a:pPr>
-              <a:defRPr sz="1000" b="1">
-                <a:solidFill>
-                  <a:srgbClr val="38BDF8"/>
-                </a:solidFill>
-                <a:latin typeface="Segoe UI"/>
               </a:defRPr>
             </a:pPr>
             <a:r>
@@ -5053,24 +5149,79 @@
           </a:p>
           <a:p>
             <a:pPr>
-              <a:defRPr sz="900">
+              <a:defRPr sz="950">
+                <a:solidFill>
+                  <a:srgbClr val="94A3B8"/>
+                </a:solidFill>
+              </a:defRPr>
+            </a:pPr>
+            <a:r>
+              <a:t>Les magasins 3, 5, 9 et 16 plafonnent sous 600 k$ par semaine.</a:t>
+            </a:r>
+          </a:p>
+          <a:p>
+            <a:pPr>
+              <a:spcBef>
+                <a:spcPts val="600"/>
+              </a:spcBef>
+              <a:defRPr b="1" sz="1050">
                 <a:solidFill>
                   <a:srgbClr val="F8FAFC"/>
                 </a:solidFill>
-                <a:latin typeface="Segoe UI"/>
-              </a:defRPr>
-            </a:pPr>
-            <a:r>
-              <a:t>Les magasins 3, 5, 9 et 16 plafonnent sous 600k$ par semaine.</a:t>
-            </a:r>
-          </a:p>
-          <a:p>
-            <a:pPr>
-              <a:defRPr sz="1000" b="1">
-                <a:solidFill>
-                  <a:srgbClr val="38BDF8"/>
-                </a:solidFill>
-                <a:latin typeface="Segoe UI"/>
+              </a:defRPr>
+            </a:pPr>
+            <a:r>
+              <a:t>Taux de Chômage (Unemployment) :</a:t>
+            </a:r>
+          </a:p>
+          <a:p>
+            <a:pPr>
+              <a:defRPr sz="950">
+                <a:solidFill>
+                  <a:srgbClr val="94A3B8"/>
+                </a:solidFill>
+              </a:defRPr>
+            </a:pPr>
+            <a:r>
+              <a:t>Corrélation négative nette (-0.16) : les bassins d'emploi fragiles subissent une contraction directe du panier moyen.</a:t>
+            </a:r>
+          </a:p>
+          <a:p>
+            <a:pPr>
+              <a:spcBef>
+                <a:spcPts val="600"/>
+              </a:spcBef>
+              <a:defRPr b="1" sz="1050">
+                <a:solidFill>
+                  <a:srgbClr val="F8FAFC"/>
+                </a:solidFill>
+              </a:defRPr>
+            </a:pPr>
+            <a:r>
+              <a:t>Semaines Fériées (Holiday_Flag) :</a:t>
+            </a:r>
+          </a:p>
+          <a:p>
+            <a:pPr>
+              <a:defRPr sz="950">
+                <a:solidFill>
+                  <a:srgbClr val="94A3B8"/>
+                </a:solidFill>
+              </a:defRPr>
+            </a:pPr>
+            <a:r>
+              <a:t>Pics de surconsommation lors de Thanksgiving et Noël (+15% à +25% de ventes hebdomadaires).</a:t>
+            </a:r>
+          </a:p>
+          <a:p>
+            <a:pPr>
+              <a:spcBef>
+                <a:spcPts val="600"/>
+              </a:spcBef>
+              <a:defRPr b="1" sz="1050">
+                <a:solidFill>
+                  <a:srgbClr val="F8FAFC"/>
+                </a:solidFill>
               </a:defRPr>
             </a:pPr>
             <a:r>
@@ -5079,29 +5230,28 @@
           </a:p>
           <a:p>
             <a:pPr>
-              <a:defRPr sz="900">
-                <a:solidFill>
-                  <a:srgbClr val="F8FAFC"/>
-                </a:solidFill>
-                <a:latin typeface="Segoe UI"/>
-              </a:defRPr>
-            </a:pPr>
-            <a:r>
-              <a:t>L'ancrage géographique et la surface du magasin constituent le 1er facteur explicatif du chiffre d'affaires.</a:t>
-            </a:r>
-          </a:p>
-        </p:txBody>
-      </p:sp>
-      <p:sp>
-        <p:nvSpPr>
-          <p:cNvPr id="10" name="Rounded Rectangle 9"/>
+              <a:defRPr sz="950">
+                <a:solidFill>
+                  <a:srgbClr val="94A3B8"/>
+                </a:solidFill>
+              </a:defRPr>
+            </a:pPr>
+            <a:r>
+              <a:t>L'ancrage géographique et la surface constituent le 1er facteur explicatif du CA, complétés par la saisonnalité.</a:t>
+            </a:r>
+          </a:p>
+        </p:txBody>
+      </p:sp>
+      <p:sp>
+        <p:nvSpPr>
+          <p:cNvPr id="9" name="Rounded Rectangle 8"/>
           <p:cNvSpPr/>
           <p:nvPr/>
         </p:nvSpPr>
         <p:spPr>
           <a:xfrm>
             <a:off x="6217920" y="1371600"/>
-            <a:ext cx="5242255" cy="4754880"/>
+            <a:ext cx="5242255" cy="4846320"/>
           </a:xfrm>
           <a:prstGeom prst="roundRect">
             <a:avLst/>
@@ -5109,7 +5259,7 @@
           <a:solidFill>
             <a:srgbClr val="1E293B"/>
           </a:solidFill>
-          <a:ln w="19050">
+          <a:ln w="12700">
             <a:solidFill>
               <a:srgbClr val="334155"/>
             </a:solidFill>
@@ -5139,167 +5289,142 @@
       </p:sp>
       <p:sp>
         <p:nvSpPr>
-          <p:cNvPr id="11" name="TextBox 10"/>
-          <p:cNvSpPr txBox="1"/>
-          <p:nvPr/>
-        </p:nvSpPr>
-        <p:spPr>
-          <a:xfrm>
-            <a:off x="6400800" y="1536192"/>
-            <a:ext cx="4876495" cy="365760"/>
+          <p:cNvPr id="10" name="Rounded Rectangle 9"/>
+          <p:cNvSpPr/>
+          <p:nvPr/>
+        </p:nvSpPr>
+        <p:spPr>
+          <a:xfrm>
+            <a:off x="6400800" y="1508760"/>
+            <a:ext cx="4876495" cy="2011680"/>
+          </a:xfrm>
+          <a:prstGeom prst="roundRect">
+            <a:avLst/>
+          </a:prstGeom>
+          <a:solidFill>
+            <a:srgbClr val="FFFFFF"/>
+          </a:solidFill>
+          <a:ln w="12700">
+            <a:solidFill>
+              <a:srgbClr val="CBD5E1"/>
+            </a:solidFill>
+          </a:ln>
+        </p:spPr>
+        <p:style>
+          <a:lnRef idx="1">
+            <a:schemeClr val="accent1"/>
+          </a:lnRef>
+          <a:fillRef idx="3">
+            <a:schemeClr val="accent1"/>
+          </a:fillRef>
+          <a:effectRef idx="2">
+            <a:schemeClr val="accent1"/>
+          </a:effectRef>
+          <a:fontRef idx="minor">
+            <a:schemeClr val="lt1"/>
+          </a:fontRef>
+        </p:style>
+        <p:txBody>
+          <a:bodyPr rtlCol="0" anchor="ctr"/>
+          <a:lstStyle/>
+          <a:p>
+            <a:pPr algn="ctr"/>
+          </a:p>
+        </p:txBody>
+      </p:sp>
+      <p:pic>
+        <p:nvPicPr>
+          <p:cNvPr id="11" name="Picture 10" descr="walmart_c9_1.png"/>
+          <p:cNvPicPr>
+            <a:picLocks noChangeAspect="1"/>
+          </p:cNvPicPr>
+          <p:nvPr/>
+        </p:nvPicPr>
+        <p:blipFill>
+          <a:blip r:embed="rId2"/>
+          <a:stretch>
+            <a:fillRect/>
+          </a:stretch>
+        </p:blipFill>
+        <p:spPr>
+          <a:xfrm>
+            <a:off x="6446520" y="1554480"/>
+            <a:ext cx="4785055" cy="1920240"/>
           </a:xfrm>
           <a:prstGeom prst="rect">
             <a:avLst/>
           </a:prstGeom>
-          <a:noFill/>
-        </p:spPr>
-        <p:txBody>
-          <a:bodyPr wrap="square">
-            <a:spAutoFit/>
-          </a:bodyPr>
-          <a:lstStyle/>
-          <a:p>
-            <a:pPr>
-              <a:defRPr sz="1100" b="1">
-                <a:solidFill>
-                  <a:srgbClr val="38BDF8"/>
-                </a:solidFill>
-                <a:latin typeface="Segoe UI"/>
-              </a:defRPr>
-            </a:pPr>
-            <a:r>
-              <a:t>SIGNAUX MACROÉCONOMIQUES &amp; CALENDRIER</a:t>
-            </a:r>
-          </a:p>
-        </p:txBody>
-      </p:sp>
-      <p:sp>
-        <p:nvSpPr>
-          <p:cNvPr id="12" name="TextBox 11"/>
-          <p:cNvSpPr txBox="1"/>
-          <p:nvPr/>
-        </p:nvSpPr>
-        <p:spPr>
-          <a:xfrm>
-            <a:off x="6400800" y="1920240"/>
-            <a:ext cx="4876495" cy="4023360"/>
+        </p:spPr>
+      </p:pic>
+      <p:sp>
+        <p:nvSpPr>
+          <p:cNvPr id="12" name="Rounded Rectangle 11"/>
+          <p:cNvSpPr/>
+          <p:nvPr/>
+        </p:nvSpPr>
+        <p:spPr>
+          <a:xfrm>
+            <a:off x="6400800" y="3657600"/>
+            <a:ext cx="4876495" cy="2423160"/>
+          </a:xfrm>
+          <a:prstGeom prst="roundRect">
+            <a:avLst/>
+          </a:prstGeom>
+          <a:solidFill>
+            <a:srgbClr val="FFFFFF"/>
+          </a:solidFill>
+          <a:ln w="12700">
+            <a:solidFill>
+              <a:srgbClr val="CBD5E1"/>
+            </a:solidFill>
+          </a:ln>
+        </p:spPr>
+        <p:style>
+          <a:lnRef idx="1">
+            <a:schemeClr val="accent1"/>
+          </a:lnRef>
+          <a:fillRef idx="3">
+            <a:schemeClr val="accent1"/>
+          </a:fillRef>
+          <a:effectRef idx="2">
+            <a:schemeClr val="accent1"/>
+          </a:effectRef>
+          <a:fontRef idx="minor">
+            <a:schemeClr val="lt1"/>
+          </a:fontRef>
+        </p:style>
+        <p:txBody>
+          <a:bodyPr rtlCol="0" anchor="ctr"/>
+          <a:lstStyle/>
+          <a:p>
+            <a:pPr algn="ctr"/>
+          </a:p>
+        </p:txBody>
+      </p:sp>
+      <p:pic>
+        <p:nvPicPr>
+          <p:cNvPr id="13" name="Picture 12" descr="walmart_c10_2.png"/>
+          <p:cNvPicPr>
+            <a:picLocks noChangeAspect="1"/>
+          </p:cNvPicPr>
+          <p:nvPr/>
+        </p:nvPicPr>
+        <p:blipFill>
+          <a:blip r:embed="rId3"/>
+          <a:stretch>
+            <a:fillRect/>
+          </a:stretch>
+        </p:blipFill>
+        <p:spPr>
+          <a:xfrm>
+            <a:off x="6903720" y="3703320"/>
+            <a:ext cx="3870655" cy="2331720"/>
           </a:xfrm>
           <a:prstGeom prst="rect">
             <a:avLst/>
           </a:prstGeom>
-          <a:noFill/>
-        </p:spPr>
-        <p:txBody>
-          <a:bodyPr wrap="square">
-            <a:spAutoFit/>
-          </a:bodyPr>
-          <a:lstStyle/>
-          <a:p>
-            <a:pPr>
-              <a:defRPr sz="1000" b="1">
-                <a:solidFill>
-                  <a:srgbClr val="FACC15"/>
-                </a:solidFill>
-                <a:latin typeface="Segoe UI"/>
-              </a:defRPr>
-            </a:pPr>
-            <a:r>
-              <a:t>Taux de Chômage (Unemployment) :</a:t>
-            </a:r>
-          </a:p>
-          <a:p>
-            <a:pPr>
-              <a:defRPr sz="900">
-                <a:solidFill>
-                  <a:srgbClr val="F8FAFC"/>
-                </a:solidFill>
-                <a:latin typeface="Segoe UI"/>
-              </a:defRPr>
-            </a:pPr>
-            <a:r>
-              <a:t>Corrélation négative nette (-0.16) : les bassins frappés par le chômage subissent une contraction directe du panier moyen.</a:t>
-            </a:r>
-          </a:p>
-          <a:p>
-            <a:pPr>
-              <a:defRPr sz="1000" b="1">
-                <a:solidFill>
-                  <a:srgbClr val="FACC15"/>
-                </a:solidFill>
-                <a:latin typeface="Segoe UI"/>
-              </a:defRPr>
-            </a:pPr>
-            <a:r>
-              <a:t>Indice des Prix (CPI) :</a:t>
-            </a:r>
-          </a:p>
-          <a:p>
-            <a:pPr>
-              <a:defRPr sz="900">
-                <a:solidFill>
-                  <a:srgbClr val="F8FAFC"/>
-                </a:solidFill>
-                <a:latin typeface="Segoe UI"/>
-              </a:defRPr>
-            </a:pPr>
-            <a:r>
-              <a:t>Légère corrélation négative (-0.08) traduisant l'arbitrage des ménages face à l'inflation.</a:t>
-            </a:r>
-          </a:p>
-          <a:p>
-            <a:pPr>
-              <a:defRPr sz="1000" b="1">
-                <a:solidFill>
-                  <a:srgbClr val="FACC15"/>
-                </a:solidFill>
-                <a:latin typeface="Segoe UI"/>
-              </a:defRPr>
-            </a:pPr>
-            <a:r>
-              <a:t>Semaines Fériées (Holiday_Flag) :</a:t>
-            </a:r>
-          </a:p>
-          <a:p>
-            <a:pPr>
-              <a:defRPr sz="900">
-                <a:solidFill>
-                  <a:srgbClr val="F8FAFC"/>
-                </a:solidFill>
-                <a:latin typeface="Segoe UI"/>
-              </a:defRPr>
-            </a:pPr>
-            <a:r>
-              <a:t>Pics de surconsommation lors de Thanksgiving et Noël (+15% à +25% de ventes).</a:t>
-            </a:r>
-          </a:p>
-          <a:p>
-            <a:pPr>
-              <a:defRPr sz="1000" b="1">
-                <a:solidFill>
-                  <a:srgbClr val="FACC15"/>
-                </a:solidFill>
-                <a:latin typeface="Segoe UI"/>
-              </a:defRPr>
-            </a:pPr>
-            <a:r>
-              <a:t>Température :</a:t>
-            </a:r>
-          </a:p>
-          <a:p>
-            <a:pPr>
-              <a:defRPr sz="900">
-                <a:solidFill>
-                  <a:srgbClr val="F8FAFC"/>
-                </a:solidFill>
-                <a:latin typeface="Segoe UI"/>
-              </a:defRPr>
-            </a:pPr>
-            <a:r>
-              <a:t>Effet saisonnier mesuré (-0.11), plus fort en hiver qu'en été.</a:t>
-            </a:r>
-          </a:p>
-        </p:txBody>
-      </p:sp>
+        </p:spPr>
+      </p:pic>
     </p:spTree>
   </p:cSld>
   <p:clrMapOvr>
@@ -5378,7 +5503,7 @@
           <a:noFill/>
         </p:spPr>
         <p:txBody>
-          <a:bodyPr wrap="square">
+          <a:bodyPr wrap="square" lIns="0" tIns="0" rIns="0" bIns="0">
             <a:spAutoFit/>
           </a:bodyPr>
           <a:lstStyle/>
@@ -5414,13 +5539,13 @@
           <a:noFill/>
         </p:spPr>
         <p:txBody>
-          <a:bodyPr wrap="square">
+          <a:bodyPr wrap="square" lIns="0" tIns="0" rIns="0" bIns="0">
             <a:spAutoFit/>
           </a:bodyPr>
           <a:lstStyle/>
           <a:p>
             <a:pPr>
-              <a:defRPr sz="2100" b="1">
+              <a:defRPr sz="1800" b="1">
                 <a:solidFill>
                   <a:srgbClr val="F8FAFC"/>
                 </a:solidFill>
@@ -5450,7 +5575,7 @@
           <a:noFill/>
         </p:spPr>
         <p:txBody>
-          <a:bodyPr wrap="square">
+          <a:bodyPr wrap="none" lIns="0" tIns="0" rIns="0" bIns="0">
             <a:spAutoFit/>
           </a:bodyPr>
           <a:lstStyle/>
@@ -5486,21 +5611,21 @@
           <a:noFill/>
         </p:spPr>
         <p:txBody>
-          <a:bodyPr wrap="square">
+          <a:bodyPr wrap="none" lIns="0" tIns="0" rIns="0" bIns="0">
             <a:spAutoFit/>
           </a:bodyPr>
           <a:lstStyle/>
           <a:p>
             <a:pPr>
-              <a:defRPr sz="1000">
-                <a:solidFill>
-                  <a:srgbClr val="64748B"/>
+              <a:defRPr sz="950">
+                <a:solidFill>
+                  <a:srgbClr val="94A3B8"/>
                 </a:solidFill>
                 <a:latin typeface="Segoe UI"/>
               </a:defRPr>
             </a:pPr>
             <a:r>
-              <a:t>Christopher GILLERON  |  Walmart Store Sales Prediction (Machine Learning Supervisé)  |  Certification CDSD Bloc 3</a:t>
+              <a:t>Christopher GILLERON  |  Walmart Store Sales Prediction (Machine Learning Supervisé)  |  Certification CDSD Bloc 3  |  Temps alloué : 5 min</a:t>
             </a:r>
           </a:p>
         </p:txBody>
@@ -5514,7 +5639,7 @@
         <p:spPr>
           <a:xfrm>
             <a:off x="731520" y="1371600"/>
-            <a:ext cx="5212080" cy="4754880"/>
+            <a:ext cx="5212080" cy="4846320"/>
           </a:xfrm>
           <a:prstGeom prst="roundRect">
             <a:avLst/>
@@ -5522,7 +5647,7 @@
           <a:solidFill>
             <a:srgbClr val="1E293B"/>
           </a:solidFill>
-          <a:ln w="19050">
+          <a:ln w="12700">
             <a:solidFill>
               <a:srgbClr val="334155"/>
             </a:solidFill>
@@ -5558,8 +5683,8 @@
         </p:nvSpPr>
         <p:spPr>
           <a:xfrm>
-            <a:off x="914400" y="1536192"/>
-            <a:ext cx="4846320" cy="365760"/>
+            <a:off x="914400" y="1554480"/>
+            <a:ext cx="4846320" cy="4480560"/>
           </a:xfrm>
           <a:prstGeom prst="rect">
             <a:avLst/>
@@ -5573,426 +5698,190 @@
           <a:lstStyle/>
           <a:p>
             <a:pPr>
-              <a:defRPr sz="1100" b="1">
+              <a:defRPr sz="1300" b="1">
                 <a:solidFill>
                   <a:srgbClr val="38BDF8"/>
                 </a:solidFill>
-                <a:latin typeface="Segoe UI"/>
               </a:defRPr>
             </a:pPr>
             <a:r>
               <a:t>MÉTRIQUES TRAIN VS TEST (SCIKIT-LEARN)</a:t>
             </a:r>
           </a:p>
-        </p:txBody>
-      </p:sp>
-      <p:graphicFrame>
-        <p:nvGraphicFramePr>
-          <p:cNvPr id="9" name="Table 8"/>
-          <p:cNvGraphicFramePr>
-            <a:graphicFrameLocks noGrp="1"/>
-          </p:cNvGraphicFramePr>
-          <p:nvPr/>
-        </p:nvGraphicFramePr>
-        <p:xfrm>
-          <a:off x="914400" y="1920240"/>
-          <a:ext cx="4846320" cy="1828800"/>
-        </p:xfrm>
-        <a:graphic>
-          <a:graphicData uri="http://schemas.openxmlformats.org/drawingml/2006/table">
-            <a:tbl>
-              <a:tblPr firstRow="1" bandRow="1">
-                <a:tableStyleId>{5C22544A-7EE6-4342-B048-85BDC9FD1C3A}</a:tableStyleId>
-              </a:tblPr>
-              <a:tblGrid>
-                <a:gridCol w="1211580"/>
-                <a:gridCol w="1211580"/>
-                <a:gridCol w="1211580"/>
-                <a:gridCol w="1211580"/>
-              </a:tblGrid>
-              <a:tr h="609600">
-                <a:tc>
-                  <a:txBody>
-                    <a:bodyPr/>
-                    <a:lstStyle/>
-                    <a:p>
-                      <a:pPr>
-                        <a:defRPr sz="1000" b="1">
-                          <a:solidFill>
-                            <a:srgbClr val="38BDF8"/>
-                          </a:solidFill>
-                          <a:latin typeface="Segoe UI"/>
-                        </a:defRPr>
-                      </a:pPr>
-                      <a:r>
-                        <a:t>Dataset</a:t>
-                      </a:r>
-                    </a:p>
-                  </a:txBody>
-                  <a:tcPr>
-                    <a:solidFill>
-                      <a:srgbClr val="0F172A"/>
-                    </a:solidFill>
-                  </a:tcPr>
-                </a:tc>
-                <a:tc>
-                  <a:txBody>
-                    <a:bodyPr/>
-                    <a:lstStyle/>
-                    <a:p>
-                      <a:pPr>
-                        <a:defRPr sz="1000" b="1">
-                          <a:solidFill>
-                            <a:srgbClr val="38BDF8"/>
-                          </a:solidFill>
-                          <a:latin typeface="Segoe UI"/>
-                        </a:defRPr>
-                      </a:pPr>
-                      <a:r>
-                        <a:t>R²</a:t>
-                      </a:r>
-                    </a:p>
-                  </a:txBody>
-                  <a:tcPr>
-                    <a:solidFill>
-                      <a:srgbClr val="0F172A"/>
-                    </a:solidFill>
-                  </a:tcPr>
-                </a:tc>
-                <a:tc>
-                  <a:txBody>
-                    <a:bodyPr/>
-                    <a:lstStyle/>
-                    <a:p>
-                      <a:pPr>
-                        <a:defRPr sz="1000" b="1">
-                          <a:solidFill>
-                            <a:srgbClr val="38BDF8"/>
-                          </a:solidFill>
-                          <a:latin typeface="Segoe UI"/>
-                        </a:defRPr>
-                      </a:pPr>
-                      <a:r>
-                        <a:t>MAE ($)</a:t>
-                      </a:r>
-                    </a:p>
-                  </a:txBody>
-                  <a:tcPr>
-                    <a:solidFill>
-                      <a:srgbClr val="0F172A"/>
-                    </a:solidFill>
-                  </a:tcPr>
-                </a:tc>
-                <a:tc>
-                  <a:txBody>
-                    <a:bodyPr/>
-                    <a:lstStyle/>
-                    <a:p>
-                      <a:pPr>
-                        <a:defRPr sz="1000" b="1">
-                          <a:solidFill>
-                            <a:srgbClr val="38BDF8"/>
-                          </a:solidFill>
-                          <a:latin typeface="Segoe UI"/>
-                        </a:defRPr>
-                      </a:pPr>
-                      <a:r>
-                        <a:t>RMSE ($)</a:t>
-                      </a:r>
-                    </a:p>
-                  </a:txBody>
-                  <a:tcPr>
-                    <a:solidFill>
-                      <a:srgbClr val="0F172A"/>
-                    </a:solidFill>
-                  </a:tcPr>
-                </a:tc>
-              </a:tr>
-              <a:tr h="609600">
-                <a:tc>
-                  <a:txBody>
-                    <a:bodyPr/>
-                    <a:lstStyle/>
-                    <a:p>
-                      <a:pPr>
-                        <a:defRPr sz="950" b="1">
-                          <a:solidFill>
-                            <a:srgbClr val="F8FAFC"/>
-                          </a:solidFill>
-                          <a:latin typeface="Segoe UI"/>
-                        </a:defRPr>
-                      </a:pPr>
-                      <a:r>
-                        <a:t>Train (Entraînement)</a:t>
-                      </a:r>
-                    </a:p>
-                  </a:txBody>
-                  <a:tcPr>
-                    <a:solidFill>
-                      <a:srgbClr val="18202F"/>
-                    </a:solidFill>
-                  </a:tcPr>
-                </a:tc>
-                <a:tc>
-                  <a:txBody>
-                    <a:bodyPr/>
-                    <a:lstStyle/>
-                    <a:p>
-                      <a:pPr>
-                        <a:defRPr sz="950" b="0">
-                          <a:solidFill>
-                            <a:srgbClr val="F8FAFC"/>
-                          </a:solidFill>
-                          <a:latin typeface="Segoe UI"/>
-                        </a:defRPr>
-                      </a:pPr>
-                      <a:r>
-                        <a:t>0.98</a:t>
-                      </a:r>
-                    </a:p>
-                  </a:txBody>
-                  <a:tcPr>
-                    <a:solidFill>
-                      <a:srgbClr val="18202F"/>
-                    </a:solidFill>
-                  </a:tcPr>
-                </a:tc>
-                <a:tc>
-                  <a:txBody>
-                    <a:bodyPr/>
-                    <a:lstStyle/>
-                    <a:p>
-                      <a:pPr>
-                        <a:defRPr sz="950" b="0">
-                          <a:solidFill>
-                            <a:srgbClr val="F8FAFC"/>
-                          </a:solidFill>
-                          <a:latin typeface="Segoe UI"/>
-                        </a:defRPr>
-                      </a:pPr>
-                      <a:r>
-                        <a:t>77 220 $</a:t>
-                      </a:r>
-                    </a:p>
-                  </a:txBody>
-                  <a:tcPr>
-                    <a:solidFill>
-                      <a:srgbClr val="18202F"/>
-                    </a:solidFill>
-                  </a:tcPr>
-                </a:tc>
-                <a:tc>
-                  <a:txBody>
-                    <a:bodyPr/>
-                    <a:lstStyle/>
-                    <a:p>
-                      <a:pPr>
-                        <a:defRPr sz="950" b="0">
-                          <a:solidFill>
-                            <a:srgbClr val="F8FAFC"/>
-                          </a:solidFill>
-                          <a:latin typeface="Segoe UI"/>
-                        </a:defRPr>
-                      </a:pPr>
-                      <a:r>
-                        <a:t>100 071 $</a:t>
-                      </a:r>
-                    </a:p>
-                  </a:txBody>
-                  <a:tcPr>
-                    <a:solidFill>
-                      <a:srgbClr val="18202F"/>
-                    </a:solidFill>
-                  </a:tcPr>
-                </a:tc>
-              </a:tr>
-              <a:tr h="609600">
-                <a:tc>
-                  <a:txBody>
-                    <a:bodyPr/>
-                    <a:lstStyle/>
-                    <a:p>
-                      <a:pPr>
-                        <a:defRPr sz="950" b="1">
-                          <a:solidFill>
-                            <a:srgbClr val="F8FAFC"/>
-                          </a:solidFill>
-                          <a:latin typeface="Segoe UI"/>
-                        </a:defRPr>
-                      </a:pPr>
-                      <a:r>
-                        <a:t>Test (Validation)</a:t>
-                      </a:r>
-                    </a:p>
-                  </a:txBody>
-                  <a:tcPr>
-                    <a:solidFill>
-                      <a:srgbClr val="1E293B"/>
-                    </a:solidFill>
-                  </a:tcPr>
-                </a:tc>
-                <a:tc>
-                  <a:txBody>
-                    <a:bodyPr/>
-                    <a:lstStyle/>
-                    <a:p>
-                      <a:pPr>
-                        <a:defRPr sz="950" b="0">
-                          <a:solidFill>
-                            <a:srgbClr val="F8FAFC"/>
-                          </a:solidFill>
-                          <a:latin typeface="Segoe UI"/>
-                        </a:defRPr>
-                      </a:pPr>
-                      <a:r>
-                        <a:t>0.90</a:t>
-                      </a:r>
-                    </a:p>
-                  </a:txBody>
-                  <a:tcPr>
-                    <a:solidFill>
-                      <a:srgbClr val="1E293B"/>
-                    </a:solidFill>
-                  </a:tcPr>
-                </a:tc>
-                <a:tc>
-                  <a:txBody>
-                    <a:bodyPr/>
-                    <a:lstStyle/>
-                    <a:p>
-                      <a:pPr>
-                        <a:defRPr sz="950" b="0">
-                          <a:solidFill>
-                            <a:srgbClr val="F8FAFC"/>
-                          </a:solidFill>
-                          <a:latin typeface="Segoe UI"/>
-                        </a:defRPr>
-                      </a:pPr>
-                      <a:r>
-                        <a:t>145 803 $</a:t>
-                      </a:r>
-                    </a:p>
-                  </a:txBody>
-                  <a:tcPr>
-                    <a:solidFill>
-                      <a:srgbClr val="1E293B"/>
-                    </a:solidFill>
-                  </a:tcPr>
-                </a:tc>
-                <a:tc>
-                  <a:txBody>
-                    <a:bodyPr/>
-                    <a:lstStyle/>
-                    <a:p>
-                      <a:pPr>
-                        <a:defRPr sz="950" b="0">
-                          <a:solidFill>
-                            <a:srgbClr val="F8FAFC"/>
-                          </a:solidFill>
-                          <a:latin typeface="Segoe UI"/>
-                        </a:defRPr>
-                      </a:pPr>
-                      <a:r>
-                        <a:t>188 478 $</a:t>
-                      </a:r>
-                    </a:p>
-                  </a:txBody>
-                  <a:tcPr>
-                    <a:solidFill>
-                      <a:srgbClr val="1E293B"/>
-                    </a:solidFill>
-                  </a:tcPr>
-                </a:tc>
-              </a:tr>
-            </a:tbl>
-          </a:graphicData>
-        </a:graphic>
-      </p:graphicFrame>
-      <p:sp>
-        <p:nvSpPr>
-          <p:cNvPr id="10" name="TextBox 9"/>
-          <p:cNvSpPr txBox="1"/>
-          <p:nvPr/>
-        </p:nvSpPr>
-        <p:spPr>
-          <a:xfrm>
-            <a:off x="914400" y="4023360"/>
-            <a:ext cx="4846320" cy="1920240"/>
-          </a:xfrm>
-          <a:prstGeom prst="rect">
-            <a:avLst/>
-          </a:prstGeom>
-          <a:noFill/>
-        </p:spPr>
-        <p:txBody>
-          <a:bodyPr wrap="square">
-            <a:spAutoFit/>
-          </a:bodyPr>
-          <a:lstStyle/>
-          <a:p>
-            <a:pPr>
-              <a:defRPr sz="1000" b="1">
-                <a:solidFill>
-                  <a:srgbClr val="FACC15"/>
-                </a:solidFill>
-                <a:latin typeface="Segoe UI"/>
-              </a:defRPr>
-            </a:pPr>
-            <a:r>
-              <a:t>Pouvoir Explicatif Élevé :</a:t>
-            </a:r>
-          </a:p>
-          <a:p>
-            <a:pPr>
-              <a:defRPr sz="900">
+          <a:p>
+            <a:pPr>
+              <a:spcBef>
+                <a:spcPts val="600"/>
+              </a:spcBef>
+              <a:defRPr b="1" sz="1050">
                 <a:solidFill>
                   <a:srgbClr val="F8FAFC"/>
                 </a:solidFill>
-                <a:latin typeface="Segoe UI"/>
-              </a:defRPr>
-            </a:pPr>
-            <a:r>
-              <a:t>90% de la variance des ventes est expliquée sur le jeu de test indépendant.</a:t>
-            </a:r>
-          </a:p>
-          <a:p>
-            <a:pPr>
-              <a:defRPr sz="1000" b="1">
-                <a:solidFill>
-                  <a:srgbClr val="FACC15"/>
-                </a:solidFill>
-                <a:latin typeface="Segoe UI"/>
-              </a:defRPr>
-            </a:pPr>
-            <a:r>
-              <a:t>Diagnostic de Surapprentissage :</a:t>
-            </a:r>
-          </a:p>
-          <a:p>
-            <a:pPr>
-              <a:defRPr sz="900">
+              </a:defRPr>
+            </a:pPr>
+            <a:r>
+              <a:t>Score R² Train : 0.974</a:t>
+            </a:r>
+          </a:p>
+          <a:p>
+            <a:pPr>
+              <a:defRPr sz="950">
+                <a:solidFill>
+                  <a:srgbClr val="94A3B8"/>
+                </a:solidFill>
+              </a:defRPr>
+            </a:pPr>
+            <a:r>
+              <a:t>Le modèle linéaire ordinaire explique 97.4% de la variance sur le jeu d'entraînement.</a:t>
+            </a:r>
+          </a:p>
+          <a:p>
+            <a:pPr>
+              <a:spcBef>
+                <a:spcPts val="600"/>
+              </a:spcBef>
+              <a:defRPr b="1" sz="1050">
                 <a:solidFill>
                   <a:srgbClr val="F8FAFC"/>
                 </a:solidFill>
-                <a:latin typeface="Segoe UI"/>
-              </a:defRPr>
-            </a:pPr>
-            <a:r>
-              <a:t>Le gap MAE (77k$ $_x000D_ightarrow$ 145k$) prouve que le modèle ordinaire mémorise une partie du bruit d'entraînement.</a:t>
-            </a:r>
-          </a:p>
-        </p:txBody>
-      </p:sp>
-      <p:sp>
-        <p:nvSpPr>
-          <p:cNvPr id="11" name="Rounded Rectangle 10"/>
+              </a:defRPr>
+            </a:pPr>
+            <a:r>
+              <a:t>Score R² Test : 0.902</a:t>
+            </a:r>
+          </a:p>
+          <a:p>
+            <a:pPr>
+              <a:defRPr sz="950">
+                <a:solidFill>
+                  <a:srgbClr val="94A3B8"/>
+                </a:solidFill>
+              </a:defRPr>
+            </a:pPr>
+            <a:r>
+              <a:t>Excellente restitution sur les données de test non vues (90.2% de variance expliquée).</a:t>
+            </a:r>
+          </a:p>
+          <a:p>
+            <a:pPr>
+              <a:spcBef>
+                <a:spcPts val="600"/>
+              </a:spcBef>
+              <a:defRPr b="1" sz="1050">
+                <a:solidFill>
+                  <a:srgbClr val="F8FAFC"/>
+                </a:solidFill>
+              </a:defRPr>
+            </a:pPr>
+            <a:r>
+              <a:t>Écart MAE (Surapprentissage) :</a:t>
+            </a:r>
+          </a:p>
+          <a:p>
+            <a:pPr>
+              <a:defRPr sz="950">
+                <a:solidFill>
+                  <a:srgbClr val="94A3B8"/>
+                </a:solidFill>
+              </a:defRPr>
+            </a:pPr>
+            <a:r>
+              <a:t>MAE Train = 77 021 $ vs MAE Test = 145 423 $ (RMSE Test: 188 477 $). L'écart quasi du simple au double révèle une mémorisation partielle du bruit d'entraînement.</a:t>
+            </a:r>
+          </a:p>
+          <a:p>
+            <a:pPr>
+              <a:spcBef>
+                <a:spcPts val="600"/>
+              </a:spcBef>
+              <a:defRPr b="1" sz="1050">
+                <a:solidFill>
+                  <a:srgbClr val="F8FAFC"/>
+                </a:solidFill>
+              </a:defRPr>
+            </a:pPr>
+            <a:r>
+              <a:t>Analyse des Résidus :</a:t>
+            </a:r>
+          </a:p>
+          <a:p>
+            <a:pPr>
+              <a:defRPr sz="950">
+                <a:solidFill>
+                  <a:srgbClr val="94A3B8"/>
+                </a:solidFill>
+              </a:defRPr>
+            </a:pPr>
+            <a:r>
+              <a:t>Le nuage Ventes Réelles vs Prédites suit fidèlement la diagonale y = x, mais la dispersion s'élargit sur les ventes extrêmes (&gt; 1.8 M$).</a:t>
+            </a:r>
+          </a:p>
+          <a:p>
+            <a:pPr>
+              <a:spcBef>
+                <a:spcPts val="600"/>
+              </a:spcBef>
+              <a:defRPr b="1" sz="1050">
+                <a:solidFill>
+                  <a:srgbClr val="F8FAFC"/>
+                </a:solidFill>
+              </a:defRPr>
+            </a:pPr>
+            <a:r>
+              <a:t>Risque de Multicolinéarité :</a:t>
+            </a:r>
+          </a:p>
+          <a:p>
+            <a:pPr>
+              <a:defRPr sz="950">
+                <a:solidFill>
+                  <a:srgbClr val="94A3B8"/>
+                </a:solidFill>
+              </a:defRPr>
+            </a:pPr>
+            <a:r>
+              <a:t>Les magasins partagent des indicateurs macroéconomiques proches, ce qui déstabilise certains coefficients ordinaires.</a:t>
+            </a:r>
+          </a:p>
+          <a:p>
+            <a:pPr>
+              <a:spcBef>
+                <a:spcPts val="600"/>
+              </a:spcBef>
+              <a:defRPr b="1" sz="1050">
+                <a:solidFill>
+                  <a:srgbClr val="F8FAFC"/>
+                </a:solidFill>
+              </a:defRPr>
+            </a:pPr>
+            <a:r>
+              <a:t>Nécessité de Régulariser :</a:t>
+            </a:r>
+          </a:p>
+          <a:p>
+            <a:pPr>
+              <a:defRPr sz="950">
+                <a:solidFill>
+                  <a:srgbClr val="94A3B8"/>
+                </a:solidFill>
+              </a:defRPr>
+            </a:pPr>
+            <a:r>
+              <a:t>Appliquer une pénalité L1/L2 pour comprimer les poids et réduire l'erreur sur les données de test.</a:t>
+            </a:r>
+          </a:p>
+        </p:txBody>
+      </p:sp>
+      <p:sp>
+        <p:nvSpPr>
+          <p:cNvPr id="9" name="Rounded Rectangle 8"/>
           <p:cNvSpPr/>
           <p:nvPr/>
         </p:nvSpPr>
         <p:spPr>
           <a:xfrm>
             <a:off x="6217920" y="1371600"/>
-            <a:ext cx="5242255" cy="4754880"/>
+            <a:ext cx="5242255" cy="4846320"/>
           </a:xfrm>
           <a:prstGeom prst="roundRect">
             <a:avLst/>
@@ -6000,7 +5889,7 @@
           <a:solidFill>
             <a:srgbClr val="1E293B"/>
           </a:solidFill>
-          <a:ln w="19050">
+          <a:ln w="12700">
             <a:solidFill>
               <a:srgbClr val="334155"/>
             </a:solidFill>
@@ -6030,14 +5919,128 @@
       </p:sp>
       <p:sp>
         <p:nvSpPr>
-          <p:cNvPr id="12" name="TextBox 11"/>
+          <p:cNvPr id="10" name="Rounded Rectangle 9"/>
+          <p:cNvSpPr/>
+          <p:nvPr/>
+        </p:nvSpPr>
+        <p:spPr>
+          <a:xfrm>
+            <a:off x="6400800" y="1508760"/>
+            <a:ext cx="4876495" cy="3291840"/>
+          </a:xfrm>
+          <a:prstGeom prst="roundRect">
+            <a:avLst/>
+          </a:prstGeom>
+          <a:solidFill>
+            <a:srgbClr val="FFFFFF"/>
+          </a:solidFill>
+          <a:ln w="12700">
+            <a:solidFill>
+              <a:srgbClr val="CBD5E1"/>
+            </a:solidFill>
+          </a:ln>
+        </p:spPr>
+        <p:style>
+          <a:lnRef idx="1">
+            <a:schemeClr val="accent1"/>
+          </a:lnRef>
+          <a:fillRef idx="3">
+            <a:schemeClr val="accent1"/>
+          </a:fillRef>
+          <a:effectRef idx="2">
+            <a:schemeClr val="accent1"/>
+          </a:effectRef>
+          <a:fontRef idx="minor">
+            <a:schemeClr val="lt1"/>
+          </a:fontRef>
+        </p:style>
+        <p:txBody>
+          <a:bodyPr rtlCol="0" anchor="ctr"/>
+          <a:lstStyle/>
+          <a:p>
+            <a:pPr algn="ctr"/>
+          </a:p>
+        </p:txBody>
+      </p:sp>
+      <p:pic>
+        <p:nvPicPr>
+          <p:cNvPr id="11" name="Picture 10" descr="walmart_c15_3.png"/>
+          <p:cNvPicPr>
+            <a:picLocks noChangeAspect="1"/>
+          </p:cNvPicPr>
+          <p:nvPr/>
+        </p:nvPicPr>
+        <p:blipFill>
+          <a:blip r:embed="rId2"/>
+          <a:stretch>
+            <a:fillRect/>
+          </a:stretch>
+        </p:blipFill>
+        <p:spPr>
+          <a:xfrm>
+            <a:off x="6949440" y="1554480"/>
+            <a:ext cx="3749039" cy="3200400"/>
+          </a:xfrm>
+          <a:prstGeom prst="rect">
+            <a:avLst/>
+          </a:prstGeom>
+        </p:spPr>
+      </p:pic>
+      <p:sp>
+        <p:nvSpPr>
+          <p:cNvPr id="12" name="Rounded Rectangle 11"/>
+          <p:cNvSpPr/>
+          <p:nvPr/>
+        </p:nvSpPr>
+        <p:spPr>
+          <a:xfrm>
+            <a:off x="6400800" y="4892040"/>
+            <a:ext cx="4876495" cy="1188720"/>
+          </a:xfrm>
+          <a:prstGeom prst="roundRect">
+            <a:avLst/>
+          </a:prstGeom>
+          <a:solidFill>
+            <a:srgbClr val="0F172A"/>
+          </a:solidFill>
+          <a:ln w="12700">
+            <a:solidFill>
+              <a:srgbClr val="334155"/>
+            </a:solidFill>
+          </a:ln>
+        </p:spPr>
+        <p:style>
+          <a:lnRef idx="1">
+            <a:schemeClr val="accent1"/>
+          </a:lnRef>
+          <a:fillRef idx="3">
+            <a:schemeClr val="accent1"/>
+          </a:fillRef>
+          <a:effectRef idx="2">
+            <a:schemeClr val="accent1"/>
+          </a:effectRef>
+          <a:fontRef idx="minor">
+            <a:schemeClr val="lt1"/>
+          </a:fontRef>
+        </p:style>
+        <p:txBody>
+          <a:bodyPr rtlCol="0" anchor="ctr"/>
+          <a:lstStyle/>
+          <a:p>
+            <a:pPr algn="ctr"/>
+          </a:p>
+        </p:txBody>
+      </p:sp>
+      <p:sp>
+        <p:nvSpPr>
+          <p:cNvPr id="13" name="TextBox 12"/>
           <p:cNvSpPr txBox="1"/>
           <p:nvPr/>
         </p:nvSpPr>
         <p:spPr>
           <a:xfrm>
-            <a:off x="6400800" y="1536192"/>
-            <a:ext cx="4876495" cy="365760"/>
+            <a:off x="6583680" y="4937760"/>
+            <a:ext cx="4510735" cy="1097280"/>
           </a:xfrm>
           <a:prstGeom prst="rect">
             <a:avLst/>
@@ -6051,142 +6054,29 @@
           <a:lstStyle/>
           <a:p>
             <a:pPr>
-              <a:defRPr sz="1100" b="1">
+              <a:defRPr sz="1050" b="1">
                 <a:solidFill>
                   <a:srgbClr val="38BDF8"/>
                 </a:solidFill>
-                <a:latin typeface="Segoe UI"/>
-              </a:defRPr>
-            </a:pPr>
-            <a:r>
-              <a:t>ANALYSE DES RÉSIDUS &amp; NÉCESSITÉ DE RÉGULARISER</a:t>
-            </a:r>
-          </a:p>
-        </p:txBody>
-      </p:sp>
-      <p:sp>
-        <p:nvSpPr>
-          <p:cNvPr id="13" name="TextBox 12"/>
-          <p:cNvSpPr txBox="1"/>
-          <p:nvPr/>
-        </p:nvSpPr>
-        <p:spPr>
-          <a:xfrm>
-            <a:off x="6400800" y="1920240"/>
-            <a:ext cx="4876495" cy="4023360"/>
-          </a:xfrm>
-          <a:prstGeom prst="rect">
-            <a:avLst/>
-          </a:prstGeom>
-          <a:noFill/>
-        </p:spPr>
-        <p:txBody>
-          <a:bodyPr wrap="square">
-            <a:spAutoFit/>
-          </a:bodyPr>
-          <a:lstStyle/>
-          <a:p>
-            <a:pPr>
-              <a:defRPr sz="1000" b="1">
-                <a:solidFill>
-                  <a:srgbClr val="38BDF8"/>
-                </a:solidFill>
-                <a:latin typeface="Segoe UI"/>
-              </a:defRPr>
-            </a:pPr>
-            <a:r>
-              <a:t>Linéarité Globale Confirmée :</a:t>
-            </a:r>
-          </a:p>
-          <a:p>
-            <a:pPr>
+              </a:defRPr>
+            </a:pPr>
+            <a:r>
+              <a:t>DIAGNOSTIC VISUEL : RÉALITÉ VS PRÉDICTIONS</a:t>
+            </a:r>
+          </a:p>
+          <a:p>
+            <a:pPr>
+              <a:spcBef>
+                <a:spcPts val="300"/>
+              </a:spcBef>
               <a:defRPr sz="900">
                 <a:solidFill>
                   <a:srgbClr val="F8FAFC"/>
                 </a:solidFill>
-                <a:latin typeface="Segoe UI"/>
-              </a:defRPr>
-            </a:pPr>
-            <a:r>
-              <a:t>Le nuage Ventes Réelles vs Ventes Prédites suit la diagonale avec fidélité sur les semaines courantes.</a:t>
-            </a:r>
-          </a:p>
-          <a:p>
-            <a:pPr>
-              <a:defRPr sz="1000" b="1">
-                <a:solidFill>
-                  <a:srgbClr val="38BDF8"/>
-                </a:solidFill>
-                <a:latin typeface="Segoe UI"/>
-              </a:defRPr>
-            </a:pPr>
-            <a:r>
-              <a:t>Écarts sur les Semaines de Pic :</a:t>
-            </a:r>
-          </a:p>
-          <a:p>
-            <a:pPr>
-              <a:defRPr sz="900">
-                <a:solidFill>
-                  <a:srgbClr val="F8FAFC"/>
-                </a:solidFill>
-                <a:latin typeface="Segoe UI"/>
-              </a:defRPr>
-            </a:pPr>
-            <a:r>
-              <a:t>Les résidus les plus forts surviennent sur les semaines Black Friday : l'engouement promotionnel dépasse la simple réponse linéaire.</a:t>
-            </a:r>
-          </a:p>
-          <a:p>
-            <a:pPr>
-              <a:defRPr sz="1000" b="1">
-                <a:solidFill>
-                  <a:srgbClr val="38BDF8"/>
-                </a:solidFill>
-                <a:latin typeface="Segoe UI"/>
-              </a:defRPr>
-            </a:pPr>
-            <a:r>
-              <a:t>Risque de Multicolinéarité :</a:t>
-            </a:r>
-          </a:p>
-          <a:p>
-            <a:pPr>
-              <a:defRPr sz="900">
-                <a:solidFill>
-                  <a:srgbClr val="F8FAFC"/>
-                </a:solidFill>
-                <a:latin typeface="Segoe UI"/>
-              </a:defRPr>
-            </a:pPr>
-            <a:r>
-              <a:t>Les magasins partagent des indicateurs macroéconomiques proches, ce qui gonfle certains poids ordinaires.</a:t>
-            </a:r>
-          </a:p>
-          <a:p>
-            <a:pPr>
-              <a:defRPr sz="1000" b="1">
-                <a:solidFill>
-                  <a:srgbClr val="38BDF8"/>
-                </a:solidFill>
-                <a:latin typeface="Segoe UI"/>
-              </a:defRPr>
-            </a:pPr>
-            <a:r>
-              <a:t>Objectif Étape Suivante :</a:t>
-            </a:r>
-          </a:p>
-          <a:p>
-            <a:pPr>
-              <a:defRPr sz="900">
-                <a:solidFill>
-                  <a:srgbClr val="F8FAFC"/>
-                </a:solidFill>
-                <a:latin typeface="Segoe UI"/>
-              </a:defRPr>
-            </a:pPr>
-            <a:r>
-              <a:t>Appliquer une pénalisation L1/L2 pour contraindre les poids et améliorer la généralisation.</a:t>
+              </a:defRPr>
+            </a:pPr>
+            <a:r>
+              <a:t>Le modèle baseline capture parfaitement l'alignement central (R²=0.90), mais sous-estime les très fortes pointes de Thanksgiving (&gt;2.2 M$). Objectif : stabiliser les coefficients via régularisation.</a:t>
             </a:r>
           </a:p>
         </p:txBody>
@@ -6269,7 +6159,7 @@
           <a:noFill/>
         </p:spPr>
         <p:txBody>
-          <a:bodyPr wrap="square">
+          <a:bodyPr wrap="square" lIns="0" tIns="0" rIns="0" bIns="0">
             <a:spAutoFit/>
           </a:bodyPr>
           <a:lstStyle/>
@@ -6305,13 +6195,13 @@
           <a:noFill/>
         </p:spPr>
         <p:txBody>
-          <a:bodyPr wrap="square">
+          <a:bodyPr wrap="square" lIns="0" tIns="0" rIns="0" bIns="0">
             <a:spAutoFit/>
           </a:bodyPr>
           <a:lstStyle/>
           <a:p>
             <a:pPr>
-              <a:defRPr sz="2100" b="1">
+              <a:defRPr sz="1800" b="1">
                 <a:solidFill>
                   <a:srgbClr val="F8FAFC"/>
                 </a:solidFill>
@@ -6341,7 +6231,7 @@
           <a:noFill/>
         </p:spPr>
         <p:txBody>
-          <a:bodyPr wrap="square">
+          <a:bodyPr wrap="none" lIns="0" tIns="0" rIns="0" bIns="0">
             <a:spAutoFit/>
           </a:bodyPr>
           <a:lstStyle/>
@@ -6377,21 +6267,21 @@
           <a:noFill/>
         </p:spPr>
         <p:txBody>
-          <a:bodyPr wrap="square">
+          <a:bodyPr wrap="none" lIns="0" tIns="0" rIns="0" bIns="0">
             <a:spAutoFit/>
           </a:bodyPr>
           <a:lstStyle/>
           <a:p>
             <a:pPr>
-              <a:defRPr sz="1000">
-                <a:solidFill>
-                  <a:srgbClr val="64748B"/>
+              <a:defRPr sz="950">
+                <a:solidFill>
+                  <a:srgbClr val="94A3B8"/>
                 </a:solidFill>
                 <a:latin typeface="Segoe UI"/>
               </a:defRPr>
             </a:pPr>
             <a:r>
-              <a:t>Christopher GILLERON  |  Walmart Store Sales Prediction (Machine Learning Supervisé)  |  Certification CDSD Bloc 3</a:t>
+              <a:t>Christopher GILLERON  |  Walmart Store Sales Prediction (Machine Learning Supervisé)  |  Certification CDSD Bloc 3  |  Temps alloué : 5 min</a:t>
             </a:r>
           </a:p>
         </p:txBody>
@@ -6405,7 +6295,7 @@
         <p:spPr>
           <a:xfrm>
             <a:off x="731520" y="1371600"/>
-            <a:ext cx="5486400" cy="4754880"/>
+            <a:ext cx="5212080" cy="4846320"/>
           </a:xfrm>
           <a:prstGeom prst="roundRect">
             <a:avLst/>
@@ -6413,7 +6303,7 @@
           <a:solidFill>
             <a:srgbClr val="1E293B"/>
           </a:solidFill>
-          <a:ln w="19050">
+          <a:ln w="12700">
             <a:solidFill>
               <a:srgbClr val="334155"/>
             </a:solidFill>
@@ -6449,8 +6339,8 @@
         </p:nvSpPr>
         <p:spPr>
           <a:xfrm>
-            <a:off x="914400" y="1536192"/>
-            <a:ext cx="5120640" cy="365760"/>
+            <a:off x="914400" y="1554480"/>
+            <a:ext cx="4846320" cy="4480560"/>
           </a:xfrm>
           <a:prstGeom prst="rect">
             <a:avLst/>
@@ -6464,648 +6354,163 @@
           <a:lstStyle/>
           <a:p>
             <a:pPr>
-              <a:defRPr sz="1100" b="1">
+              <a:defRPr sz="1300" b="1">
                 <a:solidFill>
                   <a:srgbClr val="38BDF8"/>
                 </a:solidFill>
-                <a:latin typeface="Segoe UI"/>
-              </a:defRPr>
-            </a:pPr>
-            <a:r>
-              <a:t>COEFFICIENTS DU MODÈLE LINÉAIRE (EXTRACTION .COEF_)</a:t>
-            </a:r>
-          </a:p>
-        </p:txBody>
-      </p:sp>
-      <p:graphicFrame>
-        <p:nvGraphicFramePr>
-          <p:cNvPr id="9" name="Table 8"/>
-          <p:cNvGraphicFramePr>
-            <a:graphicFrameLocks noGrp="1"/>
-          </p:cNvGraphicFramePr>
-          <p:nvPr/>
-        </p:nvGraphicFramePr>
-        <p:xfrm>
-          <a:off x="914400" y="1920240"/>
-          <a:ext cx="5120640" cy="3931920"/>
-        </p:xfrm>
-        <a:graphic>
-          <a:graphicData uri="http://schemas.openxmlformats.org/drawingml/2006/table">
-            <a:tbl>
-              <a:tblPr firstRow="1" bandRow="1">
-                <a:tableStyleId>{5C22544A-7EE6-4342-B048-85BDC9FD1C3A}</a:tableStyleId>
-              </a:tblPr>
-              <a:tblGrid>
-                <a:gridCol w="1706880"/>
-                <a:gridCol w="1706880"/>
-                <a:gridCol w="1706880"/>
-              </a:tblGrid>
-              <a:tr h="491490">
-                <a:tc>
-                  <a:txBody>
-                    <a:bodyPr/>
-                    <a:lstStyle/>
-                    <a:p>
-                      <a:pPr>
-                        <a:defRPr sz="1000" b="1">
-                          <a:solidFill>
-                            <a:srgbClr val="38BDF8"/>
-                          </a:solidFill>
-                          <a:latin typeface="Segoe UI"/>
-                        </a:defRPr>
-                      </a:pPr>
-                      <a:r>
-                        <a:t>Feature / Variable</a:t>
-                      </a:r>
-                    </a:p>
-                  </a:txBody>
-                  <a:tcPr>
-                    <a:solidFill>
-                      <a:srgbClr val="0F172A"/>
-                    </a:solidFill>
-                  </a:tcPr>
-                </a:tc>
-                <a:tc>
-                  <a:txBody>
-                    <a:bodyPr/>
-                    <a:lstStyle/>
-                    <a:p>
-                      <a:pPr>
-                        <a:defRPr sz="1000" b="1">
-                          <a:solidFill>
-                            <a:srgbClr val="38BDF8"/>
-                          </a:solidFill>
-                          <a:latin typeface="Segoe UI"/>
-                        </a:defRPr>
-                      </a:pPr>
-                      <a:r>
-                        <a:t>Coefficient ($)</a:t>
-                      </a:r>
-                    </a:p>
-                  </a:txBody>
-                  <a:tcPr>
-                    <a:solidFill>
-                      <a:srgbClr val="0F172A"/>
-                    </a:solidFill>
-                  </a:tcPr>
-                </a:tc>
-                <a:tc>
-                  <a:txBody>
-                    <a:bodyPr/>
-                    <a:lstStyle/>
-                    <a:p>
-                      <a:pPr>
-                        <a:defRPr sz="1000" b="1">
-                          <a:solidFill>
-                            <a:srgbClr val="38BDF8"/>
-                          </a:solidFill>
-                          <a:latin typeface="Segoe UI"/>
-                        </a:defRPr>
-                      </a:pPr>
-                      <a:r>
-                        <a:t>Impact Ventes</a:t>
-                      </a:r>
-                    </a:p>
-                  </a:txBody>
-                  <a:tcPr>
-                    <a:solidFill>
-                      <a:srgbClr val="0F172A"/>
-                    </a:solidFill>
-                  </a:tcPr>
-                </a:tc>
-              </a:tr>
-              <a:tr h="491490">
-                <a:tc>
-                  <a:txBody>
-                    <a:bodyPr/>
-                    <a:lstStyle/>
-                    <a:p>
-                      <a:pPr>
-                        <a:defRPr sz="950" b="1">
-                          <a:solidFill>
-                            <a:srgbClr val="F8FAFC"/>
-                          </a:solidFill>
-                          <a:latin typeface="Segoe UI"/>
-                        </a:defRPr>
-                      </a:pPr>
-                      <a:r>
-                        <a:t>Store 5</a:t>
-                      </a:r>
-                    </a:p>
-                  </a:txBody>
-                  <a:tcPr>
-                    <a:solidFill>
-                      <a:srgbClr val="18202F"/>
-                    </a:solidFill>
-                  </a:tcPr>
-                </a:tc>
-                <a:tc>
-                  <a:txBody>
-                    <a:bodyPr/>
-                    <a:lstStyle/>
-                    <a:p>
-                      <a:pPr>
-                        <a:defRPr sz="950" b="0">
-                          <a:solidFill>
-                            <a:srgbClr val="F8FAFC"/>
-                          </a:solidFill>
-                          <a:latin typeface="Segoe UI"/>
-                        </a:defRPr>
-                      </a:pPr>
-                      <a:r>
-                        <a:t>- 1 363 365 $</a:t>
-                      </a:r>
-                    </a:p>
-                  </a:txBody>
-                  <a:tcPr>
-                    <a:solidFill>
-                      <a:srgbClr val="18202F"/>
-                    </a:solidFill>
-                  </a:tcPr>
-                </a:tc>
-                <a:tc>
-                  <a:txBody>
-                    <a:bodyPr/>
-                    <a:lstStyle/>
-                    <a:p>
-                      <a:pPr>
-                        <a:defRPr sz="950" b="0">
-                          <a:solidFill>
-                            <a:srgbClr val="F8FAFC"/>
-                          </a:solidFill>
-                          <a:latin typeface="Segoe UI"/>
-                        </a:defRPr>
-                      </a:pPr>
-                      <a:r>
-                        <a:t>Pénalité maximale</a:t>
-                      </a:r>
-                    </a:p>
-                  </a:txBody>
-                  <a:tcPr>
-                    <a:solidFill>
-                      <a:srgbClr val="18202F"/>
-                    </a:solidFill>
-                  </a:tcPr>
-                </a:tc>
-              </a:tr>
-              <a:tr h="491490">
-                <a:tc>
-                  <a:txBody>
-                    <a:bodyPr/>
-                    <a:lstStyle/>
-                    <a:p>
-                      <a:pPr>
-                        <a:defRPr sz="950" b="1">
-                          <a:solidFill>
-                            <a:srgbClr val="F8FAFC"/>
-                          </a:solidFill>
-                          <a:latin typeface="Segoe UI"/>
-                        </a:defRPr>
-                      </a:pPr>
-                      <a:r>
-                        <a:t>Store 3</a:t>
-                      </a:r>
-                    </a:p>
-                  </a:txBody>
-                  <a:tcPr>
-                    <a:solidFill>
-                      <a:srgbClr val="1E293B"/>
-                    </a:solidFill>
-                  </a:tcPr>
-                </a:tc>
-                <a:tc>
-                  <a:txBody>
-                    <a:bodyPr/>
-                    <a:lstStyle/>
-                    <a:p>
-                      <a:pPr>
-                        <a:defRPr sz="950" b="0">
-                          <a:solidFill>
-                            <a:srgbClr val="F8FAFC"/>
-                          </a:solidFill>
-                          <a:latin typeface="Segoe UI"/>
-                        </a:defRPr>
-                      </a:pPr>
-                      <a:r>
-                        <a:t>- 1 203 335 $</a:t>
-                      </a:r>
-                    </a:p>
-                  </a:txBody>
-                  <a:tcPr>
-                    <a:solidFill>
-                      <a:srgbClr val="1E293B"/>
-                    </a:solidFill>
-                  </a:tcPr>
-                </a:tc>
-                <a:tc>
-                  <a:txBody>
-                    <a:bodyPr/>
-                    <a:lstStyle/>
-                    <a:p>
-                      <a:pPr>
-                        <a:defRPr sz="950" b="0">
-                          <a:solidFill>
-                            <a:srgbClr val="F8FAFC"/>
-                          </a:solidFill>
-                          <a:latin typeface="Segoe UI"/>
-                        </a:defRPr>
-                      </a:pPr>
-                      <a:r>
-                        <a:t>Très faible volume</a:t>
-                      </a:r>
-                    </a:p>
-                  </a:txBody>
-                  <a:tcPr>
-                    <a:solidFill>
-                      <a:srgbClr val="1E293B"/>
-                    </a:solidFill>
-                  </a:tcPr>
-                </a:tc>
-              </a:tr>
-              <a:tr h="491490">
-                <a:tc>
-                  <a:txBody>
-                    <a:bodyPr/>
-                    <a:lstStyle/>
-                    <a:p>
-                      <a:pPr>
-                        <a:defRPr sz="950" b="1">
-                          <a:solidFill>
-                            <a:srgbClr val="F8FAFC"/>
-                          </a:solidFill>
-                          <a:latin typeface="Segoe UI"/>
-                        </a:defRPr>
-                      </a:pPr>
-                      <a:r>
-                        <a:t>Store 16</a:t>
-                      </a:r>
-                    </a:p>
-                  </a:txBody>
-                  <a:tcPr>
-                    <a:solidFill>
-                      <a:srgbClr val="18202F"/>
-                    </a:solidFill>
-                  </a:tcPr>
-                </a:tc>
-                <a:tc>
-                  <a:txBody>
-                    <a:bodyPr/>
-                    <a:lstStyle/>
-                    <a:p>
-                      <a:pPr>
-                        <a:defRPr sz="950" b="0">
-                          <a:solidFill>
-                            <a:srgbClr val="F8FAFC"/>
-                          </a:solidFill>
-                          <a:latin typeface="Segoe UI"/>
-                        </a:defRPr>
-                      </a:pPr>
-                      <a:r>
-                        <a:t>- 1 155 017 $</a:t>
-                      </a:r>
-                    </a:p>
-                  </a:txBody>
-                  <a:tcPr>
-                    <a:solidFill>
-                      <a:srgbClr val="18202F"/>
-                    </a:solidFill>
-                  </a:tcPr>
-                </a:tc>
-                <a:tc>
-                  <a:txBody>
-                    <a:bodyPr/>
-                    <a:lstStyle/>
-                    <a:p>
-                      <a:pPr>
-                        <a:defRPr sz="950" b="0">
-                          <a:solidFill>
-                            <a:srgbClr val="F8FAFC"/>
-                          </a:solidFill>
-                          <a:latin typeface="Segoe UI"/>
-                        </a:defRPr>
-                      </a:pPr>
-                      <a:r>
-                        <a:t>Sous-performance</a:t>
-                      </a:r>
-                    </a:p>
-                  </a:txBody>
-                  <a:tcPr>
-                    <a:solidFill>
-                      <a:srgbClr val="18202F"/>
-                    </a:solidFill>
-                  </a:tcPr>
-                </a:tc>
-              </a:tr>
-              <a:tr h="491490">
-                <a:tc>
-                  <a:txBody>
-                    <a:bodyPr/>
-                    <a:lstStyle/>
-                    <a:p>
-                      <a:pPr>
-                        <a:defRPr sz="950" b="1">
-                          <a:solidFill>
-                            <a:srgbClr val="F8FAFC"/>
-                          </a:solidFill>
-                          <a:latin typeface="Segoe UI"/>
-                        </a:defRPr>
-                      </a:pPr>
-                      <a:r>
-                        <a:t>Store 9</a:t>
-                      </a:r>
-                    </a:p>
-                  </a:txBody>
-                  <a:tcPr>
-                    <a:solidFill>
-                      <a:srgbClr val="1E293B"/>
-                    </a:solidFill>
-                  </a:tcPr>
-                </a:tc>
-                <a:tc>
-                  <a:txBody>
-                    <a:bodyPr/>
-                    <a:lstStyle/>
-                    <a:p>
-                      <a:pPr>
-                        <a:defRPr sz="950" b="0">
-                          <a:solidFill>
-                            <a:srgbClr val="F8FAFC"/>
-                          </a:solidFill>
-                          <a:latin typeface="Segoe UI"/>
-                        </a:defRPr>
-                      </a:pPr>
-                      <a:r>
-                        <a:t>- 1 148 236 $</a:t>
-                      </a:r>
-                    </a:p>
-                  </a:txBody>
-                  <a:tcPr>
-                    <a:solidFill>
-                      <a:srgbClr val="1E293B"/>
-                    </a:solidFill>
-                  </a:tcPr>
-                </a:tc>
-                <a:tc>
-                  <a:txBody>
-                    <a:bodyPr/>
-                    <a:lstStyle/>
-                    <a:p>
-                      <a:pPr>
-                        <a:defRPr sz="950" b="0">
-                          <a:solidFill>
-                            <a:srgbClr val="F8FAFC"/>
-                          </a:solidFill>
-                          <a:latin typeface="Segoe UI"/>
-                        </a:defRPr>
-                      </a:pPr>
-                      <a:r>
-                        <a:t>Sous-performance</a:t>
-                      </a:r>
-                    </a:p>
-                  </a:txBody>
-                  <a:tcPr>
-                    <a:solidFill>
-                      <a:srgbClr val="1E293B"/>
-                    </a:solidFill>
-                  </a:tcPr>
-                </a:tc>
-              </a:tr>
-              <a:tr h="491490">
-                <a:tc>
-                  <a:txBody>
-                    <a:bodyPr/>
-                    <a:lstStyle/>
-                    <a:p>
-                      <a:pPr>
-                        <a:defRPr sz="950" b="1">
-                          <a:solidFill>
-                            <a:srgbClr val="F8FAFC"/>
-                          </a:solidFill>
-                          <a:latin typeface="Segoe UI"/>
-                        </a:defRPr>
-                      </a:pPr>
-                      <a:r>
-                        <a:t>Unemployment</a:t>
-                      </a:r>
-                    </a:p>
-                  </a:txBody>
-                  <a:tcPr>
-                    <a:solidFill>
-                      <a:srgbClr val="18202F"/>
-                    </a:solidFill>
-                  </a:tcPr>
-                </a:tc>
-                <a:tc>
-                  <a:txBody>
-                    <a:bodyPr/>
-                    <a:lstStyle/>
-                    <a:p>
-                      <a:pPr>
-                        <a:defRPr sz="950" b="0">
-                          <a:solidFill>
-                            <a:srgbClr val="F8FAFC"/>
-                          </a:solidFill>
-                          <a:latin typeface="Segoe UI"/>
-                        </a:defRPr>
-                      </a:pPr>
-                      <a:r>
-                        <a:t>- 42 150 $ / std</a:t>
-                      </a:r>
-                    </a:p>
-                  </a:txBody>
-                  <a:tcPr>
-                    <a:solidFill>
-                      <a:srgbClr val="18202F"/>
-                    </a:solidFill>
-                  </a:tcPr>
-                </a:tc>
-                <a:tc>
-                  <a:txBody>
-                    <a:bodyPr/>
-                    <a:lstStyle/>
-                    <a:p>
-                      <a:pPr>
-                        <a:defRPr sz="950" b="0">
-                          <a:solidFill>
-                            <a:srgbClr val="F8FAFC"/>
-                          </a:solidFill>
-                          <a:latin typeface="Segoe UI"/>
-                        </a:defRPr>
-                      </a:pPr>
-                      <a:r>
-                        <a:t>Sensibilité économique</a:t>
-                      </a:r>
-                    </a:p>
-                  </a:txBody>
-                  <a:tcPr>
-                    <a:solidFill>
-                      <a:srgbClr val="18202F"/>
-                    </a:solidFill>
-                  </a:tcPr>
-                </a:tc>
-              </a:tr>
-              <a:tr h="491490">
-                <a:tc>
-                  <a:txBody>
-                    <a:bodyPr/>
-                    <a:lstStyle/>
-                    <a:p>
-                      <a:pPr>
-                        <a:defRPr sz="950" b="1">
-                          <a:solidFill>
-                            <a:srgbClr val="F8FAFC"/>
-                          </a:solidFill>
-                          <a:latin typeface="Segoe UI"/>
-                        </a:defRPr>
-                      </a:pPr>
-                      <a:r>
-                        <a:t>CPI (Inflation)</a:t>
-                      </a:r>
-                    </a:p>
-                  </a:txBody>
-                  <a:tcPr>
-                    <a:solidFill>
-                      <a:srgbClr val="1E293B"/>
-                    </a:solidFill>
-                  </a:tcPr>
-                </a:tc>
-                <a:tc>
-                  <a:txBody>
-                    <a:bodyPr/>
-                    <a:lstStyle/>
-                    <a:p>
-                      <a:pPr>
-                        <a:defRPr sz="950" b="0">
-                          <a:solidFill>
-                            <a:srgbClr val="F8FAFC"/>
-                          </a:solidFill>
-                          <a:latin typeface="Segoe UI"/>
-                        </a:defRPr>
-                      </a:pPr>
-                      <a:r>
-                        <a:t>- 28 640 $ / std</a:t>
-                      </a:r>
-                    </a:p>
-                  </a:txBody>
-                  <a:tcPr>
-                    <a:solidFill>
-                      <a:srgbClr val="1E293B"/>
-                    </a:solidFill>
-                  </a:tcPr>
-                </a:tc>
-                <a:tc>
-                  <a:txBody>
-                    <a:bodyPr/>
-                    <a:lstStyle/>
-                    <a:p>
-                      <a:pPr>
-                        <a:defRPr sz="950" b="0">
-                          <a:solidFill>
-                            <a:srgbClr val="F8FAFC"/>
-                          </a:solidFill>
-                          <a:latin typeface="Segoe UI"/>
-                        </a:defRPr>
-                      </a:pPr>
-                      <a:r>
-                        <a:t>Arbitrage panier</a:t>
-                      </a:r>
-                    </a:p>
-                  </a:txBody>
-                  <a:tcPr>
-                    <a:solidFill>
-                      <a:srgbClr val="1E293B"/>
-                    </a:solidFill>
-                  </a:tcPr>
-                </a:tc>
-              </a:tr>
-              <a:tr h="491490">
-                <a:tc>
-                  <a:txBody>
-                    <a:bodyPr/>
-                    <a:lstStyle/>
-                    <a:p>
-                      <a:pPr>
-                        <a:defRPr sz="950" b="1">
-                          <a:solidFill>
-                            <a:srgbClr val="F8FAFC"/>
-                          </a:solidFill>
-                          <a:latin typeface="Segoe UI"/>
-                        </a:defRPr>
-                      </a:pPr>
-                      <a:r>
-                        <a:t>Holiday_Flag</a:t>
-                      </a:r>
-                    </a:p>
-                  </a:txBody>
-                  <a:tcPr>
-                    <a:solidFill>
-                      <a:srgbClr val="18202F"/>
-                    </a:solidFill>
-                  </a:tcPr>
-                </a:tc>
-                <a:tc>
-                  <a:txBody>
-                    <a:bodyPr/>
-                    <a:lstStyle/>
-                    <a:p>
-                      <a:pPr>
-                        <a:defRPr sz="950" b="0">
-                          <a:solidFill>
-                            <a:srgbClr val="F8FAFC"/>
-                          </a:solidFill>
-                          <a:latin typeface="Segoe UI"/>
-                        </a:defRPr>
-                      </a:pPr>
-                      <a:r>
-                        <a:t>+ 48 900 $</a:t>
-                      </a:r>
-                    </a:p>
-                  </a:txBody>
-                  <a:tcPr>
-                    <a:solidFill>
-                      <a:srgbClr val="18202F"/>
-                    </a:solidFill>
-                  </a:tcPr>
-                </a:tc>
-                <a:tc>
-                  <a:txBody>
-                    <a:bodyPr/>
-                    <a:lstStyle/>
-                    <a:p>
-                      <a:pPr>
-                        <a:defRPr sz="950" b="0">
-                          <a:solidFill>
-                            <a:srgbClr val="F8FAFC"/>
-                          </a:solidFill>
-                          <a:latin typeface="Segoe UI"/>
-                        </a:defRPr>
-                      </a:pPr>
-                      <a:r>
-                        <a:t>Boost semaines fériées</a:t>
-                      </a:r>
-                    </a:p>
-                  </a:txBody>
-                  <a:tcPr>
-                    <a:solidFill>
-                      <a:srgbClr val="18202F"/>
-                    </a:solidFill>
-                  </a:tcPr>
-                </a:tc>
-              </a:tr>
-            </a:tbl>
-          </a:graphicData>
-        </a:graphic>
-      </p:graphicFrame>
-      <p:sp>
-        <p:nvSpPr>
-          <p:cNvPr id="10" name="Rounded Rectangle 9"/>
+              </a:defRPr>
+            </a:pPr>
+            <a:r>
+              <a:t>ENSEIGNEMENTS MÉTIER DÉCISIONNELS</a:t>
+            </a:r>
+          </a:p>
+          <a:p>
+            <a:pPr>
+              <a:spcBef>
+                <a:spcPts val="600"/>
+              </a:spcBef>
+              <a:defRPr b="1" sz="1050">
+                <a:solidFill>
+                  <a:srgbClr val="F8FAFC"/>
+                </a:solidFill>
+              </a:defRPr>
+            </a:pPr>
+            <a:r>
+              <a:t>L'Effet Magasin Écrase Tout :</a:t>
+            </a:r>
+          </a:p>
+          <a:p>
+            <a:pPr>
+              <a:defRPr sz="950">
+                <a:solidFill>
+                  <a:srgbClr val="94A3B8"/>
+                </a:solidFill>
+              </a:defRPr>
+            </a:pPr>
+            <a:r>
+              <a:t>Les identifiants de magasins génèrent des différentiels supérieurs à 1.3 M$ par semaine par rapport au magasin de référence. La surface commerciale et la zone de chalandise priment sur tous les autres facteurs.</a:t>
+            </a:r>
+          </a:p>
+          <a:p>
+            <a:pPr>
+              <a:spcBef>
+                <a:spcPts val="600"/>
+              </a:spcBef>
+              <a:defRPr b="1" sz="1050">
+                <a:solidFill>
+                  <a:srgbClr val="F8FAFC"/>
+                </a:solidFill>
+              </a:defRPr>
+            </a:pPr>
+            <a:r>
+              <a:t>Poids du Chômage (-42 245 $) :</a:t>
+            </a:r>
+          </a:p>
+          <a:p>
+            <a:pPr>
+              <a:defRPr sz="950">
+                <a:solidFill>
+                  <a:srgbClr val="94A3B8"/>
+                </a:solidFill>
+              </a:defRPr>
+            </a:pPr>
+            <a:r>
+              <a:t>Chaque hausse d'un écart-type du chômage ampute les ventes hebdomadaires de 42 000 $ par magasin : nécessité d'orienter le mix produit vers les marques distributeur (Great Value).</a:t>
+            </a:r>
+          </a:p>
+          <a:p>
+            <a:pPr>
+              <a:spcBef>
+                <a:spcPts val="600"/>
+              </a:spcBef>
+              <a:defRPr b="1" sz="1050">
+                <a:solidFill>
+                  <a:srgbClr val="F8FAFC"/>
+                </a:solidFill>
+              </a:defRPr>
+            </a:pPr>
+            <a:r>
+              <a:t>Surcroît Férié (+48 920 $) :</a:t>
+            </a:r>
+          </a:p>
+          <a:p>
+            <a:pPr>
+              <a:defRPr sz="950">
+                <a:solidFill>
+                  <a:srgbClr val="94A3B8"/>
+                </a:solidFill>
+              </a:defRPr>
+            </a:pPr>
+            <a:r>
+              <a:t>Les semaines de fête augmentent systématiquement les ventes de ~50 000 $, validant le ROI des investissements publicitaires saisonniers.</a:t>
+            </a:r>
+          </a:p>
+          <a:p>
+            <a:pPr>
+              <a:spcBef>
+                <a:spcPts val="600"/>
+              </a:spcBef>
+              <a:defRPr b="1" sz="1050">
+                <a:solidFill>
+                  <a:srgbClr val="F8FAFC"/>
+                </a:solidFill>
+              </a:defRPr>
+            </a:pPr>
+            <a:r>
+              <a:t>Effet Température (-15 810 $) :</a:t>
+            </a:r>
+          </a:p>
+          <a:p>
+            <a:pPr>
+              <a:defRPr sz="950">
+                <a:solidFill>
+                  <a:srgbClr val="94A3B8"/>
+                </a:solidFill>
+              </a:defRPr>
+            </a:pPr>
+            <a:r>
+              <a:t>Léger ralentissement lors des canicules estivales au profit des périodes d'achats de rentrée/hiver.</a:t>
+            </a:r>
+          </a:p>
+          <a:p>
+            <a:pPr>
+              <a:spcBef>
+                <a:spcPts val="600"/>
+              </a:spcBef>
+              <a:defRPr b="1" sz="1050">
+                <a:solidFill>
+                  <a:srgbClr val="F8FAFC"/>
+                </a:solidFill>
+              </a:defRPr>
+            </a:pPr>
+            <a:r>
+              <a:t>Carburant &amp; CPI :</a:t>
+            </a:r>
+          </a:p>
+          <a:p>
+            <a:pPr>
+              <a:defRPr sz="950">
+                <a:solidFill>
+                  <a:srgbClr val="94A3B8"/>
+                </a:solidFill>
+              </a:defRPr>
+            </a:pPr>
+            <a:r>
+              <a:t>Impacts secondaires absorbés par les ajustements de trésorerie des ménages.</a:t>
+            </a:r>
+          </a:p>
+        </p:txBody>
+      </p:sp>
+      <p:sp>
+        <p:nvSpPr>
+          <p:cNvPr id="9" name="Rounded Rectangle 8"/>
           <p:cNvSpPr/>
           <p:nvPr/>
         </p:nvSpPr>
         <p:spPr>
           <a:xfrm>
-            <a:off x="6492240" y="1371600"/>
-            <a:ext cx="4967935" cy="4754880"/>
+            <a:off x="6217920" y="1371600"/>
+            <a:ext cx="5242255" cy="4846320"/>
           </a:xfrm>
           <a:prstGeom prst="roundRect">
             <a:avLst/>
@@ -7113,7 +6518,7 @@
           <a:solidFill>
             <a:srgbClr val="1E293B"/>
           </a:solidFill>
-          <a:ln w="19050">
+          <a:ln w="12700">
             <a:solidFill>
               <a:srgbClr val="334155"/>
             </a:solidFill>
@@ -7143,14 +6548,128 @@
       </p:sp>
       <p:sp>
         <p:nvSpPr>
-          <p:cNvPr id="11" name="TextBox 10"/>
+          <p:cNvPr id="10" name="Rounded Rectangle 9"/>
+          <p:cNvSpPr/>
+          <p:nvPr/>
+        </p:nvSpPr>
+        <p:spPr>
+          <a:xfrm>
+            <a:off x="6400800" y="1508760"/>
+            <a:ext cx="4876495" cy="3291840"/>
+          </a:xfrm>
+          <a:prstGeom prst="roundRect">
+            <a:avLst/>
+          </a:prstGeom>
+          <a:solidFill>
+            <a:srgbClr val="FFFFFF"/>
+          </a:solidFill>
+          <a:ln w="12700">
+            <a:solidFill>
+              <a:srgbClr val="CBD5E1"/>
+            </a:solidFill>
+          </a:ln>
+        </p:spPr>
+        <p:style>
+          <a:lnRef idx="1">
+            <a:schemeClr val="accent1"/>
+          </a:lnRef>
+          <a:fillRef idx="3">
+            <a:schemeClr val="accent1"/>
+          </a:fillRef>
+          <a:effectRef idx="2">
+            <a:schemeClr val="accent1"/>
+          </a:effectRef>
+          <a:fontRef idx="minor">
+            <a:schemeClr val="lt1"/>
+          </a:fontRef>
+        </p:style>
+        <p:txBody>
+          <a:bodyPr rtlCol="0" anchor="ctr"/>
+          <a:lstStyle/>
+          <a:p>
+            <a:pPr algn="ctr"/>
+          </a:p>
+        </p:txBody>
+      </p:sp>
+      <p:pic>
+        <p:nvPicPr>
+          <p:cNvPr id="11" name="Picture 10" descr="walmart_c18_4.png"/>
+          <p:cNvPicPr>
+            <a:picLocks noChangeAspect="1"/>
+          </p:cNvPicPr>
+          <p:nvPr/>
+        </p:nvPicPr>
+        <p:blipFill>
+          <a:blip r:embed="rId2"/>
+          <a:stretch>
+            <a:fillRect/>
+          </a:stretch>
+        </p:blipFill>
+        <p:spPr>
+          <a:xfrm>
+            <a:off x="6446520" y="1737360"/>
+            <a:ext cx="4785055" cy="2834640"/>
+          </a:xfrm>
+          <a:prstGeom prst="rect">
+            <a:avLst/>
+          </a:prstGeom>
+        </p:spPr>
+      </p:pic>
+      <p:sp>
+        <p:nvSpPr>
+          <p:cNvPr id="12" name="Rounded Rectangle 11"/>
+          <p:cNvSpPr/>
+          <p:nvPr/>
+        </p:nvSpPr>
+        <p:spPr>
+          <a:xfrm>
+            <a:off x="6400800" y="4892040"/>
+            <a:ext cx="4876495" cy="1188720"/>
+          </a:xfrm>
+          <a:prstGeom prst="roundRect">
+            <a:avLst/>
+          </a:prstGeom>
+          <a:solidFill>
+            <a:srgbClr val="0F172A"/>
+          </a:solidFill>
+          <a:ln w="12700">
+            <a:solidFill>
+              <a:srgbClr val="334155"/>
+            </a:solidFill>
+          </a:ln>
+        </p:spPr>
+        <p:style>
+          <a:lnRef idx="1">
+            <a:schemeClr val="accent1"/>
+          </a:lnRef>
+          <a:fillRef idx="3">
+            <a:schemeClr val="accent1"/>
+          </a:fillRef>
+          <a:effectRef idx="2">
+            <a:schemeClr val="accent1"/>
+          </a:effectRef>
+          <a:fontRef idx="minor">
+            <a:schemeClr val="lt1"/>
+          </a:fontRef>
+        </p:style>
+        <p:txBody>
+          <a:bodyPr rtlCol="0" anchor="ctr"/>
+          <a:lstStyle/>
+          <a:p>
+            <a:pPr algn="ctr"/>
+          </a:p>
+        </p:txBody>
+      </p:sp>
+      <p:sp>
+        <p:nvSpPr>
+          <p:cNvPr id="13" name="TextBox 12"/>
           <p:cNvSpPr txBox="1"/>
           <p:nvPr/>
         </p:nvSpPr>
         <p:spPr>
           <a:xfrm>
-            <a:off x="6675120" y="1536192"/>
-            <a:ext cx="4602175" cy="365760"/>
+            <a:off x="6583680" y="4937760"/>
+            <a:ext cx="4510735" cy="1097280"/>
           </a:xfrm>
           <a:prstGeom prst="rect">
             <a:avLst/>
@@ -7164,116 +6683,29 @@
           <a:lstStyle/>
           <a:p>
             <a:pPr>
-              <a:defRPr sz="1100" b="1">
-                <a:solidFill>
-                  <a:srgbClr val="38BDF8"/>
-                </a:solidFill>
-                <a:latin typeface="Segoe UI"/>
-              </a:defRPr>
-            </a:pPr>
-            <a:r>
-              <a:t>ENSEIGNEMENTS MÉTIER DÉCISIONNELS</a:t>
-            </a:r>
-          </a:p>
-        </p:txBody>
-      </p:sp>
-      <p:sp>
-        <p:nvSpPr>
-          <p:cNvPr id="12" name="TextBox 11"/>
-          <p:cNvSpPr txBox="1"/>
-          <p:nvPr/>
-        </p:nvSpPr>
-        <p:spPr>
-          <a:xfrm>
-            <a:off x="6675120" y="1920240"/>
-            <a:ext cx="4602175" cy="3931920"/>
-          </a:xfrm>
-          <a:prstGeom prst="rect">
-            <a:avLst/>
-          </a:prstGeom>
-          <a:noFill/>
-        </p:spPr>
-        <p:txBody>
-          <a:bodyPr wrap="square">
-            <a:spAutoFit/>
-          </a:bodyPr>
-          <a:lstStyle/>
-          <a:p>
-            <a:pPr>
-              <a:defRPr sz="1000" b="1">
-                <a:solidFill>
-                  <a:srgbClr val="38BDF8"/>
-                </a:solidFill>
-                <a:latin typeface="Segoe UI"/>
-              </a:defRPr>
-            </a:pPr>
-            <a:r>
-              <a:t>L'Effet Magasin Écrase Tout :</a:t>
-            </a:r>
-          </a:p>
-          <a:p>
-            <a:pPr>
+              <a:defRPr sz="1050" b="1">
+                <a:solidFill>
+                  <a:srgbClr val="F59E0B"/>
+                </a:solidFill>
+              </a:defRPr>
+            </a:pPr>
+            <a:r>
+              <a:t>HIÉRARCHIE DES DRIVERS DE VENTES (EXTRACTION .COEF_)</a:t>
+            </a:r>
+          </a:p>
+          <a:p>
+            <a:pPr>
+              <a:spcBef>
+                <a:spcPts val="300"/>
+              </a:spcBef>
               <a:defRPr sz="900">
                 <a:solidFill>
                   <a:srgbClr val="F8FAFC"/>
                 </a:solidFill>
-                <a:latin typeface="Segoe UI"/>
-              </a:defRPr>
-            </a:pPr>
-            <a:r>
-              <a:t>Les identifiants de magasins génèrent des différentiels supérieurs à 1.3 M$ par semaine par rapport au magasin de référence. La surface et la zone de chalandise priment sur tous les autres facteurs.</a:t>
-            </a:r>
-          </a:p>
-          <a:p>
-            <a:pPr>
-              <a:defRPr sz="1000" b="1">
-                <a:solidFill>
-                  <a:srgbClr val="38BDF8"/>
-                </a:solidFill>
-                <a:latin typeface="Segoe UI"/>
-              </a:defRPr>
-            </a:pPr>
-            <a:r>
-              <a:t>Poids du Chômage (-42k$) :</a:t>
-            </a:r>
-          </a:p>
-          <a:p>
-            <a:pPr>
-              <a:defRPr sz="900">
-                <a:solidFill>
-                  <a:srgbClr val="F8FAFC"/>
-                </a:solidFill>
-                <a:latin typeface="Segoe UI"/>
-              </a:defRPr>
-            </a:pPr>
-            <a:r>
-              <a:t>Chaque hausse d'un écart-type du chômage ampute les ventes hebdomadaires de 42 000 $ par magasin : nécessité d'orienter le mix produit vers les marques distributeur (Great Value).</a:t>
-            </a:r>
-          </a:p>
-          <a:p>
-            <a:pPr>
-              <a:defRPr sz="1000" b="1">
-                <a:solidFill>
-                  <a:srgbClr val="38BDF8"/>
-                </a:solidFill>
-                <a:latin typeface="Segoe UI"/>
-              </a:defRPr>
-            </a:pPr>
-            <a:r>
-              <a:t>Surcroît Férié (+48.9k$) :</a:t>
-            </a:r>
-          </a:p>
-          <a:p>
-            <a:pPr>
-              <a:defRPr sz="900">
-                <a:solidFill>
-                  <a:srgbClr val="F8FAFC"/>
-                </a:solidFill>
-                <a:latin typeface="Segoe UI"/>
-              </a:defRPr>
-            </a:pPr>
-            <a:r>
-              <a:t>Les semaines de fête augmentent systématiquement les ventes de ~50 000 $, validant le ROI des investissements publicitaires saisonniers.</a:t>
+              </a:defRPr>
+            </a:pPr>
+            <a:r>
+              <a:t>Visualisation des coefficients Scikit-Learn : les indicatrices de magasins (Store 4, 13, 14, 20 en haut) dominent nettement Holiday_Flag, Unemployment et Temperature.</a:t>
             </a:r>
           </a:p>
         </p:txBody>
@@ -7356,7 +6788,7 @@
           <a:noFill/>
         </p:spPr>
         <p:txBody>
-          <a:bodyPr wrap="square">
+          <a:bodyPr wrap="square" lIns="0" tIns="0" rIns="0" bIns="0">
             <a:spAutoFit/>
           </a:bodyPr>
           <a:lstStyle/>
@@ -7392,13 +6824,13 @@
           <a:noFill/>
         </p:spPr>
         <p:txBody>
-          <a:bodyPr wrap="square">
+          <a:bodyPr wrap="square" lIns="0" tIns="0" rIns="0" bIns="0">
             <a:spAutoFit/>
           </a:bodyPr>
           <a:lstStyle/>
           <a:p>
             <a:pPr>
-              <a:defRPr sz="2100" b="1">
+              <a:defRPr sz="1800" b="1">
                 <a:solidFill>
                   <a:srgbClr val="F8FAFC"/>
                 </a:solidFill>
@@ -7428,7 +6860,7 @@
           <a:noFill/>
         </p:spPr>
         <p:txBody>
-          <a:bodyPr wrap="square">
+          <a:bodyPr wrap="none" lIns="0" tIns="0" rIns="0" bIns="0">
             <a:spAutoFit/>
           </a:bodyPr>
           <a:lstStyle/>
@@ -7464,21 +6896,21 @@
           <a:noFill/>
         </p:spPr>
         <p:txBody>
-          <a:bodyPr wrap="square">
+          <a:bodyPr wrap="none" lIns="0" tIns="0" rIns="0" bIns="0">
             <a:spAutoFit/>
           </a:bodyPr>
           <a:lstStyle/>
           <a:p>
             <a:pPr>
-              <a:defRPr sz="1000">
-                <a:solidFill>
-                  <a:srgbClr val="64748B"/>
+              <a:defRPr sz="950">
+                <a:solidFill>
+                  <a:srgbClr val="94A3B8"/>
                 </a:solidFill>
                 <a:latin typeface="Segoe UI"/>
               </a:defRPr>
             </a:pPr>
             <a:r>
-              <a:t>Christopher GILLERON  |  Walmart Store Sales Prediction (Machine Learning Supervisé)  |  Certification CDSD Bloc 3</a:t>
+              <a:t>Christopher GILLERON  |  Walmart Store Sales Prediction (Machine Learning Supervisé)  |  Certification CDSD Bloc 3  |  Temps alloué : 5 min</a:t>
             </a:r>
           </a:p>
         </p:txBody>
@@ -7492,7 +6924,7 @@
         <p:spPr>
           <a:xfrm>
             <a:off x="731520" y="1371600"/>
-            <a:ext cx="10728655" cy="2194560"/>
+            <a:ext cx="5212080" cy="4846320"/>
           </a:xfrm>
           <a:prstGeom prst="roundRect">
             <a:avLst/>
@@ -7500,7 +6932,7 @@
           <a:solidFill>
             <a:srgbClr val="1E293B"/>
           </a:solidFill>
-          <a:ln w="19050">
+          <a:ln w="12700">
             <a:solidFill>
               <a:srgbClr val="334155"/>
             </a:solidFill>
@@ -7536,8 +6968,8 @@
         </p:nvSpPr>
         <p:spPr>
           <a:xfrm>
-            <a:off x="914400" y="1536192"/>
-            <a:ext cx="10362895" cy="365760"/>
+            <a:off x="914400" y="1554480"/>
+            <a:ext cx="4846320" cy="4480560"/>
           </a:xfrm>
           <a:prstGeom prst="rect">
             <a:avLst/>
@@ -7551,740 +6983,136 @@
           <a:lstStyle/>
           <a:p>
             <a:pPr>
-              <a:defRPr sz="1100" b="1">
+              <a:defRPr sz="1300" b="1">
                 <a:solidFill>
                   <a:srgbClr val="38BDF8"/>
                 </a:solidFill>
-                <a:latin typeface="Segoe UI"/>
               </a:defRPr>
             </a:pPr>
             <a:r>
               <a:t>TABLEAU COMPARATIF DES MODÈLES (SCIKIT-LEARN)</a:t>
             </a:r>
           </a:p>
-        </p:txBody>
-      </p:sp>
-      <p:graphicFrame>
-        <p:nvGraphicFramePr>
-          <p:cNvPr id="9" name="Table 8"/>
-          <p:cNvGraphicFramePr>
-            <a:graphicFrameLocks noGrp="1"/>
-          </p:cNvGraphicFramePr>
-          <p:nvPr/>
-        </p:nvGraphicFramePr>
-        <p:xfrm>
-          <a:off x="914400" y="1828800"/>
-          <a:ext cx="10362895" cy="1554480"/>
-        </p:xfrm>
-        <a:graphic>
-          <a:graphicData uri="http://schemas.openxmlformats.org/drawingml/2006/table">
-            <a:tbl>
-              <a:tblPr firstRow="1" bandRow="1">
-                <a:tableStyleId>{5C22544A-7EE6-4342-B048-85BDC9FD1C3A}</a:tableStyleId>
-              </a:tblPr>
-              <a:tblGrid>
-                <a:gridCol w="1480413"/>
-                <a:gridCol w="1480413"/>
-                <a:gridCol w="1480413"/>
-                <a:gridCol w="1480413"/>
-                <a:gridCol w="1480413"/>
-                <a:gridCol w="1480413"/>
-                <a:gridCol w="1480417"/>
-              </a:tblGrid>
-              <a:tr h="388620">
-                <a:tc>
-                  <a:txBody>
-                    <a:bodyPr/>
-                    <a:lstStyle/>
-                    <a:p>
-                      <a:pPr>
-                        <a:defRPr sz="1000" b="1">
-                          <a:solidFill>
-                            <a:srgbClr val="38BDF8"/>
-                          </a:solidFill>
-                          <a:latin typeface="Segoe UI"/>
-                        </a:defRPr>
-                      </a:pPr>
-                      <a:r>
-                        <a:t>Modèle</a:t>
-                      </a:r>
-                    </a:p>
-                  </a:txBody>
-                  <a:tcPr>
-                    <a:solidFill>
-                      <a:srgbClr val="0F172A"/>
-                    </a:solidFill>
-                  </a:tcPr>
-                </a:tc>
-                <a:tc>
-                  <a:txBody>
-                    <a:bodyPr/>
-                    <a:lstStyle/>
-                    <a:p>
-                      <a:pPr>
-                        <a:defRPr sz="1000" b="1">
-                          <a:solidFill>
-                            <a:srgbClr val="38BDF8"/>
-                          </a:solidFill>
-                          <a:latin typeface="Segoe UI"/>
-                        </a:defRPr>
-                      </a:pPr>
-                      <a:r>
-                        <a:t>Pénalité</a:t>
-                      </a:r>
-                    </a:p>
-                  </a:txBody>
-                  <a:tcPr>
-                    <a:solidFill>
-                      <a:srgbClr val="0F172A"/>
-                    </a:solidFill>
-                  </a:tcPr>
-                </a:tc>
-                <a:tc>
-                  <a:txBody>
-                    <a:bodyPr/>
-                    <a:lstStyle/>
-                    <a:p>
-                      <a:pPr>
-                        <a:defRPr sz="1000" b="1">
-                          <a:solidFill>
-                            <a:srgbClr val="38BDF8"/>
-                          </a:solidFill>
-                          <a:latin typeface="Segoe UI"/>
-                        </a:defRPr>
-                      </a:pPr>
-                      <a:r>
-                        <a:t>Best Alpha (CV)</a:t>
-                      </a:r>
-                    </a:p>
-                  </a:txBody>
-                  <a:tcPr>
-                    <a:solidFill>
-                      <a:srgbClr val="0F172A"/>
-                    </a:solidFill>
-                  </a:tcPr>
-                </a:tc>
-                <a:tc>
-                  <a:txBody>
-                    <a:bodyPr/>
-                    <a:lstStyle/>
-                    <a:p>
-                      <a:pPr>
-                        <a:defRPr sz="1000" b="1">
-                          <a:solidFill>
-                            <a:srgbClr val="38BDF8"/>
-                          </a:solidFill>
-                          <a:latin typeface="Segoe UI"/>
-                        </a:defRPr>
-                      </a:pPr>
-                      <a:r>
-                        <a:t>R² Train</a:t>
-                      </a:r>
-                    </a:p>
-                  </a:txBody>
-                  <a:tcPr>
-                    <a:solidFill>
-                      <a:srgbClr val="0F172A"/>
-                    </a:solidFill>
-                  </a:tcPr>
-                </a:tc>
-                <a:tc>
-                  <a:txBody>
-                    <a:bodyPr/>
-                    <a:lstStyle/>
-                    <a:p>
-                      <a:pPr>
-                        <a:defRPr sz="1000" b="1">
-                          <a:solidFill>
-                            <a:srgbClr val="38BDF8"/>
-                          </a:solidFill>
-                          <a:latin typeface="Segoe UI"/>
-                        </a:defRPr>
-                      </a:pPr>
-                      <a:r>
-                        <a:t>R² Test</a:t>
-                      </a:r>
-                    </a:p>
-                  </a:txBody>
-                  <a:tcPr>
-                    <a:solidFill>
-                      <a:srgbClr val="0F172A"/>
-                    </a:solidFill>
-                  </a:tcPr>
-                </a:tc>
-                <a:tc>
-                  <a:txBody>
-                    <a:bodyPr/>
-                    <a:lstStyle/>
-                    <a:p>
-                      <a:pPr>
-                        <a:defRPr sz="1000" b="1">
-                          <a:solidFill>
-                            <a:srgbClr val="38BDF8"/>
-                          </a:solidFill>
-                          <a:latin typeface="Segoe UI"/>
-                        </a:defRPr>
-                      </a:pPr>
-                      <a:r>
-                        <a:t>RMSE Test ($)</a:t>
-                      </a:r>
-                    </a:p>
-                  </a:txBody>
-                  <a:tcPr>
-                    <a:solidFill>
-                      <a:srgbClr val="0F172A"/>
-                    </a:solidFill>
-                  </a:tcPr>
-                </a:tc>
-                <a:tc>
-                  <a:txBody>
-                    <a:bodyPr/>
-                    <a:lstStyle/>
-                    <a:p>
-                      <a:pPr>
-                        <a:defRPr sz="1000" b="1">
-                          <a:solidFill>
-                            <a:srgbClr val="38BDF8"/>
-                          </a:solidFill>
-                          <a:latin typeface="Segoe UI"/>
-                        </a:defRPr>
-                      </a:pPr>
-                      <a:r>
-                        <a:t>Verdict</a:t>
-                      </a:r>
-                    </a:p>
-                  </a:txBody>
-                  <a:tcPr>
-                    <a:solidFill>
-                      <a:srgbClr val="0F172A"/>
-                    </a:solidFill>
-                  </a:tcPr>
-                </a:tc>
-              </a:tr>
-              <a:tr h="388620">
-                <a:tc>
-                  <a:txBody>
-                    <a:bodyPr/>
-                    <a:lstStyle/>
-                    <a:p>
-                      <a:pPr>
-                        <a:defRPr sz="950" b="1">
-                          <a:solidFill>
-                            <a:srgbClr val="F8FAFC"/>
-                          </a:solidFill>
-                          <a:latin typeface="Segoe UI"/>
-                        </a:defRPr>
-                      </a:pPr>
-                      <a:r>
-                        <a:t>Linear Regression</a:t>
-                      </a:r>
-                    </a:p>
-                  </a:txBody>
-                  <a:tcPr>
-                    <a:solidFill>
-                      <a:srgbClr val="18202F"/>
-                    </a:solidFill>
-                  </a:tcPr>
-                </a:tc>
-                <a:tc>
-                  <a:txBody>
-                    <a:bodyPr/>
-                    <a:lstStyle/>
-                    <a:p>
-                      <a:pPr>
-                        <a:defRPr sz="950" b="0">
-                          <a:solidFill>
-                            <a:srgbClr val="F8FAFC"/>
-                          </a:solidFill>
-                          <a:latin typeface="Segoe UI"/>
-                        </a:defRPr>
-                      </a:pPr>
-                      <a:r>
-                        <a:t>Aucune</a:t>
-                      </a:r>
-                    </a:p>
-                  </a:txBody>
-                  <a:tcPr>
-                    <a:solidFill>
-                      <a:srgbClr val="18202F"/>
-                    </a:solidFill>
-                  </a:tcPr>
-                </a:tc>
-                <a:tc>
-                  <a:txBody>
-                    <a:bodyPr/>
-                    <a:lstStyle/>
-                    <a:p>
-                      <a:pPr>
-                        <a:defRPr sz="950" b="0">
-                          <a:solidFill>
-                            <a:srgbClr val="F8FAFC"/>
-                          </a:solidFill>
-                          <a:latin typeface="Segoe UI"/>
-                        </a:defRPr>
-                      </a:pPr>
-                      <a:r>
-                        <a:t>N/A</a:t>
-                      </a:r>
-                    </a:p>
-                  </a:txBody>
-                  <a:tcPr>
-                    <a:solidFill>
-                      <a:srgbClr val="18202F"/>
-                    </a:solidFill>
-                  </a:tcPr>
-                </a:tc>
-                <a:tc>
-                  <a:txBody>
-                    <a:bodyPr/>
-                    <a:lstStyle/>
-                    <a:p>
-                      <a:pPr>
-                        <a:defRPr sz="950" b="0">
-                          <a:solidFill>
-                            <a:srgbClr val="F8FAFC"/>
-                          </a:solidFill>
-                          <a:latin typeface="Segoe UI"/>
-                        </a:defRPr>
-                      </a:pPr>
-                      <a:r>
-                        <a:t>0.98</a:t>
-                      </a:r>
-                    </a:p>
-                  </a:txBody>
-                  <a:tcPr>
-                    <a:solidFill>
-                      <a:srgbClr val="18202F"/>
-                    </a:solidFill>
-                  </a:tcPr>
-                </a:tc>
-                <a:tc>
-                  <a:txBody>
-                    <a:bodyPr/>
-                    <a:lstStyle/>
-                    <a:p>
-                      <a:pPr>
-                        <a:defRPr sz="950" b="0">
-                          <a:solidFill>
-                            <a:srgbClr val="F8FAFC"/>
-                          </a:solidFill>
-                          <a:latin typeface="Segoe UI"/>
-                        </a:defRPr>
-                      </a:pPr>
-                      <a:r>
-                        <a:t>0.90</a:t>
-                      </a:r>
-                    </a:p>
-                  </a:txBody>
-                  <a:tcPr>
-                    <a:solidFill>
-                      <a:srgbClr val="18202F"/>
-                    </a:solidFill>
-                  </a:tcPr>
-                </a:tc>
-                <a:tc>
-                  <a:txBody>
-                    <a:bodyPr/>
-                    <a:lstStyle/>
-                    <a:p>
-                      <a:pPr>
-                        <a:defRPr sz="950" b="0">
-                          <a:solidFill>
-                            <a:srgbClr val="F8FAFC"/>
-                          </a:solidFill>
-                          <a:latin typeface="Segoe UI"/>
-                        </a:defRPr>
-                      </a:pPr>
-                      <a:r>
-                        <a:t>188 478 $</a:t>
-                      </a:r>
-                    </a:p>
-                  </a:txBody>
-                  <a:tcPr>
-                    <a:solidFill>
-                      <a:srgbClr val="18202F"/>
-                    </a:solidFill>
-                  </a:tcPr>
-                </a:tc>
-                <a:tc>
-                  <a:txBody>
-                    <a:bodyPr/>
-                    <a:lstStyle/>
-                    <a:p>
-                      <a:pPr>
-                        <a:defRPr sz="950" b="0">
-                          <a:solidFill>
-                            <a:srgbClr val="F8FAFC"/>
-                          </a:solidFill>
-                          <a:latin typeface="Segoe UI"/>
-                        </a:defRPr>
-                      </a:pPr>
-                      <a:r>
-                        <a:t>Baseline</a:t>
-                      </a:r>
-                    </a:p>
-                  </a:txBody>
-                  <a:tcPr>
-                    <a:solidFill>
-                      <a:srgbClr val="18202F"/>
-                    </a:solidFill>
-                  </a:tcPr>
-                </a:tc>
-              </a:tr>
-              <a:tr h="388620">
-                <a:tc>
-                  <a:txBody>
-                    <a:bodyPr/>
-                    <a:lstStyle/>
-                    <a:p>
-                      <a:pPr>
-                        <a:defRPr sz="950" b="1">
-                          <a:solidFill>
-                            <a:srgbClr val="F8FAFC"/>
-                          </a:solidFill>
-                          <a:latin typeface="Segoe UI"/>
-                        </a:defRPr>
-                      </a:pPr>
-                      <a:r>
-                        <a:t>Ridge (L2)</a:t>
-                      </a:r>
-                    </a:p>
-                  </a:txBody>
-                  <a:tcPr>
-                    <a:solidFill>
-                      <a:srgbClr val="1E293B"/>
-                    </a:solidFill>
-                  </a:tcPr>
-                </a:tc>
-                <a:tc>
-                  <a:txBody>
-                    <a:bodyPr/>
-                    <a:lstStyle/>
-                    <a:p>
-                      <a:pPr>
-                        <a:defRPr sz="950" b="0">
-                          <a:solidFill>
-                            <a:srgbClr val="F8FAFC"/>
-                          </a:solidFill>
-                          <a:latin typeface="Segoe UI"/>
-                        </a:defRPr>
-                      </a:pPr>
-                      <a:r>
-                        <a:t>Norme ||w||₂²</a:t>
-                      </a:r>
-                    </a:p>
-                  </a:txBody>
-                  <a:tcPr>
-                    <a:solidFill>
-                      <a:srgbClr val="1E293B"/>
-                    </a:solidFill>
-                  </a:tcPr>
-                </a:tc>
-                <a:tc>
-                  <a:txBody>
-                    <a:bodyPr/>
-                    <a:lstStyle/>
-                    <a:p>
-                      <a:pPr>
-                        <a:defRPr sz="950" b="0">
-                          <a:solidFill>
-                            <a:srgbClr val="F8FAFC"/>
-                          </a:solidFill>
-                          <a:latin typeface="Segoe UI"/>
-                        </a:defRPr>
-                      </a:pPr>
-                      <a:r>
-                        <a:t>alpha = 0.01</a:t>
-                      </a:r>
-                    </a:p>
-                  </a:txBody>
-                  <a:tcPr>
-                    <a:solidFill>
-                      <a:srgbClr val="1E293B"/>
-                    </a:solidFill>
-                  </a:tcPr>
-                </a:tc>
-                <a:tc>
-                  <a:txBody>
-                    <a:bodyPr/>
-                    <a:lstStyle/>
-                    <a:p>
-                      <a:pPr>
-                        <a:defRPr sz="950" b="0">
-                          <a:solidFill>
-                            <a:srgbClr val="F8FAFC"/>
-                          </a:solidFill>
-                          <a:latin typeface="Segoe UI"/>
-                        </a:defRPr>
-                      </a:pPr>
-                      <a:r>
-                        <a:t>0.98</a:t>
-                      </a:r>
-                    </a:p>
-                  </a:txBody>
-                  <a:tcPr>
-                    <a:solidFill>
-                      <a:srgbClr val="1E293B"/>
-                    </a:solidFill>
-                  </a:tcPr>
-                </a:tc>
-                <a:tc>
-                  <a:txBody>
-                    <a:bodyPr/>
-                    <a:lstStyle/>
-                    <a:p>
-                      <a:pPr>
-                        <a:defRPr sz="950" b="0">
-                          <a:solidFill>
-                            <a:srgbClr val="F8FAFC"/>
-                          </a:solidFill>
-                          <a:latin typeface="Segoe UI"/>
-                        </a:defRPr>
-                      </a:pPr>
-                      <a:r>
-                        <a:t>0.90</a:t>
-                      </a:r>
-                    </a:p>
-                  </a:txBody>
-                  <a:tcPr>
-                    <a:solidFill>
-                      <a:srgbClr val="1E293B"/>
-                    </a:solidFill>
-                  </a:tcPr>
-                </a:tc>
-                <a:tc>
-                  <a:txBody>
-                    <a:bodyPr/>
-                    <a:lstStyle/>
-                    <a:p>
-                      <a:pPr>
-                        <a:defRPr sz="950" b="0">
-                          <a:solidFill>
-                            <a:srgbClr val="F8FAFC"/>
-                          </a:solidFill>
-                          <a:latin typeface="Segoe UI"/>
-                        </a:defRPr>
-                      </a:pPr>
-                      <a:r>
-                        <a:t>187 888 $</a:t>
-                      </a:r>
-                    </a:p>
-                  </a:txBody>
-                  <a:tcPr>
-                    <a:solidFill>
-                      <a:srgbClr val="1E293B"/>
-                    </a:solidFill>
-                  </a:tcPr>
-                </a:tc>
-                <a:tc>
-                  <a:txBody>
-                    <a:bodyPr/>
-                    <a:lstStyle/>
-                    <a:p>
-                      <a:pPr>
-                        <a:defRPr sz="950" b="0">
-                          <a:solidFill>
-                            <a:srgbClr val="F8FAFC"/>
-                          </a:solidFill>
-                          <a:latin typeface="Segoe UI"/>
-                        </a:defRPr>
-                      </a:pPr>
-                      <a:r>
-                        <a:t>Poids stabilisés</a:t>
-                      </a:r>
-                    </a:p>
-                  </a:txBody>
-                  <a:tcPr>
-                    <a:solidFill>
-                      <a:srgbClr val="1E293B"/>
-                    </a:solidFill>
-                  </a:tcPr>
-                </a:tc>
-              </a:tr>
-              <a:tr h="388620">
-                <a:tc>
-                  <a:txBody>
-                    <a:bodyPr/>
-                    <a:lstStyle/>
-                    <a:p>
-                      <a:pPr>
-                        <a:defRPr sz="950" b="1">
-                          <a:solidFill>
-                            <a:srgbClr val="10B981"/>
-                          </a:solidFill>
-                          <a:latin typeface="Segoe UI"/>
-                        </a:defRPr>
-                      </a:pPr>
-                      <a:r>
-                        <a:t>Lasso (L1) — Retenu</a:t>
-                      </a:r>
-                    </a:p>
-                  </a:txBody>
-                  <a:tcPr>
-                    <a:solidFill>
-                      <a:srgbClr val="18202F"/>
-                    </a:solidFill>
-                  </a:tcPr>
-                </a:tc>
-                <a:tc>
-                  <a:txBody>
-                    <a:bodyPr/>
-                    <a:lstStyle/>
-                    <a:p>
-                      <a:pPr>
-                        <a:defRPr sz="950" b="1">
-                          <a:solidFill>
-                            <a:srgbClr val="10B981"/>
-                          </a:solidFill>
-                          <a:latin typeface="Segoe UI"/>
-                        </a:defRPr>
-                      </a:pPr>
-                      <a:r>
-                        <a:t>Norme ||w||₁</a:t>
-                      </a:r>
-                    </a:p>
-                  </a:txBody>
-                  <a:tcPr>
-                    <a:solidFill>
-                      <a:srgbClr val="18202F"/>
-                    </a:solidFill>
-                  </a:tcPr>
-                </a:tc>
-                <a:tc>
-                  <a:txBody>
-                    <a:bodyPr/>
-                    <a:lstStyle/>
-                    <a:p>
-                      <a:pPr>
-                        <a:defRPr sz="950" b="1">
-                          <a:solidFill>
-                            <a:srgbClr val="10B981"/>
-                          </a:solidFill>
-                          <a:latin typeface="Segoe UI"/>
-                        </a:defRPr>
-                      </a:pPr>
-                      <a:r>
-                        <a:t>alpha = 1 000</a:t>
-                      </a:r>
-                    </a:p>
-                  </a:txBody>
-                  <a:tcPr>
-                    <a:solidFill>
-                      <a:srgbClr val="18202F"/>
-                    </a:solidFill>
-                  </a:tcPr>
-                </a:tc>
-                <a:tc>
-                  <a:txBody>
-                    <a:bodyPr/>
-                    <a:lstStyle/>
-                    <a:p>
-                      <a:pPr>
-                        <a:defRPr sz="950" b="1">
-                          <a:solidFill>
-                            <a:srgbClr val="10B981"/>
-                          </a:solidFill>
-                          <a:latin typeface="Segoe UI"/>
-                        </a:defRPr>
-                      </a:pPr>
-                      <a:r>
-                        <a:t>0.98</a:t>
-                      </a:r>
-                    </a:p>
-                  </a:txBody>
-                  <a:tcPr>
-                    <a:solidFill>
-                      <a:srgbClr val="18202F"/>
-                    </a:solidFill>
-                  </a:tcPr>
-                </a:tc>
-                <a:tc>
-                  <a:txBody>
-                    <a:bodyPr/>
-                    <a:lstStyle/>
-                    <a:p>
-                      <a:pPr>
-                        <a:defRPr sz="950" b="1">
-                          <a:solidFill>
-                            <a:srgbClr val="10B981"/>
-                          </a:solidFill>
-                          <a:latin typeface="Segoe UI"/>
-                        </a:defRPr>
-                      </a:pPr>
-                      <a:r>
-                        <a:t>0.91</a:t>
-                      </a:r>
-                    </a:p>
-                  </a:txBody>
-                  <a:tcPr>
-                    <a:solidFill>
-                      <a:srgbClr val="18202F"/>
-                    </a:solidFill>
-                  </a:tcPr>
-                </a:tc>
-                <a:tc>
-                  <a:txBody>
-                    <a:bodyPr/>
-                    <a:lstStyle/>
-                    <a:p>
-                      <a:pPr>
-                        <a:defRPr sz="950" b="1">
-                          <a:solidFill>
-                            <a:srgbClr val="10B981"/>
-                          </a:solidFill>
-                          <a:latin typeface="Segoe UI"/>
-                        </a:defRPr>
-                      </a:pPr>
-                      <a:r>
-                        <a:t>181 457 $</a:t>
-                      </a:r>
-                    </a:p>
-                  </a:txBody>
-                  <a:tcPr>
-                    <a:solidFill>
-                      <a:srgbClr val="18202F"/>
-                    </a:solidFill>
-                  </a:tcPr>
-                </a:tc>
-                <a:tc>
-                  <a:txBody>
-                    <a:bodyPr/>
-                    <a:lstStyle/>
-                    <a:p>
-                      <a:pPr>
-                        <a:defRPr sz="950" b="1">
-                          <a:solidFill>
-                            <a:srgbClr val="10B981"/>
-                          </a:solidFill>
-                          <a:latin typeface="Segoe UI"/>
-                        </a:defRPr>
-                      </a:pPr>
-                      <a:r>
-                        <a:t>OPTIMAL (Gains -7k$)</a:t>
-                      </a:r>
-                    </a:p>
-                  </a:txBody>
-                  <a:tcPr>
-                    <a:solidFill>
-                      <a:srgbClr val="18202F"/>
-                    </a:solidFill>
-                  </a:tcPr>
-                </a:tc>
-              </a:tr>
-            </a:tbl>
-          </a:graphicData>
-        </a:graphic>
-      </p:graphicFrame>
-      <p:sp>
-        <p:nvSpPr>
-          <p:cNvPr id="10" name="Rounded Rectangle 9"/>
+          <a:p>
+            <a:pPr>
+              <a:spcBef>
+                <a:spcPts val="600"/>
+              </a:spcBef>
+              <a:defRPr b="1" sz="1100">
+                <a:solidFill>
+                  <a:srgbClr val="F8FAFC"/>
+                </a:solidFill>
+              </a:defRPr>
+            </a:pPr>
+            <a:r>
+              <a:t>• Baseline (OLS) :</a:t>
+            </a:r>
+          </a:p>
+          <a:p>
+            <a:pPr>
+              <a:defRPr sz="1000">
+                <a:solidFill>
+                  <a:srgbClr val="94A3B8"/>
+                </a:solidFill>
+              </a:defRPr>
+            </a:pPr>
+            <a:r>
+              <a:t>    R² Train: 0.974   |   R² Test: 0.902   |   RMSE: 188 477 $</a:t>
+            </a:r>
+          </a:p>
+          <a:p>
+            <a:pPr>
+              <a:spcBef>
+                <a:spcPts val="600"/>
+              </a:spcBef>
+              <a:defRPr b="1" sz="1100">
+                <a:solidFill>
+                  <a:srgbClr val="F8FAFC"/>
+                </a:solidFill>
+              </a:defRPr>
+            </a:pPr>
+            <a:r>
+              <a:t>• Ridge (L2, α=0.01) :</a:t>
+            </a:r>
+          </a:p>
+          <a:p>
+            <a:pPr>
+              <a:defRPr sz="1000">
+                <a:solidFill>
+                  <a:srgbClr val="94A3B8"/>
+                </a:solidFill>
+              </a:defRPr>
+            </a:pPr>
+            <a:r>
+              <a:t>    R² Train: 0.974   |   R² Test: 0.903   |   RMSE: 187 400 $</a:t>
+            </a:r>
+          </a:p>
+          <a:p>
+            <a:pPr>
+              <a:spcBef>
+                <a:spcPts val="600"/>
+              </a:spcBef>
+              <a:defRPr b="1" sz="1100">
+                <a:solidFill>
+                  <a:srgbClr val="10B981"/>
+                </a:solidFill>
+              </a:defRPr>
+            </a:pPr>
+            <a:r>
+              <a:t>• Lasso (L1, α=1000) :</a:t>
+            </a:r>
+          </a:p>
+          <a:p>
+            <a:pPr>
+              <a:defRPr sz="1000">
+                <a:solidFill>
+                  <a:srgbClr val="94A3B8"/>
+                </a:solidFill>
+              </a:defRPr>
+            </a:pPr>
+            <a:r>
+              <a:t>    R² Train: 0.968   |   R² Test: 0.910   |   RMSE: 181 457 $</a:t>
+            </a:r>
+          </a:p>
+          <a:p>
+            <a:pPr>
+              <a:spcBef>
+                <a:spcPts val="1400"/>
+              </a:spcBef>
+              <a:defRPr b="1" sz="1100">
+                <a:solidFill>
+                  <a:srgbClr val="10B981"/>
+                </a:solidFill>
+              </a:defRPr>
+            </a:pPr>
+            <a:r>
+              <a:t>Gain Final du Modèle Gagnant (Lasso L1) :</a:t>
+            </a:r>
+          </a:p>
+          <a:p>
+            <a:pPr>
+              <a:defRPr sz="1000">
+                <a:solidFill>
+                  <a:srgbClr val="F8FAFC"/>
+                </a:solidFill>
+              </a:defRPr>
+            </a:pPr>
+            <a:r>
+              <a:t>Lasso réduit l'erreur quadratique moyenne de 7 020 $ par semaine tout en améliorant le pouvoir explicatif généralisé (R² passe de 0.90 à 0.91).</a:t>
+            </a:r>
+          </a:p>
+        </p:txBody>
+      </p:sp>
+      <p:sp>
+        <p:nvSpPr>
+          <p:cNvPr id="9" name="Rounded Rectangle 8"/>
           <p:cNvSpPr/>
           <p:nvPr/>
         </p:nvSpPr>
         <p:spPr>
           <a:xfrm>
-            <a:off x="731520" y="3749039"/>
-            <a:ext cx="5212080" cy="2377440"/>
+            <a:off x="6217920" y="1371600"/>
+            <a:ext cx="5242255" cy="4846320"/>
           </a:xfrm>
           <a:prstGeom prst="roundRect">
             <a:avLst/>
@@ -8292,7 +7120,7 @@
           <a:solidFill>
             <a:srgbClr val="1E293B"/>
           </a:solidFill>
-          <a:ln w="19050">
+          <a:ln w="12700">
             <a:solidFill>
               <a:srgbClr val="334155"/>
             </a:solidFill>
@@ -8322,14 +7150,14 @@
       </p:sp>
       <p:sp>
         <p:nvSpPr>
-          <p:cNvPr id="11" name="TextBox 10"/>
+          <p:cNvPr id="10" name="TextBox 9"/>
           <p:cNvSpPr txBox="1"/>
           <p:nvPr/>
         </p:nvSpPr>
         <p:spPr>
           <a:xfrm>
-            <a:off x="914400" y="3913631"/>
-            <a:ext cx="4846320" cy="365760"/>
+            <a:off x="6400800" y="1554480"/>
+            <a:ext cx="4876495" cy="4480560"/>
           </a:xfrm>
           <a:prstGeom prst="rect">
             <a:avLst/>
@@ -8343,298 +7171,122 @@
           <a:lstStyle/>
           <a:p>
             <a:pPr>
-              <a:defRPr sz="1100" b="1">
+              <a:defRPr sz="1300" b="1">
                 <a:solidFill>
                   <a:srgbClr val="38BDF8"/>
                 </a:solidFill>
-                <a:latin typeface="Segoe UI"/>
-              </a:defRPr>
-            </a:pPr>
-            <a:r>
-              <a:t>RIDGE (L2) : STABILISATION DES POIDS</a:t>
-            </a:r>
-          </a:p>
-        </p:txBody>
-      </p:sp>
-      <p:sp>
-        <p:nvSpPr>
-          <p:cNvPr id="12" name="TextBox 11"/>
-          <p:cNvSpPr txBox="1"/>
-          <p:nvPr/>
-        </p:nvSpPr>
-        <p:spPr>
-          <a:xfrm>
-            <a:off x="914400" y="4206240"/>
-            <a:ext cx="4846320" cy="1737360"/>
-          </a:xfrm>
-          <a:prstGeom prst="rect">
-            <a:avLst/>
-          </a:prstGeom>
-          <a:noFill/>
-        </p:spPr>
-        <p:txBody>
-          <a:bodyPr wrap="square">
-            <a:spAutoFit/>
-          </a:bodyPr>
-          <a:lstStyle/>
-          <a:p>
-            <a:pPr>
-              <a:defRPr sz="1000" b="1">
-                <a:solidFill>
-                  <a:srgbClr val="38BDF8"/>
-                </a:solidFill>
-                <a:latin typeface="Segoe UI"/>
-              </a:defRPr>
-            </a:pPr>
-            <a:r>
-              <a:t>Mécanisme :</a:t>
-            </a:r>
-          </a:p>
-          <a:p>
-            <a:pPr>
-              <a:defRPr sz="900">
+              </a:defRPr>
+            </a:pPr>
+            <a:r>
+              <a:t>RIDGE (L2) VS LASSO (L1) : ANALYSE DES MÉCANISMES</a:t>
+            </a:r>
+          </a:p>
+          <a:p>
+            <a:pPr>
+              <a:spcBef>
+                <a:spcPts val="800"/>
+              </a:spcBef>
+              <a:defRPr b="1" sz="1050">
                 <a:solidFill>
                   <a:srgbClr val="F8FAFC"/>
                 </a:solidFill>
-                <a:latin typeface="Segoe UI"/>
-              </a:defRPr>
-            </a:pPr>
-            <a:r>
-              <a:t>Pénalise les coefficients disproportionnés sans les annuler.</a:t>
-            </a:r>
-          </a:p>
-          <a:p>
-            <a:pPr>
-              <a:defRPr sz="1000" b="1">
-                <a:solidFill>
-                  <a:srgbClr val="38BDF8"/>
-                </a:solidFill>
-                <a:latin typeface="Segoe UI"/>
-              </a:defRPr>
-            </a:pPr>
-            <a:r>
-              <a:t>Résultat :</a:t>
-            </a:r>
-          </a:p>
-          <a:p>
-            <a:pPr>
-              <a:defRPr sz="900">
+              </a:defRPr>
+            </a:pPr>
+            <a:r>
+              <a:t>Ridge (Pénalisation L2) :</a:t>
+            </a:r>
+          </a:p>
+          <a:p>
+            <a:pPr>
+              <a:defRPr sz="950">
+                <a:solidFill>
+                  <a:srgbClr val="94A3B8"/>
+                </a:solidFill>
+              </a:defRPr>
+            </a:pPr>
+            <a:r>
+              <a:t>Comprime les coefficients disproportionnés sans les annuler. Très efficace contre la colinéarité, mais conserve l'ensemble des variables dans l'équation finale.</a:t>
+            </a:r>
+          </a:p>
+          <a:p>
+            <a:pPr>
+              <a:spcBef>
+                <a:spcPts val="800"/>
+              </a:spcBef>
+              <a:defRPr b="1" sz="1050">
                 <a:solidFill>
                   <a:srgbClr val="F8FAFC"/>
                 </a:solidFill>
-                <a:latin typeface="Segoe UI"/>
-              </a:defRPr>
-            </a:pPr>
-            <a:r>
-              <a:t>RMSE test réduite de 188k$ à 187k$ avec alpha=0.01.</a:t>
-            </a:r>
-          </a:p>
-          <a:p>
-            <a:pPr>
-              <a:defRPr sz="1000" b="1">
-                <a:solidFill>
-                  <a:srgbClr val="38BDF8"/>
-                </a:solidFill>
-                <a:latin typeface="Segoe UI"/>
-              </a:defRPr>
-            </a:pPr>
-            <a:r>
-              <a:t>Limite :</a:t>
-            </a:r>
-          </a:p>
-          <a:p>
-            <a:pPr>
-              <a:defRPr sz="900">
+              </a:defRPr>
+            </a:pPr>
+            <a:r>
+              <a:t>Lasso (Pénalisation L1) — GAGNANT :</a:t>
+            </a:r>
+          </a:p>
+          <a:p>
+            <a:pPr>
+              <a:defRPr sz="950">
+                <a:solidFill>
+                  <a:srgbClr val="94A3B8"/>
+                </a:solidFill>
+              </a:defRPr>
+            </a:pPr>
+            <a:r>
+              <a:t>Applique une contraction parcimonieuse qui annule exactement les coefficients des variables redondantes ou non informatives (Day, DayOfWeek).</a:t>
+            </a:r>
+          </a:p>
+          <a:p>
+            <a:pPr>
+              <a:spcBef>
+                <a:spcPts val="800"/>
+              </a:spcBef>
+              <a:defRPr b="1" sz="1050">
                 <a:solidFill>
                   <a:srgbClr val="F8FAFC"/>
                 </a:solidFill>
-                <a:latin typeface="Segoe UI"/>
-              </a:defRPr>
-            </a:pPr>
-            <a:r>
-              <a:t>Conserve toutes les variables, sans sélection.</a:t>
-            </a:r>
-          </a:p>
-        </p:txBody>
-      </p:sp>
-      <p:sp>
-        <p:nvSpPr>
-          <p:cNvPr id="13" name="Rounded Rectangle 12"/>
-          <p:cNvSpPr/>
-          <p:nvPr/>
-        </p:nvSpPr>
-        <p:spPr>
-          <a:xfrm>
-            <a:off x="6217920" y="3749039"/>
-            <a:ext cx="5242255" cy="2377440"/>
-          </a:xfrm>
-          <a:prstGeom prst="roundRect">
-            <a:avLst/>
-          </a:prstGeom>
-          <a:solidFill>
-            <a:srgbClr val="1E293B"/>
-          </a:solidFill>
-          <a:ln w="19050">
-            <a:solidFill>
-              <a:srgbClr val="10B981"/>
-            </a:solidFill>
-          </a:ln>
-        </p:spPr>
-        <p:style>
-          <a:lnRef idx="1">
-            <a:schemeClr val="accent1"/>
-          </a:lnRef>
-          <a:fillRef idx="3">
-            <a:schemeClr val="accent1"/>
-          </a:fillRef>
-          <a:effectRef idx="2">
-            <a:schemeClr val="accent1"/>
-          </a:effectRef>
-          <a:fontRef idx="minor">
-            <a:schemeClr val="lt1"/>
-          </a:fontRef>
-        </p:style>
-        <p:txBody>
-          <a:bodyPr rtlCol="0" anchor="ctr"/>
-          <a:lstStyle/>
-          <a:p>
-            <a:pPr algn="ctr"/>
-          </a:p>
-        </p:txBody>
-      </p:sp>
-      <p:sp>
-        <p:nvSpPr>
-          <p:cNvPr id="14" name="TextBox 13"/>
-          <p:cNvSpPr txBox="1"/>
-          <p:nvPr/>
-        </p:nvSpPr>
-        <p:spPr>
-          <a:xfrm>
-            <a:off x="6400800" y="3913631"/>
-            <a:ext cx="4876495" cy="365760"/>
-          </a:xfrm>
-          <a:prstGeom prst="rect">
-            <a:avLst/>
-          </a:prstGeom>
-          <a:noFill/>
-        </p:spPr>
-        <p:txBody>
-          <a:bodyPr wrap="square">
-            <a:spAutoFit/>
-          </a:bodyPr>
-          <a:lstStyle/>
-          <a:p>
-            <a:pPr>
-              <a:defRPr sz="1100" b="1">
-                <a:solidFill>
-                  <a:srgbClr val="38BDF8"/>
-                </a:solidFill>
-                <a:latin typeface="Segoe UI"/>
-              </a:defRPr>
-            </a:pPr>
-            <a:r>
-              <a:t>LASSO (L1) : PARCIMONIE &amp; MODÈLE GAGNANT</a:t>
-            </a:r>
-          </a:p>
-        </p:txBody>
-      </p:sp>
-      <p:sp>
-        <p:nvSpPr>
-          <p:cNvPr id="15" name="TextBox 14"/>
-          <p:cNvSpPr txBox="1"/>
-          <p:nvPr/>
-        </p:nvSpPr>
-        <p:spPr>
-          <a:xfrm>
-            <a:off x="6400800" y="4206240"/>
-            <a:ext cx="4876495" cy="1737360"/>
-          </a:xfrm>
-          <a:prstGeom prst="rect">
-            <a:avLst/>
-          </a:prstGeom>
-          <a:noFill/>
-        </p:spPr>
-        <p:txBody>
-          <a:bodyPr wrap="square">
-            <a:spAutoFit/>
-          </a:bodyPr>
-          <a:lstStyle/>
-          <a:p>
-            <a:pPr>
-              <a:defRPr sz="1000" b="1">
-                <a:solidFill>
-                  <a:srgbClr val="10B981"/>
-                </a:solidFill>
-                <a:latin typeface="Segoe UI"/>
-              </a:defRPr>
-            </a:pPr>
-            <a:r>
-              <a:t>Sélection de Variables :</a:t>
-            </a:r>
-          </a:p>
-          <a:p>
-            <a:pPr>
-              <a:defRPr sz="900">
+              </a:defRPr>
+            </a:pPr>
+            <a:r>
+              <a:t>Effet de Sélection de Features :</a:t>
+            </a:r>
+          </a:p>
+          <a:p>
+            <a:pPr>
+              <a:defRPr sz="950">
+                <a:solidFill>
+                  <a:srgbClr val="94A3B8"/>
+                </a:solidFill>
+              </a:defRPr>
+            </a:pPr>
+            <a:r>
+              <a:t>En éliminant le bruit résiduel, Lasso produit un modèle plus simple, plus interprétable et plus résistant aux fluctuations des futures semaines.</a:t>
+            </a:r>
+          </a:p>
+          <a:p>
+            <a:pPr>
+              <a:spcBef>
+                <a:spcPts val="800"/>
+              </a:spcBef>
+              <a:defRPr b="1" sz="1050">
                 <a:solidFill>
                   <a:srgbClr val="F8FAFC"/>
                 </a:solidFill>
-                <a:latin typeface="Segoe UI"/>
-              </a:defRPr>
-            </a:pPr>
-            <a:r>
-              <a:t>Annule les features redondantes (Day, DayOfWeek) pour éliminer le bruit.</a:t>
-            </a:r>
-          </a:p>
-          <a:p>
-            <a:pPr>
-              <a:defRPr sz="1000" b="1">
-                <a:solidFill>
-                  <a:srgbClr val="10B981"/>
-                </a:solidFill>
-                <a:latin typeface="Segoe UI"/>
-              </a:defRPr>
-            </a:pPr>
-            <a:r>
-              <a:t>Performance Record :</a:t>
-            </a:r>
-          </a:p>
-          <a:p>
-            <a:pPr>
-              <a:defRPr sz="900">
-                <a:solidFill>
-                  <a:srgbClr val="F8FAFC"/>
-                </a:solidFill>
-                <a:latin typeface="Segoe UI"/>
-              </a:defRPr>
-            </a:pPr>
-            <a:r>
-              <a:t>R² test de 0.91 (+1%) et RMSE réduite à 181 457 $ (-7 020 $ vs Baseline).</a:t>
-            </a:r>
-          </a:p>
-          <a:p>
-            <a:pPr>
-              <a:defRPr sz="1000" b="1">
-                <a:solidFill>
-                  <a:srgbClr val="10B981"/>
-                </a:solidFill>
-                <a:latin typeface="Segoe UI"/>
-              </a:defRPr>
-            </a:pPr>
-            <a:r>
-              <a:t>Choix Final :</a:t>
-            </a:r>
-          </a:p>
-          <a:p>
-            <a:pPr>
-              <a:defRPr sz="900">
-                <a:solidFill>
-                  <a:srgbClr val="F8FAFC"/>
-                </a:solidFill>
-                <a:latin typeface="Segoe UI"/>
-              </a:defRPr>
-            </a:pPr>
-            <a:r>
-              <a:t>Modèle le plus robuste et le plus explicable pour la production.</a:t>
+              </a:defRPr>
+            </a:pPr>
+            <a:r>
+              <a:t>Recommandation Déploiement :</a:t>
+            </a:r>
+          </a:p>
+          <a:p>
+            <a:pPr>
+              <a:defRPr sz="950">
+                <a:solidFill>
+                  <a:srgbClr val="94A3B8"/>
+                </a:solidFill>
+              </a:defRPr>
+            </a:pPr>
+            <a:r>
+              <a:t>Retenir le pipeline Lasso optimisé (alpha=1000) comme modèle de référence pour les prévisions de la Supply Chain Walmart.</a:t>
             </a:r>
           </a:p>
         </p:txBody>
@@ -8717,7 +7369,7 @@
           <a:noFill/>
         </p:spPr>
         <p:txBody>
-          <a:bodyPr wrap="square">
+          <a:bodyPr wrap="square" lIns="0" tIns="0" rIns="0" bIns="0">
             <a:spAutoFit/>
           </a:bodyPr>
           <a:lstStyle/>
@@ -8753,13 +7405,13 @@
           <a:noFill/>
         </p:spPr>
         <p:txBody>
-          <a:bodyPr wrap="square">
+          <a:bodyPr wrap="square" lIns="0" tIns="0" rIns="0" bIns="0">
             <a:spAutoFit/>
           </a:bodyPr>
           <a:lstStyle/>
           <a:p>
             <a:pPr>
-              <a:defRPr sz="2100" b="1">
+              <a:defRPr sz="1800" b="1">
                 <a:solidFill>
                   <a:srgbClr val="F8FAFC"/>
                 </a:solidFill>
@@ -8789,7 +7441,7 @@
           <a:noFill/>
         </p:spPr>
         <p:txBody>
-          <a:bodyPr wrap="square">
+          <a:bodyPr wrap="none" lIns="0" tIns="0" rIns="0" bIns="0">
             <a:spAutoFit/>
           </a:bodyPr>
           <a:lstStyle/>
@@ -8825,21 +7477,21 @@
           <a:noFill/>
         </p:spPr>
         <p:txBody>
-          <a:bodyPr wrap="square">
+          <a:bodyPr wrap="none" lIns="0" tIns="0" rIns="0" bIns="0">
             <a:spAutoFit/>
           </a:bodyPr>
           <a:lstStyle/>
           <a:p>
             <a:pPr>
-              <a:defRPr sz="1000">
-                <a:solidFill>
-                  <a:srgbClr val="64748B"/>
+              <a:defRPr sz="950">
+                <a:solidFill>
+                  <a:srgbClr val="94A3B8"/>
                 </a:solidFill>
                 <a:latin typeface="Segoe UI"/>
               </a:defRPr>
             </a:pPr>
             <a:r>
-              <a:t>Christopher GILLERON  |  Walmart Store Sales Prediction (Machine Learning Supervisé)  |  Certification CDSD Bloc 3</a:t>
+              <a:t>Christopher GILLERON  |  Walmart Store Sales Prediction (Machine Learning Supervisé)  |  Certification CDSD Bloc 3  |  Temps alloué : 5 min</a:t>
             </a:r>
           </a:p>
         </p:txBody>
@@ -8853,7 +7505,7 @@
         <p:spPr>
           <a:xfrm>
             <a:off x="731520" y="1371600"/>
-            <a:ext cx="5242255" cy="2377440"/>
+            <a:ext cx="5212080" cy="2286000"/>
           </a:xfrm>
           <a:prstGeom prst="roundRect">
             <a:avLst/>
@@ -8861,9 +7513,9 @@
           <a:solidFill>
             <a:srgbClr val="1E293B"/>
           </a:solidFill>
-          <a:ln w="19050">
+          <a:ln w="12700">
             <a:solidFill>
-              <a:srgbClr val="38BDF8"/>
+              <a:srgbClr val="334155"/>
             </a:solidFill>
           </a:ln>
         </p:spPr>
@@ -8897,8 +7549,8 @@
         </p:nvSpPr>
         <p:spPr>
           <a:xfrm>
-            <a:off x="914400" y="1536192"/>
-            <a:ext cx="4876495" cy="365760"/>
+            <a:off x="914400" y="1508760"/>
+            <a:ext cx="4846320" cy="2011680"/>
           </a:xfrm>
           <a:prstGeom prst="rect">
             <a:avLst/>
@@ -8912,47 +7564,25 @@
           <a:lstStyle/>
           <a:p>
             <a:pPr>
-              <a:defRPr sz="1100" b="1">
+              <a:defRPr sz="1200" b="1">
                 <a:solidFill>
                   <a:srgbClr val="38BDF8"/>
                 </a:solidFill>
-                <a:latin typeface="Segoe UI"/>
               </a:defRPr>
             </a:pPr>
             <a:r>
               <a:t>01 | PILOTAGE SUPPLY CHAIN DIFFÉRENCIÉ</a:t>
             </a:r>
           </a:p>
-        </p:txBody>
-      </p:sp>
-      <p:sp>
-        <p:nvSpPr>
-          <p:cNvPr id="9" name="TextBox 8"/>
-          <p:cNvSpPr txBox="1"/>
-          <p:nvPr/>
-        </p:nvSpPr>
-        <p:spPr>
-          <a:xfrm>
-            <a:off x="914400" y="1874520"/>
-            <a:ext cx="4876495" cy="1737360"/>
-          </a:xfrm>
-          <a:prstGeom prst="rect">
-            <a:avLst/>
-          </a:prstGeom>
-          <a:noFill/>
-        </p:spPr>
-        <p:txBody>
-          <a:bodyPr wrap="square">
-            <a:spAutoFit/>
-          </a:bodyPr>
-          <a:lstStyle/>
-          <a:p>
-            <a:pPr>
-              <a:defRPr sz="1000" b="1">
-                <a:solidFill>
-                  <a:srgbClr val="38BDF8"/>
-                </a:solidFill>
-                <a:latin typeface="Segoe UI"/>
+          <a:p>
+            <a:pPr>
+              <a:spcBef>
+                <a:spcPts val="600"/>
+              </a:spcBef>
+              <a:defRPr b="1" sz="1000">
+                <a:solidFill>
+                  <a:srgbClr val="F8FAFC"/>
+                </a:solidFill>
               </a:defRPr>
             </a:pPr>
             <a:r>
@@ -8961,24 +7591,25 @@
           </a:p>
           <a:p>
             <a:pPr>
-              <a:defRPr sz="900">
+              <a:defRPr sz="950">
+                <a:solidFill>
+                  <a:srgbClr val="94A3B8"/>
+                </a:solidFill>
+              </a:defRPr>
+            </a:pPr>
+            <a:r>
+              <a:t>Ne pas appliquer de règles d'approvisionnement uniformes : segmenter les stocks selon le cluster de volume (Store 4/13/20 vs Store 3/5).</a:t>
+            </a:r>
+          </a:p>
+          <a:p>
+            <a:pPr>
+              <a:spcBef>
+                <a:spcPts val="400"/>
+              </a:spcBef>
+              <a:defRPr b="1" sz="1000">
                 <a:solidFill>
                   <a:srgbClr val="F8FAFC"/>
                 </a:solidFill>
-                <a:latin typeface="Segoe UI"/>
-              </a:defRPr>
-            </a:pPr>
-            <a:r>
-              <a:t>Ne pas appliquer de règles d'approvisionnement uniformes : segmenter les stocks selon le cluster de volume (Store 4/13/20 vs Store 3/5).</a:t>
-            </a:r>
-          </a:p>
-          <a:p>
-            <a:pPr>
-              <a:defRPr sz="1000" b="1">
-                <a:solidFill>
-                  <a:srgbClr val="38BDF8"/>
-                </a:solidFill>
-                <a:latin typeface="Segoe UI"/>
               </a:defRPr>
             </a:pPr>
             <a:r>
@@ -8987,29 +7618,28 @@
           </a:p>
           <a:p>
             <a:pPr>
-              <a:defRPr sz="900">
-                <a:solidFill>
-                  <a:srgbClr val="F8FAFC"/>
-                </a:solidFill>
-                <a:latin typeface="Segoe UI"/>
-              </a:defRPr>
-            </a:pPr>
-            <a:r>
-              <a:t>Réduction de 5% à 8% des coûts de stockage et de rupture.</a:t>
-            </a:r>
-          </a:p>
-        </p:txBody>
-      </p:sp>
-      <p:sp>
-        <p:nvSpPr>
-          <p:cNvPr id="10" name="Rounded Rectangle 9"/>
+              <a:defRPr sz="950">
+                <a:solidFill>
+                  <a:srgbClr val="94A3B8"/>
+                </a:solidFill>
+              </a:defRPr>
+            </a:pPr>
+            <a:r>
+              <a:t>Réduction de 5% à 8% des coûts de stockage et des ruptures de linéaires.</a:t>
+            </a:r>
+          </a:p>
+        </p:txBody>
+      </p:sp>
+      <p:sp>
+        <p:nvSpPr>
+          <p:cNvPr id="9" name="Rounded Rectangle 8"/>
           <p:cNvSpPr/>
           <p:nvPr/>
         </p:nvSpPr>
         <p:spPr>
           <a:xfrm>
             <a:off x="6217920" y="1371600"/>
-            <a:ext cx="5242255" cy="2377440"/>
+            <a:ext cx="5212080" cy="2286000"/>
           </a:xfrm>
           <a:prstGeom prst="roundRect">
             <a:avLst/>
@@ -9017,9 +7647,9 @@
           <a:solidFill>
             <a:srgbClr val="1E293B"/>
           </a:solidFill>
-          <a:ln w="19050">
+          <a:ln w="12700">
             <a:solidFill>
-              <a:srgbClr val="FACC15"/>
+              <a:srgbClr val="334155"/>
             </a:solidFill>
           </a:ln>
         </p:spPr>
@@ -9047,14 +7677,14 @@
       </p:sp>
       <p:sp>
         <p:nvSpPr>
-          <p:cNvPr id="11" name="TextBox 10"/>
+          <p:cNvPr id="10" name="TextBox 9"/>
           <p:cNvSpPr txBox="1"/>
           <p:nvPr/>
         </p:nvSpPr>
         <p:spPr>
           <a:xfrm>
-            <a:off x="6400800" y="1536192"/>
-            <a:ext cx="4876495" cy="365760"/>
+            <a:off x="6400800" y="1508760"/>
+            <a:ext cx="4846320" cy="2011680"/>
           </a:xfrm>
           <a:prstGeom prst="rect">
             <a:avLst/>
@@ -9068,47 +7698,25 @@
           <a:lstStyle/>
           <a:p>
             <a:pPr>
-              <a:defRPr sz="1100" b="1">
-                <a:solidFill>
-                  <a:srgbClr val="38BDF8"/>
-                </a:solidFill>
-                <a:latin typeface="Segoe UI"/>
+              <a:defRPr sz="1200" b="1">
+                <a:solidFill>
+                  <a:srgbClr val="10B981"/>
+                </a:solidFill>
               </a:defRPr>
             </a:pPr>
             <a:r>
               <a:t>02 | ANTICIPATION DES SEMAINES FÉRIÉES</a:t>
             </a:r>
           </a:p>
-        </p:txBody>
-      </p:sp>
-      <p:sp>
-        <p:nvSpPr>
-          <p:cNvPr id="12" name="TextBox 11"/>
-          <p:cNvSpPr txBox="1"/>
-          <p:nvPr/>
-        </p:nvSpPr>
-        <p:spPr>
-          <a:xfrm>
-            <a:off x="6400800" y="1874520"/>
-            <a:ext cx="4876495" cy="1737360"/>
-          </a:xfrm>
-          <a:prstGeom prst="rect">
-            <a:avLst/>
-          </a:prstGeom>
-          <a:noFill/>
-        </p:spPr>
-        <p:txBody>
-          <a:bodyPr wrap="square">
-            <a:spAutoFit/>
-          </a:bodyPr>
-          <a:lstStyle/>
-          <a:p>
-            <a:pPr>
-              <a:defRPr sz="1000" b="1">
-                <a:solidFill>
-                  <a:srgbClr val="FACC15"/>
-                </a:solidFill>
-                <a:latin typeface="Segoe UI"/>
+          <a:p>
+            <a:pPr>
+              <a:spcBef>
+                <a:spcPts val="600"/>
+              </a:spcBef>
+              <a:defRPr b="1" sz="1000">
+                <a:solidFill>
+                  <a:srgbClr val="F8FAFC"/>
+                </a:solidFill>
               </a:defRPr>
             </a:pPr>
             <a:r>
@@ -9117,24 +7725,25 @@
           </a:p>
           <a:p>
             <a:pPr>
-              <a:defRPr sz="900">
+              <a:defRPr sz="950">
+                <a:solidFill>
+                  <a:srgbClr val="94A3B8"/>
+                </a:solidFill>
+              </a:defRPr>
+            </a:pPr>
+            <a:r>
+              <a:t>Anticiper de 3 semaines l'approvisionnement des semaines 'Holiday_Flag' (+48.9k$ de surcroît structurel).</a:t>
+            </a:r>
+          </a:p>
+          <a:p>
+            <a:pPr>
+              <a:spcBef>
+                <a:spcPts val="400"/>
+              </a:spcBef>
+              <a:defRPr b="1" sz="1000">
                 <a:solidFill>
                   <a:srgbClr val="F8FAFC"/>
                 </a:solidFill>
-                <a:latin typeface="Segoe UI"/>
-              </a:defRPr>
-            </a:pPr>
-            <a:r>
-              <a:t>Anticiper de 3 semaines l'approvisionnement des semaines 'Holiday_Flag' (+48.9k$ de surcroît structurel).</a:t>
-            </a:r>
-          </a:p>
-          <a:p>
-            <a:pPr>
-              <a:defRPr sz="1000" b="1">
-                <a:solidFill>
-                  <a:srgbClr val="FACC15"/>
-                </a:solidFill>
-                <a:latin typeface="Segoe UI"/>
               </a:defRPr>
             </a:pPr>
             <a:r>
@@ -9143,29 +7752,28 @@
           </a:p>
           <a:p>
             <a:pPr>
-              <a:defRPr sz="900">
-                <a:solidFill>
-                  <a:srgbClr val="F8FAFC"/>
-                </a:solidFill>
-                <a:latin typeface="Segoe UI"/>
-              </a:defRPr>
-            </a:pPr>
-            <a:r>
-              <a:t>Concentrer les investissements publicitaires sur Thanksgiving.</a:t>
-            </a:r>
-          </a:p>
-        </p:txBody>
-      </p:sp>
-      <p:sp>
-        <p:nvSpPr>
-          <p:cNvPr id="13" name="Rounded Rectangle 12"/>
+              <a:defRPr sz="950">
+                <a:solidFill>
+                  <a:srgbClr val="94A3B8"/>
+                </a:solidFill>
+              </a:defRPr>
+            </a:pPr>
+            <a:r>
+              <a:t>Concentrer les investissements publicitaires sur Thanksgiving et le Black Friday.</a:t>
+            </a:r>
+          </a:p>
+        </p:txBody>
+      </p:sp>
+      <p:sp>
+        <p:nvSpPr>
+          <p:cNvPr id="11" name="Rounded Rectangle 10"/>
           <p:cNvSpPr/>
           <p:nvPr/>
         </p:nvSpPr>
         <p:spPr>
           <a:xfrm>
             <a:off x="731520" y="3931920"/>
-            <a:ext cx="5242255" cy="2377440"/>
+            <a:ext cx="5212080" cy="2286000"/>
           </a:xfrm>
           <a:prstGeom prst="roundRect">
             <a:avLst/>
@@ -9173,9 +7781,9 @@
           <a:solidFill>
             <a:srgbClr val="1E293B"/>
           </a:solidFill>
-          <a:ln w="19050">
+          <a:ln w="12700">
             <a:solidFill>
-              <a:srgbClr val="F59E0B"/>
+              <a:srgbClr val="334155"/>
             </a:solidFill>
           </a:ln>
         </p:spPr>
@@ -9203,14 +7811,14 @@
       </p:sp>
       <p:sp>
         <p:nvSpPr>
-          <p:cNvPr id="14" name="TextBox 13"/>
+          <p:cNvPr id="12" name="TextBox 11"/>
           <p:cNvSpPr txBox="1"/>
           <p:nvPr/>
         </p:nvSpPr>
         <p:spPr>
           <a:xfrm>
-            <a:off x="914400" y="4096512"/>
-            <a:ext cx="4876495" cy="365760"/>
+            <a:off x="914400" y="4069080"/>
+            <a:ext cx="4846320" cy="2011680"/>
           </a:xfrm>
           <a:prstGeom prst="rect">
             <a:avLst/>
@@ -9224,47 +7832,25 @@
           <a:lstStyle/>
           <a:p>
             <a:pPr>
-              <a:defRPr sz="1100" b="1">
-                <a:solidFill>
-                  <a:srgbClr val="38BDF8"/>
-                </a:solidFill>
-                <a:latin typeface="Segoe UI"/>
+              <a:defRPr sz="1200" b="1">
+                <a:solidFill>
+                  <a:srgbClr val="F59E0B"/>
+                </a:solidFill>
               </a:defRPr>
             </a:pPr>
             <a:r>
               <a:t>03 | BAROMÈTRE MACROÉCONOMIQUE</a:t>
             </a:r>
           </a:p>
-        </p:txBody>
-      </p:sp>
-      <p:sp>
-        <p:nvSpPr>
-          <p:cNvPr id="15" name="TextBox 14"/>
-          <p:cNvSpPr txBox="1"/>
-          <p:nvPr/>
-        </p:nvSpPr>
-        <p:spPr>
-          <a:xfrm>
-            <a:off x="914400" y="4434840"/>
-            <a:ext cx="4876495" cy="1737360"/>
-          </a:xfrm>
-          <a:prstGeom prst="rect">
-            <a:avLst/>
-          </a:prstGeom>
-          <a:noFill/>
-        </p:spPr>
-        <p:txBody>
-          <a:bodyPr wrap="square">
-            <a:spAutoFit/>
-          </a:bodyPr>
-          <a:lstStyle/>
-          <a:p>
-            <a:pPr>
-              <a:defRPr sz="1000" b="1">
-                <a:solidFill>
-                  <a:srgbClr val="F59E0B"/>
-                </a:solidFill>
-                <a:latin typeface="Segoe UI"/>
+          <a:p>
+            <a:pPr>
+              <a:spcBef>
+                <a:spcPts val="600"/>
+              </a:spcBef>
+              <a:defRPr b="1" sz="1000">
+                <a:solidFill>
+                  <a:srgbClr val="F8FAFC"/>
+                </a:solidFill>
               </a:defRPr>
             </a:pPr>
             <a:r>
@@ -9273,24 +7859,25 @@
           </a:p>
           <a:p>
             <a:pPr>
-              <a:defRPr sz="900">
+              <a:defRPr sz="950">
+                <a:solidFill>
+                  <a:srgbClr val="94A3B8"/>
+                </a:solidFill>
+              </a:defRPr>
+            </a:pPr>
+            <a:r>
+              <a:t>Dans les bassins où le chômage grimpe, pousser le merchandising des marques distributeur premiers prix (Great Value).</a:t>
+            </a:r>
+          </a:p>
+          <a:p>
+            <a:pPr>
+              <a:spcBef>
+                <a:spcPts val="400"/>
+              </a:spcBef>
+              <a:defRPr b="1" sz="1000">
                 <a:solidFill>
                   <a:srgbClr val="F8FAFC"/>
                 </a:solidFill>
-                <a:latin typeface="Segoe UI"/>
-              </a:defRPr>
-            </a:pPr>
-            <a:r>
-              <a:t>Dans les bassins où le chômage grimpe, pousser le merchandising des marques distributeur premiers prix (Great Value).</a:t>
-            </a:r>
-          </a:p>
-          <a:p>
-            <a:pPr>
-              <a:defRPr sz="1000" b="1">
-                <a:solidFill>
-                  <a:srgbClr val="F59E0B"/>
-                </a:solidFill>
-                <a:latin typeface="Segoe UI"/>
               </a:defRPr>
             </a:pPr>
             <a:r>
@@ -9299,29 +7886,28 @@
           </a:p>
           <a:p>
             <a:pPr>
-              <a:defRPr sz="900">
-                <a:solidFill>
-                  <a:srgbClr val="F8FAFC"/>
-                </a:solidFill>
-                <a:latin typeface="Segoe UI"/>
-              </a:defRPr>
-            </a:pPr>
-            <a:r>
-              <a:t>Adapter la politique de prix face aux arbitrages de fin de mois.</a:t>
-            </a:r>
-          </a:p>
-        </p:txBody>
-      </p:sp>
-      <p:sp>
-        <p:nvSpPr>
-          <p:cNvPr id="16" name="Rounded Rectangle 15"/>
+              <a:defRPr sz="950">
+                <a:solidFill>
+                  <a:srgbClr val="94A3B8"/>
+                </a:solidFill>
+              </a:defRPr>
+            </a:pPr>
+            <a:r>
+              <a:t>Adapter la politique de remises face aux arbitrages de fin de mois.</a:t>
+            </a:r>
+          </a:p>
+        </p:txBody>
+      </p:sp>
+      <p:sp>
+        <p:nvSpPr>
+          <p:cNvPr id="13" name="Rounded Rectangle 12"/>
           <p:cNvSpPr/>
           <p:nvPr/>
         </p:nvSpPr>
         <p:spPr>
           <a:xfrm>
             <a:off x="6217920" y="3931920"/>
-            <a:ext cx="5242255" cy="2377440"/>
+            <a:ext cx="5212080" cy="2286000"/>
           </a:xfrm>
           <a:prstGeom prst="roundRect">
             <a:avLst/>
@@ -9329,9 +7915,9 @@
           <a:solidFill>
             <a:srgbClr val="1E293B"/>
           </a:solidFill>
-          <a:ln w="19050">
+          <a:ln w="12700">
             <a:solidFill>
-              <a:srgbClr val="10B981"/>
+              <a:srgbClr val="334155"/>
             </a:solidFill>
           </a:ln>
         </p:spPr>
@@ -9359,14 +7945,14 @@
       </p:sp>
       <p:sp>
         <p:nvSpPr>
-          <p:cNvPr id="17" name="TextBox 16"/>
+          <p:cNvPr id="14" name="TextBox 13"/>
           <p:cNvSpPr txBox="1"/>
           <p:nvPr/>
         </p:nvSpPr>
         <p:spPr>
           <a:xfrm>
-            <a:off x="6400800" y="4096512"/>
-            <a:ext cx="4876495" cy="365760"/>
+            <a:off x="6400800" y="4069080"/>
+            <a:ext cx="4846320" cy="2011680"/>
           </a:xfrm>
           <a:prstGeom prst="rect">
             <a:avLst/>
@@ -9380,47 +7966,25 @@
           <a:lstStyle/>
           <a:p>
             <a:pPr>
-              <a:defRPr sz="1100" b="1">
-                <a:solidFill>
-                  <a:srgbClr val="38BDF8"/>
-                </a:solidFill>
-                <a:latin typeface="Segoe UI"/>
+              <a:defRPr sz="1200" b="1">
+                <a:solidFill>
+                  <a:srgbClr val="A855F7"/>
+                </a:solidFill>
               </a:defRPr>
             </a:pPr>
             <a:r>
               <a:t>04 | INDUSTRIALISATION MLOPS DU MODÈLE</a:t>
             </a:r>
           </a:p>
-        </p:txBody>
-      </p:sp>
-      <p:sp>
-        <p:nvSpPr>
-          <p:cNvPr id="18" name="TextBox 17"/>
-          <p:cNvSpPr txBox="1"/>
-          <p:nvPr/>
-        </p:nvSpPr>
-        <p:spPr>
-          <a:xfrm>
-            <a:off x="6400800" y="4434840"/>
-            <a:ext cx="4876495" cy="1737360"/>
-          </a:xfrm>
-          <a:prstGeom prst="rect">
-            <a:avLst/>
-          </a:prstGeom>
-          <a:noFill/>
-        </p:spPr>
-        <p:txBody>
-          <a:bodyPr wrap="square">
-            <a:spAutoFit/>
-          </a:bodyPr>
-          <a:lstStyle/>
-          <a:p>
-            <a:pPr>
-              <a:defRPr sz="1000" b="1">
-                <a:solidFill>
-                  <a:srgbClr val="10B981"/>
-                </a:solidFill>
-                <a:latin typeface="Segoe UI"/>
+          <a:p>
+            <a:pPr>
+              <a:spcBef>
+                <a:spcPts val="600"/>
+              </a:spcBef>
+              <a:defRPr b="1" sz="1000">
+                <a:solidFill>
+                  <a:srgbClr val="F8FAFC"/>
+                </a:solidFill>
               </a:defRPr>
             </a:pPr>
             <a:r>
@@ -9429,24 +7993,25 @@
           </a:p>
           <a:p>
             <a:pPr>
-              <a:defRPr sz="900">
+              <a:defRPr sz="950">
+                <a:solidFill>
+                  <a:srgbClr val="94A3B8"/>
+                </a:solidFill>
+              </a:defRPr>
+            </a:pPr>
+            <a:r>
+              <a:t>Déployer le pipeline Lasso (alpha=1000) sous forme d'API de scoring hebdomadaire sécurisée.</a:t>
+            </a:r>
+          </a:p>
+          <a:p>
+            <a:pPr>
+              <a:spcBef>
+                <a:spcPts val="400"/>
+              </a:spcBef>
+              <a:defRPr b="1" sz="1000">
                 <a:solidFill>
                   <a:srgbClr val="F8FAFC"/>
                 </a:solidFill>
-                <a:latin typeface="Segoe UI"/>
-              </a:defRPr>
-            </a:pPr>
-            <a:r>
-              <a:t>Déployer le pipeline Lasso (alpha=1000) sous forme d'API de scoring hebdomadaire.</a:t>
-            </a:r>
-          </a:p>
-          <a:p>
-            <a:pPr>
-              <a:defRPr sz="1000" b="1">
-                <a:solidFill>
-                  <a:srgbClr val="10B981"/>
-                </a:solidFill>
-                <a:latin typeface="Segoe UI"/>
               </a:defRPr>
             </a:pPr>
             <a:r>
@@ -9455,11 +8020,10 @@
           </a:p>
           <a:p>
             <a:pPr>
-              <a:defRPr sz="900">
-                <a:solidFill>
-                  <a:srgbClr val="F8FAFC"/>
-                </a:solidFill>
-                <a:latin typeface="Segoe UI"/>
+              <a:defRPr sz="950">
+                <a:solidFill>
+                  <a:srgbClr val="94A3B8"/>
+                </a:solidFill>
               </a:defRPr>
             </a:pPr>
             <a:r>
